--- a/assets/docs/Tema1_Algebra_y_logica.pptx
+++ b/assets/docs/Tema1_Algebra_y_logica.pptx
@@ -516,9 +516,7 @@
           <a:p>
             <a:r>
               <a:rPr lang="en-US" dirty="0"/>
-              <a:t>Presenta la clase: el álgebra y la lógica son el idioma con el que se escriben los problemas de olimpiada.
-Pregunta de apertura: "Pago 4 paletas a x pesos cada una y un refresco de 15 pesos. ¿Qué expresión describe lo que pago?" Respuesta: 4x + 15. Pide que escriban la expresión antes de calcular nada.
-Recuerda el receso de 15 minutos a mitad de la clase.</a:t>
+              <a:t/>
             </a:r>
             <a:endParaRPr lang="en-US" dirty="0"/>
           </a:p>
@@ -606,11 +604,7 @@
           <a:p>
             <a:r>
               <a:rPr lang="en-US" dirty="0"/>
-              <a:t>Las tablas de verdad se memorizan con sentido: Y necesita las dos, O basta con una, NO invierte.
-Ejemplo para practicar: p = "el número es mayor que 10", q = "el número es par".
-- Para 12: p es V, q es V. p Y q es V. p O q es V.
-- Para 7: p es F, q es F. p Y q es F. p O q es F.
-- Para 9: p es F, q es F; pero ¿qué pasa con NO p? Pide al grupo calcular NO p para 9 y para 12.</a:t>
+              <a:t/>
             </a:r>
             <a:endParaRPr lang="en-US" dirty="0"/>
           </a:p>
@@ -698,10 +692,7 @@
           <a:p>
             <a:r>
               <a:rPr lang="en-US" dirty="0"/>
-              <a:t>Explica que el condicional solo es falso en un caso: cuando la premisa se cumple y la conclusión falla.
-Ejemplo para practicar: "Si un número es múltiplo de 4, entonces es par".
-Esto es verdadero, porque no existe un múltiplo de 4 que sea impar.
-Pregunta: ¿qué significaría un contraejemplo de esta afirmación? Respuesta: un múltiplo de 4 que sea impar, y no existe.</a:t>
+              <a:t/>
             </a:r>
             <a:endParaRPr lang="en-US" dirty="0"/>
           </a:p>
@@ -789,10 +780,7 @@
           <a:p>
             <a:r>
               <a:rPr lang="en-US" dirty="0"/>
-              <a:t>Refuerza que la negación del condicional es "p Y NO q", no la frase con "si no".
-Ejemplo para practicar: "Si es lunes, entonces tengo clase." Negación: "Es lunes y no tengo clase."
-De Morgan con otro ejemplo: NO (el cuaderno es rojo Y es grande) = "el cuaderno no es rojo O no es grande".
-Pregunta: ¿cuál es la negación de "llueve o hace frío"? Respuesta: "no llueve y no hace frío".</a:t>
+              <a:t/>
             </a:r>
             <a:endParaRPr lang="en-US" dirty="0"/>
           </a:p>
@@ -880,9 +868,7 @@
           <a:p>
             <a:r>
               <a:rPr lang="en-US" dirty="0"/>
-              <a:t>Presenta los errores como señales de que el alumno está aprendiendo, no como fallas.
-Ejemplo para practicar: 8 − 3 + 2. Un error común es calcular 8 − (3 + 2) = 3. La respuesta correcta se obtiene de izquierda a derecha: 5 + 2 = 7.
-Pide a los alumnos que escriban un error propio de la semana y lo corrijan en voz alta.</a:t>
+              <a:t/>
             </a:r>
             <a:endParaRPr lang="en-US" dirty="0"/>
           </a:p>
@@ -970,9 +956,7 @@
           <a:p>
             <a:r>
               <a:rPr lang="en-US" dirty="0"/>
-              <a:t>Repasa las cuatro ideas: variables y expresiones, propiedades, ecuaciones y lógica.
-Pregunta de repaso: ¿cuál es la negación de "si estudio, entonces no juego"? Respuesta: "estudio y juego".
-Cierre: pide que cada alumno escriba una frase con la palabra "entonces" y su negación.</a:t>
+              <a:t/>
             </a:r>
             <a:endParaRPr lang="en-US" dirty="0"/>
           </a:p>
@@ -1060,9 +1044,7 @@
           <a:p>
             <a:r>
               <a:rPr lang="en-US" dirty="0"/>
-              <a:t>Cierra con la pregunta de la diapositiva y deja que la discutan en parejas durante un minuto.
-Demuestra en vivo: si x = 5, la línea x = x + 1 deja a x en 6. En matemáticas, x = 5 solo describe, no cambia nada.
-Anticipa el Bloque 2: esta idea será la base para contadores y ciclos.</a:t>
+              <a:t/>
             </a:r>
             <a:endParaRPr lang="en-US" dirty="0"/>
           </a:p>
@@ -1150,12 +1132,7 @@
           <a:p>
             <a:r>
               <a:rPr lang="en-US" dirty="0"/>
-              <a:t>Idea central: una variable es una caja con nombre que puede cambiar de un problema a otro.
-Ejemplo distinto al de la diapositiva: y = 3x − 1.
-- Si x = 6, y = 3 · 6 − 1 = 17.
-- Si x = 0, y = −1.
-- Si x = −2, y = −7.
-Pide a los alumnos evaluar los tres casos en su cuaderno y después comparar resultados.</a:t>
+              <a:t/>
             </a:r>
             <a:endParaRPr lang="en-US" dirty="0"/>
           </a:p>
@@ -1243,10 +1220,7 @@
           <a:p>
             <a:r>
               <a:rPr lang="en-US" dirty="0"/>
-              <a:t>Explica que cada operación tiene prioridad, y que los paréntesis cambian todo.
-Ejemplo para practicar: 10 − 2 · 3 + 8 ÷ 4 = 10 − 6 + 2 = 6.
-Versión con paréntesis: (10 − 2) · 3 + 8 ÷ 4 = 8 · 3 + 2 = 26.
-Pregunta al grupo: ¿por qué las dos expresiones dan resultados distintos si solo cambian los paréntesis?</a:t>
+              <a:t/>
             </a:r>
             <a:endParaRPr lang="en-US" dirty="0"/>
           </a:p>
@@ -1334,10 +1308,7 @@
           <a:p>
             <a:r>
               <a:rPr lang="en-US" dirty="0"/>
-              <a:t>Las propiedades permiten calcular mentalmente. Muestra cómo la asociativa ahorra trabajo.
-Ejemplo para practicar: 25 · 37 · 4 = (25 · 4) · 37 = 100 · 37 = 3700.
-Otro ejemplo: 7 · (2 · 5) = (7 · 2) · 5 = 70.
-Recuerda que la resta no es conmutativa: 8 − 3 es distinto de 3 − 8. Pregunta: ¿la resta cumple la asociativa? Haz la prueba con 10 − (5 − 2) y (10 − 5) − 2.</a:t>
+              <a:t/>
             </a:r>
             <a:endParaRPr lang="en-US" dirty="0"/>
           </a:p>
@@ -1425,9 +1396,7 @@
           <a:p>
             <a:r>
               <a:rPr lang="en-US" dirty="0"/>
-              <a:t>Insiste en que el número de afuera multiplica a todos los términos de adentro.
-Ejemplo para practicar: 5(2y − 3) = 10y − 15. Comprobación con y = 4: 5(8 − 3) = 25 y 40 − 15 = 25.
-Error típico a mostrar: −2(x − 4) = −2x + 8, no −2x − 4. El signo negativo cambia el segundo término.</a:t>
+              <a:t/>
             </a:r>
             <a:endParaRPr lang="en-US" dirty="0"/>
           </a:p>
@@ -1515,10 +1484,7 @@
           <a:p>
             <a:r>
               <a:rPr lang="en-US" dirty="0"/>
-              <a:t>Usa la balanza para explicar que una ecuación se conserva si se hace lo mismo en ambos lados.
-Ejemplo para practicar: 2x = 18. Dividir ambos lados entre 2 da x = 9.
-Otro: x / 3 = 5. Multiplicar ambos lados por 3 da x = 15.
-Pregunta: si sumo 4 a un lado y no al otro, ¿qué le pasa a la balanza?</a:t>
+              <a:t/>
             </a:r>
             <a:endParaRPr lang="en-US" dirty="0"/>
           </a:p>
@@ -1606,12 +1572,7 @@
           <a:p>
             <a:r>
               <a:rPr lang="en-US" dirty="0"/>
-              <a:t>Muestra el procedimiento completo y enfatiza la comprobación. Es la forma de evitar errores en el examen.
-Ejemplo para practicar: 5x − 8 = 27.
-Paso 1: sumar 8 a ambos lados: 5x = 35.
-Paso 2: dividir entre 5: x = 7.
-Comprobación: 5 · 7 − 8 = 27. ✔
-Pide que un alumno pase al pizarrón a explicar el procedimiento en voz alta.</a:t>
+              <a:t/>
             </a:r>
             <a:endParaRPr lang="en-US" dirty="0"/>
           </a:p>
@@ -1699,13 +1660,7 @@
           <a:p>
             <a:r>
               <a:rPr lang="en-US" dirty="0"/>
-              <a:t>Esta es la diferencia más importante para quien empieza a programar.
-En álgebra, a = a · 2 implicaría que a = 0. En C++, la misma línea es una instrucción: toma el valor actual de a, lo multiplica por 2 y lo guarda otra vez en a.
-Ejemplo para practicar en C++:
-int a = 3;   // a vale 3
-a = a * 2;   // ahora a vale 6
-a = a + 1;   // ahora a vale 7
-Pregunta al grupo: ¿cuánto vale a al final? Respuesta: 7.</a:t>
+              <a:t/>
             </a:r>
             <a:endParaRPr lang="en-US" dirty="0"/>
           </a:p>
@@ -1793,12 +1748,7 @@
           <a:p>
             <a:r>
               <a:rPr lang="en-US" dirty="0"/>
-              <a:t>Una proposición tiene valor de verdad: es verdadera o falsa. Una pregunta o una opinión no lo tiene.
-Ejemplos para practicar:
-- "2 + 2 = 5": es proposición, y es falsa.
-- "¿Cuántos años tienes?": no es proposición.
-- "Todo número par es divisible entre 4": es falsa. Contraejemplo: el 6.
-Pide al grupo que busque un contraejemplo para cada afirmación falsa.</a:t>
+              <a:t/>
             </a:r>
             <a:endParaRPr lang="en-US" dirty="0"/>
           </a:p>
@@ -2243,7 +2193,7 @@
                 <a:ea typeface="Calibri" pitchFamily="34" charset="-122"/>
                 <a:cs typeface="Calibri" pitchFamily="34" charset="-120"/>
               </a:rPr>
-              <a:t>Tema 1 · Bloque 1 · Variables, propiedades, ecuaciones y condicionales</a:t>
+              <a:t>Tema 1 · Bloque 1 · Variables, propiedades, ecuaciones y lógica</a:t>
             </a:r>
             <a:endParaRPr lang="en-US" sz="2000" dirty="0"/>
           </a:p>
@@ -2290,7 +2240,7 @@
       </p:sp>
       <p:sp>
         <p:nvSpPr>
-          <p:cNvPr id="6" name="Shape 3"/>
+          <p:cNvPr id="5" name="Shape 3"/>
           <p:cNvSpPr/>
           <p:nvPr/>
         </p:nvSpPr>
@@ -2315,7 +2265,7 @@
       </p:sp>
       <p:pic>
         <p:nvPicPr>
-          <p:cNvPr id="7" name="Image 0" descr="preencoded.png">    </p:cNvPr>
+          <p:cNvPr id="6" name="Image 0" descr="preencoded.png">    </p:cNvPr>
           <p:cNvPicPr>
             <a:picLocks noChangeAspect="1"/>
           </p:cNvPicPr>
@@ -2402,7 +2352,7 @@
                 <a:ea typeface="Cambria" pitchFamily="34" charset="-122"/>
                 <a:cs typeface="Cambria" pitchFamily="34" charset="-120"/>
               </a:rPr>
-              <a:t>Y, O y NO</a:t>
+              <a:t>Traducir un problema a ecuación</a:t>
             </a:r>
             <a:endParaRPr lang="en-US" sz="3000" dirty="0"/>
           </a:p>
@@ -2441,7 +2391,7 @@
                 <a:ea typeface="Calibri" pitchFamily="34" charset="-122"/>
                 <a:cs typeface="Calibri" pitchFamily="34" charset="-120"/>
               </a:rPr>
-              <a:t>Tablas de verdad (V = verdadero, F = falso)</a:t>
+              <a:t>Perímetro de 180 m; el largo mide 10 m más que el doble del ancho</a:t>
             </a:r>
             <a:endParaRPr lang="en-US" sz="1600" dirty="0"/>
           </a:p>
@@ -2486,1786 +2436,16 @@
           </a:p>
         </p:txBody>
       </p:sp>
-      <p:graphicFrame>
-        <p:nvGraphicFramePr>
-          <p:cNvPr id="11" name="Table 0"/>
-          <p:cNvGraphicFramePr>
-            <a:graphicFrameLocks noGrp="1"/>
-          </p:cNvGraphicFramePr>
-          <p:nvPr>
-            <p:extLst>
-              <p:ext uri="{D42A27DB-BD31-4B8C-83A1-F6EECF244321}">
-                <p14:modId xmlns:p14="http://schemas.microsoft.com/office/powerpoint/2010/main" val="1579011935"/>
-              </p:ext>
-            </p:extLst>
-          </p:nvPr>
-        </p:nvGraphicFramePr>
-        <p:xfrm>
-          <a:off x="548640" y="1554480"/>
-          <a:ext cx="8046720" cy="914400"/>
-        </p:xfrm>
-        <a:graphic>
-          <a:graphicData uri="http://schemas.openxmlformats.org/drawingml/2006/table">
-            <a:tbl>
-              <a:tblPr/>
-              <a:tblGrid>
-                <a:gridCol w="1463040"/>
-                <a:gridCol w="1463040"/>
-                <a:gridCol w="1645920"/>
-                <a:gridCol w="1645920"/>
-                <a:gridCol w="1828800"/>
-              </a:tblGrid>
-              <a:tr h="411480">
-                <a:tc>
-                  <a:txBody>
-                    <a:bodyPr/>
-                    <a:lstStyle/>
-                    <a:p>
-                      <a:pPr algn="ctr" indent="0" marL="0">
-                        <a:buNone/>
-                      </a:pPr>
-                      <a:r>
-                        <a:rPr lang="en-US" sz="1800" b="1" dirty="0">
-                          <a:solidFill>
-                            <a:srgbClr val="FFFFFF"/>
-                          </a:solidFill>
-                          <a:latin typeface="Calibri" pitchFamily="34" charset="0"/>
-                          <a:ea typeface="Calibri" pitchFamily="34" charset="-122"/>
-                          <a:cs typeface="Calibri" pitchFamily="34" charset="-120"/>
-                        </a:rPr>
-                        <a:t>p</a:t>
-                      </a:r>
-                      <a:endParaRPr lang="en-US" sz="1800" dirty="0">
-                        <a:latin typeface="Calibri" charset="0"/>
-                        <a:ea typeface="Calibri" charset="0"/>
-                        <a:cs typeface="Calibri" charset="0"/>
-                      </a:endParaRPr>
-                    </a:p>
-                  </a:txBody>
-                  <a:tcPr marL="91440" marR="91440" marT="45720" marB="45720" anchor="ctr">
-                    <a:lnL w="9525" cap="flat" cmpd="sng" algn="ctr">
-                      <a:solidFill>
-                        <a:srgbClr val="C9D5E2"/>
-                      </a:solidFill>
-                      <a:prstDash val="solid"/>
-                      <a:round/>
-                      <a:headEnd type="none" w="med" len="med"/>
-                      <a:tailEnd type="none" w="med" len="med"/>
-                    </a:lnL>
-                    <a:lnR w="9525" cap="flat" cmpd="sng" algn="ctr">
-                      <a:solidFill>
-                        <a:srgbClr val="C9D5E2"/>
-                      </a:solidFill>
-                      <a:prstDash val="solid"/>
-                      <a:round/>
-                      <a:headEnd type="none" w="med" len="med"/>
-                      <a:tailEnd type="none" w="med" len="med"/>
-                    </a:lnR>
-                    <a:lnT w="9525" cap="flat" cmpd="sng" algn="ctr">
-                      <a:solidFill>
-                        <a:srgbClr val="C9D5E2"/>
-                      </a:solidFill>
-                      <a:prstDash val="solid"/>
-                      <a:round/>
-                      <a:headEnd type="none" w="med" len="med"/>
-                      <a:tailEnd type="none" w="med" len="med"/>
-                    </a:lnT>
-                    <a:lnB w="9525" cap="flat" cmpd="sng" algn="ctr">
-                      <a:solidFill>
-                        <a:srgbClr val="C9D5E2"/>
-                      </a:solidFill>
-                      <a:prstDash val="solid"/>
-                      <a:round/>
-                      <a:headEnd type="none" w="med" len="med"/>
-                      <a:tailEnd type="none" w="med" len="med"/>
-                    </a:lnB>
-                    <a:solidFill>
-                      <a:srgbClr val="4F7CAC"/>
-                    </a:solidFill>
-                  </a:tcPr>
-                </a:tc>
-                <a:tc>
-                  <a:txBody>
-                    <a:bodyPr/>
-                    <a:lstStyle/>
-                    <a:p>
-                      <a:pPr algn="ctr" indent="0" marL="0">
-                        <a:buNone/>
-                      </a:pPr>
-                      <a:r>
-                        <a:rPr lang="en-US" sz="1800" b="1" dirty="0">
-                          <a:solidFill>
-                            <a:srgbClr val="FFFFFF"/>
-                          </a:solidFill>
-                          <a:latin typeface="Calibri" pitchFamily="34" charset="0"/>
-                          <a:ea typeface="Calibri" pitchFamily="34" charset="-122"/>
-                          <a:cs typeface="Calibri" pitchFamily="34" charset="-120"/>
-                        </a:rPr>
-                        <a:t>q</a:t>
-                      </a:r>
-                      <a:endParaRPr lang="en-US" sz="1800" dirty="0">
-                        <a:latin typeface="Calibri" charset="0"/>
-                        <a:ea typeface="Calibri" charset="0"/>
-                        <a:cs typeface="Calibri" charset="0"/>
-                      </a:endParaRPr>
-                    </a:p>
-                  </a:txBody>
-                  <a:tcPr marL="91440" marR="91440" marT="45720" marB="45720" anchor="ctr">
-                    <a:lnL w="9525" cap="flat" cmpd="sng" algn="ctr">
-                      <a:solidFill>
-                        <a:srgbClr val="C9D5E2"/>
-                      </a:solidFill>
-                      <a:prstDash val="solid"/>
-                      <a:round/>
-                      <a:headEnd type="none" w="med" len="med"/>
-                      <a:tailEnd type="none" w="med" len="med"/>
-                    </a:lnL>
-                    <a:lnR w="9525" cap="flat" cmpd="sng" algn="ctr">
-                      <a:solidFill>
-                        <a:srgbClr val="C9D5E2"/>
-                      </a:solidFill>
-                      <a:prstDash val="solid"/>
-                      <a:round/>
-                      <a:headEnd type="none" w="med" len="med"/>
-                      <a:tailEnd type="none" w="med" len="med"/>
-                    </a:lnR>
-                    <a:lnT w="9525" cap="flat" cmpd="sng" algn="ctr">
-                      <a:solidFill>
-                        <a:srgbClr val="C9D5E2"/>
-                      </a:solidFill>
-                      <a:prstDash val="solid"/>
-                      <a:round/>
-                      <a:headEnd type="none" w="med" len="med"/>
-                      <a:tailEnd type="none" w="med" len="med"/>
-                    </a:lnT>
-                    <a:lnB w="9525" cap="flat" cmpd="sng" algn="ctr">
-                      <a:solidFill>
-                        <a:srgbClr val="C9D5E2"/>
-                      </a:solidFill>
-                      <a:prstDash val="solid"/>
-                      <a:round/>
-                      <a:headEnd type="none" w="med" len="med"/>
-                      <a:tailEnd type="none" w="med" len="med"/>
-                    </a:lnB>
-                    <a:solidFill>
-                      <a:srgbClr val="4F7CAC"/>
-                    </a:solidFill>
-                  </a:tcPr>
-                </a:tc>
-                <a:tc>
-                  <a:txBody>
-                    <a:bodyPr/>
-                    <a:lstStyle/>
-                    <a:p>
-                      <a:pPr algn="ctr" indent="0" marL="0">
-                        <a:buNone/>
-                      </a:pPr>
-                      <a:r>
-                        <a:rPr lang="en-US" sz="1800" b="1" dirty="0">
-                          <a:solidFill>
-                            <a:srgbClr val="FFFFFF"/>
-                          </a:solidFill>
-                          <a:latin typeface="Calibri" pitchFamily="34" charset="0"/>
-                          <a:ea typeface="Calibri" pitchFamily="34" charset="-122"/>
-                          <a:cs typeface="Calibri" pitchFamily="34" charset="-120"/>
-                        </a:rPr>
-                        <a:t>p Y q</a:t>
-                      </a:r>
-                      <a:endParaRPr lang="en-US" sz="1800" dirty="0">
-                        <a:latin typeface="Calibri" charset="0"/>
-                        <a:ea typeface="Calibri" charset="0"/>
-                        <a:cs typeface="Calibri" charset="0"/>
-                      </a:endParaRPr>
-                    </a:p>
-                  </a:txBody>
-                  <a:tcPr marL="91440" marR="91440" marT="45720" marB="45720" anchor="ctr">
-                    <a:lnL w="9525" cap="flat" cmpd="sng" algn="ctr">
-                      <a:solidFill>
-                        <a:srgbClr val="C9D5E2"/>
-                      </a:solidFill>
-                      <a:prstDash val="solid"/>
-                      <a:round/>
-                      <a:headEnd type="none" w="med" len="med"/>
-                      <a:tailEnd type="none" w="med" len="med"/>
-                    </a:lnL>
-                    <a:lnR w="9525" cap="flat" cmpd="sng" algn="ctr">
-                      <a:solidFill>
-                        <a:srgbClr val="C9D5E2"/>
-                      </a:solidFill>
-                      <a:prstDash val="solid"/>
-                      <a:round/>
-                      <a:headEnd type="none" w="med" len="med"/>
-                      <a:tailEnd type="none" w="med" len="med"/>
-                    </a:lnR>
-                    <a:lnT w="9525" cap="flat" cmpd="sng" algn="ctr">
-                      <a:solidFill>
-                        <a:srgbClr val="C9D5E2"/>
-                      </a:solidFill>
-                      <a:prstDash val="solid"/>
-                      <a:round/>
-                      <a:headEnd type="none" w="med" len="med"/>
-                      <a:tailEnd type="none" w="med" len="med"/>
-                    </a:lnT>
-                    <a:lnB w="9525" cap="flat" cmpd="sng" algn="ctr">
-                      <a:solidFill>
-                        <a:srgbClr val="C9D5E2"/>
-                      </a:solidFill>
-                      <a:prstDash val="solid"/>
-                      <a:round/>
-                      <a:headEnd type="none" w="med" len="med"/>
-                      <a:tailEnd type="none" w="med" len="med"/>
-                    </a:lnB>
-                    <a:solidFill>
-                      <a:srgbClr val="4F7CAC"/>
-                    </a:solidFill>
-                  </a:tcPr>
-                </a:tc>
-                <a:tc>
-                  <a:txBody>
-                    <a:bodyPr/>
-                    <a:lstStyle/>
-                    <a:p>
-                      <a:pPr algn="ctr" indent="0" marL="0">
-                        <a:buNone/>
-                      </a:pPr>
-                      <a:r>
-                        <a:rPr lang="en-US" sz="1800" b="1" dirty="0">
-                          <a:solidFill>
-                            <a:srgbClr val="FFFFFF"/>
-                          </a:solidFill>
-                          <a:latin typeface="Calibri" pitchFamily="34" charset="0"/>
-                          <a:ea typeface="Calibri" pitchFamily="34" charset="-122"/>
-                          <a:cs typeface="Calibri" pitchFamily="34" charset="-120"/>
-                        </a:rPr>
-                        <a:t>p O q</a:t>
-                      </a:r>
-                      <a:endParaRPr lang="en-US" sz="1800" dirty="0">
-                        <a:latin typeface="Calibri" charset="0"/>
-                        <a:ea typeface="Calibri" charset="0"/>
-                        <a:cs typeface="Calibri" charset="0"/>
-                      </a:endParaRPr>
-                    </a:p>
-                  </a:txBody>
-                  <a:tcPr marL="91440" marR="91440" marT="45720" marB="45720" anchor="ctr">
-                    <a:lnL w="9525" cap="flat" cmpd="sng" algn="ctr">
-                      <a:solidFill>
-                        <a:srgbClr val="C9D5E2"/>
-                      </a:solidFill>
-                      <a:prstDash val="solid"/>
-                      <a:round/>
-                      <a:headEnd type="none" w="med" len="med"/>
-                      <a:tailEnd type="none" w="med" len="med"/>
-                    </a:lnL>
-                    <a:lnR w="9525" cap="flat" cmpd="sng" algn="ctr">
-                      <a:solidFill>
-                        <a:srgbClr val="C9D5E2"/>
-                      </a:solidFill>
-                      <a:prstDash val="solid"/>
-                      <a:round/>
-                      <a:headEnd type="none" w="med" len="med"/>
-                      <a:tailEnd type="none" w="med" len="med"/>
-                    </a:lnR>
-                    <a:lnT w="9525" cap="flat" cmpd="sng" algn="ctr">
-                      <a:solidFill>
-                        <a:srgbClr val="C9D5E2"/>
-                      </a:solidFill>
-                      <a:prstDash val="solid"/>
-                      <a:round/>
-                      <a:headEnd type="none" w="med" len="med"/>
-                      <a:tailEnd type="none" w="med" len="med"/>
-                    </a:lnT>
-                    <a:lnB w="9525" cap="flat" cmpd="sng" algn="ctr">
-                      <a:solidFill>
-                        <a:srgbClr val="C9D5E2"/>
-                      </a:solidFill>
-                      <a:prstDash val="solid"/>
-                      <a:round/>
-                      <a:headEnd type="none" w="med" len="med"/>
-                      <a:tailEnd type="none" w="med" len="med"/>
-                    </a:lnB>
-                    <a:solidFill>
-                      <a:srgbClr val="4F7CAC"/>
-                    </a:solidFill>
-                  </a:tcPr>
-                </a:tc>
-                <a:tc>
-                  <a:txBody>
-                    <a:bodyPr/>
-                    <a:lstStyle/>
-                    <a:p>
-                      <a:pPr algn="ctr" indent="0" marL="0">
-                        <a:buNone/>
-                      </a:pPr>
-                      <a:r>
-                        <a:rPr lang="en-US" sz="1800" b="1" dirty="0">
-                          <a:solidFill>
-                            <a:srgbClr val="FFFFFF"/>
-                          </a:solidFill>
-                          <a:latin typeface="Calibri" pitchFamily="34" charset="0"/>
-                          <a:ea typeface="Calibri" pitchFamily="34" charset="-122"/>
-                          <a:cs typeface="Calibri" pitchFamily="34" charset="-120"/>
-                        </a:rPr>
-                        <a:t>NO p</a:t>
-                      </a:r>
-                      <a:endParaRPr lang="en-US" sz="1800" dirty="0">
-                        <a:latin typeface="Calibri" charset="0"/>
-                        <a:ea typeface="Calibri" charset="0"/>
-                        <a:cs typeface="Calibri" charset="0"/>
-                      </a:endParaRPr>
-                    </a:p>
-                  </a:txBody>
-                  <a:tcPr marL="91440" marR="91440" marT="45720" marB="45720" anchor="ctr">
-                    <a:lnL w="9525" cap="flat" cmpd="sng" algn="ctr">
-                      <a:solidFill>
-                        <a:srgbClr val="C9D5E2"/>
-                      </a:solidFill>
-                      <a:prstDash val="solid"/>
-                      <a:round/>
-                      <a:headEnd type="none" w="med" len="med"/>
-                      <a:tailEnd type="none" w="med" len="med"/>
-                    </a:lnL>
-                    <a:lnR w="9525" cap="flat" cmpd="sng" algn="ctr">
-                      <a:solidFill>
-                        <a:srgbClr val="C9D5E2"/>
-                      </a:solidFill>
-                      <a:prstDash val="solid"/>
-                      <a:round/>
-                      <a:headEnd type="none" w="med" len="med"/>
-                      <a:tailEnd type="none" w="med" len="med"/>
-                    </a:lnR>
-                    <a:lnT w="9525" cap="flat" cmpd="sng" algn="ctr">
-                      <a:solidFill>
-                        <a:srgbClr val="C9D5E2"/>
-                      </a:solidFill>
-                      <a:prstDash val="solid"/>
-                      <a:round/>
-                      <a:headEnd type="none" w="med" len="med"/>
-                      <a:tailEnd type="none" w="med" len="med"/>
-                    </a:lnT>
-                    <a:lnB w="9525" cap="flat" cmpd="sng" algn="ctr">
-                      <a:solidFill>
-                        <a:srgbClr val="C9D5E2"/>
-                      </a:solidFill>
-                      <a:prstDash val="solid"/>
-                      <a:round/>
-                      <a:headEnd type="none" w="med" len="med"/>
-                      <a:tailEnd type="none" w="med" len="med"/>
-                    </a:lnB>
-                    <a:solidFill>
-                      <a:srgbClr val="4F7CAC"/>
-                    </a:solidFill>
-                  </a:tcPr>
-                </a:tc>
-              </a:tr>
-              <a:tr h="411480">
-                <a:tc>
-                  <a:txBody>
-                    <a:bodyPr/>
-                    <a:lstStyle/>
-                    <a:p>
-                      <a:pPr algn="ctr" indent="0" marL="0">
-                        <a:buNone/>
-                      </a:pPr>
-                      <a:r>
-                        <a:rPr lang="en-US" sz="1800" dirty="0">
-                          <a:solidFill>
-                            <a:srgbClr val="2F3E4E"/>
-                          </a:solidFill>
-                          <a:latin typeface="Calibri" pitchFamily="34" charset="0"/>
-                          <a:ea typeface="Calibri" pitchFamily="34" charset="-122"/>
-                          <a:cs typeface="Calibri" pitchFamily="34" charset="-120"/>
-                        </a:rPr>
-                        <a:t>V</a:t>
-                      </a:r>
-                      <a:endParaRPr lang="en-US" sz="1800" dirty="0">
-                        <a:latin typeface="Calibri" charset="0"/>
-                        <a:ea typeface="Calibri" charset="0"/>
-                        <a:cs typeface="Calibri" charset="0"/>
-                      </a:endParaRPr>
-                    </a:p>
-                  </a:txBody>
-                  <a:tcPr marL="91440" marR="91440" marT="45720" marB="45720" anchor="ctr">
-                    <a:lnL w="9525" cap="flat" cmpd="sng" algn="ctr">
-                      <a:solidFill>
-                        <a:srgbClr val="C9D5E2"/>
-                      </a:solidFill>
-                      <a:prstDash val="solid"/>
-                      <a:round/>
-                      <a:headEnd type="none" w="med" len="med"/>
-                      <a:tailEnd type="none" w="med" len="med"/>
-                    </a:lnL>
-                    <a:lnR w="9525" cap="flat" cmpd="sng" algn="ctr">
-                      <a:solidFill>
-                        <a:srgbClr val="C9D5E2"/>
-                      </a:solidFill>
-                      <a:prstDash val="solid"/>
-                      <a:round/>
-                      <a:headEnd type="none" w="med" len="med"/>
-                      <a:tailEnd type="none" w="med" len="med"/>
-                    </a:lnR>
-                    <a:lnT w="9525" cap="flat" cmpd="sng" algn="ctr">
-                      <a:solidFill>
-                        <a:srgbClr val="C9D5E2"/>
-                      </a:solidFill>
-                      <a:prstDash val="solid"/>
-                      <a:round/>
-                      <a:headEnd type="none" w="med" len="med"/>
-                      <a:tailEnd type="none" w="med" len="med"/>
-                    </a:lnT>
-                    <a:lnB w="9525" cap="flat" cmpd="sng" algn="ctr">
-                      <a:solidFill>
-                        <a:srgbClr val="C9D5E2"/>
-                      </a:solidFill>
-                      <a:prstDash val="solid"/>
-                      <a:round/>
-                      <a:headEnd type="none" w="med" len="med"/>
-                      <a:tailEnd type="none" w="med" len="med"/>
-                    </a:lnB>
-                    <a:solidFill>
-                      <a:srgbClr val="FFFFFF"/>
-                    </a:solidFill>
-                  </a:tcPr>
-                </a:tc>
-                <a:tc>
-                  <a:txBody>
-                    <a:bodyPr/>
-                    <a:lstStyle/>
-                    <a:p>
-                      <a:pPr algn="ctr" indent="0" marL="0">
-                        <a:buNone/>
-                      </a:pPr>
-                      <a:r>
-                        <a:rPr lang="en-US" sz="1800" dirty="0">
-                          <a:solidFill>
-                            <a:srgbClr val="2F3E4E"/>
-                          </a:solidFill>
-                          <a:latin typeface="Calibri" pitchFamily="34" charset="0"/>
-                          <a:ea typeface="Calibri" pitchFamily="34" charset="-122"/>
-                          <a:cs typeface="Calibri" pitchFamily="34" charset="-120"/>
-                        </a:rPr>
-                        <a:t>V</a:t>
-                      </a:r>
-                      <a:endParaRPr lang="en-US" sz="1800" dirty="0">
-                        <a:latin typeface="Calibri" charset="0"/>
-                        <a:ea typeface="Calibri" charset="0"/>
-                        <a:cs typeface="Calibri" charset="0"/>
-                      </a:endParaRPr>
-                    </a:p>
-                  </a:txBody>
-                  <a:tcPr marL="91440" marR="91440" marT="45720" marB="45720" anchor="ctr">
-                    <a:lnL w="9525" cap="flat" cmpd="sng" algn="ctr">
-                      <a:solidFill>
-                        <a:srgbClr val="C9D5E2"/>
-                      </a:solidFill>
-                      <a:prstDash val="solid"/>
-                      <a:round/>
-                      <a:headEnd type="none" w="med" len="med"/>
-                      <a:tailEnd type="none" w="med" len="med"/>
-                    </a:lnL>
-                    <a:lnR w="9525" cap="flat" cmpd="sng" algn="ctr">
-                      <a:solidFill>
-                        <a:srgbClr val="C9D5E2"/>
-                      </a:solidFill>
-                      <a:prstDash val="solid"/>
-                      <a:round/>
-                      <a:headEnd type="none" w="med" len="med"/>
-                      <a:tailEnd type="none" w="med" len="med"/>
-                    </a:lnR>
-                    <a:lnT w="9525" cap="flat" cmpd="sng" algn="ctr">
-                      <a:solidFill>
-                        <a:srgbClr val="C9D5E2"/>
-                      </a:solidFill>
-                      <a:prstDash val="solid"/>
-                      <a:round/>
-                      <a:headEnd type="none" w="med" len="med"/>
-                      <a:tailEnd type="none" w="med" len="med"/>
-                    </a:lnT>
-                    <a:lnB w="9525" cap="flat" cmpd="sng" algn="ctr">
-                      <a:solidFill>
-                        <a:srgbClr val="C9D5E2"/>
-                      </a:solidFill>
-                      <a:prstDash val="solid"/>
-                      <a:round/>
-                      <a:headEnd type="none" w="med" len="med"/>
-                      <a:tailEnd type="none" w="med" len="med"/>
-                    </a:lnB>
-                    <a:solidFill>
-                      <a:srgbClr val="FFFFFF"/>
-                    </a:solidFill>
-                  </a:tcPr>
-                </a:tc>
-                <a:tc>
-                  <a:txBody>
-                    <a:bodyPr/>
-                    <a:lstStyle/>
-                    <a:p>
-                      <a:pPr algn="ctr" indent="0" marL="0">
-                        <a:buNone/>
-                      </a:pPr>
-                      <a:r>
-                        <a:rPr lang="en-US" sz="1800" dirty="0">
-                          <a:solidFill>
-                            <a:srgbClr val="2F3E4E"/>
-                          </a:solidFill>
-                          <a:latin typeface="Calibri" pitchFamily="34" charset="0"/>
-                          <a:ea typeface="Calibri" pitchFamily="34" charset="-122"/>
-                          <a:cs typeface="Calibri" pitchFamily="34" charset="-120"/>
-                        </a:rPr>
-                        <a:t>V</a:t>
-                      </a:r>
-                      <a:endParaRPr lang="en-US" sz="1800" dirty="0">
-                        <a:latin typeface="Calibri" charset="0"/>
-                        <a:ea typeface="Calibri" charset="0"/>
-                        <a:cs typeface="Calibri" charset="0"/>
-                      </a:endParaRPr>
-                    </a:p>
-                  </a:txBody>
-                  <a:tcPr marL="91440" marR="91440" marT="45720" marB="45720" anchor="ctr">
-                    <a:lnL w="9525" cap="flat" cmpd="sng" algn="ctr">
-                      <a:solidFill>
-                        <a:srgbClr val="C9D5E2"/>
-                      </a:solidFill>
-                      <a:prstDash val="solid"/>
-                      <a:round/>
-                      <a:headEnd type="none" w="med" len="med"/>
-                      <a:tailEnd type="none" w="med" len="med"/>
-                    </a:lnL>
-                    <a:lnR w="9525" cap="flat" cmpd="sng" algn="ctr">
-                      <a:solidFill>
-                        <a:srgbClr val="C9D5E2"/>
-                      </a:solidFill>
-                      <a:prstDash val="solid"/>
-                      <a:round/>
-                      <a:headEnd type="none" w="med" len="med"/>
-                      <a:tailEnd type="none" w="med" len="med"/>
-                    </a:lnR>
-                    <a:lnT w="9525" cap="flat" cmpd="sng" algn="ctr">
-                      <a:solidFill>
-                        <a:srgbClr val="C9D5E2"/>
-                      </a:solidFill>
-                      <a:prstDash val="solid"/>
-                      <a:round/>
-                      <a:headEnd type="none" w="med" len="med"/>
-                      <a:tailEnd type="none" w="med" len="med"/>
-                    </a:lnT>
-                    <a:lnB w="9525" cap="flat" cmpd="sng" algn="ctr">
-                      <a:solidFill>
-                        <a:srgbClr val="C9D5E2"/>
-                      </a:solidFill>
-                      <a:prstDash val="solid"/>
-                      <a:round/>
-                      <a:headEnd type="none" w="med" len="med"/>
-                      <a:tailEnd type="none" w="med" len="med"/>
-                    </a:lnB>
-                    <a:solidFill>
-                      <a:srgbClr val="FFFFFF"/>
-                    </a:solidFill>
-                  </a:tcPr>
-                </a:tc>
-                <a:tc>
-                  <a:txBody>
-                    <a:bodyPr/>
-                    <a:lstStyle/>
-                    <a:p>
-                      <a:pPr algn="ctr" indent="0" marL="0">
-                        <a:buNone/>
-                      </a:pPr>
-                      <a:r>
-                        <a:rPr lang="en-US" sz="1800" dirty="0">
-                          <a:solidFill>
-                            <a:srgbClr val="2F3E4E"/>
-                          </a:solidFill>
-                          <a:latin typeface="Calibri" pitchFamily="34" charset="0"/>
-                          <a:ea typeface="Calibri" pitchFamily="34" charset="-122"/>
-                          <a:cs typeface="Calibri" pitchFamily="34" charset="-120"/>
-                        </a:rPr>
-                        <a:t>V</a:t>
-                      </a:r>
-                      <a:endParaRPr lang="en-US" sz="1800" dirty="0">
-                        <a:latin typeface="Calibri" charset="0"/>
-                        <a:ea typeface="Calibri" charset="0"/>
-                        <a:cs typeface="Calibri" charset="0"/>
-                      </a:endParaRPr>
-                    </a:p>
-                  </a:txBody>
-                  <a:tcPr marL="91440" marR="91440" marT="45720" marB="45720" anchor="ctr">
-                    <a:lnL w="9525" cap="flat" cmpd="sng" algn="ctr">
-                      <a:solidFill>
-                        <a:srgbClr val="C9D5E2"/>
-                      </a:solidFill>
-                      <a:prstDash val="solid"/>
-                      <a:round/>
-                      <a:headEnd type="none" w="med" len="med"/>
-                      <a:tailEnd type="none" w="med" len="med"/>
-                    </a:lnL>
-                    <a:lnR w="9525" cap="flat" cmpd="sng" algn="ctr">
-                      <a:solidFill>
-                        <a:srgbClr val="C9D5E2"/>
-                      </a:solidFill>
-                      <a:prstDash val="solid"/>
-                      <a:round/>
-                      <a:headEnd type="none" w="med" len="med"/>
-                      <a:tailEnd type="none" w="med" len="med"/>
-                    </a:lnR>
-                    <a:lnT w="9525" cap="flat" cmpd="sng" algn="ctr">
-                      <a:solidFill>
-                        <a:srgbClr val="C9D5E2"/>
-                      </a:solidFill>
-                      <a:prstDash val="solid"/>
-                      <a:round/>
-                      <a:headEnd type="none" w="med" len="med"/>
-                      <a:tailEnd type="none" w="med" len="med"/>
-                    </a:lnT>
-                    <a:lnB w="9525" cap="flat" cmpd="sng" algn="ctr">
-                      <a:solidFill>
-                        <a:srgbClr val="C9D5E2"/>
-                      </a:solidFill>
-                      <a:prstDash val="solid"/>
-                      <a:round/>
-                      <a:headEnd type="none" w="med" len="med"/>
-                      <a:tailEnd type="none" w="med" len="med"/>
-                    </a:lnB>
-                    <a:solidFill>
-                      <a:srgbClr val="FFFFFF"/>
-                    </a:solidFill>
-                  </a:tcPr>
-                </a:tc>
-                <a:tc>
-                  <a:txBody>
-                    <a:bodyPr/>
-                    <a:lstStyle/>
-                    <a:p>
-                      <a:pPr algn="ctr" indent="0" marL="0">
-                        <a:buNone/>
-                      </a:pPr>
-                      <a:r>
-                        <a:rPr lang="en-US" sz="1800" dirty="0">
-                          <a:solidFill>
-                            <a:srgbClr val="2F3E4E"/>
-                          </a:solidFill>
-                          <a:latin typeface="Calibri" pitchFamily="34" charset="0"/>
-                          <a:ea typeface="Calibri" pitchFamily="34" charset="-122"/>
-                          <a:cs typeface="Calibri" pitchFamily="34" charset="-120"/>
-                        </a:rPr>
-                        <a:t>F</a:t>
-                      </a:r>
-                      <a:endParaRPr lang="en-US" sz="1800" dirty="0">
-                        <a:latin typeface="Calibri" charset="0"/>
-                        <a:ea typeface="Calibri" charset="0"/>
-                        <a:cs typeface="Calibri" charset="0"/>
-                      </a:endParaRPr>
-                    </a:p>
-                  </a:txBody>
-                  <a:tcPr marL="91440" marR="91440" marT="45720" marB="45720" anchor="ctr">
-                    <a:lnL w="9525" cap="flat" cmpd="sng" algn="ctr">
-                      <a:solidFill>
-                        <a:srgbClr val="C9D5E2"/>
-                      </a:solidFill>
-                      <a:prstDash val="solid"/>
-                      <a:round/>
-                      <a:headEnd type="none" w="med" len="med"/>
-                      <a:tailEnd type="none" w="med" len="med"/>
-                    </a:lnL>
-                    <a:lnR w="9525" cap="flat" cmpd="sng" algn="ctr">
-                      <a:solidFill>
-                        <a:srgbClr val="C9D5E2"/>
-                      </a:solidFill>
-                      <a:prstDash val="solid"/>
-                      <a:round/>
-                      <a:headEnd type="none" w="med" len="med"/>
-                      <a:tailEnd type="none" w="med" len="med"/>
-                    </a:lnR>
-                    <a:lnT w="9525" cap="flat" cmpd="sng" algn="ctr">
-                      <a:solidFill>
-                        <a:srgbClr val="C9D5E2"/>
-                      </a:solidFill>
-                      <a:prstDash val="solid"/>
-                      <a:round/>
-                      <a:headEnd type="none" w="med" len="med"/>
-                      <a:tailEnd type="none" w="med" len="med"/>
-                    </a:lnT>
-                    <a:lnB w="9525" cap="flat" cmpd="sng" algn="ctr">
-                      <a:solidFill>
-                        <a:srgbClr val="C9D5E2"/>
-                      </a:solidFill>
-                      <a:prstDash val="solid"/>
-                      <a:round/>
-                      <a:headEnd type="none" w="med" len="med"/>
-                      <a:tailEnd type="none" w="med" len="med"/>
-                    </a:lnB>
-                    <a:solidFill>
-                      <a:srgbClr val="FFFFFF"/>
-                    </a:solidFill>
-                  </a:tcPr>
-                </a:tc>
-              </a:tr>
-              <a:tr h="411480">
-                <a:tc>
-                  <a:txBody>
-                    <a:bodyPr/>
-                    <a:lstStyle/>
-                    <a:p>
-                      <a:pPr algn="ctr" indent="0" marL="0">
-                        <a:buNone/>
-                      </a:pPr>
-                      <a:r>
-                        <a:rPr lang="en-US" sz="1800" dirty="0">
-                          <a:solidFill>
-                            <a:srgbClr val="2F3E4E"/>
-                          </a:solidFill>
-                          <a:latin typeface="Calibri" pitchFamily="34" charset="0"/>
-                          <a:ea typeface="Calibri" pitchFamily="34" charset="-122"/>
-                          <a:cs typeface="Calibri" pitchFamily="34" charset="-120"/>
-                        </a:rPr>
-                        <a:t>V</a:t>
-                      </a:r>
-                      <a:endParaRPr lang="en-US" sz="1800" dirty="0">
-                        <a:latin typeface="Calibri" charset="0"/>
-                        <a:ea typeface="Calibri" charset="0"/>
-                        <a:cs typeface="Calibri" charset="0"/>
-                      </a:endParaRPr>
-                    </a:p>
-                  </a:txBody>
-                  <a:tcPr marL="91440" marR="91440" marT="45720" marB="45720" anchor="ctr">
-                    <a:lnL w="9525" cap="flat" cmpd="sng" algn="ctr">
-                      <a:solidFill>
-                        <a:srgbClr val="C9D5E2"/>
-                      </a:solidFill>
-                      <a:prstDash val="solid"/>
-                      <a:round/>
-                      <a:headEnd type="none" w="med" len="med"/>
-                      <a:tailEnd type="none" w="med" len="med"/>
-                    </a:lnL>
-                    <a:lnR w="9525" cap="flat" cmpd="sng" algn="ctr">
-                      <a:solidFill>
-                        <a:srgbClr val="C9D5E2"/>
-                      </a:solidFill>
-                      <a:prstDash val="solid"/>
-                      <a:round/>
-                      <a:headEnd type="none" w="med" len="med"/>
-                      <a:tailEnd type="none" w="med" len="med"/>
-                    </a:lnR>
-                    <a:lnT w="9525" cap="flat" cmpd="sng" algn="ctr">
-                      <a:solidFill>
-                        <a:srgbClr val="C9D5E2"/>
-                      </a:solidFill>
-                      <a:prstDash val="solid"/>
-                      <a:round/>
-                      <a:headEnd type="none" w="med" len="med"/>
-                      <a:tailEnd type="none" w="med" len="med"/>
-                    </a:lnT>
-                    <a:lnB w="9525" cap="flat" cmpd="sng" algn="ctr">
-                      <a:solidFill>
-                        <a:srgbClr val="C9D5E2"/>
-                      </a:solidFill>
-                      <a:prstDash val="solid"/>
-                      <a:round/>
-                      <a:headEnd type="none" w="med" len="med"/>
-                      <a:tailEnd type="none" w="med" len="med"/>
-                    </a:lnB>
-                    <a:solidFill>
-                      <a:srgbClr val="EEF3F8"/>
-                    </a:solidFill>
-                  </a:tcPr>
-                </a:tc>
-                <a:tc>
-                  <a:txBody>
-                    <a:bodyPr/>
-                    <a:lstStyle/>
-                    <a:p>
-                      <a:pPr algn="ctr" indent="0" marL="0">
-                        <a:buNone/>
-                      </a:pPr>
-                      <a:r>
-                        <a:rPr lang="en-US" sz="1800" dirty="0">
-                          <a:solidFill>
-                            <a:srgbClr val="2F3E4E"/>
-                          </a:solidFill>
-                          <a:latin typeface="Calibri" pitchFamily="34" charset="0"/>
-                          <a:ea typeface="Calibri" pitchFamily="34" charset="-122"/>
-                          <a:cs typeface="Calibri" pitchFamily="34" charset="-120"/>
-                        </a:rPr>
-                        <a:t>F</a:t>
-                      </a:r>
-                      <a:endParaRPr lang="en-US" sz="1800" dirty="0">
-                        <a:latin typeface="Calibri" charset="0"/>
-                        <a:ea typeface="Calibri" charset="0"/>
-                        <a:cs typeface="Calibri" charset="0"/>
-                      </a:endParaRPr>
-                    </a:p>
-                  </a:txBody>
-                  <a:tcPr marL="91440" marR="91440" marT="45720" marB="45720" anchor="ctr">
-                    <a:lnL w="9525" cap="flat" cmpd="sng" algn="ctr">
-                      <a:solidFill>
-                        <a:srgbClr val="C9D5E2"/>
-                      </a:solidFill>
-                      <a:prstDash val="solid"/>
-                      <a:round/>
-                      <a:headEnd type="none" w="med" len="med"/>
-                      <a:tailEnd type="none" w="med" len="med"/>
-                    </a:lnL>
-                    <a:lnR w="9525" cap="flat" cmpd="sng" algn="ctr">
-                      <a:solidFill>
-                        <a:srgbClr val="C9D5E2"/>
-                      </a:solidFill>
-                      <a:prstDash val="solid"/>
-                      <a:round/>
-                      <a:headEnd type="none" w="med" len="med"/>
-                      <a:tailEnd type="none" w="med" len="med"/>
-                    </a:lnR>
-                    <a:lnT w="9525" cap="flat" cmpd="sng" algn="ctr">
-                      <a:solidFill>
-                        <a:srgbClr val="C9D5E2"/>
-                      </a:solidFill>
-                      <a:prstDash val="solid"/>
-                      <a:round/>
-                      <a:headEnd type="none" w="med" len="med"/>
-                      <a:tailEnd type="none" w="med" len="med"/>
-                    </a:lnT>
-                    <a:lnB w="9525" cap="flat" cmpd="sng" algn="ctr">
-                      <a:solidFill>
-                        <a:srgbClr val="C9D5E2"/>
-                      </a:solidFill>
-                      <a:prstDash val="solid"/>
-                      <a:round/>
-                      <a:headEnd type="none" w="med" len="med"/>
-                      <a:tailEnd type="none" w="med" len="med"/>
-                    </a:lnB>
-                    <a:solidFill>
-                      <a:srgbClr val="EEF3F8"/>
-                    </a:solidFill>
-                  </a:tcPr>
-                </a:tc>
-                <a:tc>
-                  <a:txBody>
-                    <a:bodyPr/>
-                    <a:lstStyle/>
-                    <a:p>
-                      <a:pPr algn="ctr" indent="0" marL="0">
-                        <a:buNone/>
-                      </a:pPr>
-                      <a:r>
-                        <a:rPr lang="en-US" sz="1800" dirty="0">
-                          <a:solidFill>
-                            <a:srgbClr val="2F3E4E"/>
-                          </a:solidFill>
-                          <a:latin typeface="Calibri" pitchFamily="34" charset="0"/>
-                          <a:ea typeface="Calibri" pitchFamily="34" charset="-122"/>
-                          <a:cs typeface="Calibri" pitchFamily="34" charset="-120"/>
-                        </a:rPr>
-                        <a:t>F</a:t>
-                      </a:r>
-                      <a:endParaRPr lang="en-US" sz="1800" dirty="0">
-                        <a:latin typeface="Calibri" charset="0"/>
-                        <a:ea typeface="Calibri" charset="0"/>
-                        <a:cs typeface="Calibri" charset="0"/>
-                      </a:endParaRPr>
-                    </a:p>
-                  </a:txBody>
-                  <a:tcPr marL="91440" marR="91440" marT="45720" marB="45720" anchor="ctr">
-                    <a:lnL w="9525" cap="flat" cmpd="sng" algn="ctr">
-                      <a:solidFill>
-                        <a:srgbClr val="C9D5E2"/>
-                      </a:solidFill>
-                      <a:prstDash val="solid"/>
-                      <a:round/>
-                      <a:headEnd type="none" w="med" len="med"/>
-                      <a:tailEnd type="none" w="med" len="med"/>
-                    </a:lnL>
-                    <a:lnR w="9525" cap="flat" cmpd="sng" algn="ctr">
-                      <a:solidFill>
-                        <a:srgbClr val="C9D5E2"/>
-                      </a:solidFill>
-                      <a:prstDash val="solid"/>
-                      <a:round/>
-                      <a:headEnd type="none" w="med" len="med"/>
-                      <a:tailEnd type="none" w="med" len="med"/>
-                    </a:lnR>
-                    <a:lnT w="9525" cap="flat" cmpd="sng" algn="ctr">
-                      <a:solidFill>
-                        <a:srgbClr val="C9D5E2"/>
-                      </a:solidFill>
-                      <a:prstDash val="solid"/>
-                      <a:round/>
-                      <a:headEnd type="none" w="med" len="med"/>
-                      <a:tailEnd type="none" w="med" len="med"/>
-                    </a:lnT>
-                    <a:lnB w="9525" cap="flat" cmpd="sng" algn="ctr">
-                      <a:solidFill>
-                        <a:srgbClr val="C9D5E2"/>
-                      </a:solidFill>
-                      <a:prstDash val="solid"/>
-                      <a:round/>
-                      <a:headEnd type="none" w="med" len="med"/>
-                      <a:tailEnd type="none" w="med" len="med"/>
-                    </a:lnB>
-                    <a:solidFill>
-                      <a:srgbClr val="EEF3F8"/>
-                    </a:solidFill>
-                  </a:tcPr>
-                </a:tc>
-                <a:tc>
-                  <a:txBody>
-                    <a:bodyPr/>
-                    <a:lstStyle/>
-                    <a:p>
-                      <a:pPr algn="ctr" indent="0" marL="0">
-                        <a:buNone/>
-                      </a:pPr>
-                      <a:r>
-                        <a:rPr lang="en-US" sz="1800" dirty="0">
-                          <a:solidFill>
-                            <a:srgbClr val="2F3E4E"/>
-                          </a:solidFill>
-                          <a:latin typeface="Calibri" pitchFamily="34" charset="0"/>
-                          <a:ea typeface="Calibri" pitchFamily="34" charset="-122"/>
-                          <a:cs typeface="Calibri" pitchFamily="34" charset="-120"/>
-                        </a:rPr>
-                        <a:t>V</a:t>
-                      </a:r>
-                      <a:endParaRPr lang="en-US" sz="1800" dirty="0">
-                        <a:latin typeface="Calibri" charset="0"/>
-                        <a:ea typeface="Calibri" charset="0"/>
-                        <a:cs typeface="Calibri" charset="0"/>
-                      </a:endParaRPr>
-                    </a:p>
-                  </a:txBody>
-                  <a:tcPr marL="91440" marR="91440" marT="45720" marB="45720" anchor="ctr">
-                    <a:lnL w="9525" cap="flat" cmpd="sng" algn="ctr">
-                      <a:solidFill>
-                        <a:srgbClr val="C9D5E2"/>
-                      </a:solidFill>
-                      <a:prstDash val="solid"/>
-                      <a:round/>
-                      <a:headEnd type="none" w="med" len="med"/>
-                      <a:tailEnd type="none" w="med" len="med"/>
-                    </a:lnL>
-                    <a:lnR w="9525" cap="flat" cmpd="sng" algn="ctr">
-                      <a:solidFill>
-                        <a:srgbClr val="C9D5E2"/>
-                      </a:solidFill>
-                      <a:prstDash val="solid"/>
-                      <a:round/>
-                      <a:headEnd type="none" w="med" len="med"/>
-                      <a:tailEnd type="none" w="med" len="med"/>
-                    </a:lnR>
-                    <a:lnT w="9525" cap="flat" cmpd="sng" algn="ctr">
-                      <a:solidFill>
-                        <a:srgbClr val="C9D5E2"/>
-                      </a:solidFill>
-                      <a:prstDash val="solid"/>
-                      <a:round/>
-                      <a:headEnd type="none" w="med" len="med"/>
-                      <a:tailEnd type="none" w="med" len="med"/>
-                    </a:lnT>
-                    <a:lnB w="9525" cap="flat" cmpd="sng" algn="ctr">
-                      <a:solidFill>
-                        <a:srgbClr val="C9D5E2"/>
-                      </a:solidFill>
-                      <a:prstDash val="solid"/>
-                      <a:round/>
-                      <a:headEnd type="none" w="med" len="med"/>
-                      <a:tailEnd type="none" w="med" len="med"/>
-                    </a:lnB>
-                    <a:solidFill>
-                      <a:srgbClr val="EEF3F8"/>
-                    </a:solidFill>
-                  </a:tcPr>
-                </a:tc>
-                <a:tc>
-                  <a:txBody>
-                    <a:bodyPr/>
-                    <a:lstStyle/>
-                    <a:p>
-                      <a:pPr algn="ctr" indent="0" marL="0">
-                        <a:buNone/>
-                      </a:pPr>
-                      <a:r>
-                        <a:rPr lang="en-US" sz="1800" dirty="0">
-                          <a:solidFill>
-                            <a:srgbClr val="2F3E4E"/>
-                          </a:solidFill>
-                          <a:latin typeface="Calibri" pitchFamily="34" charset="0"/>
-                          <a:ea typeface="Calibri" pitchFamily="34" charset="-122"/>
-                          <a:cs typeface="Calibri" pitchFamily="34" charset="-120"/>
-                        </a:rPr>
-                        <a:t>F</a:t>
-                      </a:r>
-                      <a:endParaRPr lang="en-US" sz="1800" dirty="0">
-                        <a:latin typeface="Calibri" charset="0"/>
-                        <a:ea typeface="Calibri" charset="0"/>
-                        <a:cs typeface="Calibri" charset="0"/>
-                      </a:endParaRPr>
-                    </a:p>
-                  </a:txBody>
-                  <a:tcPr marL="91440" marR="91440" marT="45720" marB="45720" anchor="ctr">
-                    <a:lnL w="9525" cap="flat" cmpd="sng" algn="ctr">
-                      <a:solidFill>
-                        <a:srgbClr val="C9D5E2"/>
-                      </a:solidFill>
-                      <a:prstDash val="solid"/>
-                      <a:round/>
-                      <a:headEnd type="none" w="med" len="med"/>
-                      <a:tailEnd type="none" w="med" len="med"/>
-                    </a:lnL>
-                    <a:lnR w="9525" cap="flat" cmpd="sng" algn="ctr">
-                      <a:solidFill>
-                        <a:srgbClr val="C9D5E2"/>
-                      </a:solidFill>
-                      <a:prstDash val="solid"/>
-                      <a:round/>
-                      <a:headEnd type="none" w="med" len="med"/>
-                      <a:tailEnd type="none" w="med" len="med"/>
-                    </a:lnR>
-                    <a:lnT w="9525" cap="flat" cmpd="sng" algn="ctr">
-                      <a:solidFill>
-                        <a:srgbClr val="C9D5E2"/>
-                      </a:solidFill>
-                      <a:prstDash val="solid"/>
-                      <a:round/>
-                      <a:headEnd type="none" w="med" len="med"/>
-                      <a:tailEnd type="none" w="med" len="med"/>
-                    </a:lnT>
-                    <a:lnB w="9525" cap="flat" cmpd="sng" algn="ctr">
-                      <a:solidFill>
-                        <a:srgbClr val="C9D5E2"/>
-                      </a:solidFill>
-                      <a:prstDash val="solid"/>
-                      <a:round/>
-                      <a:headEnd type="none" w="med" len="med"/>
-                      <a:tailEnd type="none" w="med" len="med"/>
-                    </a:lnB>
-                    <a:solidFill>
-                      <a:srgbClr val="EEF3F8"/>
-                    </a:solidFill>
-                  </a:tcPr>
-                </a:tc>
-              </a:tr>
-              <a:tr h="411480">
-                <a:tc>
-                  <a:txBody>
-                    <a:bodyPr/>
-                    <a:lstStyle/>
-                    <a:p>
-                      <a:pPr algn="ctr" indent="0" marL="0">
-                        <a:buNone/>
-                      </a:pPr>
-                      <a:r>
-                        <a:rPr lang="en-US" sz="1800" dirty="0">
-                          <a:solidFill>
-                            <a:srgbClr val="2F3E4E"/>
-                          </a:solidFill>
-                          <a:latin typeface="Calibri" pitchFamily="34" charset="0"/>
-                          <a:ea typeface="Calibri" pitchFamily="34" charset="-122"/>
-                          <a:cs typeface="Calibri" pitchFamily="34" charset="-120"/>
-                        </a:rPr>
-                        <a:t>F</a:t>
-                      </a:r>
-                      <a:endParaRPr lang="en-US" sz="1800" dirty="0">
-                        <a:latin typeface="Calibri" charset="0"/>
-                        <a:ea typeface="Calibri" charset="0"/>
-                        <a:cs typeface="Calibri" charset="0"/>
-                      </a:endParaRPr>
-                    </a:p>
-                  </a:txBody>
-                  <a:tcPr marL="91440" marR="91440" marT="45720" marB="45720" anchor="ctr">
-                    <a:lnL w="9525" cap="flat" cmpd="sng" algn="ctr">
-                      <a:solidFill>
-                        <a:srgbClr val="C9D5E2"/>
-                      </a:solidFill>
-                      <a:prstDash val="solid"/>
-                      <a:round/>
-                      <a:headEnd type="none" w="med" len="med"/>
-                      <a:tailEnd type="none" w="med" len="med"/>
-                    </a:lnL>
-                    <a:lnR w="9525" cap="flat" cmpd="sng" algn="ctr">
-                      <a:solidFill>
-                        <a:srgbClr val="C9D5E2"/>
-                      </a:solidFill>
-                      <a:prstDash val="solid"/>
-                      <a:round/>
-                      <a:headEnd type="none" w="med" len="med"/>
-                      <a:tailEnd type="none" w="med" len="med"/>
-                    </a:lnR>
-                    <a:lnT w="9525" cap="flat" cmpd="sng" algn="ctr">
-                      <a:solidFill>
-                        <a:srgbClr val="C9D5E2"/>
-                      </a:solidFill>
-                      <a:prstDash val="solid"/>
-                      <a:round/>
-                      <a:headEnd type="none" w="med" len="med"/>
-                      <a:tailEnd type="none" w="med" len="med"/>
-                    </a:lnT>
-                    <a:lnB w="9525" cap="flat" cmpd="sng" algn="ctr">
-                      <a:solidFill>
-                        <a:srgbClr val="C9D5E2"/>
-                      </a:solidFill>
-                      <a:prstDash val="solid"/>
-                      <a:round/>
-                      <a:headEnd type="none" w="med" len="med"/>
-                      <a:tailEnd type="none" w="med" len="med"/>
-                    </a:lnB>
-                    <a:solidFill>
-                      <a:srgbClr val="FFFFFF"/>
-                    </a:solidFill>
-                  </a:tcPr>
-                </a:tc>
-                <a:tc>
-                  <a:txBody>
-                    <a:bodyPr/>
-                    <a:lstStyle/>
-                    <a:p>
-                      <a:pPr algn="ctr" indent="0" marL="0">
-                        <a:buNone/>
-                      </a:pPr>
-                      <a:r>
-                        <a:rPr lang="en-US" sz="1800" dirty="0">
-                          <a:solidFill>
-                            <a:srgbClr val="2F3E4E"/>
-                          </a:solidFill>
-                          <a:latin typeface="Calibri" pitchFamily="34" charset="0"/>
-                          <a:ea typeface="Calibri" pitchFamily="34" charset="-122"/>
-                          <a:cs typeface="Calibri" pitchFamily="34" charset="-120"/>
-                        </a:rPr>
-                        <a:t>V</a:t>
-                      </a:r>
-                      <a:endParaRPr lang="en-US" sz="1800" dirty="0">
-                        <a:latin typeface="Calibri" charset="0"/>
-                        <a:ea typeface="Calibri" charset="0"/>
-                        <a:cs typeface="Calibri" charset="0"/>
-                      </a:endParaRPr>
-                    </a:p>
-                  </a:txBody>
-                  <a:tcPr marL="91440" marR="91440" marT="45720" marB="45720" anchor="ctr">
-                    <a:lnL w="9525" cap="flat" cmpd="sng" algn="ctr">
-                      <a:solidFill>
-                        <a:srgbClr val="C9D5E2"/>
-                      </a:solidFill>
-                      <a:prstDash val="solid"/>
-                      <a:round/>
-                      <a:headEnd type="none" w="med" len="med"/>
-                      <a:tailEnd type="none" w="med" len="med"/>
-                    </a:lnL>
-                    <a:lnR w="9525" cap="flat" cmpd="sng" algn="ctr">
-                      <a:solidFill>
-                        <a:srgbClr val="C9D5E2"/>
-                      </a:solidFill>
-                      <a:prstDash val="solid"/>
-                      <a:round/>
-                      <a:headEnd type="none" w="med" len="med"/>
-                      <a:tailEnd type="none" w="med" len="med"/>
-                    </a:lnR>
-                    <a:lnT w="9525" cap="flat" cmpd="sng" algn="ctr">
-                      <a:solidFill>
-                        <a:srgbClr val="C9D5E2"/>
-                      </a:solidFill>
-                      <a:prstDash val="solid"/>
-                      <a:round/>
-                      <a:headEnd type="none" w="med" len="med"/>
-                      <a:tailEnd type="none" w="med" len="med"/>
-                    </a:lnT>
-                    <a:lnB w="9525" cap="flat" cmpd="sng" algn="ctr">
-                      <a:solidFill>
-                        <a:srgbClr val="C9D5E2"/>
-                      </a:solidFill>
-                      <a:prstDash val="solid"/>
-                      <a:round/>
-                      <a:headEnd type="none" w="med" len="med"/>
-                      <a:tailEnd type="none" w="med" len="med"/>
-                    </a:lnB>
-                    <a:solidFill>
-                      <a:srgbClr val="FFFFFF"/>
-                    </a:solidFill>
-                  </a:tcPr>
-                </a:tc>
-                <a:tc>
-                  <a:txBody>
-                    <a:bodyPr/>
-                    <a:lstStyle/>
-                    <a:p>
-                      <a:pPr algn="ctr" indent="0" marL="0">
-                        <a:buNone/>
-                      </a:pPr>
-                      <a:r>
-                        <a:rPr lang="en-US" sz="1800" dirty="0">
-                          <a:solidFill>
-                            <a:srgbClr val="2F3E4E"/>
-                          </a:solidFill>
-                          <a:latin typeface="Calibri" pitchFamily="34" charset="0"/>
-                          <a:ea typeface="Calibri" pitchFamily="34" charset="-122"/>
-                          <a:cs typeface="Calibri" pitchFamily="34" charset="-120"/>
-                        </a:rPr>
-                        <a:t>F</a:t>
-                      </a:r>
-                      <a:endParaRPr lang="en-US" sz="1800" dirty="0">
-                        <a:latin typeface="Calibri" charset="0"/>
-                        <a:ea typeface="Calibri" charset="0"/>
-                        <a:cs typeface="Calibri" charset="0"/>
-                      </a:endParaRPr>
-                    </a:p>
-                  </a:txBody>
-                  <a:tcPr marL="91440" marR="91440" marT="45720" marB="45720" anchor="ctr">
-                    <a:lnL w="9525" cap="flat" cmpd="sng" algn="ctr">
-                      <a:solidFill>
-                        <a:srgbClr val="C9D5E2"/>
-                      </a:solidFill>
-                      <a:prstDash val="solid"/>
-                      <a:round/>
-                      <a:headEnd type="none" w="med" len="med"/>
-                      <a:tailEnd type="none" w="med" len="med"/>
-                    </a:lnL>
-                    <a:lnR w="9525" cap="flat" cmpd="sng" algn="ctr">
-                      <a:solidFill>
-                        <a:srgbClr val="C9D5E2"/>
-                      </a:solidFill>
-                      <a:prstDash val="solid"/>
-                      <a:round/>
-                      <a:headEnd type="none" w="med" len="med"/>
-                      <a:tailEnd type="none" w="med" len="med"/>
-                    </a:lnR>
-                    <a:lnT w="9525" cap="flat" cmpd="sng" algn="ctr">
-                      <a:solidFill>
-                        <a:srgbClr val="C9D5E2"/>
-                      </a:solidFill>
-                      <a:prstDash val="solid"/>
-                      <a:round/>
-                      <a:headEnd type="none" w="med" len="med"/>
-                      <a:tailEnd type="none" w="med" len="med"/>
-                    </a:lnT>
-                    <a:lnB w="9525" cap="flat" cmpd="sng" algn="ctr">
-                      <a:solidFill>
-                        <a:srgbClr val="C9D5E2"/>
-                      </a:solidFill>
-                      <a:prstDash val="solid"/>
-                      <a:round/>
-                      <a:headEnd type="none" w="med" len="med"/>
-                      <a:tailEnd type="none" w="med" len="med"/>
-                    </a:lnB>
-                    <a:solidFill>
-                      <a:srgbClr val="FFFFFF"/>
-                    </a:solidFill>
-                  </a:tcPr>
-                </a:tc>
-                <a:tc>
-                  <a:txBody>
-                    <a:bodyPr/>
-                    <a:lstStyle/>
-                    <a:p>
-                      <a:pPr algn="ctr" indent="0" marL="0">
-                        <a:buNone/>
-                      </a:pPr>
-                      <a:r>
-                        <a:rPr lang="en-US" sz="1800" dirty="0">
-                          <a:solidFill>
-                            <a:srgbClr val="2F3E4E"/>
-                          </a:solidFill>
-                          <a:latin typeface="Calibri" pitchFamily="34" charset="0"/>
-                          <a:ea typeface="Calibri" pitchFamily="34" charset="-122"/>
-                          <a:cs typeface="Calibri" pitchFamily="34" charset="-120"/>
-                        </a:rPr>
-                        <a:t>V</a:t>
-                      </a:r>
-                      <a:endParaRPr lang="en-US" sz="1800" dirty="0">
-                        <a:latin typeface="Calibri" charset="0"/>
-                        <a:ea typeface="Calibri" charset="0"/>
-                        <a:cs typeface="Calibri" charset="0"/>
-                      </a:endParaRPr>
-                    </a:p>
-                  </a:txBody>
-                  <a:tcPr marL="91440" marR="91440" marT="45720" marB="45720" anchor="ctr">
-                    <a:lnL w="9525" cap="flat" cmpd="sng" algn="ctr">
-                      <a:solidFill>
-                        <a:srgbClr val="C9D5E2"/>
-                      </a:solidFill>
-                      <a:prstDash val="solid"/>
-                      <a:round/>
-                      <a:headEnd type="none" w="med" len="med"/>
-                      <a:tailEnd type="none" w="med" len="med"/>
-                    </a:lnL>
-                    <a:lnR w="9525" cap="flat" cmpd="sng" algn="ctr">
-                      <a:solidFill>
-                        <a:srgbClr val="C9D5E2"/>
-                      </a:solidFill>
-                      <a:prstDash val="solid"/>
-                      <a:round/>
-                      <a:headEnd type="none" w="med" len="med"/>
-                      <a:tailEnd type="none" w="med" len="med"/>
-                    </a:lnR>
-                    <a:lnT w="9525" cap="flat" cmpd="sng" algn="ctr">
-                      <a:solidFill>
-                        <a:srgbClr val="C9D5E2"/>
-                      </a:solidFill>
-                      <a:prstDash val="solid"/>
-                      <a:round/>
-                      <a:headEnd type="none" w="med" len="med"/>
-                      <a:tailEnd type="none" w="med" len="med"/>
-                    </a:lnT>
-                    <a:lnB w="9525" cap="flat" cmpd="sng" algn="ctr">
-                      <a:solidFill>
-                        <a:srgbClr val="C9D5E2"/>
-                      </a:solidFill>
-                      <a:prstDash val="solid"/>
-                      <a:round/>
-                      <a:headEnd type="none" w="med" len="med"/>
-                      <a:tailEnd type="none" w="med" len="med"/>
-                    </a:lnB>
-                    <a:solidFill>
-                      <a:srgbClr val="FFFFFF"/>
-                    </a:solidFill>
-                  </a:tcPr>
-                </a:tc>
-                <a:tc>
-                  <a:txBody>
-                    <a:bodyPr/>
-                    <a:lstStyle/>
-                    <a:p>
-                      <a:pPr algn="ctr" indent="0" marL="0">
-                        <a:buNone/>
-                      </a:pPr>
-                      <a:r>
-                        <a:rPr lang="en-US" sz="1800" dirty="0">
-                          <a:solidFill>
-                            <a:srgbClr val="2F3E4E"/>
-                          </a:solidFill>
-                          <a:latin typeface="Calibri" pitchFamily="34" charset="0"/>
-                          <a:ea typeface="Calibri" pitchFamily="34" charset="-122"/>
-                          <a:cs typeface="Calibri" pitchFamily="34" charset="-120"/>
-                        </a:rPr>
-                        <a:t>V</a:t>
-                      </a:r>
-                      <a:endParaRPr lang="en-US" sz="1800" dirty="0">
-                        <a:latin typeface="Calibri" charset="0"/>
-                        <a:ea typeface="Calibri" charset="0"/>
-                        <a:cs typeface="Calibri" charset="0"/>
-                      </a:endParaRPr>
-                    </a:p>
-                  </a:txBody>
-                  <a:tcPr marL="91440" marR="91440" marT="45720" marB="45720" anchor="ctr">
-                    <a:lnL w="9525" cap="flat" cmpd="sng" algn="ctr">
-                      <a:solidFill>
-                        <a:srgbClr val="C9D5E2"/>
-                      </a:solidFill>
-                      <a:prstDash val="solid"/>
-                      <a:round/>
-                      <a:headEnd type="none" w="med" len="med"/>
-                      <a:tailEnd type="none" w="med" len="med"/>
-                    </a:lnL>
-                    <a:lnR w="9525" cap="flat" cmpd="sng" algn="ctr">
-                      <a:solidFill>
-                        <a:srgbClr val="C9D5E2"/>
-                      </a:solidFill>
-                      <a:prstDash val="solid"/>
-                      <a:round/>
-                      <a:headEnd type="none" w="med" len="med"/>
-                      <a:tailEnd type="none" w="med" len="med"/>
-                    </a:lnR>
-                    <a:lnT w="9525" cap="flat" cmpd="sng" algn="ctr">
-                      <a:solidFill>
-                        <a:srgbClr val="C9D5E2"/>
-                      </a:solidFill>
-                      <a:prstDash val="solid"/>
-                      <a:round/>
-                      <a:headEnd type="none" w="med" len="med"/>
-                      <a:tailEnd type="none" w="med" len="med"/>
-                    </a:lnT>
-                    <a:lnB w="9525" cap="flat" cmpd="sng" algn="ctr">
-                      <a:solidFill>
-                        <a:srgbClr val="C9D5E2"/>
-                      </a:solidFill>
-                      <a:prstDash val="solid"/>
-                      <a:round/>
-                      <a:headEnd type="none" w="med" len="med"/>
-                      <a:tailEnd type="none" w="med" len="med"/>
-                    </a:lnB>
-                    <a:solidFill>
-                      <a:srgbClr val="FFFFFF"/>
-                    </a:solidFill>
-                  </a:tcPr>
-                </a:tc>
-              </a:tr>
-              <a:tr h="411480">
-                <a:tc>
-                  <a:txBody>
-                    <a:bodyPr/>
-                    <a:lstStyle/>
-                    <a:p>
-                      <a:pPr algn="ctr" indent="0" marL="0">
-                        <a:buNone/>
-                      </a:pPr>
-                      <a:r>
-                        <a:rPr lang="en-US" sz="1800" dirty="0">
-                          <a:solidFill>
-                            <a:srgbClr val="2F3E4E"/>
-                          </a:solidFill>
-                          <a:latin typeface="Calibri" pitchFamily="34" charset="0"/>
-                          <a:ea typeface="Calibri" pitchFamily="34" charset="-122"/>
-                          <a:cs typeface="Calibri" pitchFamily="34" charset="-120"/>
-                        </a:rPr>
-                        <a:t>F</a:t>
-                      </a:r>
-                      <a:endParaRPr lang="en-US" sz="1800" dirty="0">
-                        <a:latin typeface="Calibri" charset="0"/>
-                        <a:ea typeface="Calibri" charset="0"/>
-                        <a:cs typeface="Calibri" charset="0"/>
-                      </a:endParaRPr>
-                    </a:p>
-                  </a:txBody>
-                  <a:tcPr marL="91440" marR="91440" marT="45720" marB="45720" anchor="ctr">
-                    <a:lnL w="9525" cap="flat" cmpd="sng" algn="ctr">
-                      <a:solidFill>
-                        <a:srgbClr val="C9D5E2"/>
-                      </a:solidFill>
-                      <a:prstDash val="solid"/>
-                      <a:round/>
-                      <a:headEnd type="none" w="med" len="med"/>
-                      <a:tailEnd type="none" w="med" len="med"/>
-                    </a:lnL>
-                    <a:lnR w="9525" cap="flat" cmpd="sng" algn="ctr">
-                      <a:solidFill>
-                        <a:srgbClr val="C9D5E2"/>
-                      </a:solidFill>
-                      <a:prstDash val="solid"/>
-                      <a:round/>
-                      <a:headEnd type="none" w="med" len="med"/>
-                      <a:tailEnd type="none" w="med" len="med"/>
-                    </a:lnR>
-                    <a:lnT w="9525" cap="flat" cmpd="sng" algn="ctr">
-                      <a:solidFill>
-                        <a:srgbClr val="C9D5E2"/>
-                      </a:solidFill>
-                      <a:prstDash val="solid"/>
-                      <a:round/>
-                      <a:headEnd type="none" w="med" len="med"/>
-                      <a:tailEnd type="none" w="med" len="med"/>
-                    </a:lnT>
-                    <a:lnB w="9525" cap="flat" cmpd="sng" algn="ctr">
-                      <a:solidFill>
-                        <a:srgbClr val="C9D5E2"/>
-                      </a:solidFill>
-                      <a:prstDash val="solid"/>
-                      <a:round/>
-                      <a:headEnd type="none" w="med" len="med"/>
-                      <a:tailEnd type="none" w="med" len="med"/>
-                    </a:lnB>
-                    <a:solidFill>
-                      <a:srgbClr val="EEF3F8"/>
-                    </a:solidFill>
-                  </a:tcPr>
-                </a:tc>
-                <a:tc>
-                  <a:txBody>
-                    <a:bodyPr/>
-                    <a:lstStyle/>
-                    <a:p>
-                      <a:pPr algn="ctr" indent="0" marL="0">
-                        <a:buNone/>
-                      </a:pPr>
-                      <a:r>
-                        <a:rPr lang="en-US" sz="1800" dirty="0">
-                          <a:solidFill>
-                            <a:srgbClr val="2F3E4E"/>
-                          </a:solidFill>
-                          <a:latin typeface="Calibri" pitchFamily="34" charset="0"/>
-                          <a:ea typeface="Calibri" pitchFamily="34" charset="-122"/>
-                          <a:cs typeface="Calibri" pitchFamily="34" charset="-120"/>
-                        </a:rPr>
-                        <a:t>F</a:t>
-                      </a:r>
-                      <a:endParaRPr lang="en-US" sz="1800" dirty="0">
-                        <a:latin typeface="Calibri" charset="0"/>
-                        <a:ea typeface="Calibri" charset="0"/>
-                        <a:cs typeface="Calibri" charset="0"/>
-                      </a:endParaRPr>
-                    </a:p>
-                  </a:txBody>
-                  <a:tcPr marL="91440" marR="91440" marT="45720" marB="45720" anchor="ctr">
-                    <a:lnL w="9525" cap="flat" cmpd="sng" algn="ctr">
-                      <a:solidFill>
-                        <a:srgbClr val="C9D5E2"/>
-                      </a:solidFill>
-                      <a:prstDash val="solid"/>
-                      <a:round/>
-                      <a:headEnd type="none" w="med" len="med"/>
-                      <a:tailEnd type="none" w="med" len="med"/>
-                    </a:lnL>
-                    <a:lnR w="9525" cap="flat" cmpd="sng" algn="ctr">
-                      <a:solidFill>
-                        <a:srgbClr val="C9D5E2"/>
-                      </a:solidFill>
-                      <a:prstDash val="solid"/>
-                      <a:round/>
-                      <a:headEnd type="none" w="med" len="med"/>
-                      <a:tailEnd type="none" w="med" len="med"/>
-                    </a:lnR>
-                    <a:lnT w="9525" cap="flat" cmpd="sng" algn="ctr">
-                      <a:solidFill>
-                        <a:srgbClr val="C9D5E2"/>
-                      </a:solidFill>
-                      <a:prstDash val="solid"/>
-                      <a:round/>
-                      <a:headEnd type="none" w="med" len="med"/>
-                      <a:tailEnd type="none" w="med" len="med"/>
-                    </a:lnT>
-                    <a:lnB w="9525" cap="flat" cmpd="sng" algn="ctr">
-                      <a:solidFill>
-                        <a:srgbClr val="C9D5E2"/>
-                      </a:solidFill>
-                      <a:prstDash val="solid"/>
-                      <a:round/>
-                      <a:headEnd type="none" w="med" len="med"/>
-                      <a:tailEnd type="none" w="med" len="med"/>
-                    </a:lnB>
-                    <a:solidFill>
-                      <a:srgbClr val="EEF3F8"/>
-                    </a:solidFill>
-                  </a:tcPr>
-                </a:tc>
-                <a:tc>
-                  <a:txBody>
-                    <a:bodyPr/>
-                    <a:lstStyle/>
-                    <a:p>
-                      <a:pPr algn="ctr" indent="0" marL="0">
-                        <a:buNone/>
-                      </a:pPr>
-                      <a:r>
-                        <a:rPr lang="en-US" sz="1800" dirty="0">
-                          <a:solidFill>
-                            <a:srgbClr val="2F3E4E"/>
-                          </a:solidFill>
-                          <a:latin typeface="Calibri" pitchFamily="34" charset="0"/>
-                          <a:ea typeface="Calibri" pitchFamily="34" charset="-122"/>
-                          <a:cs typeface="Calibri" pitchFamily="34" charset="-120"/>
-                        </a:rPr>
-                        <a:t>F</a:t>
-                      </a:r>
-                      <a:endParaRPr lang="en-US" sz="1800" dirty="0">
-                        <a:latin typeface="Calibri" charset="0"/>
-                        <a:ea typeface="Calibri" charset="0"/>
-                        <a:cs typeface="Calibri" charset="0"/>
-                      </a:endParaRPr>
-                    </a:p>
-                  </a:txBody>
-                  <a:tcPr marL="91440" marR="91440" marT="45720" marB="45720" anchor="ctr">
-                    <a:lnL w="9525" cap="flat" cmpd="sng" algn="ctr">
-                      <a:solidFill>
-                        <a:srgbClr val="C9D5E2"/>
-                      </a:solidFill>
-                      <a:prstDash val="solid"/>
-                      <a:round/>
-                      <a:headEnd type="none" w="med" len="med"/>
-                      <a:tailEnd type="none" w="med" len="med"/>
-                    </a:lnL>
-                    <a:lnR w="9525" cap="flat" cmpd="sng" algn="ctr">
-                      <a:solidFill>
-                        <a:srgbClr val="C9D5E2"/>
-                      </a:solidFill>
-                      <a:prstDash val="solid"/>
-                      <a:round/>
-                      <a:headEnd type="none" w="med" len="med"/>
-                      <a:tailEnd type="none" w="med" len="med"/>
-                    </a:lnR>
-                    <a:lnT w="9525" cap="flat" cmpd="sng" algn="ctr">
-                      <a:solidFill>
-                        <a:srgbClr val="C9D5E2"/>
-                      </a:solidFill>
-                      <a:prstDash val="solid"/>
-                      <a:round/>
-                      <a:headEnd type="none" w="med" len="med"/>
-                      <a:tailEnd type="none" w="med" len="med"/>
-                    </a:lnT>
-                    <a:lnB w="9525" cap="flat" cmpd="sng" algn="ctr">
-                      <a:solidFill>
-                        <a:srgbClr val="C9D5E2"/>
-                      </a:solidFill>
-                      <a:prstDash val="solid"/>
-                      <a:round/>
-                      <a:headEnd type="none" w="med" len="med"/>
-                      <a:tailEnd type="none" w="med" len="med"/>
-                    </a:lnB>
-                    <a:solidFill>
-                      <a:srgbClr val="EEF3F8"/>
-                    </a:solidFill>
-                  </a:tcPr>
-                </a:tc>
-                <a:tc>
-                  <a:txBody>
-                    <a:bodyPr/>
-                    <a:lstStyle/>
-                    <a:p>
-                      <a:pPr algn="ctr" indent="0" marL="0">
-                        <a:buNone/>
-                      </a:pPr>
-                      <a:r>
-                        <a:rPr lang="en-US" sz="1800" dirty="0">
-                          <a:solidFill>
-                            <a:srgbClr val="2F3E4E"/>
-                          </a:solidFill>
-                          <a:latin typeface="Calibri" pitchFamily="34" charset="0"/>
-                          <a:ea typeface="Calibri" pitchFamily="34" charset="-122"/>
-                          <a:cs typeface="Calibri" pitchFamily="34" charset="-120"/>
-                        </a:rPr>
-                        <a:t>F</a:t>
-                      </a:r>
-                      <a:endParaRPr lang="en-US" sz="1800" dirty="0">
-                        <a:latin typeface="Calibri" charset="0"/>
-                        <a:ea typeface="Calibri" charset="0"/>
-                        <a:cs typeface="Calibri" charset="0"/>
-                      </a:endParaRPr>
-                    </a:p>
-                  </a:txBody>
-                  <a:tcPr marL="91440" marR="91440" marT="45720" marB="45720" anchor="ctr">
-                    <a:lnL w="9525" cap="flat" cmpd="sng" algn="ctr">
-                      <a:solidFill>
-                        <a:srgbClr val="C9D5E2"/>
-                      </a:solidFill>
-                      <a:prstDash val="solid"/>
-                      <a:round/>
-                      <a:headEnd type="none" w="med" len="med"/>
-                      <a:tailEnd type="none" w="med" len="med"/>
-                    </a:lnL>
-                    <a:lnR w="9525" cap="flat" cmpd="sng" algn="ctr">
-                      <a:solidFill>
-                        <a:srgbClr val="C9D5E2"/>
-                      </a:solidFill>
-                      <a:prstDash val="solid"/>
-                      <a:round/>
-                      <a:headEnd type="none" w="med" len="med"/>
-                      <a:tailEnd type="none" w="med" len="med"/>
-                    </a:lnR>
-                    <a:lnT w="9525" cap="flat" cmpd="sng" algn="ctr">
-                      <a:solidFill>
-                        <a:srgbClr val="C9D5E2"/>
-                      </a:solidFill>
-                      <a:prstDash val="solid"/>
-                      <a:round/>
-                      <a:headEnd type="none" w="med" len="med"/>
-                      <a:tailEnd type="none" w="med" len="med"/>
-                    </a:lnT>
-                    <a:lnB w="9525" cap="flat" cmpd="sng" algn="ctr">
-                      <a:solidFill>
-                        <a:srgbClr val="C9D5E2"/>
-                      </a:solidFill>
-                      <a:prstDash val="solid"/>
-                      <a:round/>
-                      <a:headEnd type="none" w="med" len="med"/>
-                      <a:tailEnd type="none" w="med" len="med"/>
-                    </a:lnB>
-                    <a:solidFill>
-                      <a:srgbClr val="EEF3F8"/>
-                    </a:solidFill>
-                  </a:tcPr>
-                </a:tc>
-                <a:tc>
-                  <a:txBody>
-                    <a:bodyPr/>
-                    <a:lstStyle/>
-                    <a:p>
-                      <a:pPr algn="ctr" indent="0" marL="0">
-                        <a:buNone/>
-                      </a:pPr>
-                      <a:r>
-                        <a:rPr lang="en-US" sz="1800" dirty="0">
-                          <a:solidFill>
-                            <a:srgbClr val="2F3E4E"/>
-                          </a:solidFill>
-                          <a:latin typeface="Calibri" pitchFamily="34" charset="0"/>
-                          <a:ea typeface="Calibri" pitchFamily="34" charset="-122"/>
-                          <a:cs typeface="Calibri" pitchFamily="34" charset="-120"/>
-                        </a:rPr>
-                        <a:t>V</a:t>
-                      </a:r>
-                      <a:endParaRPr lang="en-US" sz="1800" dirty="0">
-                        <a:latin typeface="Calibri" charset="0"/>
-                        <a:ea typeface="Calibri" charset="0"/>
-                        <a:cs typeface="Calibri" charset="0"/>
-                      </a:endParaRPr>
-                    </a:p>
-                  </a:txBody>
-                  <a:tcPr marL="91440" marR="91440" marT="45720" marB="45720" anchor="ctr">
-                    <a:lnL w="9525" cap="flat" cmpd="sng" algn="ctr">
-                      <a:solidFill>
-                        <a:srgbClr val="C9D5E2"/>
-                      </a:solidFill>
-                      <a:prstDash val="solid"/>
-                      <a:round/>
-                      <a:headEnd type="none" w="med" len="med"/>
-                      <a:tailEnd type="none" w="med" len="med"/>
-                    </a:lnL>
-                    <a:lnR w="9525" cap="flat" cmpd="sng" algn="ctr">
-                      <a:solidFill>
-                        <a:srgbClr val="C9D5E2"/>
-                      </a:solidFill>
-                      <a:prstDash val="solid"/>
-                      <a:round/>
-                      <a:headEnd type="none" w="med" len="med"/>
-                      <a:tailEnd type="none" w="med" len="med"/>
-                    </a:lnR>
-                    <a:lnT w="9525" cap="flat" cmpd="sng" algn="ctr">
-                      <a:solidFill>
-                        <a:srgbClr val="C9D5E2"/>
-                      </a:solidFill>
-                      <a:prstDash val="solid"/>
-                      <a:round/>
-                      <a:headEnd type="none" w="med" len="med"/>
-                      <a:tailEnd type="none" w="med" len="med"/>
-                    </a:lnT>
-                    <a:lnB w="9525" cap="flat" cmpd="sng" algn="ctr">
-                      <a:solidFill>
-                        <a:srgbClr val="C9D5E2"/>
-                      </a:solidFill>
-                      <a:prstDash val="solid"/>
-                      <a:round/>
-                      <a:headEnd type="none" w="med" len="med"/>
-                      <a:tailEnd type="none" w="med" len="med"/>
-                    </a:lnB>
-                    <a:solidFill>
-                      <a:srgbClr val="EEF3F8"/>
-                    </a:solidFill>
-                  </a:tcPr>
-                </a:tc>
-              </a:tr>
-            </a:tbl>
-          </a:graphicData>
-        </a:graphic>
-      </p:graphicFrame>
-      <p:sp>
-        <p:nvSpPr>
-          <p:cNvPr id="7" name="Shape 3"/>
-          <p:cNvSpPr/>
-          <p:nvPr/>
-        </p:nvSpPr>
-        <p:spPr>
-          <a:xfrm>
-            <a:off x="548640" y="3840480"/>
-            <a:ext cx="8046720" cy="640080"/>
-          </a:xfrm>
-          <a:prstGeom prst="roundRect">
-            <a:avLst>
-              <a:gd name="adj" fmla="val 17143"/>
-            </a:avLst>
-          </a:prstGeom>
-          <a:solidFill>
-            <a:srgbClr val="ECE8F6"/>
-          </a:solidFill>
-          <a:ln w="12700">
-            <a:solidFill>
-              <a:srgbClr val="ECE8F6"/>
-            </a:solidFill>
-            <a:prstDash val="solid"/>
-          </a:ln>
-        </p:spPr>
-      </p:sp>
-      <p:sp>
-        <p:nvSpPr>
-          <p:cNvPr id="8" name="Text 4"/>
+      <p:sp>
+        <p:nvSpPr>
+          <p:cNvPr id="5" name="Text 3"/>
           <p:cNvSpPr txBox="1"/>
           <p:nvPr/>
         </p:nvSpPr>
         <p:spPr>
           <a:xfrm>
-            <a:off x="822960" y="3840480"/>
-            <a:ext cx="7498080" cy="640080"/>
+            <a:off x="548640" y="1645920"/>
+            <a:ext cx="8046720" cy="2743200"/>
           </a:xfrm>
           <a:prstGeom prst="rect">
             <a:avLst/>
@@ -4274,11 +2454,15 @@
           <a:ln/>
         </p:spPr>
         <p:txBody>
-          <a:bodyPr wrap="square" lIns="0" tIns="0" rIns="0" bIns="0" rtlCol="0" anchor="ctr"/>
-          <a:lstStyle/>
-          <a:p>
-            <a:pPr indent="0" marL="0">
-              <a:buNone/>
+          <a:bodyPr wrap="square" lIns="0" tIns="0" rIns="0" bIns="0" rtlCol="0" anchor="t"/>
+          <a:lstStyle/>
+          <a:p>
+            <a:pPr marL="342900" indent="-342900">
+              <a:spcAft>
+                <a:spcPts val="600"/>
+              </a:spcAft>
+              <a:buSzPct val="100000"/>
+              <a:buChar char="•"/>
             </a:pPr>
             <a:r>
               <a:rPr lang="en-US" sz="1700" dirty="0">
@@ -4289,7 +2473,70 @@
                 <a:ea typeface="Calibri" pitchFamily="34" charset="-122"/>
                 <a:cs typeface="Calibri" pitchFamily="34" charset="-120"/>
               </a:rPr>
-              <a:t>En lógica, O es incluyente: basta con que una parte sea verdadera.</a:t>
+              <a:t>Ancho: x. Largo: 2x + 10.</a:t>
+            </a:r>
+            <a:endParaRPr lang="en-US" sz="1700" dirty="0"/>
+          </a:p>
+          <a:p>
+            <a:pPr marL="342900" indent="-342900">
+              <a:spcAft>
+                <a:spcPts val="600"/>
+              </a:spcAft>
+              <a:buSzPct val="100000"/>
+              <a:buChar char="•"/>
+            </a:pPr>
+            <a:r>
+              <a:rPr lang="en-US" sz="1700" dirty="0">
+                <a:solidFill>
+                  <a:srgbClr val="2F3E4E"/>
+                </a:solidFill>
+                <a:latin typeface="Calibri" pitchFamily="34" charset="0"/>
+                <a:ea typeface="Calibri" pitchFamily="34" charset="-122"/>
+                <a:cs typeface="Calibri" pitchFamily="34" charset="-120"/>
+              </a:rPr>
+              <a:t>Perímetro: 2(largo) + 2(ancho) = 180, así que 2(2x + 10) + 2x = 180.</a:t>
+            </a:r>
+            <a:endParaRPr lang="en-US" sz="1700" dirty="0"/>
+          </a:p>
+          <a:p>
+            <a:pPr marL="342900" indent="-342900">
+              <a:spcAft>
+                <a:spcPts val="600"/>
+              </a:spcAft>
+              <a:buSzPct val="100000"/>
+              <a:buChar char="•"/>
+            </a:pPr>
+            <a:r>
+              <a:rPr lang="en-US" sz="1700" dirty="0">
+                <a:solidFill>
+                  <a:srgbClr val="2F3E4E"/>
+                </a:solidFill>
+                <a:latin typeface="Calibri" pitchFamily="34" charset="0"/>
+                <a:ea typeface="Calibri" pitchFamily="34" charset="-122"/>
+                <a:cs typeface="Calibri" pitchFamily="34" charset="-120"/>
+              </a:rPr>
+              <a:t>Distributiva y agrupación: 6x + 20 = 180, entonces 6x = 160 y x = 80/3 ≈ 26.67 m.</a:t>
+            </a:r>
+            <a:endParaRPr lang="en-US" sz="1700" dirty="0"/>
+          </a:p>
+          <a:p>
+            <a:pPr marL="342900" indent="-342900">
+              <a:spcAft>
+                <a:spcPts val="600"/>
+              </a:spcAft>
+              <a:buSzPct val="100000"/>
+              <a:buChar char="•"/>
+            </a:pPr>
+            <a:r>
+              <a:rPr lang="en-US" sz="1700" dirty="0">
+                <a:solidFill>
+                  <a:srgbClr val="2F3E4E"/>
+                </a:solidFill>
+                <a:latin typeface="Calibri" pitchFamily="34" charset="0"/>
+                <a:ea typeface="Calibri" pitchFamily="34" charset="-122"/>
+                <a:cs typeface="Calibri" pitchFamily="34" charset="-120"/>
+              </a:rPr>
+              <a:t>Largo: 190/3 ≈ 63.33 m. Comprobación: el perímetro es 180 m.</a:t>
             </a:r>
             <a:endParaRPr lang="en-US" sz="1700" dirty="0"/>
           </a:p>
@@ -4360,7 +2607,7 @@
                 <a:ea typeface="Cambria" pitchFamily="34" charset="-122"/>
                 <a:cs typeface="Cambria" pitchFamily="34" charset="-120"/>
               </a:rPr>
-              <a:t>Si p, entonces q</a:t>
+              <a:t>Proposiciones: verdadero o falso</a:t>
             </a:r>
             <a:endParaRPr lang="en-US" sz="3000" dirty="0"/>
           </a:p>
@@ -4399,7 +2646,7 @@
                 <a:ea typeface="Calibri" pitchFamily="34" charset="-122"/>
                 <a:cs typeface="Calibri" pitchFamily="34" charset="-120"/>
               </a:rPr>
-              <a:t>Solo es falso cuando p es verdadero y q es falso</a:t>
+              <a:t>Cada proposición tiene exactamente un valor de verdad</a:t>
             </a:r>
             <a:endParaRPr lang="en-US" sz="1600" dirty="0"/>
           </a:p>
@@ -4441,6 +2688,112 @@
               <a:t>Club de programación Competitiva - BugSquad 2026</a:t>
             </a:r>
             <a:endParaRPr lang="en-US" sz="1000" dirty="0"/>
+          </a:p>
+        </p:txBody>
+      </p:sp>
+      <p:sp>
+        <p:nvSpPr>
+          <p:cNvPr id="5" name="Text 3"/>
+          <p:cNvSpPr txBox="1"/>
+          <p:nvPr/>
+        </p:nvSpPr>
+        <p:spPr>
+          <a:xfrm>
+            <a:off x="548640" y="1645920"/>
+            <a:ext cx="3566160" cy="2926080"/>
+          </a:xfrm>
+          <a:prstGeom prst="rect">
+            <a:avLst/>
+          </a:prstGeom>
+          <a:noFill/>
+          <a:ln/>
+        </p:spPr>
+        <p:txBody>
+          <a:bodyPr wrap="square" lIns="0" tIns="0" rIns="0" bIns="0" rtlCol="0" anchor="t"/>
+          <a:lstStyle/>
+          <a:p>
+            <a:pPr marL="342900" indent="-342900">
+              <a:spcAft>
+                <a:spcPts val="600"/>
+              </a:spcAft>
+              <a:buSzPct val="100000"/>
+              <a:buChar char="•"/>
+            </a:pPr>
+            <a:r>
+              <a:rPr lang="en-US" sz="1500" dirty="0">
+                <a:solidFill>
+                  <a:srgbClr val="2F3E4E"/>
+                </a:solidFill>
+                <a:latin typeface="Calibri" pitchFamily="34" charset="0"/>
+                <a:ea typeface="Calibri" pitchFamily="34" charset="-122"/>
+                <a:cs typeface="Calibri" pitchFamily="34" charset="-120"/>
+              </a:rPr>
+              <a:t>Y (p ∧ q): verdadera solo si ambas son V.</a:t>
+            </a:r>
+            <a:endParaRPr lang="en-US" sz="1500" dirty="0"/>
+          </a:p>
+          <a:p>
+            <a:pPr marL="342900" indent="-342900">
+              <a:spcAft>
+                <a:spcPts val="600"/>
+              </a:spcAft>
+              <a:buSzPct val="100000"/>
+              <a:buChar char="•"/>
+            </a:pPr>
+            <a:r>
+              <a:rPr lang="en-US" sz="1500" dirty="0">
+                <a:solidFill>
+                  <a:srgbClr val="2F3E4E"/>
+                </a:solidFill>
+                <a:latin typeface="Calibri" pitchFamily="34" charset="0"/>
+                <a:ea typeface="Calibri" pitchFamily="34" charset="-122"/>
+                <a:cs typeface="Calibri" pitchFamily="34" charset="-120"/>
+              </a:rPr>
+              <a:t>O (p ∨ q): verdadera si al menos una es V.</a:t>
+            </a:r>
+            <a:endParaRPr lang="en-US" sz="1500" dirty="0"/>
+          </a:p>
+          <a:p>
+            <a:pPr marL="342900" indent="-342900">
+              <a:spcAft>
+                <a:spcPts val="600"/>
+              </a:spcAft>
+              <a:buSzPct val="100000"/>
+              <a:buChar char="•"/>
+            </a:pPr>
+            <a:r>
+              <a:rPr lang="en-US" sz="1500" dirty="0">
+                <a:solidFill>
+                  <a:srgbClr val="2F3E4E"/>
+                </a:solidFill>
+                <a:latin typeface="Calibri" pitchFamily="34" charset="0"/>
+                <a:ea typeface="Calibri" pitchFamily="34" charset="-122"/>
+                <a:cs typeface="Calibri" pitchFamily="34" charset="-120"/>
+              </a:rPr>
+              <a:t>NO (¬p): invierte el valor de verdad.</a:t>
+            </a:r>
+            <a:endParaRPr lang="en-US" sz="1500" dirty="0"/>
+          </a:p>
+          <a:p>
+            <a:pPr marL="342900" indent="-342900">
+              <a:spcAft>
+                <a:spcPts val="600"/>
+              </a:spcAft>
+              <a:buSzPct val="100000"/>
+              <a:buChar char="•"/>
+            </a:pPr>
+            <a:r>
+              <a:rPr lang="en-US" sz="1500" dirty="0">
+                <a:solidFill>
+                  <a:srgbClr val="2F3E4E"/>
+                </a:solidFill>
+                <a:latin typeface="Calibri" pitchFamily="34" charset="0"/>
+                <a:ea typeface="Calibri" pitchFamily="34" charset="-122"/>
+                <a:cs typeface="Calibri" pitchFamily="34" charset="-120"/>
+              </a:rPr>
+              <a:t>Condicional (p → q): solo es falso si p es V y q es F.</a:t>
+            </a:r>
+            <a:endParaRPr lang="en-US" sz="1500" dirty="0"/>
           </a:p>
         </p:txBody>
       </p:sp>
@@ -4459,17 +2812,20 @@
           </p:nvPr>
         </p:nvGraphicFramePr>
         <p:xfrm>
-          <a:off x="548640" y="1554480"/>
-          <a:ext cx="3840480" cy="914400"/>
+          <a:off x="4389120" y="1828800"/>
+          <a:ext cx="4206240" cy="914400"/>
         </p:xfrm>
         <a:graphic>
           <a:graphicData uri="http://schemas.openxmlformats.org/drawingml/2006/table">
             <a:tbl>
               <a:tblPr/>
               <a:tblGrid>
-                <a:gridCol w="1280160"/>
-                <a:gridCol w="1280160"/>
-                <a:gridCol w="1280160"/>
+                <a:gridCol w="694944"/>
+                <a:gridCol w="694944"/>
+                <a:gridCol w="694944"/>
+                <a:gridCol w="713232"/>
+                <a:gridCol w="713232"/>
+                <a:gridCol w="694944"/>
               </a:tblGrid>
               <a:tr h="411480">
                 <a:tc>
@@ -4481,7 +2837,7 @@
                         <a:buNone/>
                       </a:pPr>
                       <a:r>
-                        <a:rPr lang="en-US" sz="1800" b="1" dirty="0">
+                        <a:rPr lang="en-US" sz="1400" b="1" dirty="0">
                           <a:solidFill>
                             <a:srgbClr val="FFFFFF"/>
                           </a:solidFill>
@@ -4491,7 +2847,7 @@
                         </a:rPr>
                         <a:t>p</a:t>
                       </a:r>
-                      <a:endParaRPr lang="en-US" sz="1800" dirty="0">
+                      <a:endParaRPr lang="en-US" sz="1400" dirty="0">
                         <a:latin typeface="Calibri" charset="0"/>
                         <a:ea typeface="Calibri" charset="0"/>
                         <a:cs typeface="Calibri" charset="0"/>
@@ -4549,7 +2905,7 @@
                         <a:buNone/>
                       </a:pPr>
                       <a:r>
-                        <a:rPr lang="en-US" sz="1800" b="1" dirty="0">
+                        <a:rPr lang="en-US" sz="1400" b="1" dirty="0">
                           <a:solidFill>
                             <a:srgbClr val="FFFFFF"/>
                           </a:solidFill>
@@ -4559,7 +2915,7 @@
                         </a:rPr>
                         <a:t>q</a:t>
                       </a:r>
-                      <a:endParaRPr lang="en-US" sz="1800" dirty="0">
+                      <a:endParaRPr lang="en-US" sz="1400" dirty="0">
                         <a:latin typeface="Calibri" charset="0"/>
                         <a:ea typeface="Calibri" charset="0"/>
                         <a:cs typeface="Calibri" charset="0"/>
@@ -4617,7 +2973,211 @@
                         <a:buNone/>
                       </a:pPr>
                       <a:r>
-                        <a:rPr lang="en-US" sz="1800" b="1" dirty="0">
+                        <a:rPr lang="en-US" sz="1400" b="1" dirty="0">
+                          <a:solidFill>
+                            <a:srgbClr val="FFFFFF"/>
+                          </a:solidFill>
+                          <a:latin typeface="Calibri" pitchFamily="34" charset="0"/>
+                          <a:ea typeface="Calibri" pitchFamily="34" charset="-122"/>
+                          <a:cs typeface="Calibri" pitchFamily="34" charset="-120"/>
+                        </a:rPr>
+                        <a:t>¬p</a:t>
+                      </a:r>
+                      <a:endParaRPr lang="en-US" sz="1400" dirty="0">
+                        <a:latin typeface="Calibri" charset="0"/>
+                        <a:ea typeface="Calibri" charset="0"/>
+                        <a:cs typeface="Calibri" charset="0"/>
+                      </a:endParaRPr>
+                    </a:p>
+                  </a:txBody>
+                  <a:tcPr marL="91440" marR="91440" marT="45720" marB="45720" anchor="ctr">
+                    <a:lnL w="9525" cap="flat" cmpd="sng" algn="ctr">
+                      <a:solidFill>
+                        <a:srgbClr val="C9D5E2"/>
+                      </a:solidFill>
+                      <a:prstDash val="solid"/>
+                      <a:round/>
+                      <a:headEnd type="none" w="med" len="med"/>
+                      <a:tailEnd type="none" w="med" len="med"/>
+                    </a:lnL>
+                    <a:lnR w="9525" cap="flat" cmpd="sng" algn="ctr">
+                      <a:solidFill>
+                        <a:srgbClr val="C9D5E2"/>
+                      </a:solidFill>
+                      <a:prstDash val="solid"/>
+                      <a:round/>
+                      <a:headEnd type="none" w="med" len="med"/>
+                      <a:tailEnd type="none" w="med" len="med"/>
+                    </a:lnR>
+                    <a:lnT w="9525" cap="flat" cmpd="sng" algn="ctr">
+                      <a:solidFill>
+                        <a:srgbClr val="C9D5E2"/>
+                      </a:solidFill>
+                      <a:prstDash val="solid"/>
+                      <a:round/>
+                      <a:headEnd type="none" w="med" len="med"/>
+                      <a:tailEnd type="none" w="med" len="med"/>
+                    </a:lnT>
+                    <a:lnB w="9525" cap="flat" cmpd="sng" algn="ctr">
+                      <a:solidFill>
+                        <a:srgbClr val="C9D5E2"/>
+                      </a:solidFill>
+                      <a:prstDash val="solid"/>
+                      <a:round/>
+                      <a:headEnd type="none" w="med" len="med"/>
+                      <a:tailEnd type="none" w="med" len="med"/>
+                    </a:lnB>
+                    <a:solidFill>
+                      <a:srgbClr val="4F7CAC"/>
+                    </a:solidFill>
+                  </a:tcPr>
+                </a:tc>
+                <a:tc>
+                  <a:txBody>
+                    <a:bodyPr/>
+                    <a:lstStyle/>
+                    <a:p>
+                      <a:pPr algn="ctr" indent="0" marL="0">
+                        <a:buNone/>
+                      </a:pPr>
+                      <a:r>
+                        <a:rPr lang="en-US" sz="1400" b="1" dirty="0">
+                          <a:solidFill>
+                            <a:srgbClr val="FFFFFF"/>
+                          </a:solidFill>
+                          <a:latin typeface="Calibri" pitchFamily="34" charset="0"/>
+                          <a:ea typeface="Calibri" pitchFamily="34" charset="-122"/>
+                          <a:cs typeface="Calibri" pitchFamily="34" charset="-120"/>
+                        </a:rPr>
+                        <a:t>p ∧ q</a:t>
+                      </a:r>
+                      <a:endParaRPr lang="en-US" sz="1400" dirty="0">
+                        <a:latin typeface="Calibri" charset="0"/>
+                        <a:ea typeface="Calibri" charset="0"/>
+                        <a:cs typeface="Calibri" charset="0"/>
+                      </a:endParaRPr>
+                    </a:p>
+                  </a:txBody>
+                  <a:tcPr marL="91440" marR="91440" marT="45720" marB="45720" anchor="ctr">
+                    <a:lnL w="9525" cap="flat" cmpd="sng" algn="ctr">
+                      <a:solidFill>
+                        <a:srgbClr val="C9D5E2"/>
+                      </a:solidFill>
+                      <a:prstDash val="solid"/>
+                      <a:round/>
+                      <a:headEnd type="none" w="med" len="med"/>
+                      <a:tailEnd type="none" w="med" len="med"/>
+                    </a:lnL>
+                    <a:lnR w="9525" cap="flat" cmpd="sng" algn="ctr">
+                      <a:solidFill>
+                        <a:srgbClr val="C9D5E2"/>
+                      </a:solidFill>
+                      <a:prstDash val="solid"/>
+                      <a:round/>
+                      <a:headEnd type="none" w="med" len="med"/>
+                      <a:tailEnd type="none" w="med" len="med"/>
+                    </a:lnR>
+                    <a:lnT w="9525" cap="flat" cmpd="sng" algn="ctr">
+                      <a:solidFill>
+                        <a:srgbClr val="C9D5E2"/>
+                      </a:solidFill>
+                      <a:prstDash val="solid"/>
+                      <a:round/>
+                      <a:headEnd type="none" w="med" len="med"/>
+                      <a:tailEnd type="none" w="med" len="med"/>
+                    </a:lnT>
+                    <a:lnB w="9525" cap="flat" cmpd="sng" algn="ctr">
+                      <a:solidFill>
+                        <a:srgbClr val="C9D5E2"/>
+                      </a:solidFill>
+                      <a:prstDash val="solid"/>
+                      <a:round/>
+                      <a:headEnd type="none" w="med" len="med"/>
+                      <a:tailEnd type="none" w="med" len="med"/>
+                    </a:lnB>
+                    <a:solidFill>
+                      <a:srgbClr val="4F7CAC"/>
+                    </a:solidFill>
+                  </a:tcPr>
+                </a:tc>
+                <a:tc>
+                  <a:txBody>
+                    <a:bodyPr/>
+                    <a:lstStyle/>
+                    <a:p>
+                      <a:pPr algn="ctr" indent="0" marL="0">
+                        <a:buNone/>
+                      </a:pPr>
+                      <a:r>
+                        <a:rPr lang="en-US" sz="1400" b="1" dirty="0">
+                          <a:solidFill>
+                            <a:srgbClr val="FFFFFF"/>
+                          </a:solidFill>
+                          <a:latin typeface="Calibri" pitchFamily="34" charset="0"/>
+                          <a:ea typeface="Calibri" pitchFamily="34" charset="-122"/>
+                          <a:cs typeface="Calibri" pitchFamily="34" charset="-120"/>
+                        </a:rPr>
+                        <a:t>p ∨ q</a:t>
+                      </a:r>
+                      <a:endParaRPr lang="en-US" sz="1400" dirty="0">
+                        <a:latin typeface="Calibri" charset="0"/>
+                        <a:ea typeface="Calibri" charset="0"/>
+                        <a:cs typeface="Calibri" charset="0"/>
+                      </a:endParaRPr>
+                    </a:p>
+                  </a:txBody>
+                  <a:tcPr marL="91440" marR="91440" marT="45720" marB="45720" anchor="ctr">
+                    <a:lnL w="9525" cap="flat" cmpd="sng" algn="ctr">
+                      <a:solidFill>
+                        <a:srgbClr val="C9D5E2"/>
+                      </a:solidFill>
+                      <a:prstDash val="solid"/>
+                      <a:round/>
+                      <a:headEnd type="none" w="med" len="med"/>
+                      <a:tailEnd type="none" w="med" len="med"/>
+                    </a:lnL>
+                    <a:lnR w="9525" cap="flat" cmpd="sng" algn="ctr">
+                      <a:solidFill>
+                        <a:srgbClr val="C9D5E2"/>
+                      </a:solidFill>
+                      <a:prstDash val="solid"/>
+                      <a:round/>
+                      <a:headEnd type="none" w="med" len="med"/>
+                      <a:tailEnd type="none" w="med" len="med"/>
+                    </a:lnR>
+                    <a:lnT w="9525" cap="flat" cmpd="sng" algn="ctr">
+                      <a:solidFill>
+                        <a:srgbClr val="C9D5E2"/>
+                      </a:solidFill>
+                      <a:prstDash val="solid"/>
+                      <a:round/>
+                      <a:headEnd type="none" w="med" len="med"/>
+                      <a:tailEnd type="none" w="med" len="med"/>
+                    </a:lnT>
+                    <a:lnB w="9525" cap="flat" cmpd="sng" algn="ctr">
+                      <a:solidFill>
+                        <a:srgbClr val="C9D5E2"/>
+                      </a:solidFill>
+                      <a:prstDash val="solid"/>
+                      <a:round/>
+                      <a:headEnd type="none" w="med" len="med"/>
+                      <a:tailEnd type="none" w="med" len="med"/>
+                    </a:lnB>
+                    <a:solidFill>
+                      <a:srgbClr val="4F7CAC"/>
+                    </a:solidFill>
+                  </a:tcPr>
+                </a:tc>
+                <a:tc>
+                  <a:txBody>
+                    <a:bodyPr/>
+                    <a:lstStyle/>
+                    <a:p>
+                      <a:pPr algn="ctr" indent="0" marL="0">
+                        <a:buNone/>
+                      </a:pPr>
+                      <a:r>
+                        <a:rPr lang="en-US" sz="1400" b="1" dirty="0">
                           <a:solidFill>
                             <a:srgbClr val="FFFFFF"/>
                           </a:solidFill>
@@ -4627,7 +3187,7 @@
                         </a:rPr>
                         <a:t>p → q</a:t>
                       </a:r>
-                      <a:endParaRPr lang="en-US" sz="1800" dirty="0">
+                      <a:endParaRPr lang="en-US" sz="1400" dirty="0">
                         <a:latin typeface="Calibri" charset="0"/>
                         <a:ea typeface="Calibri" charset="0"/>
                         <a:cs typeface="Calibri" charset="0"/>
@@ -4687,7 +3247,7 @@
                         <a:buNone/>
                       </a:pPr>
                       <a:r>
-                        <a:rPr lang="en-US" sz="1800" dirty="0">
+                        <a:rPr lang="en-US" sz="1400" dirty="0">
                           <a:solidFill>
                             <a:srgbClr val="2F3E4E"/>
                           </a:solidFill>
@@ -4695,9 +3255,9 @@
                           <a:ea typeface="Calibri" pitchFamily="34" charset="-122"/>
                           <a:cs typeface="Calibri" pitchFamily="34" charset="-120"/>
                         </a:rPr>
-                        <a:t>V</a:t>
+                        <a:t>F</a:t>
                       </a:r>
-                      <a:endParaRPr lang="en-US" sz="1800" dirty="0">
+                      <a:endParaRPr lang="en-US" sz="1400" dirty="0">
                         <a:latin typeface="Calibri" charset="0"/>
                         <a:ea typeface="Calibri" charset="0"/>
                         <a:cs typeface="Calibri" charset="0"/>
@@ -4755,7 +3315,7 @@
                         <a:buNone/>
                       </a:pPr>
                       <a:r>
-                        <a:rPr lang="en-US" sz="1800" dirty="0">
+                        <a:rPr lang="en-US" sz="1400" dirty="0">
                           <a:solidFill>
                             <a:srgbClr val="2F3E4E"/>
                           </a:solidFill>
@@ -4763,9 +3323,9 @@
                           <a:ea typeface="Calibri" pitchFamily="34" charset="-122"/>
                           <a:cs typeface="Calibri" pitchFamily="34" charset="-120"/>
                         </a:rPr>
-                        <a:t>V</a:t>
+                        <a:t>F</a:t>
                       </a:r>
-                      <a:endParaRPr lang="en-US" sz="1800" dirty="0">
+                      <a:endParaRPr lang="en-US" sz="1400" dirty="0">
                         <a:latin typeface="Calibri" charset="0"/>
                         <a:ea typeface="Calibri" charset="0"/>
                         <a:cs typeface="Calibri" charset="0"/>
@@ -4823,7 +3383,7 @@
                         <a:buNone/>
                       </a:pPr>
                       <a:r>
-                        <a:rPr lang="en-US" sz="1800" dirty="0">
+                        <a:rPr lang="en-US" sz="1400" dirty="0">
                           <a:solidFill>
                             <a:srgbClr val="2F3E4E"/>
                           </a:solidFill>
@@ -4833,7 +3393,211 @@
                         </a:rPr>
                         <a:t>V</a:t>
                       </a:r>
-                      <a:endParaRPr lang="en-US" sz="1800" dirty="0">
+                      <a:endParaRPr lang="en-US" sz="1400" dirty="0">
+                        <a:latin typeface="Calibri" charset="0"/>
+                        <a:ea typeface="Calibri" charset="0"/>
+                        <a:cs typeface="Calibri" charset="0"/>
+                      </a:endParaRPr>
+                    </a:p>
+                  </a:txBody>
+                  <a:tcPr marL="91440" marR="91440" marT="45720" marB="45720" anchor="ctr">
+                    <a:lnL w="9525" cap="flat" cmpd="sng" algn="ctr">
+                      <a:solidFill>
+                        <a:srgbClr val="C9D5E2"/>
+                      </a:solidFill>
+                      <a:prstDash val="solid"/>
+                      <a:round/>
+                      <a:headEnd type="none" w="med" len="med"/>
+                      <a:tailEnd type="none" w="med" len="med"/>
+                    </a:lnL>
+                    <a:lnR w="9525" cap="flat" cmpd="sng" algn="ctr">
+                      <a:solidFill>
+                        <a:srgbClr val="C9D5E2"/>
+                      </a:solidFill>
+                      <a:prstDash val="solid"/>
+                      <a:round/>
+                      <a:headEnd type="none" w="med" len="med"/>
+                      <a:tailEnd type="none" w="med" len="med"/>
+                    </a:lnR>
+                    <a:lnT w="9525" cap="flat" cmpd="sng" algn="ctr">
+                      <a:solidFill>
+                        <a:srgbClr val="C9D5E2"/>
+                      </a:solidFill>
+                      <a:prstDash val="solid"/>
+                      <a:round/>
+                      <a:headEnd type="none" w="med" len="med"/>
+                      <a:tailEnd type="none" w="med" len="med"/>
+                    </a:lnT>
+                    <a:lnB w="9525" cap="flat" cmpd="sng" algn="ctr">
+                      <a:solidFill>
+                        <a:srgbClr val="C9D5E2"/>
+                      </a:solidFill>
+                      <a:prstDash val="solid"/>
+                      <a:round/>
+                      <a:headEnd type="none" w="med" len="med"/>
+                      <a:tailEnd type="none" w="med" len="med"/>
+                    </a:lnB>
+                    <a:solidFill>
+                      <a:srgbClr val="FFFFFF"/>
+                    </a:solidFill>
+                  </a:tcPr>
+                </a:tc>
+                <a:tc>
+                  <a:txBody>
+                    <a:bodyPr/>
+                    <a:lstStyle/>
+                    <a:p>
+                      <a:pPr algn="ctr" indent="0" marL="0">
+                        <a:buNone/>
+                      </a:pPr>
+                      <a:r>
+                        <a:rPr lang="en-US" sz="1400" dirty="0">
+                          <a:solidFill>
+                            <a:srgbClr val="2F3E4E"/>
+                          </a:solidFill>
+                          <a:latin typeface="Calibri" pitchFamily="34" charset="0"/>
+                          <a:ea typeface="Calibri" pitchFamily="34" charset="-122"/>
+                          <a:cs typeface="Calibri" pitchFamily="34" charset="-120"/>
+                        </a:rPr>
+                        <a:t>F</a:t>
+                      </a:r>
+                      <a:endParaRPr lang="en-US" sz="1400" dirty="0">
+                        <a:latin typeface="Calibri" charset="0"/>
+                        <a:ea typeface="Calibri" charset="0"/>
+                        <a:cs typeface="Calibri" charset="0"/>
+                      </a:endParaRPr>
+                    </a:p>
+                  </a:txBody>
+                  <a:tcPr marL="91440" marR="91440" marT="45720" marB="45720" anchor="ctr">
+                    <a:lnL w="9525" cap="flat" cmpd="sng" algn="ctr">
+                      <a:solidFill>
+                        <a:srgbClr val="C9D5E2"/>
+                      </a:solidFill>
+                      <a:prstDash val="solid"/>
+                      <a:round/>
+                      <a:headEnd type="none" w="med" len="med"/>
+                      <a:tailEnd type="none" w="med" len="med"/>
+                    </a:lnL>
+                    <a:lnR w="9525" cap="flat" cmpd="sng" algn="ctr">
+                      <a:solidFill>
+                        <a:srgbClr val="C9D5E2"/>
+                      </a:solidFill>
+                      <a:prstDash val="solid"/>
+                      <a:round/>
+                      <a:headEnd type="none" w="med" len="med"/>
+                      <a:tailEnd type="none" w="med" len="med"/>
+                    </a:lnR>
+                    <a:lnT w="9525" cap="flat" cmpd="sng" algn="ctr">
+                      <a:solidFill>
+                        <a:srgbClr val="C9D5E2"/>
+                      </a:solidFill>
+                      <a:prstDash val="solid"/>
+                      <a:round/>
+                      <a:headEnd type="none" w="med" len="med"/>
+                      <a:tailEnd type="none" w="med" len="med"/>
+                    </a:lnT>
+                    <a:lnB w="9525" cap="flat" cmpd="sng" algn="ctr">
+                      <a:solidFill>
+                        <a:srgbClr val="C9D5E2"/>
+                      </a:solidFill>
+                      <a:prstDash val="solid"/>
+                      <a:round/>
+                      <a:headEnd type="none" w="med" len="med"/>
+                      <a:tailEnd type="none" w="med" len="med"/>
+                    </a:lnB>
+                    <a:solidFill>
+                      <a:srgbClr val="FFFFFF"/>
+                    </a:solidFill>
+                  </a:tcPr>
+                </a:tc>
+                <a:tc>
+                  <a:txBody>
+                    <a:bodyPr/>
+                    <a:lstStyle/>
+                    <a:p>
+                      <a:pPr algn="ctr" indent="0" marL="0">
+                        <a:buNone/>
+                      </a:pPr>
+                      <a:r>
+                        <a:rPr lang="en-US" sz="1400" dirty="0">
+                          <a:solidFill>
+                            <a:srgbClr val="2F3E4E"/>
+                          </a:solidFill>
+                          <a:latin typeface="Calibri" pitchFamily="34" charset="0"/>
+                          <a:ea typeface="Calibri" pitchFamily="34" charset="-122"/>
+                          <a:cs typeface="Calibri" pitchFamily="34" charset="-120"/>
+                        </a:rPr>
+                        <a:t>F</a:t>
+                      </a:r>
+                      <a:endParaRPr lang="en-US" sz="1400" dirty="0">
+                        <a:latin typeface="Calibri" charset="0"/>
+                        <a:ea typeface="Calibri" charset="0"/>
+                        <a:cs typeface="Calibri" charset="0"/>
+                      </a:endParaRPr>
+                    </a:p>
+                  </a:txBody>
+                  <a:tcPr marL="91440" marR="91440" marT="45720" marB="45720" anchor="ctr">
+                    <a:lnL w="9525" cap="flat" cmpd="sng" algn="ctr">
+                      <a:solidFill>
+                        <a:srgbClr val="C9D5E2"/>
+                      </a:solidFill>
+                      <a:prstDash val="solid"/>
+                      <a:round/>
+                      <a:headEnd type="none" w="med" len="med"/>
+                      <a:tailEnd type="none" w="med" len="med"/>
+                    </a:lnL>
+                    <a:lnR w="9525" cap="flat" cmpd="sng" algn="ctr">
+                      <a:solidFill>
+                        <a:srgbClr val="C9D5E2"/>
+                      </a:solidFill>
+                      <a:prstDash val="solid"/>
+                      <a:round/>
+                      <a:headEnd type="none" w="med" len="med"/>
+                      <a:tailEnd type="none" w="med" len="med"/>
+                    </a:lnR>
+                    <a:lnT w="9525" cap="flat" cmpd="sng" algn="ctr">
+                      <a:solidFill>
+                        <a:srgbClr val="C9D5E2"/>
+                      </a:solidFill>
+                      <a:prstDash val="solid"/>
+                      <a:round/>
+                      <a:headEnd type="none" w="med" len="med"/>
+                      <a:tailEnd type="none" w="med" len="med"/>
+                    </a:lnT>
+                    <a:lnB w="9525" cap="flat" cmpd="sng" algn="ctr">
+                      <a:solidFill>
+                        <a:srgbClr val="C9D5E2"/>
+                      </a:solidFill>
+                      <a:prstDash val="solid"/>
+                      <a:round/>
+                      <a:headEnd type="none" w="med" len="med"/>
+                      <a:tailEnd type="none" w="med" len="med"/>
+                    </a:lnB>
+                    <a:solidFill>
+                      <a:srgbClr val="FFFFFF"/>
+                    </a:solidFill>
+                  </a:tcPr>
+                </a:tc>
+                <a:tc>
+                  <a:txBody>
+                    <a:bodyPr/>
+                    <a:lstStyle/>
+                    <a:p>
+                      <a:pPr algn="ctr" indent="0" marL="0">
+                        <a:buNone/>
+                      </a:pPr>
+                      <a:r>
+                        <a:rPr lang="en-US" sz="1400" dirty="0">
+                          <a:solidFill>
+                            <a:srgbClr val="2F3E4E"/>
+                          </a:solidFill>
+                          <a:latin typeface="Calibri" pitchFamily="34" charset="0"/>
+                          <a:ea typeface="Calibri" pitchFamily="34" charset="-122"/>
+                          <a:cs typeface="Calibri" pitchFamily="34" charset="-120"/>
+                        </a:rPr>
+                        <a:t>V</a:t>
+                      </a:r>
+                      <a:endParaRPr lang="en-US" sz="1400" dirty="0">
                         <a:latin typeface="Calibri" charset="0"/>
                         <a:ea typeface="Calibri" charset="0"/>
                         <a:cs typeface="Calibri" charset="0"/>
@@ -4893,7 +3657,7 @@
                         <a:buNone/>
                       </a:pPr>
                       <a:r>
-                        <a:rPr lang="en-US" sz="1800" dirty="0">
+                        <a:rPr lang="en-US" sz="1400" dirty="0">
                           <a:solidFill>
                             <a:srgbClr val="2F3E4E"/>
                           </a:solidFill>
@@ -4901,9 +3665,9 @@
                           <a:ea typeface="Calibri" pitchFamily="34" charset="-122"/>
                           <a:cs typeface="Calibri" pitchFamily="34" charset="-120"/>
                         </a:rPr>
-                        <a:t>V</a:t>
+                        <a:t>F</a:t>
                       </a:r>
-                      <a:endParaRPr lang="en-US" sz="1800" dirty="0">
+                      <a:endParaRPr lang="en-US" sz="1400" dirty="0">
                         <a:latin typeface="Calibri" charset="0"/>
                         <a:ea typeface="Calibri" charset="0"/>
                         <a:cs typeface="Calibri" charset="0"/>
@@ -4961,7 +3725,7 @@
                         <a:buNone/>
                       </a:pPr>
                       <a:r>
-                        <a:rPr lang="en-US" sz="1800" dirty="0">
+                        <a:rPr lang="en-US" sz="1400" dirty="0">
                           <a:solidFill>
                             <a:srgbClr val="2F3E4E"/>
                           </a:solidFill>
@@ -4969,9 +3733,9 @@
                           <a:ea typeface="Calibri" pitchFamily="34" charset="-122"/>
                           <a:cs typeface="Calibri" pitchFamily="34" charset="-120"/>
                         </a:rPr>
-                        <a:t>F</a:t>
+                        <a:t>V</a:t>
                       </a:r>
-                      <a:endParaRPr lang="en-US" sz="1800" dirty="0">
+                      <a:endParaRPr lang="en-US" sz="1400" dirty="0">
                         <a:latin typeface="Calibri" charset="0"/>
                         <a:ea typeface="Calibri" charset="0"/>
                         <a:cs typeface="Calibri" charset="0"/>
@@ -5029,7 +3793,75 @@
                         <a:buNone/>
                       </a:pPr>
                       <a:r>
-                        <a:rPr lang="en-US" sz="1800" dirty="0">
+                        <a:rPr lang="en-US" sz="1400" dirty="0">
+                          <a:solidFill>
+                            <a:srgbClr val="2F3E4E"/>
+                          </a:solidFill>
+                          <a:latin typeface="Calibri" pitchFamily="34" charset="0"/>
+                          <a:ea typeface="Calibri" pitchFamily="34" charset="-122"/>
+                          <a:cs typeface="Calibri" pitchFamily="34" charset="-120"/>
+                        </a:rPr>
+                        <a:t>V</a:t>
+                      </a:r>
+                      <a:endParaRPr lang="en-US" sz="1400" dirty="0">
+                        <a:latin typeface="Calibri" charset="0"/>
+                        <a:ea typeface="Calibri" charset="0"/>
+                        <a:cs typeface="Calibri" charset="0"/>
+                      </a:endParaRPr>
+                    </a:p>
+                  </a:txBody>
+                  <a:tcPr marL="91440" marR="91440" marT="45720" marB="45720" anchor="ctr">
+                    <a:lnL w="9525" cap="flat" cmpd="sng" algn="ctr">
+                      <a:solidFill>
+                        <a:srgbClr val="C9D5E2"/>
+                      </a:solidFill>
+                      <a:prstDash val="solid"/>
+                      <a:round/>
+                      <a:headEnd type="none" w="med" len="med"/>
+                      <a:tailEnd type="none" w="med" len="med"/>
+                    </a:lnL>
+                    <a:lnR w="9525" cap="flat" cmpd="sng" algn="ctr">
+                      <a:solidFill>
+                        <a:srgbClr val="C9D5E2"/>
+                      </a:solidFill>
+                      <a:prstDash val="solid"/>
+                      <a:round/>
+                      <a:headEnd type="none" w="med" len="med"/>
+                      <a:tailEnd type="none" w="med" len="med"/>
+                    </a:lnR>
+                    <a:lnT w="9525" cap="flat" cmpd="sng" algn="ctr">
+                      <a:solidFill>
+                        <a:srgbClr val="C9D5E2"/>
+                      </a:solidFill>
+                      <a:prstDash val="solid"/>
+                      <a:round/>
+                      <a:headEnd type="none" w="med" len="med"/>
+                      <a:tailEnd type="none" w="med" len="med"/>
+                    </a:lnT>
+                    <a:lnB w="9525" cap="flat" cmpd="sng" algn="ctr">
+                      <a:solidFill>
+                        <a:srgbClr val="C9D5E2"/>
+                      </a:solidFill>
+                      <a:prstDash val="solid"/>
+                      <a:round/>
+                      <a:headEnd type="none" w="med" len="med"/>
+                      <a:tailEnd type="none" w="med" len="med"/>
+                    </a:lnB>
+                    <a:solidFill>
+                      <a:srgbClr val="EEF3F8"/>
+                    </a:solidFill>
+                  </a:tcPr>
+                </a:tc>
+                <a:tc>
+                  <a:txBody>
+                    <a:bodyPr/>
+                    <a:lstStyle/>
+                    <a:p>
+                      <a:pPr algn="ctr" indent="0" marL="0">
+                        <a:buNone/>
+                      </a:pPr>
+                      <a:r>
+                        <a:rPr lang="en-US" sz="1400" dirty="0">
                           <a:solidFill>
                             <a:srgbClr val="2F3E4E"/>
                           </a:solidFill>
@@ -5039,7 +3871,143 @@
                         </a:rPr>
                         <a:t>F</a:t>
                       </a:r>
-                      <a:endParaRPr lang="en-US" sz="1800" dirty="0">
+                      <a:endParaRPr lang="en-US" sz="1400" dirty="0">
+                        <a:latin typeface="Calibri" charset="0"/>
+                        <a:ea typeface="Calibri" charset="0"/>
+                        <a:cs typeface="Calibri" charset="0"/>
+                      </a:endParaRPr>
+                    </a:p>
+                  </a:txBody>
+                  <a:tcPr marL="91440" marR="91440" marT="45720" marB="45720" anchor="ctr">
+                    <a:lnL w="9525" cap="flat" cmpd="sng" algn="ctr">
+                      <a:solidFill>
+                        <a:srgbClr val="C9D5E2"/>
+                      </a:solidFill>
+                      <a:prstDash val="solid"/>
+                      <a:round/>
+                      <a:headEnd type="none" w="med" len="med"/>
+                      <a:tailEnd type="none" w="med" len="med"/>
+                    </a:lnL>
+                    <a:lnR w="9525" cap="flat" cmpd="sng" algn="ctr">
+                      <a:solidFill>
+                        <a:srgbClr val="C9D5E2"/>
+                      </a:solidFill>
+                      <a:prstDash val="solid"/>
+                      <a:round/>
+                      <a:headEnd type="none" w="med" len="med"/>
+                      <a:tailEnd type="none" w="med" len="med"/>
+                    </a:lnR>
+                    <a:lnT w="9525" cap="flat" cmpd="sng" algn="ctr">
+                      <a:solidFill>
+                        <a:srgbClr val="C9D5E2"/>
+                      </a:solidFill>
+                      <a:prstDash val="solid"/>
+                      <a:round/>
+                      <a:headEnd type="none" w="med" len="med"/>
+                      <a:tailEnd type="none" w="med" len="med"/>
+                    </a:lnT>
+                    <a:lnB w="9525" cap="flat" cmpd="sng" algn="ctr">
+                      <a:solidFill>
+                        <a:srgbClr val="C9D5E2"/>
+                      </a:solidFill>
+                      <a:prstDash val="solid"/>
+                      <a:round/>
+                      <a:headEnd type="none" w="med" len="med"/>
+                      <a:tailEnd type="none" w="med" len="med"/>
+                    </a:lnB>
+                    <a:solidFill>
+                      <a:srgbClr val="EEF3F8"/>
+                    </a:solidFill>
+                  </a:tcPr>
+                </a:tc>
+                <a:tc>
+                  <a:txBody>
+                    <a:bodyPr/>
+                    <a:lstStyle/>
+                    <a:p>
+                      <a:pPr algn="ctr" indent="0" marL="0">
+                        <a:buNone/>
+                      </a:pPr>
+                      <a:r>
+                        <a:rPr lang="en-US" sz="1400" dirty="0">
+                          <a:solidFill>
+                            <a:srgbClr val="2F3E4E"/>
+                          </a:solidFill>
+                          <a:latin typeface="Calibri" pitchFamily="34" charset="0"/>
+                          <a:ea typeface="Calibri" pitchFamily="34" charset="-122"/>
+                          <a:cs typeface="Calibri" pitchFamily="34" charset="-120"/>
+                        </a:rPr>
+                        <a:t>V</a:t>
+                      </a:r>
+                      <a:endParaRPr lang="en-US" sz="1400" dirty="0">
+                        <a:latin typeface="Calibri" charset="0"/>
+                        <a:ea typeface="Calibri" charset="0"/>
+                        <a:cs typeface="Calibri" charset="0"/>
+                      </a:endParaRPr>
+                    </a:p>
+                  </a:txBody>
+                  <a:tcPr marL="91440" marR="91440" marT="45720" marB="45720" anchor="ctr">
+                    <a:lnL w="9525" cap="flat" cmpd="sng" algn="ctr">
+                      <a:solidFill>
+                        <a:srgbClr val="C9D5E2"/>
+                      </a:solidFill>
+                      <a:prstDash val="solid"/>
+                      <a:round/>
+                      <a:headEnd type="none" w="med" len="med"/>
+                      <a:tailEnd type="none" w="med" len="med"/>
+                    </a:lnL>
+                    <a:lnR w="9525" cap="flat" cmpd="sng" algn="ctr">
+                      <a:solidFill>
+                        <a:srgbClr val="C9D5E2"/>
+                      </a:solidFill>
+                      <a:prstDash val="solid"/>
+                      <a:round/>
+                      <a:headEnd type="none" w="med" len="med"/>
+                      <a:tailEnd type="none" w="med" len="med"/>
+                    </a:lnR>
+                    <a:lnT w="9525" cap="flat" cmpd="sng" algn="ctr">
+                      <a:solidFill>
+                        <a:srgbClr val="C9D5E2"/>
+                      </a:solidFill>
+                      <a:prstDash val="solid"/>
+                      <a:round/>
+                      <a:headEnd type="none" w="med" len="med"/>
+                      <a:tailEnd type="none" w="med" len="med"/>
+                    </a:lnT>
+                    <a:lnB w="9525" cap="flat" cmpd="sng" algn="ctr">
+                      <a:solidFill>
+                        <a:srgbClr val="C9D5E2"/>
+                      </a:solidFill>
+                      <a:prstDash val="solid"/>
+                      <a:round/>
+                      <a:headEnd type="none" w="med" len="med"/>
+                      <a:tailEnd type="none" w="med" len="med"/>
+                    </a:lnB>
+                    <a:solidFill>
+                      <a:srgbClr val="EEF3F8"/>
+                    </a:solidFill>
+                  </a:tcPr>
+                </a:tc>
+                <a:tc>
+                  <a:txBody>
+                    <a:bodyPr/>
+                    <a:lstStyle/>
+                    <a:p>
+                      <a:pPr algn="ctr" indent="0" marL="0">
+                        <a:buNone/>
+                      </a:pPr>
+                      <a:r>
+                        <a:rPr lang="en-US" sz="1400" dirty="0">
+                          <a:solidFill>
+                            <a:srgbClr val="2F3E4E"/>
+                          </a:solidFill>
+                          <a:latin typeface="Calibri" pitchFamily="34" charset="0"/>
+                          <a:ea typeface="Calibri" pitchFamily="34" charset="-122"/>
+                          <a:cs typeface="Calibri" pitchFamily="34" charset="-120"/>
+                        </a:rPr>
+                        <a:t>V</a:t>
+                      </a:r>
+                      <a:endParaRPr lang="en-US" sz="1400" dirty="0">
                         <a:latin typeface="Calibri" charset="0"/>
                         <a:ea typeface="Calibri" charset="0"/>
                         <a:cs typeface="Calibri" charset="0"/>
@@ -5099,7 +4067,7 @@
                         <a:buNone/>
                       </a:pPr>
                       <a:r>
-                        <a:rPr lang="en-US" sz="1800" dirty="0">
+                        <a:rPr lang="en-US" sz="1400" dirty="0">
                           <a:solidFill>
                             <a:srgbClr val="2F3E4E"/>
                           </a:solidFill>
@@ -5107,9 +4075,9 @@
                           <a:ea typeface="Calibri" pitchFamily="34" charset="-122"/>
                           <a:cs typeface="Calibri" pitchFamily="34" charset="-120"/>
                         </a:rPr>
-                        <a:t>F</a:t>
+                        <a:t>V</a:t>
                       </a:r>
-                      <a:endParaRPr lang="en-US" sz="1800" dirty="0">
+                      <a:endParaRPr lang="en-US" sz="1400" dirty="0">
                         <a:latin typeface="Calibri" charset="0"/>
                         <a:ea typeface="Calibri" charset="0"/>
                         <a:cs typeface="Calibri" charset="0"/>
@@ -5167,7 +4135,7 @@
                         <a:buNone/>
                       </a:pPr>
                       <a:r>
-                        <a:rPr lang="en-US" sz="1800" dirty="0">
+                        <a:rPr lang="en-US" sz="1400" dirty="0">
                           <a:solidFill>
                             <a:srgbClr val="2F3E4E"/>
                           </a:solidFill>
@@ -5175,9 +4143,9 @@
                           <a:ea typeface="Calibri" pitchFamily="34" charset="-122"/>
                           <a:cs typeface="Calibri" pitchFamily="34" charset="-120"/>
                         </a:rPr>
-                        <a:t>V</a:t>
+                        <a:t>F</a:t>
                       </a:r>
-                      <a:endParaRPr lang="en-US" sz="1800" dirty="0">
+                      <a:endParaRPr lang="en-US" sz="1400" dirty="0">
                         <a:latin typeface="Calibri" charset="0"/>
                         <a:ea typeface="Calibri" charset="0"/>
                         <a:cs typeface="Calibri" charset="0"/>
@@ -5235,7 +4203,143 @@
                         <a:buNone/>
                       </a:pPr>
                       <a:r>
-                        <a:rPr lang="en-US" sz="1800" dirty="0">
+                        <a:rPr lang="en-US" sz="1400" dirty="0">
+                          <a:solidFill>
+                            <a:srgbClr val="2F3E4E"/>
+                          </a:solidFill>
+                          <a:latin typeface="Calibri" pitchFamily="34" charset="0"/>
+                          <a:ea typeface="Calibri" pitchFamily="34" charset="-122"/>
+                          <a:cs typeface="Calibri" pitchFamily="34" charset="-120"/>
+                        </a:rPr>
+                        <a:t>F</a:t>
+                      </a:r>
+                      <a:endParaRPr lang="en-US" sz="1400" dirty="0">
+                        <a:latin typeface="Calibri" charset="0"/>
+                        <a:ea typeface="Calibri" charset="0"/>
+                        <a:cs typeface="Calibri" charset="0"/>
+                      </a:endParaRPr>
+                    </a:p>
+                  </a:txBody>
+                  <a:tcPr marL="91440" marR="91440" marT="45720" marB="45720" anchor="ctr">
+                    <a:lnL w="9525" cap="flat" cmpd="sng" algn="ctr">
+                      <a:solidFill>
+                        <a:srgbClr val="C9D5E2"/>
+                      </a:solidFill>
+                      <a:prstDash val="solid"/>
+                      <a:round/>
+                      <a:headEnd type="none" w="med" len="med"/>
+                      <a:tailEnd type="none" w="med" len="med"/>
+                    </a:lnL>
+                    <a:lnR w="9525" cap="flat" cmpd="sng" algn="ctr">
+                      <a:solidFill>
+                        <a:srgbClr val="C9D5E2"/>
+                      </a:solidFill>
+                      <a:prstDash val="solid"/>
+                      <a:round/>
+                      <a:headEnd type="none" w="med" len="med"/>
+                      <a:tailEnd type="none" w="med" len="med"/>
+                    </a:lnR>
+                    <a:lnT w="9525" cap="flat" cmpd="sng" algn="ctr">
+                      <a:solidFill>
+                        <a:srgbClr val="C9D5E2"/>
+                      </a:solidFill>
+                      <a:prstDash val="solid"/>
+                      <a:round/>
+                      <a:headEnd type="none" w="med" len="med"/>
+                      <a:tailEnd type="none" w="med" len="med"/>
+                    </a:lnT>
+                    <a:lnB w="9525" cap="flat" cmpd="sng" algn="ctr">
+                      <a:solidFill>
+                        <a:srgbClr val="C9D5E2"/>
+                      </a:solidFill>
+                      <a:prstDash val="solid"/>
+                      <a:round/>
+                      <a:headEnd type="none" w="med" len="med"/>
+                      <a:tailEnd type="none" w="med" len="med"/>
+                    </a:lnB>
+                    <a:solidFill>
+                      <a:srgbClr val="FFFFFF"/>
+                    </a:solidFill>
+                  </a:tcPr>
+                </a:tc>
+                <a:tc>
+                  <a:txBody>
+                    <a:bodyPr/>
+                    <a:lstStyle/>
+                    <a:p>
+                      <a:pPr algn="ctr" indent="0" marL="0">
+                        <a:buNone/>
+                      </a:pPr>
+                      <a:r>
+                        <a:rPr lang="en-US" sz="1400" dirty="0">
+                          <a:solidFill>
+                            <a:srgbClr val="2F3E4E"/>
+                          </a:solidFill>
+                          <a:latin typeface="Calibri" pitchFamily="34" charset="0"/>
+                          <a:ea typeface="Calibri" pitchFamily="34" charset="-122"/>
+                          <a:cs typeface="Calibri" pitchFamily="34" charset="-120"/>
+                        </a:rPr>
+                        <a:t>F</a:t>
+                      </a:r>
+                      <a:endParaRPr lang="en-US" sz="1400" dirty="0">
+                        <a:latin typeface="Calibri" charset="0"/>
+                        <a:ea typeface="Calibri" charset="0"/>
+                        <a:cs typeface="Calibri" charset="0"/>
+                      </a:endParaRPr>
+                    </a:p>
+                  </a:txBody>
+                  <a:tcPr marL="91440" marR="91440" marT="45720" marB="45720" anchor="ctr">
+                    <a:lnL w="9525" cap="flat" cmpd="sng" algn="ctr">
+                      <a:solidFill>
+                        <a:srgbClr val="C9D5E2"/>
+                      </a:solidFill>
+                      <a:prstDash val="solid"/>
+                      <a:round/>
+                      <a:headEnd type="none" w="med" len="med"/>
+                      <a:tailEnd type="none" w="med" len="med"/>
+                    </a:lnL>
+                    <a:lnR w="9525" cap="flat" cmpd="sng" algn="ctr">
+                      <a:solidFill>
+                        <a:srgbClr val="C9D5E2"/>
+                      </a:solidFill>
+                      <a:prstDash val="solid"/>
+                      <a:round/>
+                      <a:headEnd type="none" w="med" len="med"/>
+                      <a:tailEnd type="none" w="med" len="med"/>
+                    </a:lnR>
+                    <a:lnT w="9525" cap="flat" cmpd="sng" algn="ctr">
+                      <a:solidFill>
+                        <a:srgbClr val="C9D5E2"/>
+                      </a:solidFill>
+                      <a:prstDash val="solid"/>
+                      <a:round/>
+                      <a:headEnd type="none" w="med" len="med"/>
+                      <a:tailEnd type="none" w="med" len="med"/>
+                    </a:lnT>
+                    <a:lnB w="9525" cap="flat" cmpd="sng" algn="ctr">
+                      <a:solidFill>
+                        <a:srgbClr val="C9D5E2"/>
+                      </a:solidFill>
+                      <a:prstDash val="solid"/>
+                      <a:round/>
+                      <a:headEnd type="none" w="med" len="med"/>
+                      <a:tailEnd type="none" w="med" len="med"/>
+                    </a:lnB>
+                    <a:solidFill>
+                      <a:srgbClr val="FFFFFF"/>
+                    </a:solidFill>
+                  </a:tcPr>
+                </a:tc>
+                <a:tc>
+                  <a:txBody>
+                    <a:bodyPr/>
+                    <a:lstStyle/>
+                    <a:p>
+                      <a:pPr algn="ctr" indent="0" marL="0">
+                        <a:buNone/>
+                      </a:pPr>
+                      <a:r>
+                        <a:rPr lang="en-US" sz="1400" dirty="0">
                           <a:solidFill>
                             <a:srgbClr val="2F3E4E"/>
                           </a:solidFill>
@@ -5245,7 +4349,75 @@
                         </a:rPr>
                         <a:t>V</a:t>
                       </a:r>
-                      <a:endParaRPr lang="en-US" sz="1800" dirty="0">
+                      <a:endParaRPr lang="en-US" sz="1400" dirty="0">
+                        <a:latin typeface="Calibri" charset="0"/>
+                        <a:ea typeface="Calibri" charset="0"/>
+                        <a:cs typeface="Calibri" charset="0"/>
+                      </a:endParaRPr>
+                    </a:p>
+                  </a:txBody>
+                  <a:tcPr marL="91440" marR="91440" marT="45720" marB="45720" anchor="ctr">
+                    <a:lnL w="9525" cap="flat" cmpd="sng" algn="ctr">
+                      <a:solidFill>
+                        <a:srgbClr val="C9D5E2"/>
+                      </a:solidFill>
+                      <a:prstDash val="solid"/>
+                      <a:round/>
+                      <a:headEnd type="none" w="med" len="med"/>
+                      <a:tailEnd type="none" w="med" len="med"/>
+                    </a:lnL>
+                    <a:lnR w="9525" cap="flat" cmpd="sng" algn="ctr">
+                      <a:solidFill>
+                        <a:srgbClr val="C9D5E2"/>
+                      </a:solidFill>
+                      <a:prstDash val="solid"/>
+                      <a:round/>
+                      <a:headEnd type="none" w="med" len="med"/>
+                      <a:tailEnd type="none" w="med" len="med"/>
+                    </a:lnR>
+                    <a:lnT w="9525" cap="flat" cmpd="sng" algn="ctr">
+                      <a:solidFill>
+                        <a:srgbClr val="C9D5E2"/>
+                      </a:solidFill>
+                      <a:prstDash val="solid"/>
+                      <a:round/>
+                      <a:headEnd type="none" w="med" len="med"/>
+                      <a:tailEnd type="none" w="med" len="med"/>
+                    </a:lnT>
+                    <a:lnB w="9525" cap="flat" cmpd="sng" algn="ctr">
+                      <a:solidFill>
+                        <a:srgbClr val="C9D5E2"/>
+                      </a:solidFill>
+                      <a:prstDash val="solid"/>
+                      <a:round/>
+                      <a:headEnd type="none" w="med" len="med"/>
+                      <a:tailEnd type="none" w="med" len="med"/>
+                    </a:lnB>
+                    <a:solidFill>
+                      <a:srgbClr val="FFFFFF"/>
+                    </a:solidFill>
+                  </a:tcPr>
+                </a:tc>
+                <a:tc>
+                  <a:txBody>
+                    <a:bodyPr/>
+                    <a:lstStyle/>
+                    <a:p>
+                      <a:pPr algn="ctr" indent="0" marL="0">
+                        <a:buNone/>
+                      </a:pPr>
+                      <a:r>
+                        <a:rPr lang="en-US" sz="1400" dirty="0">
+                          <a:solidFill>
+                            <a:srgbClr val="2F3E4E"/>
+                          </a:solidFill>
+                          <a:latin typeface="Calibri" pitchFamily="34" charset="0"/>
+                          <a:ea typeface="Calibri" pitchFamily="34" charset="-122"/>
+                          <a:cs typeface="Calibri" pitchFamily="34" charset="-120"/>
+                        </a:rPr>
+                        <a:t>F</a:t>
+                      </a:r>
+                      <a:endParaRPr lang="en-US" sz="1400" dirty="0">
                         <a:latin typeface="Calibri" charset="0"/>
                         <a:ea typeface="Calibri" charset="0"/>
                         <a:cs typeface="Calibri" charset="0"/>
@@ -5305,7 +4477,7 @@
                         <a:buNone/>
                       </a:pPr>
                       <a:r>
-                        <a:rPr lang="en-US" sz="1800" dirty="0">
+                        <a:rPr lang="en-US" sz="1400" dirty="0">
                           <a:solidFill>
                             <a:srgbClr val="2F3E4E"/>
                           </a:solidFill>
@@ -5313,9 +4485,9 @@
                           <a:ea typeface="Calibri" pitchFamily="34" charset="-122"/>
                           <a:cs typeface="Calibri" pitchFamily="34" charset="-120"/>
                         </a:rPr>
-                        <a:t>F</a:t>
+                        <a:t>V</a:t>
                       </a:r>
-                      <a:endParaRPr lang="en-US" sz="1800" dirty="0">
+                      <a:endParaRPr lang="en-US" sz="1400" dirty="0">
                         <a:latin typeface="Calibri" charset="0"/>
                         <a:ea typeface="Calibri" charset="0"/>
                         <a:cs typeface="Calibri" charset="0"/>
@@ -5373,7 +4545,7 @@
                         <a:buNone/>
                       </a:pPr>
                       <a:r>
-                        <a:rPr lang="en-US" sz="1800" dirty="0">
+                        <a:rPr lang="en-US" sz="1400" dirty="0">
                           <a:solidFill>
                             <a:srgbClr val="2F3E4E"/>
                           </a:solidFill>
@@ -5381,9 +4553,9 @@
                           <a:ea typeface="Calibri" pitchFamily="34" charset="-122"/>
                           <a:cs typeface="Calibri" pitchFamily="34" charset="-120"/>
                         </a:rPr>
-                        <a:t>F</a:t>
+                        <a:t>V</a:t>
                       </a:r>
-                      <a:endParaRPr lang="en-US" sz="1800" dirty="0">
+                      <a:endParaRPr lang="en-US" sz="1400" dirty="0">
                         <a:latin typeface="Calibri" charset="0"/>
                         <a:ea typeface="Calibri" charset="0"/>
                         <a:cs typeface="Calibri" charset="0"/>
@@ -5441,7 +4613,75 @@
                         <a:buNone/>
                       </a:pPr>
                       <a:r>
-                        <a:rPr lang="en-US" sz="1800" dirty="0">
+                        <a:rPr lang="en-US" sz="1400" dirty="0">
+                          <a:solidFill>
+                            <a:srgbClr val="2F3E4E"/>
+                          </a:solidFill>
+                          <a:latin typeface="Calibri" pitchFamily="34" charset="0"/>
+                          <a:ea typeface="Calibri" pitchFamily="34" charset="-122"/>
+                          <a:cs typeface="Calibri" pitchFamily="34" charset="-120"/>
+                        </a:rPr>
+                        <a:t>F</a:t>
+                      </a:r>
+                      <a:endParaRPr lang="en-US" sz="1400" dirty="0">
+                        <a:latin typeface="Calibri" charset="0"/>
+                        <a:ea typeface="Calibri" charset="0"/>
+                        <a:cs typeface="Calibri" charset="0"/>
+                      </a:endParaRPr>
+                    </a:p>
+                  </a:txBody>
+                  <a:tcPr marL="91440" marR="91440" marT="45720" marB="45720" anchor="ctr">
+                    <a:lnL w="9525" cap="flat" cmpd="sng" algn="ctr">
+                      <a:solidFill>
+                        <a:srgbClr val="C9D5E2"/>
+                      </a:solidFill>
+                      <a:prstDash val="solid"/>
+                      <a:round/>
+                      <a:headEnd type="none" w="med" len="med"/>
+                      <a:tailEnd type="none" w="med" len="med"/>
+                    </a:lnL>
+                    <a:lnR w="9525" cap="flat" cmpd="sng" algn="ctr">
+                      <a:solidFill>
+                        <a:srgbClr val="C9D5E2"/>
+                      </a:solidFill>
+                      <a:prstDash val="solid"/>
+                      <a:round/>
+                      <a:headEnd type="none" w="med" len="med"/>
+                      <a:tailEnd type="none" w="med" len="med"/>
+                    </a:lnR>
+                    <a:lnT w="9525" cap="flat" cmpd="sng" algn="ctr">
+                      <a:solidFill>
+                        <a:srgbClr val="C9D5E2"/>
+                      </a:solidFill>
+                      <a:prstDash val="solid"/>
+                      <a:round/>
+                      <a:headEnd type="none" w="med" len="med"/>
+                      <a:tailEnd type="none" w="med" len="med"/>
+                    </a:lnT>
+                    <a:lnB w="9525" cap="flat" cmpd="sng" algn="ctr">
+                      <a:solidFill>
+                        <a:srgbClr val="C9D5E2"/>
+                      </a:solidFill>
+                      <a:prstDash val="solid"/>
+                      <a:round/>
+                      <a:headEnd type="none" w="med" len="med"/>
+                      <a:tailEnd type="none" w="med" len="med"/>
+                    </a:lnB>
+                    <a:solidFill>
+                      <a:srgbClr val="EEF3F8"/>
+                    </a:solidFill>
+                  </a:tcPr>
+                </a:tc>
+                <a:tc>
+                  <a:txBody>
+                    <a:bodyPr/>
+                    <a:lstStyle/>
+                    <a:p>
+                      <a:pPr algn="ctr" indent="0" marL="0">
+                        <a:buNone/>
+                      </a:pPr>
+                      <a:r>
+                        <a:rPr lang="en-US" sz="1400" dirty="0">
                           <a:solidFill>
                             <a:srgbClr val="2F3E4E"/>
                           </a:solidFill>
@@ -5451,7 +4691,143 @@
                         </a:rPr>
                         <a:t>V</a:t>
                       </a:r>
-                      <a:endParaRPr lang="en-US" sz="1800" dirty="0">
+                      <a:endParaRPr lang="en-US" sz="1400" dirty="0">
+                        <a:latin typeface="Calibri" charset="0"/>
+                        <a:ea typeface="Calibri" charset="0"/>
+                        <a:cs typeface="Calibri" charset="0"/>
+                      </a:endParaRPr>
+                    </a:p>
+                  </a:txBody>
+                  <a:tcPr marL="91440" marR="91440" marT="45720" marB="45720" anchor="ctr">
+                    <a:lnL w="9525" cap="flat" cmpd="sng" algn="ctr">
+                      <a:solidFill>
+                        <a:srgbClr val="C9D5E2"/>
+                      </a:solidFill>
+                      <a:prstDash val="solid"/>
+                      <a:round/>
+                      <a:headEnd type="none" w="med" len="med"/>
+                      <a:tailEnd type="none" w="med" len="med"/>
+                    </a:lnL>
+                    <a:lnR w="9525" cap="flat" cmpd="sng" algn="ctr">
+                      <a:solidFill>
+                        <a:srgbClr val="C9D5E2"/>
+                      </a:solidFill>
+                      <a:prstDash val="solid"/>
+                      <a:round/>
+                      <a:headEnd type="none" w="med" len="med"/>
+                      <a:tailEnd type="none" w="med" len="med"/>
+                    </a:lnR>
+                    <a:lnT w="9525" cap="flat" cmpd="sng" algn="ctr">
+                      <a:solidFill>
+                        <a:srgbClr val="C9D5E2"/>
+                      </a:solidFill>
+                      <a:prstDash val="solid"/>
+                      <a:round/>
+                      <a:headEnd type="none" w="med" len="med"/>
+                      <a:tailEnd type="none" w="med" len="med"/>
+                    </a:lnT>
+                    <a:lnB w="9525" cap="flat" cmpd="sng" algn="ctr">
+                      <a:solidFill>
+                        <a:srgbClr val="C9D5E2"/>
+                      </a:solidFill>
+                      <a:prstDash val="solid"/>
+                      <a:round/>
+                      <a:headEnd type="none" w="med" len="med"/>
+                      <a:tailEnd type="none" w="med" len="med"/>
+                    </a:lnB>
+                    <a:solidFill>
+                      <a:srgbClr val="EEF3F8"/>
+                    </a:solidFill>
+                  </a:tcPr>
+                </a:tc>
+                <a:tc>
+                  <a:txBody>
+                    <a:bodyPr/>
+                    <a:lstStyle/>
+                    <a:p>
+                      <a:pPr algn="ctr" indent="0" marL="0">
+                        <a:buNone/>
+                      </a:pPr>
+                      <a:r>
+                        <a:rPr lang="en-US" sz="1400" dirty="0">
+                          <a:solidFill>
+                            <a:srgbClr val="2F3E4E"/>
+                          </a:solidFill>
+                          <a:latin typeface="Calibri" pitchFamily="34" charset="0"/>
+                          <a:ea typeface="Calibri" pitchFamily="34" charset="-122"/>
+                          <a:cs typeface="Calibri" pitchFamily="34" charset="-120"/>
+                        </a:rPr>
+                        <a:t>V</a:t>
+                      </a:r>
+                      <a:endParaRPr lang="en-US" sz="1400" dirty="0">
+                        <a:latin typeface="Calibri" charset="0"/>
+                        <a:ea typeface="Calibri" charset="0"/>
+                        <a:cs typeface="Calibri" charset="0"/>
+                      </a:endParaRPr>
+                    </a:p>
+                  </a:txBody>
+                  <a:tcPr marL="91440" marR="91440" marT="45720" marB="45720" anchor="ctr">
+                    <a:lnL w="9525" cap="flat" cmpd="sng" algn="ctr">
+                      <a:solidFill>
+                        <a:srgbClr val="C9D5E2"/>
+                      </a:solidFill>
+                      <a:prstDash val="solid"/>
+                      <a:round/>
+                      <a:headEnd type="none" w="med" len="med"/>
+                      <a:tailEnd type="none" w="med" len="med"/>
+                    </a:lnL>
+                    <a:lnR w="9525" cap="flat" cmpd="sng" algn="ctr">
+                      <a:solidFill>
+                        <a:srgbClr val="C9D5E2"/>
+                      </a:solidFill>
+                      <a:prstDash val="solid"/>
+                      <a:round/>
+                      <a:headEnd type="none" w="med" len="med"/>
+                      <a:tailEnd type="none" w="med" len="med"/>
+                    </a:lnR>
+                    <a:lnT w="9525" cap="flat" cmpd="sng" algn="ctr">
+                      <a:solidFill>
+                        <a:srgbClr val="C9D5E2"/>
+                      </a:solidFill>
+                      <a:prstDash val="solid"/>
+                      <a:round/>
+                      <a:headEnd type="none" w="med" len="med"/>
+                      <a:tailEnd type="none" w="med" len="med"/>
+                    </a:lnT>
+                    <a:lnB w="9525" cap="flat" cmpd="sng" algn="ctr">
+                      <a:solidFill>
+                        <a:srgbClr val="C9D5E2"/>
+                      </a:solidFill>
+                      <a:prstDash val="solid"/>
+                      <a:round/>
+                      <a:headEnd type="none" w="med" len="med"/>
+                      <a:tailEnd type="none" w="med" len="med"/>
+                    </a:lnB>
+                    <a:solidFill>
+                      <a:srgbClr val="EEF3F8"/>
+                    </a:solidFill>
+                  </a:tcPr>
+                </a:tc>
+                <a:tc>
+                  <a:txBody>
+                    <a:bodyPr/>
+                    <a:lstStyle/>
+                    <a:p>
+                      <a:pPr algn="ctr" indent="0" marL="0">
+                        <a:buNone/>
+                      </a:pPr>
+                      <a:r>
+                        <a:rPr lang="en-US" sz="1400" dirty="0">
+                          <a:solidFill>
+                            <a:srgbClr val="2F3E4E"/>
+                          </a:solidFill>
+                          <a:latin typeface="Calibri" pitchFamily="34" charset="0"/>
+                          <a:ea typeface="Calibri" pitchFamily="34" charset="-122"/>
+                          <a:cs typeface="Calibri" pitchFamily="34" charset="-120"/>
+                        </a:rPr>
+                        <a:t>V</a:t>
+                      </a:r>
+                      <a:endParaRPr lang="en-US" sz="1400" dirty="0">
                         <a:latin typeface="Calibri" charset="0"/>
                         <a:ea typeface="Calibri" charset="0"/>
                         <a:cs typeface="Calibri" charset="0"/>
@@ -5505,160 +4881,6 @@
           </a:graphicData>
         </a:graphic>
       </p:graphicFrame>
-      <p:sp>
-        <p:nvSpPr>
-          <p:cNvPr id="7" name="Shape 3"/>
-          <p:cNvSpPr/>
-          <p:nvPr/>
-        </p:nvSpPr>
-        <p:spPr>
-          <a:xfrm>
-            <a:off x="4846320" y="1554480"/>
-            <a:ext cx="3749040" cy="2926080"/>
-          </a:xfrm>
-          <a:prstGeom prst="roundRect">
-            <a:avLst>
-              <a:gd name="adj" fmla="val 3750"/>
-            </a:avLst>
-          </a:prstGeom>
-          <a:solidFill>
-            <a:srgbClr val="EEF3F8"/>
-          </a:solidFill>
-          <a:ln w="12700">
-            <a:solidFill>
-              <a:srgbClr val="EEF3F8"/>
-            </a:solidFill>
-            <a:prstDash val="solid"/>
-          </a:ln>
-        </p:spPr>
-      </p:sp>
-      <p:sp>
-        <p:nvSpPr>
-          <p:cNvPr id="8" name="Shape 4"/>
-          <p:cNvSpPr/>
-          <p:nvPr/>
-        </p:nvSpPr>
-        <p:spPr>
-          <a:xfrm>
-            <a:off x="5120640" y="1783080"/>
-            <a:ext cx="640080" cy="640080"/>
-          </a:xfrm>
-          <a:prstGeom prst="ellipse">
-            <a:avLst/>
-          </a:prstGeom>
-          <a:solidFill>
-            <a:srgbClr val="4F7CAC"/>
-          </a:solidFill>
-          <a:ln w="12700">
-            <a:solidFill>
-              <a:srgbClr val="4F7CAC"/>
-            </a:solidFill>
-            <a:prstDash val="solid"/>
-          </a:ln>
-        </p:spPr>
-      </p:sp>
-      <p:pic>
-        <p:nvPicPr>
-          <p:cNvPr id="9" name="Image 0" descr="preencoded.png">    </p:cNvPr>
-          <p:cNvPicPr>
-            <a:picLocks noChangeAspect="1"/>
-          </p:cNvPicPr>
-          <p:nvPr/>
-        </p:nvPicPr>
-        <p:blipFill>
-          <a:blip r:embed="rId1"/>
-          <a:stretch>
-            <a:fillRect/>
-          </a:stretch>
-        </p:blipFill>
-        <p:spPr>
-          <a:xfrm>
-            <a:off x="5293462" y="1955902"/>
-            <a:ext cx="294437" cy="294437"/>
-          </a:xfrm>
-          <a:prstGeom prst="rect">
-            <a:avLst/>
-          </a:prstGeom>
-        </p:spPr>
-      </p:pic>
-      <p:sp>
-        <p:nvSpPr>
-          <p:cNvPr id="10" name="Text 5"/>
-          <p:cNvSpPr txBox="1"/>
-          <p:nvPr/>
-        </p:nvSpPr>
-        <p:spPr>
-          <a:xfrm>
-            <a:off x="5120640" y="2651760"/>
-            <a:ext cx="3291840" cy="457200"/>
-          </a:xfrm>
-          <a:prstGeom prst="rect">
-            <a:avLst/>
-          </a:prstGeom>
-          <a:noFill/>
-          <a:ln/>
-        </p:spPr>
-        <p:txBody>
-          <a:bodyPr wrap="square" lIns="0" tIns="0" rIns="0" bIns="0" rtlCol="0" anchor="t"/>
-          <a:lstStyle/>
-          <a:p>
-            <a:pPr indent="0" marL="0">
-              <a:buNone/>
-            </a:pPr>
-            <a:r>
-              <a:rPr lang="en-US" sz="1800" b="1" dirty="0">
-                <a:solidFill>
-                  <a:srgbClr val="2F3E4E"/>
-                </a:solidFill>
-                <a:latin typeface="Calibri" pitchFamily="34" charset="0"/>
-                <a:ea typeface="Calibri" pitchFamily="34" charset="-122"/>
-                <a:cs typeface="Calibri" pitchFamily="34" charset="-120"/>
-              </a:rPr>
-              <a:t>"Si estudio, entonces apruebo"</a:t>
-            </a:r>
-            <a:endParaRPr lang="en-US" sz="1800" dirty="0"/>
-          </a:p>
-        </p:txBody>
-      </p:sp>
-      <p:sp>
-        <p:nvSpPr>
-          <p:cNvPr id="11" name="Text 6"/>
-          <p:cNvSpPr txBox="1"/>
-          <p:nvPr/>
-        </p:nvSpPr>
-        <p:spPr>
-          <a:xfrm>
-            <a:off x="5120640" y="3200400"/>
-            <a:ext cx="3291840" cy="914400"/>
-          </a:xfrm>
-          <a:prstGeom prst="rect">
-            <a:avLst/>
-          </a:prstGeom>
-          <a:noFill/>
-          <a:ln/>
-        </p:spPr>
-        <p:txBody>
-          <a:bodyPr wrap="square" lIns="0" tIns="0" rIns="0" bIns="0" rtlCol="0" anchor="t"/>
-          <a:lstStyle/>
-          <a:p>
-            <a:pPr indent="0" marL="0">
-              <a:buNone/>
-            </a:pPr>
-            <a:r>
-              <a:rPr lang="en-US" sz="1700" dirty="0">
-                <a:solidFill>
-                  <a:srgbClr val="5F6E80"/>
-                </a:solidFill>
-                <a:latin typeface="Calibri" pitchFamily="34" charset="0"/>
-                <a:ea typeface="Calibri" pitchFamily="34" charset="-122"/>
-                <a:cs typeface="Calibri" pitchFamily="34" charset="-120"/>
-              </a:rPr>
-              <a:t>La promesa solo se rompe si estudié y no aprobé.</a:t>
-            </a:r>
-            <a:endParaRPr lang="en-US" sz="1700" dirty="0"/>
-          </a:p>
-        </p:txBody>
-      </p:sp>
     </p:spTree>
   </p:cSld>
   <p:clrMapOvr>
@@ -5724,7 +4946,7 @@
                 <a:ea typeface="Cambria" pitchFamily="34" charset="-122"/>
                 <a:cs typeface="Cambria" pitchFamily="34" charset="-120"/>
               </a:rPr>
-              <a:t>Negación de un condicional</a:t>
+              <a:t>Si p, entonces q</a:t>
             </a:r>
             <a:endParaRPr lang="en-US" sz="3000" dirty="0"/>
           </a:p>
@@ -5763,7 +4985,7 @@
                 <a:ea typeface="Calibri" pitchFamily="34" charset="-122"/>
                 <a:cs typeface="Calibri" pitchFamily="34" charset="-120"/>
               </a:rPr>
-              <a:t>Se niega con "Y", no con "si no"</a:t>
+              <a:t>La promesa solo se rompe si p ocurre y q falla</a:t>
             </a:r>
             <a:endParaRPr lang="en-US" sz="1600" dirty="0"/>
           </a:p>
@@ -5810,18 +5032,18 @@
       </p:sp>
       <p:sp>
         <p:nvSpPr>
-          <p:cNvPr id="6" name="Shape 3"/>
+          <p:cNvPr id="5" name="Shape 3"/>
           <p:cNvSpPr/>
           <p:nvPr/>
         </p:nvSpPr>
         <p:spPr>
           <a:xfrm>
-            <a:off x="548640" y="1554480"/>
-            <a:ext cx="3749040" cy="2194560"/>
+            <a:off x="548640" y="1737360"/>
+            <a:ext cx="3840480" cy="1005840"/>
           </a:xfrm>
           <a:prstGeom prst="roundRect">
             <a:avLst>
-              <a:gd name="adj" fmla="val 5000"/>
+              <a:gd name="adj" fmla="val 10909"/>
             </a:avLst>
           </a:prstGeom>
           <a:solidFill>
@@ -5837,14 +5059,14 @@
       </p:sp>
       <p:sp>
         <p:nvSpPr>
-          <p:cNvPr id="7" name="Text 4"/>
+          <p:cNvPr id="6" name="Text 4"/>
           <p:cNvSpPr txBox="1"/>
           <p:nvPr/>
         </p:nvSpPr>
         <p:spPr>
           <a:xfrm>
-            <a:off x="822960" y="1783080"/>
-            <a:ext cx="3291840" cy="457200"/>
+            <a:off x="548640" y="1737360"/>
+            <a:ext cx="3840480" cy="1005840"/>
           </a:xfrm>
           <a:prstGeom prst="rect">
             <a:avLst/>
@@ -5853,14 +5075,14 @@
           <a:ln/>
         </p:spPr>
         <p:txBody>
-          <a:bodyPr wrap="square" lIns="0" tIns="0" rIns="0" bIns="0" rtlCol="0" anchor="t"/>
-          <a:lstStyle/>
-          <a:p>
-            <a:pPr indent="0" marL="0">
+          <a:bodyPr wrap="square" lIns="0" tIns="0" rIns="0" bIns="0" rtlCol="0" anchor="ctr"/>
+          <a:lstStyle/>
+          <a:p>
+            <a:pPr algn="ctr" indent="0" marL="0">
               <a:buNone/>
             </a:pPr>
             <a:r>
-              <a:rPr lang="en-US" sz="2000" b="1" dirty="0">
+              <a:rPr lang="en-US" sz="2200" b="1" dirty="0">
                 <a:solidFill>
                   <a:srgbClr val="2F3E4E"/>
                 </a:solidFill>
@@ -5868,170 +5090,26 @@
                 <a:ea typeface="Calibri" pitchFamily="34" charset="-122"/>
                 <a:cs typeface="Calibri" pitchFamily="34" charset="-120"/>
               </a:rPr>
-              <a:t>NO (p → q) = p Y NO q</a:t>
-            </a:r>
-            <a:endParaRPr lang="en-US" sz="2000" dirty="0"/>
-          </a:p>
-        </p:txBody>
-      </p:sp>
-      <p:sp>
-        <p:nvSpPr>
-          <p:cNvPr id="8" name="Text 5"/>
-          <p:cNvSpPr txBox="1"/>
-          <p:nvPr/>
-        </p:nvSpPr>
-        <p:spPr>
-          <a:xfrm>
-            <a:off x="822960" y="2468880"/>
-            <a:ext cx="3291840" cy="457200"/>
-          </a:xfrm>
-          <a:prstGeom prst="rect">
-            <a:avLst/>
-          </a:prstGeom>
-          <a:noFill/>
-          <a:ln/>
-        </p:spPr>
-        <p:txBody>
-          <a:bodyPr wrap="square" lIns="0" tIns="0" rIns="0" bIns="0" rtlCol="0" anchor="t"/>
-          <a:lstStyle/>
-          <a:p>
-            <a:pPr indent="0" marL="0">
-              <a:buNone/>
-            </a:pPr>
-            <a:r>
-              <a:rPr lang="en-US" sz="1700" dirty="0">
-                <a:solidFill>
-                  <a:srgbClr val="2F3E4E"/>
-                </a:solidFill>
-                <a:latin typeface="Calibri" pitchFamily="34" charset="0"/>
-                <a:ea typeface="Calibri" pitchFamily="34" charset="-122"/>
-                <a:cs typeface="Calibri" pitchFamily="34" charset="-120"/>
-              </a:rPr>
-              <a:t>Ejemplo: "llueve y no me mojo"</a:t>
-            </a:r>
-            <a:endParaRPr lang="en-US" sz="1700" dirty="0"/>
-          </a:p>
-        </p:txBody>
-      </p:sp>
-      <p:sp>
-        <p:nvSpPr>
-          <p:cNvPr id="9" name="Shape 6"/>
+              <a:t>p → q ≡ ¬p ∨ q</a:t>
+            </a:r>
+            <a:endParaRPr lang="en-US" sz="2200" dirty="0"/>
+          </a:p>
+        </p:txBody>
+      </p:sp>
+      <p:sp>
+        <p:nvSpPr>
+          <p:cNvPr id="7" name="Shape 5"/>
           <p:cNvSpPr/>
           <p:nvPr/>
         </p:nvSpPr>
         <p:spPr>
           <a:xfrm>
-            <a:off x="4846320" y="1554480"/>
-            <a:ext cx="3749040" cy="2194560"/>
+            <a:off x="4754880" y="1737360"/>
+            <a:ext cx="3840480" cy="1005840"/>
           </a:xfrm>
           <a:prstGeom prst="roundRect">
             <a:avLst>
-              <a:gd name="adj" fmla="val 5000"/>
-            </a:avLst>
-          </a:prstGeom>
-          <a:solidFill>
-            <a:srgbClr val="E1F0E7"/>
-          </a:solidFill>
-          <a:ln w="12700">
-            <a:solidFill>
-              <a:srgbClr val="E1F0E7"/>
-            </a:solidFill>
-            <a:prstDash val="solid"/>
-          </a:ln>
-        </p:spPr>
-      </p:sp>
-      <p:sp>
-        <p:nvSpPr>
-          <p:cNvPr id="10" name="Text 7"/>
-          <p:cNvSpPr txBox="1"/>
-          <p:nvPr/>
-        </p:nvSpPr>
-        <p:spPr>
-          <a:xfrm>
-            <a:off x="5120640" y="1783080"/>
-            <a:ext cx="3291840" cy="731520"/>
-          </a:xfrm>
-          <a:prstGeom prst="rect">
-            <a:avLst/>
-          </a:prstGeom>
-          <a:noFill/>
-          <a:ln/>
-        </p:spPr>
-        <p:txBody>
-          <a:bodyPr wrap="square" lIns="0" tIns="0" rIns="0" bIns="0" rtlCol="0" anchor="t"/>
-          <a:lstStyle/>
-          <a:p>
-            <a:pPr indent="0" marL="0">
-              <a:buNone/>
-            </a:pPr>
-            <a:r>
-              <a:rPr lang="en-US" sz="1900" b="1" dirty="0">
-                <a:solidFill>
-                  <a:srgbClr val="2F3E4E"/>
-                </a:solidFill>
-                <a:latin typeface="Calibri" pitchFamily="34" charset="0"/>
-                <a:ea typeface="Calibri" pitchFamily="34" charset="-122"/>
-                <a:cs typeface="Calibri" pitchFamily="34" charset="-120"/>
-              </a:rPr>
-              <a:t>De Morgan: NO (p Y q) = NO p O NO q</a:t>
-            </a:r>
-            <a:endParaRPr lang="en-US" sz="1900" dirty="0"/>
-          </a:p>
-        </p:txBody>
-      </p:sp>
-      <p:sp>
-        <p:nvSpPr>
-          <p:cNvPr id="11" name="Text 8"/>
-          <p:cNvSpPr txBox="1"/>
-          <p:nvPr/>
-        </p:nvSpPr>
-        <p:spPr>
-          <a:xfrm>
-            <a:off x="5120640" y="2651760"/>
-            <a:ext cx="3291840" cy="457200"/>
-          </a:xfrm>
-          <a:prstGeom prst="rect">
-            <a:avLst/>
-          </a:prstGeom>
-          <a:noFill/>
-          <a:ln/>
-        </p:spPr>
-        <p:txBody>
-          <a:bodyPr wrap="square" lIns="0" tIns="0" rIns="0" bIns="0" rtlCol="0" anchor="t"/>
-          <a:lstStyle/>
-          <a:p>
-            <a:pPr indent="0" marL="0">
-              <a:buNone/>
-            </a:pPr>
-            <a:r>
-              <a:rPr lang="en-US" sz="1700" dirty="0">
-                <a:solidFill>
-                  <a:srgbClr val="2F3E4E"/>
-                </a:solidFill>
-                <a:latin typeface="Calibri" pitchFamily="34" charset="0"/>
-                <a:ea typeface="Calibri" pitchFamily="34" charset="-122"/>
-                <a:cs typeface="Calibri" pitchFamily="34" charset="-120"/>
-              </a:rPr>
-              <a:t>Ejemplo: "no llueve o no hace frío"</a:t>
-            </a:r>
-            <a:endParaRPr lang="en-US" sz="1700" dirty="0"/>
-          </a:p>
-        </p:txBody>
-      </p:sp>
-      <p:sp>
-        <p:nvSpPr>
-          <p:cNvPr id="12" name="Shape 9"/>
-          <p:cNvSpPr/>
-          <p:nvPr/>
-        </p:nvSpPr>
-        <p:spPr>
-          <a:xfrm>
-            <a:off x="548640" y="4023360"/>
-            <a:ext cx="8046720" cy="548640"/>
-          </a:xfrm>
-          <a:prstGeom prst="roundRect">
-            <a:avLst>
-              <a:gd name="adj" fmla="val 20000"/>
+              <a:gd name="adj" fmla="val 10909"/>
             </a:avLst>
           </a:prstGeom>
           <a:solidFill>
@@ -6047,14 +5125,14 @@
       </p:sp>
       <p:sp>
         <p:nvSpPr>
-          <p:cNvPr id="13" name="Text 10"/>
+          <p:cNvPr id="8" name="Text 6"/>
           <p:cNvSpPr txBox="1"/>
           <p:nvPr/>
         </p:nvSpPr>
         <p:spPr>
           <a:xfrm>
-            <a:off x="822960" y="4023360"/>
-            <a:ext cx="7498080" cy="548640"/>
+            <a:off x="4754880" y="1737360"/>
+            <a:ext cx="3840480" cy="1005840"/>
           </a:xfrm>
           <a:prstGeom prst="rect">
             <a:avLst/>
@@ -6066,11 +5144,11 @@
           <a:bodyPr wrap="square" lIns="0" tIns="0" rIns="0" bIns="0" rtlCol="0" anchor="ctr"/>
           <a:lstStyle/>
           <a:p>
-            <a:pPr indent="0" marL="0">
+            <a:pPr algn="ctr" indent="0" marL="0">
               <a:buNone/>
             </a:pPr>
             <a:r>
-              <a:rPr lang="en-US" sz="1700" dirty="0">
+              <a:rPr lang="en-US" sz="2200" b="1" dirty="0">
                 <a:solidFill>
                   <a:srgbClr val="2F3E4E"/>
                 </a:solidFill>
@@ -6078,7 +5156,85 @@
                 <a:ea typeface="Calibri" pitchFamily="34" charset="-122"/>
                 <a:cs typeface="Calibri" pitchFamily="34" charset="-120"/>
               </a:rPr>
-              <a:t>Error común: la negación NO es "si no p, entonces no q".</a:t>
+              <a:t>¬(p → q) ≡ p ∧ ¬q</a:t>
+            </a:r>
+            <a:endParaRPr lang="en-US" sz="2200" dirty="0"/>
+          </a:p>
+        </p:txBody>
+      </p:sp>
+      <p:sp>
+        <p:nvSpPr>
+          <p:cNvPr id="9" name="Text 7"/>
+          <p:cNvSpPr txBox="1"/>
+          <p:nvPr/>
+        </p:nvSpPr>
+        <p:spPr>
+          <a:xfrm>
+            <a:off x="548640" y="3017520"/>
+            <a:ext cx="8046720" cy="457200"/>
+          </a:xfrm>
+          <a:prstGeom prst="rect">
+            <a:avLst/>
+          </a:prstGeom>
+          <a:noFill/>
+          <a:ln/>
+        </p:spPr>
+        <p:txBody>
+          <a:bodyPr wrap="square" lIns="0" tIns="0" rIns="0" bIns="0" rtlCol="0" anchor="t"/>
+          <a:lstStyle/>
+          <a:p>
+            <a:pPr indent="0" marL="0">
+              <a:buNone/>
+            </a:pPr>
+            <a:r>
+              <a:rPr lang="en-US" sz="1600" dirty="0">
+                <a:solidFill>
+                  <a:srgbClr val="2F3E4E"/>
+                </a:solidFill>
+                <a:latin typeface="Calibri" pitchFamily="34" charset="0"/>
+                <a:ea typeface="Calibri" pitchFamily="34" charset="-122"/>
+                <a:cs typeface="Calibri" pitchFamily="34" charset="-120"/>
+              </a:rPr>
+              <a:t>Ejemplo: "si llueve, llevo paraguas". Es falsa solo si llueve y salgo sin paraguas.</a:t>
+            </a:r>
+            <a:endParaRPr lang="en-US" sz="1600" dirty="0"/>
+          </a:p>
+        </p:txBody>
+      </p:sp>
+      <p:sp>
+        <p:nvSpPr>
+          <p:cNvPr id="10" name="Text 8"/>
+          <p:cNvSpPr txBox="1"/>
+          <p:nvPr/>
+        </p:nvSpPr>
+        <p:spPr>
+          <a:xfrm>
+            <a:off x="548640" y="3749040"/>
+            <a:ext cx="8046720" cy="457200"/>
+          </a:xfrm>
+          <a:prstGeom prst="rect">
+            <a:avLst/>
+          </a:prstGeom>
+          <a:noFill/>
+          <a:ln/>
+        </p:spPr>
+        <p:txBody>
+          <a:bodyPr wrap="square" lIns="0" tIns="0" rIns="0" bIns="0" rtlCol="0" anchor="t"/>
+          <a:lstStyle/>
+          <a:p>
+            <a:pPr indent="0" marL="0">
+              <a:buNone/>
+            </a:pPr>
+            <a:r>
+              <a:rPr lang="en-US" sz="1700" b="1" dirty="0">
+                <a:solidFill>
+                  <a:srgbClr val="2F3E4E"/>
+                </a:solidFill>
+                <a:latin typeface="Calibri" pitchFamily="34" charset="0"/>
+                <a:ea typeface="Calibri" pitchFamily="34" charset="-122"/>
+                <a:cs typeface="Calibri" pitchFamily="34" charset="-120"/>
+              </a:rPr>
+              <a:t>De Morgan:   ¬(p ∧ q) ≡ ¬p ∨ ¬q        ¬(p ∨ q) ≡ ¬p ∧ ¬q</a:t>
             </a:r>
             <a:endParaRPr lang="en-US" sz="1700" dirty="0"/>
           </a:p>
@@ -6235,63 +5391,14 @@
       </p:sp>
       <p:sp>
         <p:nvSpPr>
-          <p:cNvPr id="6" name="Shape 3"/>
-          <p:cNvSpPr/>
-          <p:nvPr/>
-        </p:nvSpPr>
-        <p:spPr>
-          <a:xfrm>
-            <a:off x="548640" y="1554480"/>
-            <a:ext cx="548640" cy="548640"/>
-          </a:xfrm>
-          <a:prstGeom prst="ellipse">
-            <a:avLst/>
-          </a:prstGeom>
-          <a:solidFill>
-            <a:srgbClr val="E39B6B"/>
-          </a:solidFill>
-          <a:ln w="12700">
-            <a:solidFill>
-              <a:srgbClr val="E39B6B"/>
-            </a:solidFill>
-            <a:prstDash val="solid"/>
-          </a:ln>
-        </p:spPr>
-      </p:sp>
-      <p:pic>
-        <p:nvPicPr>
-          <p:cNvPr id="7" name="Image 0" descr="preencoded.png">    </p:cNvPr>
-          <p:cNvPicPr>
-            <a:picLocks noChangeAspect="1"/>
-          </p:cNvPicPr>
-          <p:nvPr/>
-        </p:nvPicPr>
-        <p:blipFill>
-          <a:blip r:embed="rId1"/>
-          <a:stretch>
-            <a:fillRect/>
-          </a:stretch>
-        </p:blipFill>
-        <p:spPr>
-          <a:xfrm>
-            <a:off x="696773" y="1702613"/>
-            <a:ext cx="252374" cy="252374"/>
-          </a:xfrm>
-          <a:prstGeom prst="rect">
-            <a:avLst/>
-          </a:prstGeom>
-        </p:spPr>
-      </p:pic>
-      <p:sp>
-        <p:nvSpPr>
-          <p:cNvPr id="8" name="Text 4"/>
+          <p:cNvPr id="5" name="Text 3"/>
           <p:cNvSpPr txBox="1"/>
           <p:nvPr/>
         </p:nvSpPr>
         <p:spPr>
           <a:xfrm>
-            <a:off x="1371600" y="1554480"/>
-            <a:ext cx="7223760" cy="548640"/>
+            <a:off x="548640" y="1645920"/>
+            <a:ext cx="8046720" cy="2926080"/>
           </a:xfrm>
           <a:prstGeom prst="rect">
             <a:avLst/>
@@ -6300,11 +5407,15 @@
           <a:ln/>
         </p:spPr>
         <p:txBody>
-          <a:bodyPr wrap="square" lIns="0" tIns="0" rIns="0" bIns="0" rtlCol="0" anchor="ctr"/>
-          <a:lstStyle/>
-          <a:p>
-            <a:pPr indent="0" marL="0">
-              <a:buNone/>
+          <a:bodyPr wrap="square" lIns="0" tIns="0" rIns="0" bIns="0" rtlCol="0" anchor="t"/>
+          <a:lstStyle/>
+          <a:p>
+            <a:pPr marL="342900" indent="-342900">
+              <a:spcAft>
+                <a:spcPts val="600"/>
+              </a:spcAft>
+              <a:buSzPct val="100000"/>
+              <a:buChar char="•"/>
             </a:pPr>
             <a:r>
               <a:rPr lang="en-US" sz="1800" dirty="0">
@@ -6315,84 +5426,17 @@
                 <a:ea typeface="Calibri" pitchFamily="34" charset="-122"/>
                 <a:cs typeface="Calibri" pitchFamily="34" charset="-120"/>
               </a:rPr>
-              <a:t>Escribir 2 + 3 · 4 = 20 (las multiplicaciones van primero)</a:t>
+              <a:t>Mala distributiva con signo negativo: −a(b − c) = −ab + ac.</a:t>
             </a:r>
             <a:endParaRPr lang="en-US" sz="1800" dirty="0"/>
           </a:p>
-        </p:txBody>
-      </p:sp>
-      <p:sp>
-        <p:nvSpPr>
-          <p:cNvPr id="9" name="Shape 5"/>
-          <p:cNvSpPr/>
-          <p:nvPr/>
-        </p:nvSpPr>
-        <p:spPr>
-          <a:xfrm>
-            <a:off x="548640" y="2331720"/>
-            <a:ext cx="548640" cy="548640"/>
-          </a:xfrm>
-          <a:prstGeom prst="ellipse">
-            <a:avLst/>
-          </a:prstGeom>
-          <a:solidFill>
-            <a:srgbClr val="E39B6B"/>
-          </a:solidFill>
-          <a:ln w="12700">
-            <a:solidFill>
-              <a:srgbClr val="E39B6B"/>
-            </a:solidFill>
-            <a:prstDash val="solid"/>
-          </a:ln>
-        </p:spPr>
-      </p:sp>
-      <p:pic>
-        <p:nvPicPr>
-          <p:cNvPr id="10" name="Image 1" descr="preencoded.png">    </p:cNvPr>
-          <p:cNvPicPr>
-            <a:picLocks noChangeAspect="1"/>
-          </p:cNvPicPr>
-          <p:nvPr/>
-        </p:nvPicPr>
-        <p:blipFill>
-          <a:blip r:embed="rId2"/>
-          <a:stretch>
-            <a:fillRect/>
-          </a:stretch>
-        </p:blipFill>
-        <p:spPr>
-          <a:xfrm>
-            <a:off x="696773" y="2479853"/>
-            <a:ext cx="252374" cy="252374"/>
-          </a:xfrm>
-          <a:prstGeom prst="rect">
-            <a:avLst/>
-          </a:prstGeom>
-        </p:spPr>
-      </p:pic>
-      <p:sp>
-        <p:nvSpPr>
-          <p:cNvPr id="11" name="Text 6"/>
-          <p:cNvSpPr txBox="1"/>
-          <p:nvPr/>
-        </p:nvSpPr>
-        <p:spPr>
-          <a:xfrm>
-            <a:off x="1371600" y="2331720"/>
-            <a:ext cx="7223760" cy="548640"/>
-          </a:xfrm>
-          <a:prstGeom prst="rect">
-            <a:avLst/>
-          </a:prstGeom>
-          <a:noFill/>
-          <a:ln/>
-        </p:spPr>
-        <p:txBody>
-          <a:bodyPr wrap="square" lIns="0" tIns="0" rIns="0" bIns="0" rtlCol="0" anchor="ctr"/>
-          <a:lstStyle/>
-          <a:p>
-            <a:pPr indent="0" marL="0">
-              <a:buNone/>
+          <a:p>
+            <a:pPr marL="342900" indent="-342900">
+              <a:spcAft>
+                <a:spcPts val="600"/>
+              </a:spcAft>
+              <a:buSzPct val="100000"/>
+              <a:buChar char="•"/>
             </a:pPr>
             <a:r>
               <a:rPr lang="en-US" sz="1800" dirty="0">
@@ -6403,84 +5447,17 @@
                 <a:ea typeface="Calibri" pitchFamily="34" charset="-122"/>
                 <a:cs typeface="Calibri" pitchFamily="34" charset="-120"/>
               </a:rPr>
-              <a:t>Escribir 2(x + 3) = 2x + 3 (la distributiva multiplica todo)</a:t>
+              <a:t>Negar un condicional como ¬p → ¬q. La negación correcta es p ∧ ¬q.</a:t>
             </a:r>
             <a:endParaRPr lang="en-US" sz="1800" dirty="0"/>
           </a:p>
-        </p:txBody>
-      </p:sp>
-      <p:sp>
-        <p:nvSpPr>
-          <p:cNvPr id="12" name="Shape 7"/>
-          <p:cNvSpPr/>
-          <p:nvPr/>
-        </p:nvSpPr>
-        <p:spPr>
-          <a:xfrm>
-            <a:off x="548640" y="3108960"/>
-            <a:ext cx="548640" cy="548640"/>
-          </a:xfrm>
-          <a:prstGeom prst="ellipse">
-            <a:avLst/>
-          </a:prstGeom>
-          <a:solidFill>
-            <a:srgbClr val="E39B6B"/>
-          </a:solidFill>
-          <a:ln w="12700">
-            <a:solidFill>
-              <a:srgbClr val="E39B6B"/>
-            </a:solidFill>
-            <a:prstDash val="solid"/>
-          </a:ln>
-        </p:spPr>
-      </p:sp>
-      <p:pic>
-        <p:nvPicPr>
-          <p:cNvPr id="13" name="Image 2" descr="preencoded.png">    </p:cNvPr>
-          <p:cNvPicPr>
-            <a:picLocks noChangeAspect="1"/>
-          </p:cNvPicPr>
-          <p:nvPr/>
-        </p:nvPicPr>
-        <p:blipFill>
-          <a:blip r:embed="rId3"/>
-          <a:stretch>
-            <a:fillRect/>
-          </a:stretch>
-        </p:blipFill>
-        <p:spPr>
-          <a:xfrm>
-            <a:off x="696773" y="3257093"/>
-            <a:ext cx="252374" cy="252374"/>
-          </a:xfrm>
-          <a:prstGeom prst="rect">
-            <a:avLst/>
-          </a:prstGeom>
-        </p:spPr>
-      </p:pic>
-      <p:sp>
-        <p:nvSpPr>
-          <p:cNvPr id="14" name="Text 8"/>
-          <p:cNvSpPr txBox="1"/>
-          <p:nvPr/>
-        </p:nvSpPr>
-        <p:spPr>
-          <a:xfrm>
-            <a:off x="1371600" y="3108960"/>
-            <a:ext cx="7223760" cy="548640"/>
-          </a:xfrm>
-          <a:prstGeom prst="rect">
-            <a:avLst/>
-          </a:prstGeom>
-          <a:noFill/>
-          <a:ln/>
-        </p:spPr>
-        <p:txBody>
-          <a:bodyPr wrap="square" lIns="0" tIns="0" rIns="0" bIns="0" rtlCol="0" anchor="ctr"/>
-          <a:lstStyle/>
-          <a:p>
-            <a:pPr indent="0" marL="0">
-              <a:buNone/>
+          <a:p>
+            <a:pPr marL="342900" indent="-342900">
+              <a:spcAft>
+                <a:spcPts val="600"/>
+              </a:spcAft>
+              <a:buSzPct val="100000"/>
+              <a:buChar char="•"/>
             </a:pPr>
             <a:r>
               <a:rPr lang="en-US" sz="1800" dirty="0">
@@ -6491,84 +5468,17 @@
                 <a:ea typeface="Calibri" pitchFamily="34" charset="-122"/>
                 <a:cs typeface="Calibri" pitchFamily="34" charset="-120"/>
               </a:rPr>
-              <a:t>Cambiar solo un lado de la ecuación</a:t>
+              <a:t>Escribir a + b / c cuando se quiere (a + b) / c. Los paréntesis cambian el resultado.</a:t>
             </a:r>
             <a:endParaRPr lang="en-US" sz="1800" dirty="0"/>
           </a:p>
-        </p:txBody>
-      </p:sp>
-      <p:sp>
-        <p:nvSpPr>
-          <p:cNvPr id="15" name="Shape 9"/>
-          <p:cNvSpPr/>
-          <p:nvPr/>
-        </p:nvSpPr>
-        <p:spPr>
-          <a:xfrm>
-            <a:off x="548640" y="3886200"/>
-            <a:ext cx="548640" cy="548640"/>
-          </a:xfrm>
-          <a:prstGeom prst="ellipse">
-            <a:avLst/>
-          </a:prstGeom>
-          <a:solidFill>
-            <a:srgbClr val="E39B6B"/>
-          </a:solidFill>
-          <a:ln w="12700">
-            <a:solidFill>
-              <a:srgbClr val="E39B6B"/>
-            </a:solidFill>
-            <a:prstDash val="solid"/>
-          </a:ln>
-        </p:spPr>
-      </p:sp>
-      <p:pic>
-        <p:nvPicPr>
-          <p:cNvPr id="16" name="Image 3" descr="preencoded.png">    </p:cNvPr>
-          <p:cNvPicPr>
-            <a:picLocks noChangeAspect="1"/>
-          </p:cNvPicPr>
-          <p:nvPr/>
-        </p:nvPicPr>
-        <p:blipFill>
-          <a:blip r:embed="rId4"/>
-          <a:stretch>
-            <a:fillRect/>
-          </a:stretch>
-        </p:blipFill>
-        <p:spPr>
-          <a:xfrm>
-            <a:off x="696773" y="4034333"/>
-            <a:ext cx="252374" cy="252374"/>
-          </a:xfrm>
-          <a:prstGeom prst="rect">
-            <a:avLst/>
-          </a:prstGeom>
-        </p:spPr>
-      </p:pic>
-      <p:sp>
-        <p:nvSpPr>
-          <p:cNvPr id="17" name="Text 10"/>
-          <p:cNvSpPr txBox="1"/>
-          <p:nvPr/>
-        </p:nvSpPr>
-        <p:spPr>
-          <a:xfrm>
-            <a:off x="1371600" y="3886200"/>
-            <a:ext cx="7223760" cy="548640"/>
-          </a:xfrm>
-          <a:prstGeom prst="rect">
-            <a:avLst/>
-          </a:prstGeom>
-          <a:noFill/>
-          <a:ln/>
-        </p:spPr>
-        <p:txBody>
-          <a:bodyPr wrap="square" lIns="0" tIns="0" rIns="0" bIns="0" rtlCol="0" anchor="ctr"/>
-          <a:lstStyle/>
-          <a:p>
-            <a:pPr indent="0" marL="0">
-              <a:buNone/>
+          <a:p>
+            <a:pPr marL="342900" indent="-342900">
+              <a:spcAft>
+                <a:spcPts val="600"/>
+              </a:spcAft>
+              <a:buSzPct val="100000"/>
+              <a:buChar char="•"/>
             </a:pPr>
             <a:r>
               <a:rPr lang="en-US" sz="1800" dirty="0">
@@ -6579,7 +5489,7 @@
                 <a:ea typeface="Calibri" pitchFamily="34" charset="-122"/>
                 <a:cs typeface="Calibri" pitchFamily="34" charset="-120"/>
               </a:rPr>
-              <a:t>Confundir la negación de "si… entonces"</a:t>
+              <a:t>Leer x = x + 1 como ecuación. Es una orden: x cambia de valor.</a:t>
             </a:r>
             <a:endParaRPr lang="en-US" sz="1800" dirty="0"/>
           </a:p>
@@ -6664,8 +5574,8 @@
         </p:nvSpPr>
         <p:spPr>
           <a:xfrm>
-            <a:off x="548640" y="4754880"/>
-            <a:ext cx="8046720" cy="228600"/>
+            <a:off x="548640" y="960120"/>
+            <a:ext cx="8046720" cy="365760"/>
           </a:xfrm>
           <a:prstGeom prst="rect">
             <a:avLst/>
@@ -6681,106 +5591,30 @@
               <a:buNone/>
             </a:pPr>
             <a:r>
-              <a:rPr lang="en-US" sz="1000" dirty="0">
-                <a:solidFill>
-                  <a:srgbClr val="8A98A8"/>
+              <a:rPr lang="en-US" sz="1600" dirty="0">
+                <a:solidFill>
+                  <a:srgbClr val="5F6E80"/>
                 </a:solidFill>
                 <a:latin typeface="Calibri" pitchFamily="34" charset="0"/>
                 <a:ea typeface="Calibri" pitchFamily="34" charset="-122"/>
                 <a:cs typeface="Calibri" pitchFamily="34" charset="-120"/>
               </a:rPr>
-              <a:t>Club de programación Competitiva - BugSquad 2026</a:t>
-            </a:r>
-            <a:endParaRPr lang="en-US" sz="1000" dirty="0"/>
-          </a:p>
-        </p:txBody>
-      </p:sp>
-      <p:sp>
-        <p:nvSpPr>
-          <p:cNvPr id="5" name="Shape 2"/>
-          <p:cNvSpPr/>
-          <p:nvPr/>
-        </p:nvSpPr>
-        <p:spPr>
-          <a:xfrm>
-            <a:off x="548640" y="1554480"/>
-            <a:ext cx="1828800" cy="2743200"/>
-          </a:xfrm>
-          <a:prstGeom prst="roundRect">
-            <a:avLst>
-              <a:gd name="adj" fmla="val 6000"/>
-            </a:avLst>
-          </a:prstGeom>
-          <a:solidFill>
-            <a:srgbClr val="DDE8F3"/>
-          </a:solidFill>
-          <a:ln w="12700">
-            <a:solidFill>
-              <a:srgbClr val="DDE8F3"/>
-            </a:solidFill>
-            <a:prstDash val="solid"/>
-          </a:ln>
-        </p:spPr>
-      </p:sp>
-      <p:sp>
-        <p:nvSpPr>
-          <p:cNvPr id="6" name="Shape 3"/>
-          <p:cNvSpPr/>
-          <p:nvPr/>
-        </p:nvSpPr>
-        <p:spPr>
-          <a:xfrm>
-            <a:off x="1097280" y="1828800"/>
-            <a:ext cx="731520" cy="731520"/>
-          </a:xfrm>
-          <a:prstGeom prst="ellipse">
-            <a:avLst/>
-          </a:prstGeom>
-          <a:solidFill>
-            <a:srgbClr val="4F7CAC"/>
-          </a:solidFill>
-          <a:ln w="12700">
-            <a:solidFill>
-              <a:srgbClr val="4F7CAC"/>
-            </a:solidFill>
-            <a:prstDash val="solid"/>
-          </a:ln>
-        </p:spPr>
-      </p:sp>
-      <p:pic>
-        <p:nvPicPr>
-          <p:cNvPr id="7" name="Image 0" descr="preencoded.png">    </p:cNvPr>
-          <p:cNvPicPr>
-            <a:picLocks noChangeAspect="1"/>
-          </p:cNvPicPr>
-          <p:nvPr/>
-        </p:nvPicPr>
-        <p:blipFill>
-          <a:blip r:embed="rId1"/>
-          <a:stretch>
-            <a:fillRect/>
-          </a:stretch>
-        </p:blipFill>
-        <p:spPr>
-          <a:xfrm>
-            <a:off x="1294790" y="2026310"/>
-            <a:ext cx="336499" cy="336499"/>
-          </a:xfrm>
-          <a:prstGeom prst="rect">
-            <a:avLst/>
-          </a:prstGeom>
-        </p:spPr>
-      </p:pic>
-      <p:sp>
-        <p:nvSpPr>
-          <p:cNvPr id="8" name="Text 4"/>
+              <a:t>Variables, propiedades, ecuaciones y lógica</a:t>
+            </a:r>
+            <a:endParaRPr lang="en-US" sz="1600" dirty="0"/>
+          </a:p>
+        </p:txBody>
+      </p:sp>
+      <p:sp>
+        <p:nvSpPr>
+          <p:cNvPr id="4" name="Text 2"/>
           <p:cNvSpPr txBox="1"/>
           <p:nvPr/>
         </p:nvSpPr>
         <p:spPr>
           <a:xfrm>
-            <a:off x="731520" y="3017520"/>
-            <a:ext cx="1463040" cy="457200"/>
+            <a:off x="548640" y="4754880"/>
+            <a:ext cx="8046720" cy="228600"/>
           </a:xfrm>
           <a:prstGeom prst="rect">
             <a:avLst/>
@@ -6789,528 +5623,885 @@
           <a:ln/>
         </p:spPr>
         <p:txBody>
-          <a:bodyPr wrap="square" lIns="0" tIns="0" rIns="0" bIns="0" rtlCol="0" anchor="t"/>
-          <a:lstStyle/>
-          <a:p>
-            <a:pPr algn="ctr" indent="0" marL="0">
+          <a:bodyPr wrap="square" lIns="0" tIns="0" rIns="0" bIns="0" rtlCol="0" anchor="ctr"/>
+          <a:lstStyle/>
+          <a:p>
+            <a:pPr indent="0" marL="0">
               <a:buNone/>
             </a:pPr>
             <a:r>
-              <a:rPr lang="en-US" sz="1800" b="1" dirty="0">
-                <a:solidFill>
-                  <a:srgbClr val="2F3E4E"/>
+              <a:rPr lang="en-US" sz="1000" dirty="0">
+                <a:solidFill>
+                  <a:srgbClr val="8A98A8"/>
                 </a:solidFill>
                 <a:latin typeface="Calibri" pitchFamily="34" charset="0"/>
                 <a:ea typeface="Calibri" pitchFamily="34" charset="-122"/>
                 <a:cs typeface="Calibri" pitchFamily="34" charset="-120"/>
               </a:rPr>
-              <a:t>Variables</a:t>
-            </a:r>
-            <a:endParaRPr lang="en-US" sz="1800" dirty="0"/>
-          </a:p>
-        </p:txBody>
-      </p:sp>
-      <p:sp>
-        <p:nvSpPr>
-          <p:cNvPr id="9" name="Text 5"/>
-          <p:cNvSpPr txBox="1"/>
-          <p:nvPr/>
-        </p:nvSpPr>
-        <p:spPr>
-          <a:xfrm>
-            <a:off x="731520" y="3474720"/>
-            <a:ext cx="1463040" cy="731520"/>
-          </a:xfrm>
-          <a:prstGeom prst="rect">
-            <a:avLst/>
-          </a:prstGeom>
-          <a:noFill/>
-          <a:ln/>
-        </p:spPr>
-        <p:txBody>
-          <a:bodyPr wrap="square" lIns="0" tIns="0" rIns="0" bIns="0" rtlCol="0" anchor="t"/>
-          <a:lstStyle/>
-          <a:p>
-            <a:pPr algn="ctr" indent="0" marL="0">
-              <a:buNone/>
-            </a:pPr>
-            <a:r>
-              <a:rPr lang="en-US" sz="1300" dirty="0">
-                <a:solidFill>
-                  <a:srgbClr val="5F6E80"/>
-                </a:solidFill>
-                <a:latin typeface="Calibri" pitchFamily="34" charset="0"/>
-                <a:ea typeface="Calibri" pitchFamily="34" charset="-122"/>
-                <a:cs typeface="Calibri" pitchFamily="34" charset="-120"/>
-              </a:rPr>
-              <a:t>Evaluar y sustituir</a:t>
-            </a:r>
-            <a:endParaRPr lang="en-US" sz="1300" dirty="0"/>
-          </a:p>
-        </p:txBody>
-      </p:sp>
-      <p:sp>
-        <p:nvSpPr>
-          <p:cNvPr id="10" name="Shape 6"/>
-          <p:cNvSpPr/>
-          <p:nvPr/>
-        </p:nvSpPr>
-        <p:spPr>
-          <a:xfrm>
-            <a:off x="2587752" y="1554480"/>
-            <a:ext cx="1828800" cy="2743200"/>
-          </a:xfrm>
-          <a:prstGeom prst="roundRect">
-            <a:avLst>
-              <a:gd name="adj" fmla="val 6000"/>
-            </a:avLst>
-          </a:prstGeom>
-          <a:solidFill>
-            <a:srgbClr val="E1F0E7"/>
-          </a:solidFill>
-          <a:ln w="12700">
-            <a:solidFill>
-              <a:srgbClr val="E1F0E7"/>
-            </a:solidFill>
-            <a:prstDash val="solid"/>
-          </a:ln>
-        </p:spPr>
-      </p:sp>
-      <p:sp>
-        <p:nvSpPr>
-          <p:cNvPr id="11" name="Shape 7"/>
-          <p:cNvSpPr/>
-          <p:nvPr/>
-        </p:nvSpPr>
-        <p:spPr>
-          <a:xfrm>
-            <a:off x="3136392" y="1828800"/>
-            <a:ext cx="731520" cy="731520"/>
-          </a:xfrm>
-          <a:prstGeom prst="ellipse">
-            <a:avLst/>
-          </a:prstGeom>
-          <a:solidFill>
-            <a:srgbClr val="6FA287"/>
-          </a:solidFill>
-          <a:ln w="12700">
-            <a:solidFill>
-              <a:srgbClr val="6FA287"/>
-            </a:solidFill>
-            <a:prstDash val="solid"/>
-          </a:ln>
-        </p:spPr>
-      </p:sp>
-      <p:pic>
-        <p:nvPicPr>
-          <p:cNvPr id="12" name="Image 1" descr="preencoded.png">    </p:cNvPr>
-          <p:cNvPicPr>
-            <a:picLocks noChangeAspect="1"/>
-          </p:cNvPicPr>
-          <p:nvPr/>
-        </p:nvPicPr>
-        <p:blipFill>
-          <a:blip r:embed="rId2"/>
-          <a:stretch>
-            <a:fillRect/>
-          </a:stretch>
-        </p:blipFill>
-        <p:spPr>
-          <a:xfrm>
-            <a:off x="3333902" y="2026310"/>
-            <a:ext cx="336499" cy="336499"/>
-          </a:xfrm>
-          <a:prstGeom prst="rect">
-            <a:avLst/>
-          </a:prstGeom>
-        </p:spPr>
-      </p:pic>
-      <p:sp>
-        <p:nvSpPr>
-          <p:cNvPr id="13" name="Text 8"/>
-          <p:cNvSpPr txBox="1"/>
-          <p:nvPr/>
-        </p:nvSpPr>
-        <p:spPr>
-          <a:xfrm>
-            <a:off x="2770632" y="3017520"/>
-            <a:ext cx="1463040" cy="457200"/>
-          </a:xfrm>
-          <a:prstGeom prst="rect">
-            <a:avLst/>
-          </a:prstGeom>
-          <a:noFill/>
-          <a:ln/>
-        </p:spPr>
-        <p:txBody>
-          <a:bodyPr wrap="square" lIns="0" tIns="0" rIns="0" bIns="0" rtlCol="0" anchor="t"/>
-          <a:lstStyle/>
-          <a:p>
-            <a:pPr algn="ctr" indent="0" marL="0">
-              <a:buNone/>
-            </a:pPr>
-            <a:r>
-              <a:rPr lang="en-US" sz="1800" b="1" dirty="0">
-                <a:solidFill>
-                  <a:srgbClr val="2F3E4E"/>
-                </a:solidFill>
-                <a:latin typeface="Calibri" pitchFamily="34" charset="0"/>
-                <a:ea typeface="Calibri" pitchFamily="34" charset="-122"/>
-                <a:cs typeface="Calibri" pitchFamily="34" charset="-120"/>
-              </a:rPr>
-              <a:t>Propiedades</a:t>
-            </a:r>
-            <a:endParaRPr lang="en-US" sz="1800" dirty="0"/>
-          </a:p>
-        </p:txBody>
-      </p:sp>
-      <p:sp>
-        <p:nvSpPr>
-          <p:cNvPr id="14" name="Text 9"/>
-          <p:cNvSpPr txBox="1"/>
-          <p:nvPr/>
-        </p:nvSpPr>
-        <p:spPr>
-          <a:xfrm>
-            <a:off x="2770632" y="3474720"/>
-            <a:ext cx="1463040" cy="731520"/>
-          </a:xfrm>
-          <a:prstGeom prst="rect">
-            <a:avLst/>
-          </a:prstGeom>
-          <a:noFill/>
-          <a:ln/>
-        </p:spPr>
-        <p:txBody>
-          <a:bodyPr wrap="square" lIns="0" tIns="0" rIns="0" bIns="0" rtlCol="0" anchor="t"/>
-          <a:lstStyle/>
-          <a:p>
-            <a:pPr algn="ctr" indent="0" marL="0">
-              <a:buNone/>
-            </a:pPr>
-            <a:r>
-              <a:rPr lang="en-US" sz="1300" dirty="0">
-                <a:solidFill>
-                  <a:srgbClr val="5F6E80"/>
-                </a:solidFill>
-                <a:latin typeface="Calibri" pitchFamily="34" charset="0"/>
-                <a:ea typeface="Calibri" pitchFamily="34" charset="-122"/>
-                <a:cs typeface="Calibri" pitchFamily="34" charset="-120"/>
-              </a:rPr>
-              <a:t>Conmutativa, asociativa, distributiva</a:t>
-            </a:r>
-            <a:endParaRPr lang="en-US" sz="1300" dirty="0"/>
-          </a:p>
-        </p:txBody>
-      </p:sp>
-      <p:sp>
-        <p:nvSpPr>
-          <p:cNvPr id="15" name="Shape 10"/>
-          <p:cNvSpPr/>
-          <p:nvPr/>
-        </p:nvSpPr>
-        <p:spPr>
-          <a:xfrm>
-            <a:off x="4626864" y="1554480"/>
-            <a:ext cx="1828800" cy="2743200"/>
-          </a:xfrm>
-          <a:prstGeom prst="roundRect">
-            <a:avLst>
-              <a:gd name="adj" fmla="val 6000"/>
-            </a:avLst>
-          </a:prstGeom>
-          <a:solidFill>
-            <a:srgbClr val="FBEADC"/>
-          </a:solidFill>
-          <a:ln w="12700">
-            <a:solidFill>
-              <a:srgbClr val="FBEADC"/>
-            </a:solidFill>
-            <a:prstDash val="solid"/>
-          </a:ln>
-        </p:spPr>
-      </p:sp>
-      <p:sp>
-        <p:nvSpPr>
-          <p:cNvPr id="16" name="Shape 11"/>
-          <p:cNvSpPr/>
-          <p:nvPr/>
-        </p:nvSpPr>
-        <p:spPr>
-          <a:xfrm>
-            <a:off x="5175504" y="1828800"/>
-            <a:ext cx="731520" cy="731520"/>
-          </a:xfrm>
-          <a:prstGeom prst="ellipse">
-            <a:avLst/>
-          </a:prstGeom>
-          <a:solidFill>
-            <a:srgbClr val="E39B6B"/>
-          </a:solidFill>
-          <a:ln w="12700">
-            <a:solidFill>
-              <a:srgbClr val="E39B6B"/>
-            </a:solidFill>
-            <a:prstDash val="solid"/>
-          </a:ln>
-        </p:spPr>
-      </p:sp>
-      <p:pic>
-        <p:nvPicPr>
-          <p:cNvPr id="17" name="Image 2" descr="preencoded.png">    </p:cNvPr>
-          <p:cNvPicPr>
-            <a:picLocks noChangeAspect="1"/>
-          </p:cNvPicPr>
-          <p:nvPr/>
-        </p:nvPicPr>
-        <p:blipFill>
-          <a:blip r:embed="rId3"/>
-          <a:stretch>
-            <a:fillRect/>
-          </a:stretch>
-        </p:blipFill>
-        <p:spPr>
-          <a:xfrm>
-            <a:off x="5373014" y="2026310"/>
-            <a:ext cx="336499" cy="336499"/>
-          </a:xfrm>
-          <a:prstGeom prst="rect">
-            <a:avLst/>
-          </a:prstGeom>
-        </p:spPr>
-      </p:pic>
-      <p:sp>
-        <p:nvSpPr>
-          <p:cNvPr id="18" name="Text 12"/>
-          <p:cNvSpPr txBox="1"/>
-          <p:nvPr/>
-        </p:nvSpPr>
-        <p:spPr>
-          <a:xfrm>
-            <a:off x="4809744" y="3017520"/>
-            <a:ext cx="1463040" cy="457200"/>
-          </a:xfrm>
-          <a:prstGeom prst="rect">
-            <a:avLst/>
-          </a:prstGeom>
-          <a:noFill/>
-          <a:ln/>
-        </p:spPr>
-        <p:txBody>
-          <a:bodyPr wrap="square" lIns="0" tIns="0" rIns="0" bIns="0" rtlCol="0" anchor="t"/>
-          <a:lstStyle/>
-          <a:p>
-            <a:pPr algn="ctr" indent="0" marL="0">
-              <a:buNone/>
-            </a:pPr>
-            <a:r>
-              <a:rPr lang="en-US" sz="1800" b="1" dirty="0">
-                <a:solidFill>
-                  <a:srgbClr val="2F3E4E"/>
-                </a:solidFill>
-                <a:latin typeface="Calibri" pitchFamily="34" charset="0"/>
-                <a:ea typeface="Calibri" pitchFamily="34" charset="-122"/>
-                <a:cs typeface="Calibri" pitchFamily="34" charset="-120"/>
-              </a:rPr>
-              <a:t>Ecuaciones</a:t>
-            </a:r>
-            <a:endParaRPr lang="en-US" sz="1800" dirty="0"/>
-          </a:p>
-        </p:txBody>
-      </p:sp>
-      <p:sp>
-        <p:nvSpPr>
-          <p:cNvPr id="19" name="Text 13"/>
-          <p:cNvSpPr txBox="1"/>
-          <p:nvPr/>
-        </p:nvSpPr>
-        <p:spPr>
-          <a:xfrm>
-            <a:off x="4809744" y="3474720"/>
-            <a:ext cx="1463040" cy="731520"/>
-          </a:xfrm>
-          <a:prstGeom prst="rect">
-            <a:avLst/>
-          </a:prstGeom>
-          <a:noFill/>
-          <a:ln/>
-        </p:spPr>
-        <p:txBody>
-          <a:bodyPr wrap="square" lIns="0" tIns="0" rIns="0" bIns="0" rtlCol="0" anchor="t"/>
-          <a:lstStyle/>
-          <a:p>
-            <a:pPr algn="ctr" indent="0" marL="0">
-              <a:buNone/>
-            </a:pPr>
-            <a:r>
-              <a:rPr lang="en-US" sz="1300" dirty="0">
-                <a:solidFill>
-                  <a:srgbClr val="5F6E80"/>
-                </a:solidFill>
-                <a:latin typeface="Calibri" pitchFamily="34" charset="0"/>
-                <a:ea typeface="Calibri" pitchFamily="34" charset="-122"/>
-                <a:cs typeface="Calibri" pitchFamily="34" charset="-120"/>
-              </a:rPr>
-              <a:t>Comprueba siempre</a:t>
-            </a:r>
-            <a:endParaRPr lang="en-US" sz="1300" dirty="0"/>
-          </a:p>
-        </p:txBody>
-      </p:sp>
-      <p:sp>
-        <p:nvSpPr>
-          <p:cNvPr id="20" name="Shape 14"/>
-          <p:cNvSpPr/>
-          <p:nvPr/>
-        </p:nvSpPr>
-        <p:spPr>
-          <a:xfrm>
-            <a:off x="6665976" y="1554480"/>
-            <a:ext cx="1828800" cy="2743200"/>
-          </a:xfrm>
-          <a:prstGeom prst="roundRect">
-            <a:avLst>
-              <a:gd name="adj" fmla="val 6000"/>
-            </a:avLst>
-          </a:prstGeom>
-          <a:solidFill>
-            <a:srgbClr val="ECE8F6"/>
-          </a:solidFill>
-          <a:ln w="12700">
-            <a:solidFill>
-              <a:srgbClr val="ECE8F6"/>
-            </a:solidFill>
-            <a:prstDash val="solid"/>
-          </a:ln>
-        </p:spPr>
-      </p:sp>
-      <p:sp>
-        <p:nvSpPr>
-          <p:cNvPr id="21" name="Shape 15"/>
-          <p:cNvSpPr/>
-          <p:nvPr/>
-        </p:nvSpPr>
-        <p:spPr>
-          <a:xfrm>
-            <a:off x="7214616" y="1828800"/>
-            <a:ext cx="731520" cy="731520"/>
-          </a:xfrm>
-          <a:prstGeom prst="ellipse">
-            <a:avLst/>
-          </a:prstGeom>
-          <a:solidFill>
-            <a:srgbClr val="8E7FBF"/>
-          </a:solidFill>
-          <a:ln w="12700">
-            <a:solidFill>
-              <a:srgbClr val="8E7FBF"/>
-            </a:solidFill>
-            <a:prstDash val="solid"/>
-          </a:ln>
-        </p:spPr>
-      </p:sp>
-      <p:pic>
-        <p:nvPicPr>
-          <p:cNvPr id="22" name="Image 3" descr="preencoded.png">    </p:cNvPr>
-          <p:cNvPicPr>
-            <a:picLocks noChangeAspect="1"/>
-          </p:cNvPicPr>
-          <p:nvPr/>
-        </p:nvPicPr>
-        <p:blipFill>
-          <a:blip r:embed="rId4"/>
-          <a:stretch>
-            <a:fillRect/>
-          </a:stretch>
-        </p:blipFill>
-        <p:spPr>
-          <a:xfrm>
-            <a:off x="7412126" y="2026310"/>
-            <a:ext cx="336499" cy="336499"/>
-          </a:xfrm>
-          <a:prstGeom prst="rect">
-            <a:avLst/>
-          </a:prstGeom>
-        </p:spPr>
-      </p:pic>
-      <p:sp>
-        <p:nvSpPr>
-          <p:cNvPr id="23" name="Text 16"/>
-          <p:cNvSpPr txBox="1"/>
-          <p:nvPr/>
-        </p:nvSpPr>
-        <p:spPr>
-          <a:xfrm>
-            <a:off x="6848856" y="3017520"/>
-            <a:ext cx="1463040" cy="457200"/>
-          </a:xfrm>
-          <a:prstGeom prst="rect">
-            <a:avLst/>
-          </a:prstGeom>
-          <a:noFill/>
-          <a:ln/>
-        </p:spPr>
-        <p:txBody>
-          <a:bodyPr wrap="square" lIns="0" tIns="0" rIns="0" bIns="0" rtlCol="0" anchor="t"/>
-          <a:lstStyle/>
-          <a:p>
-            <a:pPr algn="ctr" indent="0" marL="0">
-              <a:buNone/>
-            </a:pPr>
-            <a:r>
-              <a:rPr lang="en-US" sz="1800" b="1" dirty="0">
-                <a:solidFill>
-                  <a:srgbClr val="2F3E4E"/>
-                </a:solidFill>
-                <a:latin typeface="Calibri" pitchFamily="34" charset="0"/>
-                <a:ea typeface="Calibri" pitchFamily="34" charset="-122"/>
-                <a:cs typeface="Calibri" pitchFamily="34" charset="-120"/>
-              </a:rPr>
-              <a:t>Lógica</a:t>
-            </a:r>
-            <a:endParaRPr lang="en-US" sz="1800" dirty="0"/>
-          </a:p>
-        </p:txBody>
-      </p:sp>
-      <p:sp>
-        <p:nvSpPr>
-          <p:cNvPr id="24" name="Text 17"/>
-          <p:cNvSpPr txBox="1"/>
-          <p:nvPr/>
-        </p:nvSpPr>
-        <p:spPr>
-          <a:xfrm>
-            <a:off x="6848856" y="3474720"/>
-            <a:ext cx="1463040" cy="731520"/>
-          </a:xfrm>
-          <a:prstGeom prst="rect">
-            <a:avLst/>
-          </a:prstGeom>
-          <a:noFill/>
-          <a:ln/>
-        </p:spPr>
-        <p:txBody>
-          <a:bodyPr wrap="square" lIns="0" tIns="0" rIns="0" bIns="0" rtlCol="0" anchor="t"/>
-          <a:lstStyle/>
-          <a:p>
-            <a:pPr algn="ctr" indent="0" marL="0">
-              <a:buNone/>
-            </a:pPr>
-            <a:r>
-              <a:rPr lang="en-US" sz="1300" dirty="0">
-                <a:solidFill>
-                  <a:srgbClr val="5F6E80"/>
-                </a:solidFill>
-                <a:latin typeface="Calibri" pitchFamily="34" charset="0"/>
-                <a:ea typeface="Calibri" pitchFamily="34" charset="-122"/>
-                <a:cs typeface="Calibri" pitchFamily="34" charset="-120"/>
-              </a:rPr>
-              <a:t>Y, O, NO, si… entonces</a:t>
-            </a:r>
-            <a:endParaRPr lang="en-US" sz="1300" dirty="0"/>
-          </a:p>
-        </p:txBody>
-      </p:sp>
+              <a:t>Club de programación Competitiva - BugSquad 2026</a:t>
+            </a:r>
+            <a:endParaRPr lang="en-US" sz="1000" dirty="0"/>
+          </a:p>
+        </p:txBody>
+      </p:sp>
+      <p:graphicFrame>
+        <p:nvGraphicFramePr>
+          <p:cNvPr id="15" name="Table 0"/>
+          <p:cNvGraphicFramePr>
+            <a:graphicFrameLocks noGrp="1"/>
+          </p:cNvGraphicFramePr>
+          <p:nvPr>
+            <p:extLst>
+              <p:ext uri="{D42A27DB-BD31-4B8C-83A1-F6EECF244321}">
+                <p14:modId xmlns:p14="http://schemas.microsoft.com/office/powerpoint/2010/main" val="1579011935"/>
+              </p:ext>
+            </p:extLst>
+          </p:nvPr>
+        </p:nvGraphicFramePr>
+        <p:xfrm>
+          <a:off x="548640" y="1554480"/>
+          <a:ext cx="8046720" cy="914400"/>
+        </p:xfrm>
+        <a:graphic>
+          <a:graphicData uri="http://schemas.openxmlformats.org/drawingml/2006/table">
+            <a:tbl>
+              <a:tblPr/>
+              <a:tblGrid>
+                <a:gridCol w="2560320"/>
+                <a:gridCol w="5486400"/>
+              </a:tblGrid>
+              <a:tr h="411480">
+                <a:tc>
+                  <a:txBody>
+                    <a:bodyPr/>
+                    <a:lstStyle/>
+                    <a:p>
+                      <a:pPr algn="ctr" indent="0" marL="0">
+                        <a:buNone/>
+                      </a:pPr>
+                      <a:r>
+                        <a:rPr lang="en-US" sz="1500" b="1" dirty="0">
+                          <a:solidFill>
+                            <a:srgbClr val="FFFFFF"/>
+                          </a:solidFill>
+                          <a:latin typeface="Calibri" pitchFamily="34" charset="0"/>
+                          <a:ea typeface="Calibri" pitchFamily="34" charset="-122"/>
+                          <a:cs typeface="Calibri" pitchFamily="34" charset="-120"/>
+                        </a:rPr>
+                        <a:t>Tema</a:t>
+                      </a:r>
+                      <a:endParaRPr lang="en-US" sz="1500" dirty="0">
+                        <a:latin typeface="Calibri" charset="0"/>
+                        <a:ea typeface="Calibri" charset="0"/>
+                        <a:cs typeface="Calibri" charset="0"/>
+                      </a:endParaRPr>
+                    </a:p>
+                  </a:txBody>
+                  <a:tcPr marL="91440" marR="91440" marT="45720" marB="45720" anchor="ctr">
+                    <a:lnL w="9525" cap="flat" cmpd="sng" algn="ctr">
+                      <a:solidFill>
+                        <a:srgbClr val="C9D5E2"/>
+                      </a:solidFill>
+                      <a:prstDash val="solid"/>
+                      <a:round/>
+                      <a:headEnd type="none" w="med" len="med"/>
+                      <a:tailEnd type="none" w="med" len="med"/>
+                    </a:lnL>
+                    <a:lnR w="9525" cap="flat" cmpd="sng" algn="ctr">
+                      <a:solidFill>
+                        <a:srgbClr val="C9D5E2"/>
+                      </a:solidFill>
+                      <a:prstDash val="solid"/>
+                      <a:round/>
+                      <a:headEnd type="none" w="med" len="med"/>
+                      <a:tailEnd type="none" w="med" len="med"/>
+                    </a:lnR>
+                    <a:lnT w="9525" cap="flat" cmpd="sng" algn="ctr">
+                      <a:solidFill>
+                        <a:srgbClr val="C9D5E2"/>
+                      </a:solidFill>
+                      <a:prstDash val="solid"/>
+                      <a:round/>
+                      <a:headEnd type="none" w="med" len="med"/>
+                      <a:tailEnd type="none" w="med" len="med"/>
+                    </a:lnT>
+                    <a:lnB w="9525" cap="flat" cmpd="sng" algn="ctr">
+                      <a:solidFill>
+                        <a:srgbClr val="C9D5E2"/>
+                      </a:solidFill>
+                      <a:prstDash val="solid"/>
+                      <a:round/>
+                      <a:headEnd type="none" w="med" len="med"/>
+                      <a:tailEnd type="none" w="med" len="med"/>
+                    </a:lnB>
+                    <a:solidFill>
+                      <a:srgbClr val="4F7CAC"/>
+                    </a:solidFill>
+                  </a:tcPr>
+                </a:tc>
+                <a:tc>
+                  <a:txBody>
+                    <a:bodyPr/>
+                    <a:lstStyle/>
+                    <a:p>
+                      <a:pPr algn="ctr" indent="0" marL="0">
+                        <a:buNone/>
+                      </a:pPr>
+                      <a:r>
+                        <a:rPr lang="en-US" sz="1500" b="1" dirty="0">
+                          <a:solidFill>
+                            <a:srgbClr val="FFFFFF"/>
+                          </a:solidFill>
+                          <a:latin typeface="Calibri" pitchFamily="34" charset="0"/>
+                          <a:ea typeface="Calibri" pitchFamily="34" charset="-122"/>
+                          <a:cs typeface="Calibri" pitchFamily="34" charset="-120"/>
+                        </a:rPr>
+                        <a:t>Idea clave</a:t>
+                      </a:r>
+                      <a:endParaRPr lang="en-US" sz="1500" dirty="0">
+                        <a:latin typeface="Calibri" charset="0"/>
+                        <a:ea typeface="Calibri" charset="0"/>
+                        <a:cs typeface="Calibri" charset="0"/>
+                      </a:endParaRPr>
+                    </a:p>
+                  </a:txBody>
+                  <a:tcPr marL="91440" marR="91440" marT="45720" marB="45720" anchor="ctr">
+                    <a:lnL w="9525" cap="flat" cmpd="sng" algn="ctr">
+                      <a:solidFill>
+                        <a:srgbClr val="C9D5E2"/>
+                      </a:solidFill>
+                      <a:prstDash val="solid"/>
+                      <a:round/>
+                      <a:headEnd type="none" w="med" len="med"/>
+                      <a:tailEnd type="none" w="med" len="med"/>
+                    </a:lnL>
+                    <a:lnR w="9525" cap="flat" cmpd="sng" algn="ctr">
+                      <a:solidFill>
+                        <a:srgbClr val="C9D5E2"/>
+                      </a:solidFill>
+                      <a:prstDash val="solid"/>
+                      <a:round/>
+                      <a:headEnd type="none" w="med" len="med"/>
+                      <a:tailEnd type="none" w="med" len="med"/>
+                    </a:lnR>
+                    <a:lnT w="9525" cap="flat" cmpd="sng" algn="ctr">
+                      <a:solidFill>
+                        <a:srgbClr val="C9D5E2"/>
+                      </a:solidFill>
+                      <a:prstDash val="solid"/>
+                      <a:round/>
+                      <a:headEnd type="none" w="med" len="med"/>
+                      <a:tailEnd type="none" w="med" len="med"/>
+                    </a:lnT>
+                    <a:lnB w="9525" cap="flat" cmpd="sng" algn="ctr">
+                      <a:solidFill>
+                        <a:srgbClr val="C9D5E2"/>
+                      </a:solidFill>
+                      <a:prstDash val="solid"/>
+                      <a:round/>
+                      <a:headEnd type="none" w="med" len="med"/>
+                      <a:tailEnd type="none" w="med" len="med"/>
+                    </a:lnB>
+                    <a:solidFill>
+                      <a:srgbClr val="4F7CAC"/>
+                    </a:solidFill>
+                  </a:tcPr>
+                </a:tc>
+              </a:tr>
+              <a:tr h="411480">
+                <a:tc>
+                  <a:txBody>
+                    <a:bodyPr/>
+                    <a:lstStyle/>
+                    <a:p>
+                      <a:pPr algn="ctr" indent="0" marL="0">
+                        <a:buNone/>
+                      </a:pPr>
+                      <a:r>
+                        <a:rPr lang="en-US" sz="1500" dirty="0">
+                          <a:solidFill>
+                            <a:srgbClr val="2F3E4E"/>
+                          </a:solidFill>
+                          <a:latin typeface="Calibri" pitchFamily="34" charset="0"/>
+                          <a:ea typeface="Calibri" pitchFamily="34" charset="-122"/>
+                          <a:cs typeface="Calibri" pitchFamily="34" charset="-120"/>
+                        </a:rPr>
+                        <a:t>Variables y expresiones</a:t>
+                      </a:r>
+                      <a:endParaRPr lang="en-US" sz="1500" dirty="0">
+                        <a:latin typeface="Calibri" charset="0"/>
+                        <a:ea typeface="Calibri" charset="0"/>
+                        <a:cs typeface="Calibri" charset="0"/>
+                      </a:endParaRPr>
+                    </a:p>
+                  </a:txBody>
+                  <a:tcPr marL="91440" marR="91440" marT="45720" marB="45720" anchor="ctr">
+                    <a:lnL w="9525" cap="flat" cmpd="sng" algn="ctr">
+                      <a:solidFill>
+                        <a:srgbClr val="C9D5E2"/>
+                      </a:solidFill>
+                      <a:prstDash val="solid"/>
+                      <a:round/>
+                      <a:headEnd type="none" w="med" len="med"/>
+                      <a:tailEnd type="none" w="med" len="med"/>
+                    </a:lnL>
+                    <a:lnR w="9525" cap="flat" cmpd="sng" algn="ctr">
+                      <a:solidFill>
+                        <a:srgbClr val="C9D5E2"/>
+                      </a:solidFill>
+                      <a:prstDash val="solid"/>
+                      <a:round/>
+                      <a:headEnd type="none" w="med" len="med"/>
+                      <a:tailEnd type="none" w="med" len="med"/>
+                    </a:lnR>
+                    <a:lnT w="9525" cap="flat" cmpd="sng" algn="ctr">
+                      <a:solidFill>
+                        <a:srgbClr val="C9D5E2"/>
+                      </a:solidFill>
+                      <a:prstDash val="solid"/>
+                      <a:round/>
+                      <a:headEnd type="none" w="med" len="med"/>
+                      <a:tailEnd type="none" w="med" len="med"/>
+                    </a:lnT>
+                    <a:lnB w="9525" cap="flat" cmpd="sng" algn="ctr">
+                      <a:solidFill>
+                        <a:srgbClr val="C9D5E2"/>
+                      </a:solidFill>
+                      <a:prstDash val="solid"/>
+                      <a:round/>
+                      <a:headEnd type="none" w="med" len="med"/>
+                      <a:tailEnd type="none" w="med" len="med"/>
+                    </a:lnB>
+                    <a:solidFill>
+                      <a:srgbClr val="FFFFFF"/>
+                    </a:solidFill>
+                  </a:tcPr>
+                </a:tc>
+                <a:tc>
+                  <a:txBody>
+                    <a:bodyPr/>
+                    <a:lstStyle/>
+                    <a:p>
+                      <a:pPr algn="ctr" indent="0" marL="0">
+                        <a:buNone/>
+                      </a:pPr>
+                      <a:r>
+                        <a:rPr lang="en-US" sz="1500" dirty="0">
+                          <a:solidFill>
+                            <a:srgbClr val="2F3E4E"/>
+                          </a:solidFill>
+                          <a:latin typeface="Calibri" pitchFamily="34" charset="0"/>
+                          <a:ea typeface="Calibri" pitchFamily="34" charset="-122"/>
+                          <a:cs typeface="Calibri" pitchFamily="34" charset="-120"/>
+                        </a:rPr>
+                        <a:t>Término, coeficiente y constante; orden de operaciones</a:t>
+                      </a:r>
+                      <a:endParaRPr lang="en-US" sz="1500" dirty="0">
+                        <a:latin typeface="Calibri" charset="0"/>
+                        <a:ea typeface="Calibri" charset="0"/>
+                        <a:cs typeface="Calibri" charset="0"/>
+                      </a:endParaRPr>
+                    </a:p>
+                  </a:txBody>
+                  <a:tcPr marL="91440" marR="91440" marT="45720" marB="45720" anchor="ctr">
+                    <a:lnL w="9525" cap="flat" cmpd="sng" algn="ctr">
+                      <a:solidFill>
+                        <a:srgbClr val="C9D5E2"/>
+                      </a:solidFill>
+                      <a:prstDash val="solid"/>
+                      <a:round/>
+                      <a:headEnd type="none" w="med" len="med"/>
+                      <a:tailEnd type="none" w="med" len="med"/>
+                    </a:lnL>
+                    <a:lnR w="9525" cap="flat" cmpd="sng" algn="ctr">
+                      <a:solidFill>
+                        <a:srgbClr val="C9D5E2"/>
+                      </a:solidFill>
+                      <a:prstDash val="solid"/>
+                      <a:round/>
+                      <a:headEnd type="none" w="med" len="med"/>
+                      <a:tailEnd type="none" w="med" len="med"/>
+                    </a:lnR>
+                    <a:lnT w="9525" cap="flat" cmpd="sng" algn="ctr">
+                      <a:solidFill>
+                        <a:srgbClr val="C9D5E2"/>
+                      </a:solidFill>
+                      <a:prstDash val="solid"/>
+                      <a:round/>
+                      <a:headEnd type="none" w="med" len="med"/>
+                      <a:tailEnd type="none" w="med" len="med"/>
+                    </a:lnT>
+                    <a:lnB w="9525" cap="flat" cmpd="sng" algn="ctr">
+                      <a:solidFill>
+                        <a:srgbClr val="C9D5E2"/>
+                      </a:solidFill>
+                      <a:prstDash val="solid"/>
+                      <a:round/>
+                      <a:headEnd type="none" w="med" len="med"/>
+                      <a:tailEnd type="none" w="med" len="med"/>
+                    </a:lnB>
+                    <a:solidFill>
+                      <a:srgbClr val="FFFFFF"/>
+                    </a:solidFill>
+                  </a:tcPr>
+                </a:tc>
+              </a:tr>
+              <a:tr h="411480">
+                <a:tc>
+                  <a:txBody>
+                    <a:bodyPr/>
+                    <a:lstStyle/>
+                    <a:p>
+                      <a:pPr algn="ctr" indent="0" marL="0">
+                        <a:buNone/>
+                      </a:pPr>
+                      <a:r>
+                        <a:rPr lang="en-US" sz="1500" dirty="0">
+                          <a:solidFill>
+                            <a:srgbClr val="2F3E4E"/>
+                          </a:solidFill>
+                          <a:latin typeface="Calibri" pitchFamily="34" charset="0"/>
+                          <a:ea typeface="Calibri" pitchFamily="34" charset="-122"/>
+                          <a:cs typeface="Calibri" pitchFamily="34" charset="-120"/>
+                        </a:rPr>
+                        <a:t>Igualdad y asignación</a:t>
+                      </a:r>
+                      <a:endParaRPr lang="en-US" sz="1500" dirty="0">
+                        <a:latin typeface="Calibri" charset="0"/>
+                        <a:ea typeface="Calibri" charset="0"/>
+                        <a:cs typeface="Calibri" charset="0"/>
+                      </a:endParaRPr>
+                    </a:p>
+                  </a:txBody>
+                  <a:tcPr marL="91440" marR="91440" marT="45720" marB="45720" anchor="ctr">
+                    <a:lnL w="9525" cap="flat" cmpd="sng" algn="ctr">
+                      <a:solidFill>
+                        <a:srgbClr val="C9D5E2"/>
+                      </a:solidFill>
+                      <a:prstDash val="solid"/>
+                      <a:round/>
+                      <a:headEnd type="none" w="med" len="med"/>
+                      <a:tailEnd type="none" w="med" len="med"/>
+                    </a:lnL>
+                    <a:lnR w="9525" cap="flat" cmpd="sng" algn="ctr">
+                      <a:solidFill>
+                        <a:srgbClr val="C9D5E2"/>
+                      </a:solidFill>
+                      <a:prstDash val="solid"/>
+                      <a:round/>
+                      <a:headEnd type="none" w="med" len="med"/>
+                      <a:tailEnd type="none" w="med" len="med"/>
+                    </a:lnR>
+                    <a:lnT w="9525" cap="flat" cmpd="sng" algn="ctr">
+                      <a:solidFill>
+                        <a:srgbClr val="C9D5E2"/>
+                      </a:solidFill>
+                      <a:prstDash val="solid"/>
+                      <a:round/>
+                      <a:headEnd type="none" w="med" len="med"/>
+                      <a:tailEnd type="none" w="med" len="med"/>
+                    </a:lnT>
+                    <a:lnB w="9525" cap="flat" cmpd="sng" algn="ctr">
+                      <a:solidFill>
+                        <a:srgbClr val="C9D5E2"/>
+                      </a:solidFill>
+                      <a:prstDash val="solid"/>
+                      <a:round/>
+                      <a:headEnd type="none" w="med" len="med"/>
+                      <a:tailEnd type="none" w="med" len="med"/>
+                    </a:lnB>
+                    <a:solidFill>
+                      <a:srgbClr val="EEF3F8"/>
+                    </a:solidFill>
+                  </a:tcPr>
+                </a:tc>
+                <a:tc>
+                  <a:txBody>
+                    <a:bodyPr/>
+                    <a:lstStyle/>
+                    <a:p>
+                      <a:pPr algn="ctr" indent="0" marL="0">
+                        <a:buNone/>
+                      </a:pPr>
+                      <a:r>
+                        <a:rPr lang="en-US" sz="1500" dirty="0">
+                          <a:solidFill>
+                            <a:srgbClr val="2F3E4E"/>
+                          </a:solidFill>
+                          <a:latin typeface="Calibri" pitchFamily="34" charset="0"/>
+                          <a:ea typeface="Calibri" pitchFamily="34" charset="-122"/>
+                          <a:cs typeface="Calibri" pitchFamily="34" charset="-120"/>
+                        </a:rPr>
+                        <a:t>"=" afirma en álgebra; en programación una orden cambia el valor</a:t>
+                      </a:r>
+                      <a:endParaRPr lang="en-US" sz="1500" dirty="0">
+                        <a:latin typeface="Calibri" charset="0"/>
+                        <a:ea typeface="Calibri" charset="0"/>
+                        <a:cs typeface="Calibri" charset="0"/>
+                      </a:endParaRPr>
+                    </a:p>
+                  </a:txBody>
+                  <a:tcPr marL="91440" marR="91440" marT="45720" marB="45720" anchor="ctr">
+                    <a:lnL w="9525" cap="flat" cmpd="sng" algn="ctr">
+                      <a:solidFill>
+                        <a:srgbClr val="C9D5E2"/>
+                      </a:solidFill>
+                      <a:prstDash val="solid"/>
+                      <a:round/>
+                      <a:headEnd type="none" w="med" len="med"/>
+                      <a:tailEnd type="none" w="med" len="med"/>
+                    </a:lnL>
+                    <a:lnR w="9525" cap="flat" cmpd="sng" algn="ctr">
+                      <a:solidFill>
+                        <a:srgbClr val="C9D5E2"/>
+                      </a:solidFill>
+                      <a:prstDash val="solid"/>
+                      <a:round/>
+                      <a:headEnd type="none" w="med" len="med"/>
+                      <a:tailEnd type="none" w="med" len="med"/>
+                    </a:lnR>
+                    <a:lnT w="9525" cap="flat" cmpd="sng" algn="ctr">
+                      <a:solidFill>
+                        <a:srgbClr val="C9D5E2"/>
+                      </a:solidFill>
+                      <a:prstDash val="solid"/>
+                      <a:round/>
+                      <a:headEnd type="none" w="med" len="med"/>
+                      <a:tailEnd type="none" w="med" len="med"/>
+                    </a:lnT>
+                    <a:lnB w="9525" cap="flat" cmpd="sng" algn="ctr">
+                      <a:solidFill>
+                        <a:srgbClr val="C9D5E2"/>
+                      </a:solidFill>
+                      <a:prstDash val="solid"/>
+                      <a:round/>
+                      <a:headEnd type="none" w="med" len="med"/>
+                      <a:tailEnd type="none" w="med" len="med"/>
+                    </a:lnB>
+                    <a:solidFill>
+                      <a:srgbClr val="EEF3F8"/>
+                    </a:solidFill>
+                  </a:tcPr>
+                </a:tc>
+              </a:tr>
+              <a:tr h="411480">
+                <a:tc>
+                  <a:txBody>
+                    <a:bodyPr/>
+                    <a:lstStyle/>
+                    <a:p>
+                      <a:pPr algn="ctr" indent="0" marL="0">
+                        <a:buNone/>
+                      </a:pPr>
+                      <a:r>
+                        <a:rPr lang="en-US" sz="1500" dirty="0">
+                          <a:solidFill>
+                            <a:srgbClr val="2F3E4E"/>
+                          </a:solidFill>
+                          <a:latin typeface="Calibri" pitchFamily="34" charset="0"/>
+                          <a:ea typeface="Calibri" pitchFamily="34" charset="-122"/>
+                          <a:cs typeface="Calibri" pitchFamily="34" charset="-120"/>
+                        </a:rPr>
+                        <a:t>Propiedades</a:t>
+                      </a:r>
+                      <a:endParaRPr lang="en-US" sz="1500" dirty="0">
+                        <a:latin typeface="Calibri" charset="0"/>
+                        <a:ea typeface="Calibri" charset="0"/>
+                        <a:cs typeface="Calibri" charset="0"/>
+                      </a:endParaRPr>
+                    </a:p>
+                  </a:txBody>
+                  <a:tcPr marL="91440" marR="91440" marT="45720" marB="45720" anchor="ctr">
+                    <a:lnL w="9525" cap="flat" cmpd="sng" algn="ctr">
+                      <a:solidFill>
+                        <a:srgbClr val="C9D5E2"/>
+                      </a:solidFill>
+                      <a:prstDash val="solid"/>
+                      <a:round/>
+                      <a:headEnd type="none" w="med" len="med"/>
+                      <a:tailEnd type="none" w="med" len="med"/>
+                    </a:lnL>
+                    <a:lnR w="9525" cap="flat" cmpd="sng" algn="ctr">
+                      <a:solidFill>
+                        <a:srgbClr val="C9D5E2"/>
+                      </a:solidFill>
+                      <a:prstDash val="solid"/>
+                      <a:round/>
+                      <a:headEnd type="none" w="med" len="med"/>
+                      <a:tailEnd type="none" w="med" len="med"/>
+                    </a:lnR>
+                    <a:lnT w="9525" cap="flat" cmpd="sng" algn="ctr">
+                      <a:solidFill>
+                        <a:srgbClr val="C9D5E2"/>
+                      </a:solidFill>
+                      <a:prstDash val="solid"/>
+                      <a:round/>
+                      <a:headEnd type="none" w="med" len="med"/>
+                      <a:tailEnd type="none" w="med" len="med"/>
+                    </a:lnT>
+                    <a:lnB w="9525" cap="flat" cmpd="sng" algn="ctr">
+                      <a:solidFill>
+                        <a:srgbClr val="C9D5E2"/>
+                      </a:solidFill>
+                      <a:prstDash val="solid"/>
+                      <a:round/>
+                      <a:headEnd type="none" w="med" len="med"/>
+                      <a:tailEnd type="none" w="med" len="med"/>
+                    </a:lnB>
+                    <a:solidFill>
+                      <a:srgbClr val="FFFFFF"/>
+                    </a:solidFill>
+                  </a:tcPr>
+                </a:tc>
+                <a:tc>
+                  <a:txBody>
+                    <a:bodyPr/>
+                    <a:lstStyle/>
+                    <a:p>
+                      <a:pPr algn="ctr" indent="0" marL="0">
+                        <a:buNone/>
+                      </a:pPr>
+                      <a:r>
+                        <a:rPr lang="en-US" sz="1500" dirty="0">
+                          <a:solidFill>
+                            <a:srgbClr val="2F3E4E"/>
+                          </a:solidFill>
+                          <a:latin typeface="Calibri" pitchFamily="34" charset="0"/>
+                          <a:ea typeface="Calibri" pitchFamily="34" charset="-122"/>
+                          <a:cs typeface="Calibri" pitchFamily="34" charset="-120"/>
+                        </a:rPr>
+                        <a:t>Conmutativa, asociativa y distributiva para simplificar</a:t>
+                      </a:r>
+                      <a:endParaRPr lang="en-US" sz="1500" dirty="0">
+                        <a:latin typeface="Calibri" charset="0"/>
+                        <a:ea typeface="Calibri" charset="0"/>
+                        <a:cs typeface="Calibri" charset="0"/>
+                      </a:endParaRPr>
+                    </a:p>
+                  </a:txBody>
+                  <a:tcPr marL="91440" marR="91440" marT="45720" marB="45720" anchor="ctr">
+                    <a:lnL w="9525" cap="flat" cmpd="sng" algn="ctr">
+                      <a:solidFill>
+                        <a:srgbClr val="C9D5E2"/>
+                      </a:solidFill>
+                      <a:prstDash val="solid"/>
+                      <a:round/>
+                      <a:headEnd type="none" w="med" len="med"/>
+                      <a:tailEnd type="none" w="med" len="med"/>
+                    </a:lnL>
+                    <a:lnR w="9525" cap="flat" cmpd="sng" algn="ctr">
+                      <a:solidFill>
+                        <a:srgbClr val="C9D5E2"/>
+                      </a:solidFill>
+                      <a:prstDash val="solid"/>
+                      <a:round/>
+                      <a:headEnd type="none" w="med" len="med"/>
+                      <a:tailEnd type="none" w="med" len="med"/>
+                    </a:lnR>
+                    <a:lnT w="9525" cap="flat" cmpd="sng" algn="ctr">
+                      <a:solidFill>
+                        <a:srgbClr val="C9D5E2"/>
+                      </a:solidFill>
+                      <a:prstDash val="solid"/>
+                      <a:round/>
+                      <a:headEnd type="none" w="med" len="med"/>
+                      <a:tailEnd type="none" w="med" len="med"/>
+                    </a:lnT>
+                    <a:lnB w="9525" cap="flat" cmpd="sng" algn="ctr">
+                      <a:solidFill>
+                        <a:srgbClr val="C9D5E2"/>
+                      </a:solidFill>
+                      <a:prstDash val="solid"/>
+                      <a:round/>
+                      <a:headEnd type="none" w="med" len="med"/>
+                      <a:tailEnd type="none" w="med" len="med"/>
+                    </a:lnB>
+                    <a:solidFill>
+                      <a:srgbClr val="FFFFFF"/>
+                    </a:solidFill>
+                  </a:tcPr>
+                </a:tc>
+              </a:tr>
+              <a:tr h="411480">
+                <a:tc>
+                  <a:txBody>
+                    <a:bodyPr/>
+                    <a:lstStyle/>
+                    <a:p>
+                      <a:pPr algn="ctr" indent="0" marL="0">
+                        <a:buNone/>
+                      </a:pPr>
+                      <a:r>
+                        <a:rPr lang="en-US" sz="1500" dirty="0">
+                          <a:solidFill>
+                            <a:srgbClr val="2F3E4E"/>
+                          </a:solidFill>
+                          <a:latin typeface="Calibri" pitchFamily="34" charset="0"/>
+                          <a:ea typeface="Calibri" pitchFamily="34" charset="-122"/>
+                          <a:cs typeface="Calibri" pitchFamily="34" charset="-120"/>
+                        </a:rPr>
+                        <a:t>Ecuaciones</a:t>
+                      </a:r>
+                      <a:endParaRPr lang="en-US" sz="1500" dirty="0">
+                        <a:latin typeface="Calibri" charset="0"/>
+                        <a:ea typeface="Calibri" charset="0"/>
+                        <a:cs typeface="Calibri" charset="0"/>
+                      </a:endParaRPr>
+                    </a:p>
+                  </a:txBody>
+                  <a:tcPr marL="91440" marR="91440" marT="45720" marB="45720" anchor="ctr">
+                    <a:lnL w="9525" cap="flat" cmpd="sng" algn="ctr">
+                      <a:solidFill>
+                        <a:srgbClr val="C9D5E2"/>
+                      </a:solidFill>
+                      <a:prstDash val="solid"/>
+                      <a:round/>
+                      <a:headEnd type="none" w="med" len="med"/>
+                      <a:tailEnd type="none" w="med" len="med"/>
+                    </a:lnL>
+                    <a:lnR w="9525" cap="flat" cmpd="sng" algn="ctr">
+                      <a:solidFill>
+                        <a:srgbClr val="C9D5E2"/>
+                      </a:solidFill>
+                      <a:prstDash val="solid"/>
+                      <a:round/>
+                      <a:headEnd type="none" w="med" len="med"/>
+                      <a:tailEnd type="none" w="med" len="med"/>
+                    </a:lnR>
+                    <a:lnT w="9525" cap="flat" cmpd="sng" algn="ctr">
+                      <a:solidFill>
+                        <a:srgbClr val="C9D5E2"/>
+                      </a:solidFill>
+                      <a:prstDash val="solid"/>
+                      <a:round/>
+                      <a:headEnd type="none" w="med" len="med"/>
+                      <a:tailEnd type="none" w="med" len="med"/>
+                    </a:lnT>
+                    <a:lnB w="9525" cap="flat" cmpd="sng" algn="ctr">
+                      <a:solidFill>
+                        <a:srgbClr val="C9D5E2"/>
+                      </a:solidFill>
+                      <a:prstDash val="solid"/>
+                      <a:round/>
+                      <a:headEnd type="none" w="med" len="med"/>
+                      <a:tailEnd type="none" w="med" len="med"/>
+                    </a:lnB>
+                    <a:solidFill>
+                      <a:srgbClr val="EEF3F8"/>
+                    </a:solidFill>
+                  </a:tcPr>
+                </a:tc>
+                <a:tc>
+                  <a:txBody>
+                    <a:bodyPr/>
+                    <a:lstStyle/>
+                    <a:p>
+                      <a:pPr algn="ctr" indent="0" marL="0">
+                        <a:buNone/>
+                      </a:pPr>
+                      <a:r>
+                        <a:rPr lang="en-US" sz="1500" dirty="0">
+                          <a:solidFill>
+                            <a:srgbClr val="2F3E4E"/>
+                          </a:solidFill>
+                          <a:latin typeface="Calibri" pitchFamily="34" charset="0"/>
+                          <a:ea typeface="Calibri" pitchFamily="34" charset="-122"/>
+                          <a:cs typeface="Calibri" pitchFamily="34" charset="-120"/>
+                        </a:rPr>
+                        <a:t>Balanza: simplificar, agrupar, despejar y comprobar</a:t>
+                      </a:r>
+                      <a:endParaRPr lang="en-US" sz="1500" dirty="0">
+                        <a:latin typeface="Calibri" charset="0"/>
+                        <a:ea typeface="Calibri" charset="0"/>
+                        <a:cs typeface="Calibri" charset="0"/>
+                      </a:endParaRPr>
+                    </a:p>
+                  </a:txBody>
+                  <a:tcPr marL="91440" marR="91440" marT="45720" marB="45720" anchor="ctr">
+                    <a:lnL w="9525" cap="flat" cmpd="sng" algn="ctr">
+                      <a:solidFill>
+                        <a:srgbClr val="C9D5E2"/>
+                      </a:solidFill>
+                      <a:prstDash val="solid"/>
+                      <a:round/>
+                      <a:headEnd type="none" w="med" len="med"/>
+                      <a:tailEnd type="none" w="med" len="med"/>
+                    </a:lnL>
+                    <a:lnR w="9525" cap="flat" cmpd="sng" algn="ctr">
+                      <a:solidFill>
+                        <a:srgbClr val="C9D5E2"/>
+                      </a:solidFill>
+                      <a:prstDash val="solid"/>
+                      <a:round/>
+                      <a:headEnd type="none" w="med" len="med"/>
+                      <a:tailEnd type="none" w="med" len="med"/>
+                    </a:lnR>
+                    <a:lnT w="9525" cap="flat" cmpd="sng" algn="ctr">
+                      <a:solidFill>
+                        <a:srgbClr val="C9D5E2"/>
+                      </a:solidFill>
+                      <a:prstDash val="solid"/>
+                      <a:round/>
+                      <a:headEnd type="none" w="med" len="med"/>
+                      <a:tailEnd type="none" w="med" len="med"/>
+                    </a:lnT>
+                    <a:lnB w="9525" cap="flat" cmpd="sng" algn="ctr">
+                      <a:solidFill>
+                        <a:srgbClr val="C9D5E2"/>
+                      </a:solidFill>
+                      <a:prstDash val="solid"/>
+                      <a:round/>
+                      <a:headEnd type="none" w="med" len="med"/>
+                      <a:tailEnd type="none" w="med" len="med"/>
+                    </a:lnB>
+                    <a:solidFill>
+                      <a:srgbClr val="EEF3F8"/>
+                    </a:solidFill>
+                  </a:tcPr>
+                </a:tc>
+              </a:tr>
+              <a:tr h="411480">
+                <a:tc>
+                  <a:txBody>
+                    <a:bodyPr/>
+                    <a:lstStyle/>
+                    <a:p>
+                      <a:pPr algn="ctr" indent="0" marL="0">
+                        <a:buNone/>
+                      </a:pPr>
+                      <a:r>
+                        <a:rPr lang="en-US" sz="1500" dirty="0">
+                          <a:solidFill>
+                            <a:srgbClr val="2F3E4E"/>
+                          </a:solidFill>
+                          <a:latin typeface="Calibri" pitchFamily="34" charset="0"/>
+                          <a:ea typeface="Calibri" pitchFamily="34" charset="-122"/>
+                          <a:cs typeface="Calibri" pitchFamily="34" charset="-120"/>
+                        </a:rPr>
+                        <a:t>Lógica</a:t>
+                      </a:r>
+                      <a:endParaRPr lang="en-US" sz="1500" dirty="0">
+                        <a:latin typeface="Calibri" charset="0"/>
+                        <a:ea typeface="Calibri" charset="0"/>
+                        <a:cs typeface="Calibri" charset="0"/>
+                      </a:endParaRPr>
+                    </a:p>
+                  </a:txBody>
+                  <a:tcPr marL="91440" marR="91440" marT="45720" marB="45720" anchor="ctr">
+                    <a:lnL w="9525" cap="flat" cmpd="sng" algn="ctr">
+                      <a:solidFill>
+                        <a:srgbClr val="C9D5E2"/>
+                      </a:solidFill>
+                      <a:prstDash val="solid"/>
+                      <a:round/>
+                      <a:headEnd type="none" w="med" len="med"/>
+                      <a:tailEnd type="none" w="med" len="med"/>
+                    </a:lnL>
+                    <a:lnR w="9525" cap="flat" cmpd="sng" algn="ctr">
+                      <a:solidFill>
+                        <a:srgbClr val="C9D5E2"/>
+                      </a:solidFill>
+                      <a:prstDash val="solid"/>
+                      <a:round/>
+                      <a:headEnd type="none" w="med" len="med"/>
+                      <a:tailEnd type="none" w="med" len="med"/>
+                    </a:lnR>
+                    <a:lnT w="9525" cap="flat" cmpd="sng" algn="ctr">
+                      <a:solidFill>
+                        <a:srgbClr val="C9D5E2"/>
+                      </a:solidFill>
+                      <a:prstDash val="solid"/>
+                      <a:round/>
+                      <a:headEnd type="none" w="med" len="med"/>
+                      <a:tailEnd type="none" w="med" len="med"/>
+                    </a:lnT>
+                    <a:lnB w="9525" cap="flat" cmpd="sng" algn="ctr">
+                      <a:solidFill>
+                        <a:srgbClr val="C9D5E2"/>
+                      </a:solidFill>
+                      <a:prstDash val="solid"/>
+                      <a:round/>
+                      <a:headEnd type="none" w="med" len="med"/>
+                      <a:tailEnd type="none" w="med" len="med"/>
+                    </a:lnB>
+                    <a:solidFill>
+                      <a:srgbClr val="FFFFFF"/>
+                    </a:solidFill>
+                  </a:tcPr>
+                </a:tc>
+                <a:tc>
+                  <a:txBody>
+                    <a:bodyPr/>
+                    <a:lstStyle/>
+                    <a:p>
+                      <a:pPr algn="ctr" indent="0" marL="0">
+                        <a:buNone/>
+                      </a:pPr>
+                      <a:r>
+                        <a:rPr lang="en-US" sz="1500" dirty="0">
+                          <a:solidFill>
+                            <a:srgbClr val="2F3E4E"/>
+                          </a:solidFill>
+                          <a:latin typeface="Calibri" pitchFamily="34" charset="0"/>
+                          <a:ea typeface="Calibri" pitchFamily="34" charset="-122"/>
+                          <a:cs typeface="Calibri" pitchFamily="34" charset="-120"/>
+                        </a:rPr>
+                        <a:t>p → q solo es falso si p es V y q es F; equivale a ¬p ∨ q</a:t>
+                      </a:r>
+                      <a:endParaRPr lang="en-US" sz="1500" dirty="0">
+                        <a:latin typeface="Calibri" charset="0"/>
+                        <a:ea typeface="Calibri" charset="0"/>
+                        <a:cs typeface="Calibri" charset="0"/>
+                      </a:endParaRPr>
+                    </a:p>
+                  </a:txBody>
+                  <a:tcPr marL="91440" marR="91440" marT="45720" marB="45720" anchor="ctr">
+                    <a:lnL w="9525" cap="flat" cmpd="sng" algn="ctr">
+                      <a:solidFill>
+                        <a:srgbClr val="C9D5E2"/>
+                      </a:solidFill>
+                      <a:prstDash val="solid"/>
+                      <a:round/>
+                      <a:headEnd type="none" w="med" len="med"/>
+                      <a:tailEnd type="none" w="med" len="med"/>
+                    </a:lnL>
+                    <a:lnR w="9525" cap="flat" cmpd="sng" algn="ctr">
+                      <a:solidFill>
+                        <a:srgbClr val="C9D5E2"/>
+                      </a:solidFill>
+                      <a:prstDash val="solid"/>
+                      <a:round/>
+                      <a:headEnd type="none" w="med" len="med"/>
+                      <a:tailEnd type="none" w="med" len="med"/>
+                    </a:lnR>
+                    <a:lnT w="9525" cap="flat" cmpd="sng" algn="ctr">
+                      <a:solidFill>
+                        <a:srgbClr val="C9D5E2"/>
+                      </a:solidFill>
+                      <a:prstDash val="solid"/>
+                      <a:round/>
+                      <a:headEnd type="none" w="med" len="med"/>
+                      <a:tailEnd type="none" w="med" len="med"/>
+                    </a:lnT>
+                    <a:lnB w="9525" cap="flat" cmpd="sng" algn="ctr">
+                      <a:solidFill>
+                        <a:srgbClr val="C9D5E2"/>
+                      </a:solidFill>
+                      <a:prstDash val="solid"/>
+                      <a:round/>
+                      <a:headEnd type="none" w="med" len="med"/>
+                      <a:tailEnd type="none" w="med" len="med"/>
+                    </a:lnB>
+                    <a:solidFill>
+                      <a:srgbClr val="FFFFFF"/>
+                    </a:solidFill>
+                  </a:tcPr>
+                </a:tc>
+              </a:tr>
+            </a:tbl>
+          </a:graphicData>
+        </a:graphic>
+      </p:graphicFrame>
     </p:spTree>
   </p:cSld>
   <p:clrMapOvr>
@@ -7325,7 +6516,7 @@
     <p:bg>
       <p:bgPr>
         <a:solidFill>
-          <a:srgbClr val="2F3E4E"/>
+          <a:srgbClr val="FFFFFF"/>
         </a:solidFill>
       </p:bgPr>
     </p:bg>
@@ -7351,8 +6542,8 @@
         </p:nvSpPr>
         <p:spPr>
           <a:xfrm>
-            <a:off x="731520" y="1417320"/>
-            <a:ext cx="6035040" cy="1371600"/>
+            <a:off x="548640" y="320040"/>
+            <a:ext cx="8046720" cy="640080"/>
           </a:xfrm>
           <a:prstGeom prst="rect">
             <a:avLst/>
@@ -7361,24 +6552,24 @@
           <a:ln/>
         </p:spPr>
         <p:txBody>
-          <a:bodyPr wrap="square" lIns="0" tIns="0" rIns="0" bIns="0" rtlCol="0" anchor="b"/>
+          <a:bodyPr wrap="square" lIns="0" tIns="0" rIns="0" bIns="0" rtlCol="0" anchor="ctr"/>
           <a:lstStyle/>
           <a:p>
             <a:pPr indent="0" marL="0">
               <a:buNone/>
             </a:pPr>
             <a:r>
-              <a:rPr lang="en-US" sz="4000" b="1" dirty="0">
-                <a:solidFill>
-                  <a:srgbClr val="FFFFFF"/>
+              <a:rPr lang="en-US" sz="3000" b="1" dirty="0">
+                <a:solidFill>
+                  <a:srgbClr val="2F3E4E"/>
                 </a:solidFill>
                 <a:latin typeface="Cambria" pitchFamily="34" charset="0"/>
                 <a:ea typeface="Cambria" pitchFamily="34" charset="-122"/>
                 <a:cs typeface="Cambria" pitchFamily="34" charset="-120"/>
               </a:rPr>
-              <a:t>¿Qué diferencia hay?</a:t>
-            </a:r>
-            <a:endParaRPr lang="en-US" sz="4000" dirty="0"/>
+              <a:t>Preguntas de reflexión</a:t>
+            </a:r>
+            <a:endParaRPr lang="en-US" sz="3000" dirty="0"/>
           </a:p>
         </p:txBody>
       </p:sp>
@@ -7390,8 +6581,8 @@
         </p:nvSpPr>
         <p:spPr>
           <a:xfrm>
-            <a:off x="731520" y="2926080"/>
-            <a:ext cx="6035040" cy="822960"/>
+            <a:off x="548640" y="960120"/>
+            <a:ext cx="8046720" cy="365760"/>
           </a:xfrm>
           <a:prstGeom prst="rect">
             <a:avLst/>
@@ -7400,24 +6591,24 @@
           <a:ln/>
         </p:spPr>
         <p:txBody>
-          <a:bodyPr wrap="square" lIns="0" tIns="0" rIns="0" bIns="0" rtlCol="0" anchor="t"/>
+          <a:bodyPr wrap="square" lIns="0" tIns="0" rIns="0" bIns="0" rtlCol="0" anchor="ctr"/>
           <a:lstStyle/>
           <a:p>
             <a:pPr indent="0" marL="0">
               <a:buNone/>
             </a:pPr>
             <a:r>
-              <a:rPr lang="en-US" sz="2000" dirty="0">
-                <a:solidFill>
-                  <a:srgbClr val="C9D6E5"/>
+              <a:rPr lang="en-US" sz="1600" dirty="0">
+                <a:solidFill>
+                  <a:srgbClr val="5F6E80"/>
                 </a:solidFill>
                 <a:latin typeface="Calibri" pitchFamily="34" charset="0"/>
                 <a:ea typeface="Calibri" pitchFamily="34" charset="-122"/>
                 <a:cs typeface="Calibri" pitchFamily="34" charset="-120"/>
               </a:rPr>
-              <a:t>x = 5 en matemáticas  ·  x = x + 1 en programación</a:t>
-            </a:r>
-            <a:endParaRPr lang="en-US" sz="2000" dirty="0"/>
+              <a:t>Respóndelas antes de la tarea</a:t>
+            </a:r>
+            <a:endParaRPr lang="en-US" sz="1600" dirty="0"/>
           </a:p>
         </p:txBody>
       </p:sp>
@@ -7448,7 +6639,7 @@
             <a:r>
               <a:rPr lang="en-US" sz="1000" dirty="0">
                 <a:solidFill>
-                  <a:srgbClr val="B8C4D2"/>
+                  <a:srgbClr val="8A98A8"/>
                 </a:solidFill>
                 <a:latin typeface="Calibri" pitchFamily="34" charset="0"/>
                 <a:ea typeface="Calibri" pitchFamily="34" charset="-122"/>
@@ -7462,53 +6653,128 @@
       </p:sp>
       <p:sp>
         <p:nvSpPr>
-          <p:cNvPr id="6" name="Shape 3"/>
-          <p:cNvSpPr/>
-          <p:nvPr/>
-        </p:nvSpPr>
-        <p:spPr>
-          <a:xfrm>
-            <a:off x="6949440" y="1371600"/>
-            <a:ext cx="1645920" cy="1645920"/>
-          </a:xfrm>
-          <a:prstGeom prst="ellipse">
-            <a:avLst/>
-          </a:prstGeom>
-          <a:solidFill>
-            <a:srgbClr val="4F7CAC"/>
-          </a:solidFill>
-          <a:ln w="12700">
-            <a:solidFill>
-              <a:srgbClr val="4F7CAC"/>
-            </a:solidFill>
-            <a:prstDash val="solid"/>
-          </a:ln>
-        </p:spPr>
-      </p:sp>
-      <p:pic>
-        <p:nvPicPr>
-          <p:cNvPr id="7" name="Image 0" descr="preencoded.png">    </p:cNvPr>
-          <p:cNvPicPr>
-            <a:picLocks noChangeAspect="1"/>
-          </p:cNvPicPr>
-          <p:nvPr/>
-        </p:nvPicPr>
-        <p:blipFill>
-          <a:blip r:embed="rId1"/>
-          <a:stretch>
-            <a:fillRect/>
-          </a:stretch>
-        </p:blipFill>
-        <p:spPr>
-          <a:xfrm>
-            <a:off x="7393838" y="1815998"/>
-            <a:ext cx="757123" cy="757123"/>
+          <p:cNvPr id="5" name="Text 3"/>
+          <p:cNvSpPr txBox="1"/>
+          <p:nvPr/>
+        </p:nvSpPr>
+        <p:spPr>
+          <a:xfrm>
+            <a:off x="548640" y="1645920"/>
+            <a:ext cx="8046720" cy="2377440"/>
           </a:xfrm>
           <a:prstGeom prst="rect">
             <a:avLst/>
           </a:prstGeom>
-        </p:spPr>
-      </p:pic>
+          <a:noFill/>
+          <a:ln/>
+        </p:spPr>
+        <p:txBody>
+          <a:bodyPr wrap="square" lIns="0" tIns="0" rIns="0" bIns="0" rtlCol="0" anchor="t"/>
+          <a:lstStyle/>
+          <a:p>
+            <a:pPr marL="342900" indent="-342900">
+              <a:spcAft>
+                <a:spcPts val="600"/>
+              </a:spcAft>
+              <a:buSzPct val="100000"/>
+              <a:buChar char="•"/>
+            </a:pPr>
+            <a:r>
+              <a:rPr lang="en-US" sz="1800" dirty="0">
+                <a:solidFill>
+                  <a:srgbClr val="2F3E4E"/>
+                </a:solidFill>
+                <a:latin typeface="Calibri" pitchFamily="34" charset="0"/>
+                <a:ea typeface="Calibri" pitchFamily="34" charset="-122"/>
+                <a:cs typeface="Calibri" pitchFamily="34" charset="-120"/>
+              </a:rPr>
+              <a:t>¿Por qué conviene simplificar una expresión antes de resolverla?</a:t>
+            </a:r>
+            <a:endParaRPr lang="en-US" sz="1800" dirty="0"/>
+          </a:p>
+          <a:p>
+            <a:pPr marL="342900" indent="-342900">
+              <a:spcAft>
+                <a:spcPts val="600"/>
+              </a:spcAft>
+              <a:buSzPct val="100000"/>
+              <a:buChar char="•"/>
+            </a:pPr>
+            <a:r>
+              <a:rPr lang="en-US" sz="1800" dirty="0">
+                <a:solidFill>
+                  <a:srgbClr val="2F3E4E"/>
+                </a:solidFill>
+                <a:latin typeface="Calibri" pitchFamily="34" charset="0"/>
+                <a:ea typeface="Calibri" pitchFamily="34" charset="-122"/>
+                <a:cs typeface="Calibri" pitchFamily="34" charset="-120"/>
+              </a:rPr>
+              <a:t>Si la condición es NO (x &gt; 30 y y &lt; 100), ¿cómo la reescribes con De Morgan?</a:t>
+            </a:r>
+            <a:endParaRPr lang="en-US" sz="1800" dirty="0"/>
+          </a:p>
+          <a:p>
+            <a:pPr marL="342900" indent="-342900">
+              <a:spcAft>
+                <a:spcPts val="600"/>
+              </a:spcAft>
+              <a:buSzPct val="100000"/>
+              <a:buChar char="•"/>
+            </a:pPr>
+            <a:r>
+              <a:rPr lang="en-US" sz="1800" dirty="0">
+                <a:solidFill>
+                  <a:srgbClr val="2F3E4E"/>
+                </a:solidFill>
+                <a:latin typeface="Calibri" pitchFamily="34" charset="0"/>
+                <a:ea typeface="Calibri" pitchFamily="34" charset="-122"/>
+                <a:cs typeface="Calibri" pitchFamily="34" charset="-120"/>
+              </a:rPr>
+              <a:t>Si al comprobar una solución no se cumple la igualdad original, ¿qué significa?</a:t>
+            </a:r>
+            <a:endParaRPr lang="en-US" sz="1800" dirty="0"/>
+          </a:p>
+        </p:txBody>
+      </p:sp>
+      <p:sp>
+        <p:nvSpPr>
+          <p:cNvPr id="6" name="Text 4"/>
+          <p:cNvSpPr txBox="1"/>
+          <p:nvPr/>
+        </p:nvSpPr>
+        <p:spPr>
+          <a:xfrm>
+            <a:off x="548640" y="4114800"/>
+            <a:ext cx="8046720" cy="365760"/>
+          </a:xfrm>
+          <a:prstGeom prst="rect">
+            <a:avLst/>
+          </a:prstGeom>
+          <a:noFill/>
+          <a:ln/>
+        </p:spPr>
+        <p:txBody>
+          <a:bodyPr wrap="square" lIns="0" tIns="0" rIns="0" bIns="0" rtlCol="0" anchor="t"/>
+          <a:lstStyle/>
+          <a:p>
+            <a:pPr indent="0" marL="0">
+              <a:buNone/>
+            </a:pPr>
+            <a:r>
+              <a:rPr lang="en-US" sz="1500" dirty="0">
+                <a:solidFill>
+                  <a:srgbClr val="5F6E80"/>
+                </a:solidFill>
+                <a:latin typeface="Calibri" pitchFamily="34" charset="0"/>
+                <a:ea typeface="Calibri" pitchFamily="34" charset="-122"/>
+                <a:cs typeface="Calibri" pitchFamily="34" charset="-120"/>
+              </a:rPr>
+              <a:t>En el sitio: Pestaña Practicar (14 ejercicios) y Quiz (10 preguntas).</a:t>
+            </a:r>
+            <a:endParaRPr lang="en-US" sz="1500" dirty="0"/>
+          </a:p>
+        </p:txBody>
+      </p:sp>
     </p:spTree>
   </p:cSld>
   <p:clrMapOvr>
@@ -7613,7 +6879,7 @@
                 <a:ea typeface="Calibri" pitchFamily="34" charset="-122"/>
                 <a:cs typeface="Calibri" pitchFamily="34" charset="-120"/>
               </a:rPr>
-              <a:t>Una letra guarda un número que puede cambiar</a:t>
+              <a:t>Una letra guarda un valor que puede cambiar</a:t>
             </a:r>
             <a:endParaRPr lang="en-US" sz="1600" dirty="0"/>
           </a:p>
@@ -7660,13 +6926,13 @@
       </p:sp>
       <p:sp>
         <p:nvSpPr>
-          <p:cNvPr id="6" name="Shape 3"/>
+          <p:cNvPr id="5" name="Shape 3"/>
           <p:cNvSpPr/>
           <p:nvPr/>
         </p:nvSpPr>
         <p:spPr>
           <a:xfrm>
-            <a:off x="548640" y="2011680"/>
+            <a:off x="548640" y="1920240"/>
             <a:ext cx="2194560" cy="1188720"/>
           </a:xfrm>
           <a:prstGeom prst="roundRect">
@@ -7687,13 +6953,13 @@
       </p:sp>
       <p:sp>
         <p:nvSpPr>
-          <p:cNvPr id="7" name="Text 4"/>
+          <p:cNvPr id="6" name="Text 4"/>
           <p:cNvSpPr txBox="1"/>
           <p:nvPr/>
         </p:nvSpPr>
         <p:spPr>
           <a:xfrm>
-            <a:off x="548640" y="2011680"/>
+            <a:off x="548640" y="1920240"/>
             <a:ext cx="2194560" cy="1188720"/>
           </a:xfrm>
           <a:prstGeom prst="rect">
@@ -7726,13 +6992,13 @@
       </p:sp>
       <p:sp>
         <p:nvSpPr>
-          <p:cNvPr id="8" name="Shape 5"/>
+          <p:cNvPr id="7" name="Shape 5"/>
           <p:cNvSpPr/>
           <p:nvPr/>
         </p:nvSpPr>
         <p:spPr>
           <a:xfrm>
-            <a:off x="2880360" y="2423160"/>
+            <a:off x="2880360" y="2331720"/>
             <a:ext cx="457200" cy="365760"/>
           </a:xfrm>
           <a:prstGeom prst="rightArrow">
@@ -7751,13 +7017,13 @@
       </p:sp>
       <p:sp>
         <p:nvSpPr>
-          <p:cNvPr id="9" name="Shape 6"/>
+          <p:cNvPr id="8" name="Shape 6"/>
           <p:cNvSpPr/>
           <p:nvPr/>
         </p:nvSpPr>
         <p:spPr>
           <a:xfrm>
-            <a:off x="3474720" y="2011680"/>
+            <a:off x="3474720" y="1920240"/>
             <a:ext cx="2377440" cy="1188720"/>
           </a:xfrm>
           <a:prstGeom prst="roundRect">
@@ -7778,13 +7044,13 @@
       </p:sp>
       <p:sp>
         <p:nvSpPr>
-          <p:cNvPr id="10" name="Text 7"/>
+          <p:cNvPr id="9" name="Text 7"/>
           <p:cNvSpPr txBox="1"/>
           <p:nvPr/>
         </p:nvSpPr>
         <p:spPr>
           <a:xfrm>
-            <a:off x="3474720" y="2011680"/>
+            <a:off x="3474720" y="1920240"/>
             <a:ext cx="2377440" cy="1188720"/>
           </a:xfrm>
           <a:prstGeom prst="rect">
@@ -7817,13 +7083,13 @@
       </p:sp>
       <p:sp>
         <p:nvSpPr>
-          <p:cNvPr id="11" name="Shape 8"/>
+          <p:cNvPr id="10" name="Shape 8"/>
           <p:cNvSpPr/>
           <p:nvPr/>
         </p:nvSpPr>
         <p:spPr>
           <a:xfrm>
-            <a:off x="5989320" y="2423160"/>
+            <a:off x="5989320" y="2331720"/>
             <a:ext cx="457200" cy="365760"/>
           </a:xfrm>
           <a:prstGeom prst="rightArrow">
@@ -7842,13 +7108,13 @@
       </p:sp>
       <p:sp>
         <p:nvSpPr>
-          <p:cNvPr id="12" name="Shape 9"/>
+          <p:cNvPr id="11" name="Shape 9"/>
           <p:cNvSpPr/>
           <p:nvPr/>
         </p:nvSpPr>
         <p:spPr>
           <a:xfrm>
-            <a:off x="6583680" y="2011680"/>
+            <a:off x="6583680" y="1920240"/>
             <a:ext cx="2011680" cy="1188720"/>
           </a:xfrm>
           <a:prstGeom prst="roundRect">
@@ -7869,13 +7135,13 @@
       </p:sp>
       <p:sp>
         <p:nvSpPr>
-          <p:cNvPr id="13" name="Text 10"/>
+          <p:cNvPr id="12" name="Text 10"/>
           <p:cNvSpPr txBox="1"/>
           <p:nvPr/>
         </p:nvSpPr>
         <p:spPr>
           <a:xfrm>
-            <a:off x="6583680" y="2011680"/>
+            <a:off x="6583680" y="1920240"/>
             <a:ext cx="2011680" cy="1188720"/>
           </a:xfrm>
           <a:prstGeom prst="rect">
@@ -7908,14 +7174,14 @@
       </p:sp>
       <p:sp>
         <p:nvSpPr>
-          <p:cNvPr id="14" name="Text 11"/>
+          <p:cNvPr id="13" name="Text 11"/>
           <p:cNvSpPr txBox="1"/>
           <p:nvPr/>
         </p:nvSpPr>
         <p:spPr>
           <a:xfrm>
-            <a:off x="548640" y="3657600"/>
-            <a:ext cx="8046720" cy="457200"/>
+            <a:off x="548640" y="3474720"/>
+            <a:ext cx="8046720" cy="365760"/>
           </a:xfrm>
           <a:prstGeom prst="rect">
             <a:avLst/>
@@ -7933,7 +7199,7 @@
             <a:r>
               <a:rPr lang="en-US" sz="1800" dirty="0">
                 <a:solidFill>
-                  <a:srgbClr val="5F6E80"/>
+                  <a:srgbClr val="2F3E4E"/>
                 </a:solidFill>
                 <a:latin typeface="Calibri" pitchFamily="34" charset="0"/>
                 <a:ea typeface="Calibri" pitchFamily="34" charset="-122"/>
@@ -7942,6 +7208,45 @@
               <a:t>Con x = 4: 2 · 4 + 3 = 11. Si cambia x, cambia el resultado.</a:t>
             </a:r>
             <a:endParaRPr lang="en-US" sz="1800" dirty="0"/>
+          </a:p>
+        </p:txBody>
+      </p:sp>
+      <p:sp>
+        <p:nvSpPr>
+          <p:cNvPr id="14" name="Text 12"/>
+          <p:cNvSpPr txBox="1"/>
+          <p:nvPr/>
+        </p:nvSpPr>
+        <p:spPr>
+          <a:xfrm>
+            <a:off x="548640" y="4023360"/>
+            <a:ext cx="8046720" cy="457200"/>
+          </a:xfrm>
+          <a:prstGeom prst="rect">
+            <a:avLst/>
+          </a:prstGeom>
+          <a:noFill/>
+          <a:ln/>
+        </p:spPr>
+        <p:txBody>
+          <a:bodyPr wrap="square" lIns="0" tIns="0" rIns="0" bIns="0" rtlCol="0" anchor="t"/>
+          <a:lstStyle/>
+          <a:p>
+            <a:pPr indent="0" marL="0">
+              <a:buNone/>
+            </a:pPr>
+            <a:r>
+              <a:rPr lang="en-US" sz="1500" dirty="0">
+                <a:solidFill>
+                  <a:srgbClr val="5F6E80"/>
+                </a:solidFill>
+                <a:latin typeface="Calibri" pitchFamily="34" charset="0"/>
+                <a:ea typeface="Calibri" pitchFamily="34" charset="-122"/>
+                <a:cs typeface="Calibri" pitchFamily="34" charset="-120"/>
+              </a:rPr>
+              <a:t>En 2x + 3: 2x y 3 son términos; 2 es el coeficiente y 3 es el término constante.</a:t>
+            </a:r>
+            <a:endParaRPr lang="en-US" sz="1500" dirty="0"/>
           </a:p>
         </p:txBody>
       </p:sp>
@@ -8096,7 +7401,7 @@
       </p:sp>
       <p:sp>
         <p:nvSpPr>
-          <p:cNvPr id="6" name="Shape 3"/>
+          <p:cNvPr id="5" name="Shape 3"/>
           <p:cNvSpPr/>
           <p:nvPr/>
         </p:nvSpPr>
@@ -8123,7 +7428,7 @@
       </p:sp>
       <p:sp>
         <p:nvSpPr>
-          <p:cNvPr id="7" name="Text 4"/>
+          <p:cNvPr id="6" name="Text 4"/>
           <p:cNvSpPr txBox="1"/>
           <p:nvPr/>
         </p:nvSpPr>
@@ -8162,7 +7467,7 @@
       </p:sp>
       <p:sp>
         <p:nvSpPr>
-          <p:cNvPr id="8" name="Shape 5"/>
+          <p:cNvPr id="7" name="Shape 5"/>
           <p:cNvSpPr/>
           <p:nvPr/>
         </p:nvSpPr>
@@ -8187,7 +7492,7 @@
       </p:sp>
       <p:sp>
         <p:nvSpPr>
-          <p:cNvPr id="9" name="Shape 6"/>
+          <p:cNvPr id="8" name="Shape 6"/>
           <p:cNvSpPr/>
           <p:nvPr/>
         </p:nvSpPr>
@@ -8214,7 +7519,7 @@
       </p:sp>
       <p:sp>
         <p:nvSpPr>
-          <p:cNvPr id="10" name="Text 7"/>
+          <p:cNvPr id="9" name="Text 7"/>
           <p:cNvSpPr txBox="1"/>
           <p:nvPr/>
         </p:nvSpPr>
@@ -8253,7 +7558,7 @@
       </p:sp>
       <p:sp>
         <p:nvSpPr>
-          <p:cNvPr id="11" name="Shape 8"/>
+          <p:cNvPr id="10" name="Shape 8"/>
           <p:cNvSpPr/>
           <p:nvPr/>
         </p:nvSpPr>
@@ -8278,7 +7583,7 @@
       </p:sp>
       <p:sp>
         <p:nvSpPr>
-          <p:cNvPr id="12" name="Shape 9"/>
+          <p:cNvPr id="11" name="Shape 9"/>
           <p:cNvSpPr/>
           <p:nvPr/>
         </p:nvSpPr>
@@ -8305,7 +7610,7 @@
       </p:sp>
       <p:sp>
         <p:nvSpPr>
-          <p:cNvPr id="13" name="Text 10"/>
+          <p:cNvPr id="12" name="Text 10"/>
           <p:cNvSpPr txBox="1"/>
           <p:nvPr/>
         </p:nvSpPr>
@@ -8344,13 +7649,13 @@
       </p:sp>
       <p:sp>
         <p:nvSpPr>
-          <p:cNvPr id="14" name="Text 11"/>
+          <p:cNvPr id="13" name="Text 11"/>
           <p:cNvSpPr txBox="1"/>
           <p:nvPr/>
         </p:nvSpPr>
         <p:spPr>
           <a:xfrm>
-            <a:off x="548640" y="3383280"/>
+            <a:off x="548640" y="3200400"/>
             <a:ext cx="8046720" cy="457200"/>
           </a:xfrm>
           <a:prstGeom prst="rect">
@@ -8383,13 +7688,13 @@
       </p:sp>
       <p:sp>
         <p:nvSpPr>
-          <p:cNvPr id="15" name="Text 12"/>
+          <p:cNvPr id="14" name="Text 12"/>
           <p:cNvSpPr txBox="1"/>
           <p:nvPr/>
         </p:nvSpPr>
         <p:spPr>
           <a:xfrm>
-            <a:off x="548640" y="3931920"/>
+            <a:off x="548640" y="3749040"/>
             <a:ext cx="8046720" cy="457200"/>
           </a:xfrm>
           <a:prstGeom prst="rect">
@@ -8414,7 +7719,7 @@
                 <a:ea typeface="Calibri" pitchFamily="34" charset="-122"/>
                 <a:cs typeface="Calibri" pitchFamily="34" charset="-120"/>
               </a:rPr>
-              <a:t>Sin este orden, 2 + 3 · 4 daría 20 por error.</a:t>
+              <a:t>Por eso 2 + 3 · 4 = 14, no 20.</a:t>
             </a:r>
             <a:endParaRPr lang="en-US" sz="1600" dirty="0"/>
           </a:p>
@@ -8485,7 +7790,7 @@
                 <a:ea typeface="Cambria" pitchFamily="34" charset="-122"/>
                 <a:cs typeface="Cambria" pitchFamily="34" charset="-120"/>
               </a:rPr>
-              <a:t>Propiedades para simplificar</a:t>
+              <a:t>Igualdad y asignación</a:t>
             </a:r>
             <a:endParaRPr lang="en-US" sz="3000" dirty="0"/>
           </a:p>
@@ -8524,7 +7829,7 @@
                 <a:ea typeface="Calibri" pitchFamily="34" charset="-122"/>
                 <a:cs typeface="Calibri" pitchFamily="34" charset="-120"/>
               </a:rPr>
-              <a:t>Cambian la forma de escribir, no el valor</a:t>
+              <a:t>El signo "=" puede ser una afirmación o una orden</a:t>
             </a:r>
             <a:endParaRPr lang="en-US" sz="1600" dirty="0"/>
           </a:p>
@@ -8571,18 +7876,18 @@
       </p:sp>
       <p:sp>
         <p:nvSpPr>
-          <p:cNvPr id="6" name="Shape 3"/>
+          <p:cNvPr id="5" name="Shape 3"/>
           <p:cNvSpPr/>
           <p:nvPr/>
         </p:nvSpPr>
         <p:spPr>
           <a:xfrm>
             <a:off x="548640" y="1645920"/>
-            <a:ext cx="2560320" cy="2834640"/>
+            <a:ext cx="3840480" cy="2651760"/>
           </a:xfrm>
           <a:prstGeom prst="roundRect">
             <a:avLst>
-              <a:gd name="adj" fmla="val 4286"/>
+              <a:gd name="adj" fmla="val 4138"/>
             </a:avLst>
           </a:prstGeom>
           <a:solidFill>
@@ -8598,63 +7903,14 @@
       </p:sp>
       <p:sp>
         <p:nvSpPr>
-          <p:cNvPr id="7" name="Shape 4"/>
-          <p:cNvSpPr/>
-          <p:nvPr/>
-        </p:nvSpPr>
-        <p:spPr>
-          <a:xfrm>
-            <a:off x="822960" y="1920240"/>
-            <a:ext cx="731520" cy="731520"/>
-          </a:xfrm>
-          <a:prstGeom prst="ellipse">
-            <a:avLst/>
-          </a:prstGeom>
-          <a:solidFill>
-            <a:srgbClr val="4F7CAC"/>
-          </a:solidFill>
-          <a:ln w="12700">
-            <a:solidFill>
-              <a:srgbClr val="4F7CAC"/>
-            </a:solidFill>
-            <a:prstDash val="solid"/>
-          </a:ln>
-        </p:spPr>
-      </p:sp>
-      <p:pic>
-        <p:nvPicPr>
-          <p:cNvPr id="8" name="Image 0" descr="preencoded.png">    </p:cNvPr>
-          <p:cNvPicPr>
-            <a:picLocks noChangeAspect="1"/>
-          </p:cNvPicPr>
-          <p:nvPr/>
-        </p:nvPicPr>
-        <p:blipFill>
-          <a:blip r:embed="rId1"/>
-          <a:stretch>
-            <a:fillRect/>
-          </a:stretch>
-        </p:blipFill>
-        <p:spPr>
-          <a:xfrm>
-            <a:off x="1020470" y="2117750"/>
-            <a:ext cx="336499" cy="336499"/>
-          </a:xfrm>
-          <a:prstGeom prst="rect">
-            <a:avLst/>
-          </a:prstGeom>
-        </p:spPr>
-      </p:pic>
-      <p:sp>
-        <p:nvSpPr>
-          <p:cNvPr id="9" name="Text 5"/>
+          <p:cNvPr id="6" name="Text 4"/>
           <p:cNvSpPr txBox="1"/>
           <p:nvPr/>
         </p:nvSpPr>
         <p:spPr>
           <a:xfrm>
-            <a:off x="822960" y="2834640"/>
-            <a:ext cx="2103120" cy="365760"/>
+            <a:off x="822960" y="1828800"/>
+            <a:ext cx="3291840" cy="411480"/>
           </a:xfrm>
           <a:prstGeom prst="rect">
             <a:avLst/>
@@ -8670,30 +7926,30 @@
               <a:buNone/>
             </a:pPr>
             <a:r>
-              <a:rPr lang="en-US" sz="2000" b="1" dirty="0">
-                <a:solidFill>
-                  <a:srgbClr val="2F3E4E"/>
+              <a:rPr lang="en-US" sz="1800" b="1" dirty="0">
+                <a:solidFill>
+                  <a:srgbClr val="4F7CAC"/>
                 </a:solidFill>
                 <a:latin typeface="Calibri" pitchFamily="34" charset="0"/>
                 <a:ea typeface="Calibri" pitchFamily="34" charset="-122"/>
                 <a:cs typeface="Calibri" pitchFamily="34" charset="-120"/>
               </a:rPr>
-              <a:t>Conmutativa</a:t>
-            </a:r>
-            <a:endParaRPr lang="en-US" sz="2000" dirty="0"/>
-          </a:p>
-        </p:txBody>
-      </p:sp>
-      <p:sp>
-        <p:nvSpPr>
-          <p:cNvPr id="10" name="Text 6"/>
+              <a:t>En álgebra</a:t>
+            </a:r>
+            <a:endParaRPr lang="en-US" sz="1800" dirty="0"/>
+          </a:p>
+        </p:txBody>
+      </p:sp>
+      <p:sp>
+        <p:nvSpPr>
+          <p:cNvPr id="7" name="Text 5"/>
           <p:cNvSpPr txBox="1"/>
           <p:nvPr/>
         </p:nvSpPr>
         <p:spPr>
           <a:xfrm>
-            <a:off x="822960" y="3291840"/>
-            <a:ext cx="2103120" cy="640080"/>
+            <a:off x="822960" y="2331720"/>
+            <a:ext cx="3291840" cy="1828800"/>
           </a:xfrm>
           <a:prstGeom prst="rect">
             <a:avLst/>
@@ -8709,7 +7965,7 @@
               <a:buNone/>
             </a:pPr>
             <a:r>
-              <a:rPr lang="en-US" sz="1600" dirty="0">
+              <a:rPr lang="en-US" sz="1500" dirty="0">
                 <a:solidFill>
                   <a:srgbClr val="2F3E4E"/>
                 </a:solidFill>
@@ -8717,65 +7973,49 @@
                 <a:ea typeface="Calibri" pitchFamily="34" charset="-122"/>
                 <a:cs typeface="Calibri" pitchFamily="34" charset="-120"/>
               </a:rPr>
-              <a:t>a + b = b + a</a:t>
-            </a:r>
-            <a:endParaRPr lang="en-US" sz="1600" dirty="0"/>
-          </a:p>
-        </p:txBody>
-      </p:sp>
-      <p:sp>
-        <p:nvSpPr>
-          <p:cNvPr id="11" name="Text 7"/>
-          <p:cNvSpPr txBox="1"/>
-          <p:nvPr/>
-        </p:nvSpPr>
-        <p:spPr>
-          <a:xfrm>
-            <a:off x="822960" y="3977640"/>
-            <a:ext cx="2103120" cy="457200"/>
-          </a:xfrm>
-          <a:prstGeom prst="rect">
-            <a:avLst/>
-          </a:prstGeom>
-          <a:noFill/>
-          <a:ln/>
-        </p:spPr>
-        <p:txBody>
-          <a:bodyPr wrap="square" lIns="0" tIns="0" rIns="0" bIns="0" rtlCol="0" anchor="t"/>
-          <a:lstStyle/>
+              <a:t>x = 5 es una afirmación: x es 5.</a:t>
+            </a:r>
+            <a:endParaRPr lang="en-US" sz="1500" dirty="0"/>
+          </a:p>
           <a:p>
             <a:pPr indent="0" marL="0">
               <a:buNone/>
             </a:pPr>
-            <a:r>
-              <a:rPr lang="en-US" sz="1400" dirty="0">
-                <a:solidFill>
-                  <a:srgbClr val="5F6E80"/>
+            <a:endParaRPr lang="en-US" sz="1500" dirty="0"/>
+          </a:p>
+          <a:p>
+            <a:pPr indent="0" marL="0">
+              <a:buNone/>
+            </a:pPr>
+            <a:r>
+              <a:rPr lang="en-US" sz="1500" dirty="0">
+                <a:solidFill>
+                  <a:srgbClr val="2F3E4E"/>
                 </a:solidFill>
                 <a:latin typeface="Calibri" pitchFamily="34" charset="0"/>
                 <a:ea typeface="Calibri" pitchFamily="34" charset="-122"/>
                 <a:cs typeface="Calibri" pitchFamily="34" charset="-120"/>
               </a:rPr>
-              <a:t>3 + x = x + 3</a:t>
-            </a:r>
-            <a:endParaRPr lang="en-US" sz="1400" dirty="0"/>
-          </a:p>
-        </p:txBody>
-      </p:sp>
-      <p:sp>
-        <p:nvSpPr>
-          <p:cNvPr id="12" name="Shape 8"/>
+              <a:t>Si a x = x + 1 la tratas como ecuación, al restar x obtienes 0 = 1, algo imposible.</a:t>
+            </a:r>
+            <a:endParaRPr lang="en-US" sz="1500" dirty="0"/>
+          </a:p>
+        </p:txBody>
+      </p:sp>
+      <p:sp>
+        <p:nvSpPr>
+          <p:cNvPr id="8" name="Shape 6"/>
           <p:cNvSpPr/>
           <p:nvPr/>
         </p:nvSpPr>
         <p:spPr>
           <a:xfrm>
-            <a:off x="3291840" y="1645920"/>
-            <a:ext cx="2560320" cy="2834640"/>
+            <a:off x="4754880" y="1645920"/>
+            <a:ext cx="3840480" cy="2651760"/>
           </a:xfrm>
           <a:prstGeom prst="roundRect">
             <a:avLst>
-              <a:gd name="adj" fmla="val 4286"/>
+              <a:gd name="adj" fmla="val 4138"/>
             </a:avLst>
           </a:prstGeom>
           <a:solidFill>
@@ -8791,63 +8031,14 @@
       </p:sp>
       <p:sp>
         <p:nvSpPr>
-          <p:cNvPr id="13" name="Shape 9"/>
-          <p:cNvSpPr/>
-          <p:nvPr/>
-        </p:nvSpPr>
-        <p:spPr>
-          <a:xfrm>
-            <a:off x="3566160" y="1920240"/>
-            <a:ext cx="731520" cy="731520"/>
-          </a:xfrm>
-          <a:prstGeom prst="ellipse">
-            <a:avLst/>
-          </a:prstGeom>
-          <a:solidFill>
-            <a:srgbClr val="6FA287"/>
-          </a:solidFill>
-          <a:ln w="12700">
-            <a:solidFill>
-              <a:srgbClr val="6FA287"/>
-            </a:solidFill>
-            <a:prstDash val="solid"/>
-          </a:ln>
-        </p:spPr>
-      </p:sp>
-      <p:pic>
-        <p:nvPicPr>
-          <p:cNvPr id="14" name="Image 1" descr="preencoded.png">    </p:cNvPr>
-          <p:cNvPicPr>
-            <a:picLocks noChangeAspect="1"/>
-          </p:cNvPicPr>
-          <p:nvPr/>
-        </p:nvPicPr>
-        <p:blipFill>
-          <a:blip r:embed="rId2"/>
-          <a:stretch>
-            <a:fillRect/>
-          </a:stretch>
-        </p:blipFill>
-        <p:spPr>
-          <a:xfrm>
-            <a:off x="3763670" y="2117750"/>
-            <a:ext cx="336499" cy="336499"/>
-          </a:xfrm>
-          <a:prstGeom prst="rect">
-            <a:avLst/>
-          </a:prstGeom>
-        </p:spPr>
-      </p:pic>
-      <p:sp>
-        <p:nvSpPr>
-          <p:cNvPr id="15" name="Text 10"/>
+          <p:cNvPr id="9" name="Text 7"/>
           <p:cNvSpPr txBox="1"/>
           <p:nvPr/>
         </p:nvSpPr>
         <p:spPr>
           <a:xfrm>
-            <a:off x="3566160" y="2834640"/>
-            <a:ext cx="2103120" cy="365760"/>
+            <a:off x="5029200" y="1828800"/>
+            <a:ext cx="3291840" cy="411480"/>
           </a:xfrm>
           <a:prstGeom prst="rect">
             <a:avLst/>
@@ -8863,30 +8054,30 @@
               <a:buNone/>
             </a:pPr>
             <a:r>
-              <a:rPr lang="en-US" sz="2000" b="1" dirty="0">
-                <a:solidFill>
-                  <a:srgbClr val="2F3E4E"/>
+              <a:rPr lang="en-US" sz="1800" b="1" dirty="0">
+                <a:solidFill>
+                  <a:srgbClr val="6FA287"/>
                 </a:solidFill>
                 <a:latin typeface="Calibri" pitchFamily="34" charset="0"/>
                 <a:ea typeface="Calibri" pitchFamily="34" charset="-122"/>
                 <a:cs typeface="Calibri" pitchFamily="34" charset="-120"/>
               </a:rPr>
-              <a:t>Asociativa</a:t>
-            </a:r>
-            <a:endParaRPr lang="en-US" sz="2000" dirty="0"/>
-          </a:p>
-        </p:txBody>
-      </p:sp>
-      <p:sp>
-        <p:nvSpPr>
-          <p:cNvPr id="16" name="Text 11"/>
+              <a:t>Como orden</a:t>
+            </a:r>
+            <a:endParaRPr lang="en-US" sz="1800" dirty="0"/>
+          </a:p>
+        </p:txBody>
+      </p:sp>
+      <p:sp>
+        <p:nvSpPr>
+          <p:cNvPr id="10" name="Text 8"/>
           <p:cNvSpPr txBox="1"/>
           <p:nvPr/>
         </p:nvSpPr>
         <p:spPr>
           <a:xfrm>
-            <a:off x="3566160" y="3291840"/>
-            <a:ext cx="2103120" cy="640080"/>
+            <a:off x="5029200" y="2331720"/>
+            <a:ext cx="3291840" cy="1828800"/>
           </a:xfrm>
           <a:prstGeom prst="rect">
             <a:avLst/>
@@ -8902,7 +8093,7 @@
               <a:buNone/>
             </a:pPr>
             <a:r>
-              <a:rPr lang="en-US" sz="1600" dirty="0">
+              <a:rPr lang="en-US" sz="1500" dirty="0">
                 <a:solidFill>
                   <a:srgbClr val="2F3E4E"/>
                 </a:solidFill>
@@ -8910,137 +8101,45 @@
                 <a:ea typeface="Calibri" pitchFamily="34" charset="-122"/>
                 <a:cs typeface="Calibri" pitchFamily="34" charset="-120"/>
               </a:rPr>
-              <a:t>(a + b) + c = a + (b + c)</a:t>
-            </a:r>
-            <a:endParaRPr lang="en-US" sz="1600" dirty="0"/>
-          </a:p>
-        </p:txBody>
-      </p:sp>
-      <p:sp>
-        <p:nvSpPr>
-          <p:cNvPr id="17" name="Text 12"/>
-          <p:cNvSpPr txBox="1"/>
-          <p:nvPr/>
-        </p:nvSpPr>
-        <p:spPr>
-          <a:xfrm>
-            <a:off x="3566160" y="3977640"/>
-            <a:ext cx="2103120" cy="457200"/>
-          </a:xfrm>
-          <a:prstGeom prst="rect">
-            <a:avLst/>
-          </a:prstGeom>
-          <a:noFill/>
-          <a:ln/>
-        </p:spPr>
-        <p:txBody>
-          <a:bodyPr wrap="square" lIns="0" tIns="0" rIns="0" bIns="0" rtlCol="0" anchor="t"/>
-          <a:lstStyle/>
+              <a:t>x = x + 1 significa: toma el valor de x, súmale 1 y guarda el resultado en x.</a:t>
+            </a:r>
+            <a:endParaRPr lang="en-US" sz="1500" dirty="0"/>
+          </a:p>
           <a:p>
             <a:pPr indent="0" marL="0">
               <a:buNone/>
             </a:pPr>
-            <a:r>
-              <a:rPr lang="en-US" sz="1400" dirty="0">
-                <a:solidFill>
-                  <a:srgbClr val="5F6E80"/>
+            <a:endParaRPr lang="en-US" sz="1500" dirty="0"/>
+          </a:p>
+          <a:p>
+            <a:pPr indent="0" marL="0">
+              <a:buNone/>
+            </a:pPr>
+            <a:r>
+              <a:rPr lang="en-US" sz="1500" dirty="0">
+                <a:solidFill>
+                  <a:srgbClr val="2F3E4E"/>
                 </a:solidFill>
                 <a:latin typeface="Calibri" pitchFamily="34" charset="0"/>
                 <a:ea typeface="Calibri" pitchFamily="34" charset="-122"/>
                 <a:cs typeface="Calibri" pitchFamily="34" charset="-120"/>
               </a:rPr>
-              <a:t>Agrupar no cambia el total</a:t>
-            </a:r>
-            <a:endParaRPr lang="en-US" sz="1400" dirty="0"/>
-          </a:p>
-        </p:txBody>
-      </p:sp>
-      <p:sp>
-        <p:nvSpPr>
-          <p:cNvPr id="18" name="Shape 13"/>
-          <p:cNvSpPr/>
-          <p:nvPr/>
-        </p:nvSpPr>
-        <p:spPr>
-          <a:xfrm>
-            <a:off x="6035040" y="1645920"/>
-            <a:ext cx="2560320" cy="2834640"/>
-          </a:xfrm>
-          <a:prstGeom prst="roundRect">
-            <a:avLst>
-              <a:gd name="adj" fmla="val 4286"/>
-            </a:avLst>
-          </a:prstGeom>
-          <a:solidFill>
-            <a:srgbClr val="FBEADC"/>
-          </a:solidFill>
-          <a:ln w="12700">
-            <a:solidFill>
-              <a:srgbClr val="FBEADC"/>
-            </a:solidFill>
-            <a:prstDash val="solid"/>
-          </a:ln>
-        </p:spPr>
-      </p:sp>
-      <p:sp>
-        <p:nvSpPr>
-          <p:cNvPr id="19" name="Shape 14"/>
-          <p:cNvSpPr/>
-          <p:nvPr/>
-        </p:nvSpPr>
-        <p:spPr>
-          <a:xfrm>
-            <a:off x="6309360" y="1920240"/>
-            <a:ext cx="731520" cy="731520"/>
-          </a:xfrm>
-          <a:prstGeom prst="ellipse">
-            <a:avLst/>
-          </a:prstGeom>
-          <a:solidFill>
-            <a:srgbClr val="E39B6B"/>
-          </a:solidFill>
-          <a:ln w="12700">
-            <a:solidFill>
-              <a:srgbClr val="E39B6B"/>
-            </a:solidFill>
-            <a:prstDash val="solid"/>
-          </a:ln>
-        </p:spPr>
-      </p:sp>
-      <p:pic>
-        <p:nvPicPr>
-          <p:cNvPr id="20" name="Image 2" descr="preencoded.png">    </p:cNvPr>
-          <p:cNvPicPr>
-            <a:picLocks noChangeAspect="1"/>
-          </p:cNvPicPr>
-          <p:nvPr/>
-        </p:nvPicPr>
-        <p:blipFill>
-          <a:blip r:embed="rId3"/>
-          <a:stretch>
-            <a:fillRect/>
-          </a:stretch>
-        </p:blipFill>
-        <p:spPr>
-          <a:xfrm>
-            <a:off x="6506870" y="2117750"/>
-            <a:ext cx="336499" cy="336499"/>
-          </a:xfrm>
-          <a:prstGeom prst="rect">
-            <a:avLst/>
-          </a:prstGeom>
-        </p:spPr>
-      </p:pic>
-      <p:sp>
-        <p:nvSpPr>
-          <p:cNvPr id="21" name="Text 15"/>
+              <a:t>Como orden, es válida.</a:t>
+            </a:r>
+            <a:endParaRPr lang="en-US" sz="1500" dirty="0"/>
+          </a:p>
+        </p:txBody>
+      </p:sp>
+      <p:sp>
+        <p:nvSpPr>
+          <p:cNvPr id="11" name="Text 9"/>
           <p:cNvSpPr txBox="1"/>
           <p:nvPr/>
         </p:nvSpPr>
         <p:spPr>
           <a:xfrm>
-            <a:off x="6309360" y="2834640"/>
-            <a:ext cx="2103120" cy="365760"/>
+            <a:off x="548640" y="4480560"/>
+            <a:ext cx="8046720" cy="274320"/>
           </a:xfrm>
           <a:prstGeom prst="rect">
             <a:avLst/>
@@ -9056,95 +8155,17 @@
               <a:buNone/>
             </a:pPr>
             <a:r>
-              <a:rPr lang="en-US" sz="2000" b="1" dirty="0">
-                <a:solidFill>
-                  <a:srgbClr val="2F3E4E"/>
+              <a:rPr lang="en-US" sz="1300" dirty="0">
+                <a:solidFill>
+                  <a:srgbClr val="5F6E80"/>
                 </a:solidFill>
                 <a:latin typeface="Calibri" pitchFamily="34" charset="0"/>
                 <a:ea typeface="Calibri" pitchFamily="34" charset="-122"/>
                 <a:cs typeface="Calibri" pitchFamily="34" charset="-120"/>
               </a:rPr>
-              <a:t>Distributiva</a:t>
-            </a:r>
-            <a:endParaRPr lang="en-US" sz="2000" dirty="0"/>
-          </a:p>
-        </p:txBody>
-      </p:sp>
-      <p:sp>
-        <p:nvSpPr>
-          <p:cNvPr id="22" name="Text 16"/>
-          <p:cNvSpPr txBox="1"/>
-          <p:nvPr/>
-        </p:nvSpPr>
-        <p:spPr>
-          <a:xfrm>
-            <a:off x="6309360" y="3291840"/>
-            <a:ext cx="2103120" cy="640080"/>
-          </a:xfrm>
-          <a:prstGeom prst="rect">
-            <a:avLst/>
-          </a:prstGeom>
-          <a:noFill/>
-          <a:ln/>
-        </p:spPr>
-        <p:txBody>
-          <a:bodyPr wrap="square" lIns="0" tIns="0" rIns="0" bIns="0" rtlCol="0" anchor="t"/>
-          <a:lstStyle/>
-          <a:p>
-            <a:pPr indent="0" marL="0">
-              <a:buNone/>
-            </a:pPr>
-            <a:r>
-              <a:rPr lang="en-US" sz="1600" dirty="0">
-                <a:solidFill>
-                  <a:srgbClr val="2F3E4E"/>
-                </a:solidFill>
-                <a:latin typeface="Calibri" pitchFamily="34" charset="0"/>
-                <a:ea typeface="Calibri" pitchFamily="34" charset="-122"/>
-                <a:cs typeface="Calibri" pitchFamily="34" charset="-120"/>
-              </a:rPr>
-              <a:t>a(b + c) = ab + ac</a:t>
-            </a:r>
-            <a:endParaRPr lang="en-US" sz="1600" dirty="0"/>
-          </a:p>
-        </p:txBody>
-      </p:sp>
-      <p:sp>
-        <p:nvSpPr>
-          <p:cNvPr id="23" name="Text 17"/>
-          <p:cNvSpPr txBox="1"/>
-          <p:nvPr/>
-        </p:nvSpPr>
-        <p:spPr>
-          <a:xfrm>
-            <a:off x="6309360" y="3977640"/>
-            <a:ext cx="2103120" cy="457200"/>
-          </a:xfrm>
-          <a:prstGeom prst="rect">
-            <a:avLst/>
-          </a:prstGeom>
-          <a:noFill/>
-          <a:ln/>
-        </p:spPr>
-        <p:txBody>
-          <a:bodyPr wrap="square" lIns="0" tIns="0" rIns="0" bIns="0" rtlCol="0" anchor="t"/>
-          <a:lstStyle/>
-          <a:p>
-            <a:pPr indent="0" marL="0">
-              <a:buNone/>
-            </a:pPr>
-            <a:r>
-              <a:rPr lang="en-US" sz="1400" dirty="0">
-                <a:solidFill>
-                  <a:srgbClr val="5F6E80"/>
-                </a:solidFill>
-                <a:latin typeface="Calibri" pitchFamily="34" charset="0"/>
-                <a:ea typeface="Calibri" pitchFamily="34" charset="-122"/>
-                <a:cs typeface="Calibri" pitchFamily="34" charset="-120"/>
-              </a:rPr>
-              <a:t>3(x + 4) = 3x + 12</a:t>
-            </a:r>
-            <a:endParaRPr lang="en-US" sz="1400" dirty="0"/>
+              <a:t>Si a vale 3 y ejecutas la orden "suma 1 a a", a pasa a valer 4.</a:t>
+            </a:r>
+            <a:endParaRPr lang="en-US" sz="1300" dirty="0"/>
           </a:p>
         </p:txBody>
       </p:sp>
@@ -9213,7 +8234,7 @@
                 <a:ea typeface="Cambria" pitchFamily="34" charset="-122"/>
                 <a:cs typeface="Cambria" pitchFamily="34" charset="-120"/>
               </a:rPr>
-              <a:t>La distributiva en acción</a:t>
+              <a:t>Propiedades para simplificar</a:t>
             </a:r>
             <a:endParaRPr lang="en-US" sz="3000" dirty="0"/>
           </a:p>
@@ -9252,7 +8273,7 @@
                 <a:ea typeface="Calibri" pitchFamily="34" charset="-122"/>
                 <a:cs typeface="Calibri" pitchFamily="34" charset="-120"/>
               </a:rPr>
-              <a:t>El número de afuera multiplica a cada término de adentro</a:t>
+              <a:t>Cambian la forma de escribir, no el valor</a:t>
             </a:r>
             <a:endParaRPr lang="en-US" sz="1600" dirty="0"/>
           </a:p>
@@ -9299,18 +8320,18 @@
       </p:sp>
       <p:sp>
         <p:nvSpPr>
-          <p:cNvPr id="6" name="Shape 3"/>
+          <p:cNvPr id="5" name="Shape 3"/>
           <p:cNvSpPr/>
           <p:nvPr/>
         </p:nvSpPr>
         <p:spPr>
           <a:xfrm>
-            <a:off x="548640" y="1828800"/>
-            <a:ext cx="2926080" cy="1097280"/>
+            <a:off x="548640" y="1645920"/>
+            <a:ext cx="2560320" cy="2377440"/>
           </a:xfrm>
           <a:prstGeom prst="roundRect">
             <a:avLst>
-              <a:gd name="adj" fmla="val 10000"/>
+              <a:gd name="adj" fmla="val 4615"/>
             </a:avLst>
           </a:prstGeom>
           <a:solidFill>
@@ -9326,55 +8347,16 @@
       </p:sp>
       <p:sp>
         <p:nvSpPr>
-          <p:cNvPr id="7" name="Text 4"/>
-          <p:cNvSpPr txBox="1"/>
-          <p:nvPr/>
-        </p:nvSpPr>
-        <p:spPr>
-          <a:xfrm>
-            <a:off x="548640" y="1828800"/>
-            <a:ext cx="2926080" cy="1097280"/>
-          </a:xfrm>
-          <a:prstGeom prst="rect">
-            <a:avLst/>
-          </a:prstGeom>
-          <a:noFill/>
-          <a:ln/>
-        </p:spPr>
-        <p:txBody>
-          <a:bodyPr wrap="square" lIns="0" tIns="0" rIns="0" bIns="0" rtlCol="0" anchor="ctr"/>
-          <a:lstStyle/>
-          <a:p>
-            <a:pPr algn="ctr" indent="0" marL="0">
-              <a:buNone/>
-            </a:pPr>
-            <a:r>
-              <a:rPr lang="en-US" sz="2600" b="1" dirty="0">
-                <a:solidFill>
-                  <a:srgbClr val="2F3E4E"/>
-                </a:solidFill>
-                <a:latin typeface="Calibri" pitchFamily="34" charset="0"/>
-                <a:ea typeface="Calibri" pitchFamily="34" charset="-122"/>
-                <a:cs typeface="Calibri" pitchFamily="34" charset="-120"/>
-              </a:rPr>
-              <a:t>3(x + 4)</a:t>
-            </a:r>
-            <a:endParaRPr lang="en-US" sz="2600" dirty="0"/>
-          </a:p>
-        </p:txBody>
-      </p:sp>
-      <p:sp>
-        <p:nvSpPr>
-          <p:cNvPr id="8" name="Shape 5"/>
+          <p:cNvPr id="6" name="Shape 4"/>
           <p:cNvSpPr/>
           <p:nvPr/>
         </p:nvSpPr>
         <p:spPr>
           <a:xfrm>
-            <a:off x="3657600" y="2194560"/>
-            <a:ext cx="822960" cy="365760"/>
-          </a:xfrm>
-          <a:prstGeom prst="rightArrow">
+            <a:off x="731520" y="1828800"/>
+            <a:ext cx="548640" cy="548640"/>
+          </a:xfrm>
+          <a:prstGeom prst="ellipse">
             <a:avLst/>
           </a:prstGeom>
           <a:solidFill>
@@ -9388,20 +8370,156 @@
           </a:ln>
         </p:spPr>
       </p:sp>
-      <p:sp>
-        <p:nvSpPr>
-          <p:cNvPr id="9" name="Shape 6"/>
+      <p:pic>
+        <p:nvPicPr>
+          <p:cNvPr id="7" name="Image 0" descr="preencoded.png">    </p:cNvPr>
+          <p:cNvPicPr>
+            <a:picLocks noChangeAspect="1"/>
+          </p:cNvPicPr>
+          <p:nvPr/>
+        </p:nvPicPr>
+        <p:blipFill>
+          <a:blip r:embed="rId1"/>
+          <a:stretch>
+            <a:fillRect/>
+          </a:stretch>
+        </p:blipFill>
+        <p:spPr>
+          <a:xfrm>
+            <a:off x="879653" y="1976933"/>
+            <a:ext cx="252374" cy="252374"/>
+          </a:xfrm>
+          <a:prstGeom prst="rect">
+            <a:avLst/>
+          </a:prstGeom>
+        </p:spPr>
+      </p:pic>
+      <p:sp>
+        <p:nvSpPr>
+          <p:cNvPr id="8" name="Text 5"/>
+          <p:cNvSpPr txBox="1"/>
+          <p:nvPr/>
+        </p:nvSpPr>
+        <p:spPr>
+          <a:xfrm>
+            <a:off x="731520" y="2514600"/>
+            <a:ext cx="2194560" cy="548640"/>
+          </a:xfrm>
+          <a:prstGeom prst="rect">
+            <a:avLst/>
+          </a:prstGeom>
+          <a:noFill/>
+          <a:ln/>
+        </p:spPr>
+        <p:txBody>
+          <a:bodyPr wrap="square" lIns="0" tIns="0" rIns="0" bIns="0" rtlCol="0" anchor="t"/>
+          <a:lstStyle/>
+          <a:p>
+            <a:pPr indent="0" marL="0">
+              <a:buNone/>
+            </a:pPr>
+            <a:r>
+              <a:rPr lang="en-US" sz="1600" b="1" dirty="0">
+                <a:solidFill>
+                  <a:srgbClr val="2F3E4E"/>
+                </a:solidFill>
+                <a:latin typeface="Calibri" pitchFamily="34" charset="0"/>
+                <a:ea typeface="Calibri" pitchFamily="34" charset="-122"/>
+                <a:cs typeface="Calibri" pitchFamily="34" charset="-120"/>
+              </a:rPr>
+              <a:t>Conmutativa</a:t>
+            </a:r>
+            <a:endParaRPr lang="en-US" sz="1600" dirty="0"/>
+          </a:p>
+        </p:txBody>
+      </p:sp>
+      <p:sp>
+        <p:nvSpPr>
+          <p:cNvPr id="9" name="Text 6"/>
+          <p:cNvSpPr txBox="1"/>
+          <p:nvPr/>
+        </p:nvSpPr>
+        <p:spPr>
+          <a:xfrm>
+            <a:off x="731520" y="3108960"/>
+            <a:ext cx="2194560" cy="868680"/>
+          </a:xfrm>
+          <a:prstGeom prst="rect">
+            <a:avLst/>
+          </a:prstGeom>
+          <a:noFill/>
+          <a:ln/>
+        </p:spPr>
+        <p:txBody>
+          <a:bodyPr wrap="square" lIns="0" tIns="0" rIns="0" bIns="0" rtlCol="0" anchor="t"/>
+          <a:lstStyle/>
+          <a:p>
+            <a:pPr indent="0" marL="0">
+              <a:buNone/>
+            </a:pPr>
+            <a:r>
+              <a:rPr lang="en-US" sz="1300" dirty="0">
+                <a:solidFill>
+                  <a:srgbClr val="2F3E4E"/>
+                </a:solidFill>
+                <a:latin typeface="Calibri" pitchFamily="34" charset="0"/>
+                <a:ea typeface="Calibri" pitchFamily="34" charset="-122"/>
+                <a:cs typeface="Calibri" pitchFamily="34" charset="-120"/>
+              </a:rPr>
+              <a:t>a + b = b + a</a:t>
+            </a:r>
+            <a:endParaRPr lang="en-US" sz="1300" dirty="0"/>
+          </a:p>
+          <a:p>
+            <a:pPr indent="0" marL="0">
+              <a:buNone/>
+            </a:pPr>
+            <a:r>
+              <a:rPr lang="en-US" sz="1300" dirty="0">
+                <a:solidFill>
+                  <a:srgbClr val="2F3E4E"/>
+                </a:solidFill>
+                <a:latin typeface="Calibri" pitchFamily="34" charset="0"/>
+                <a:ea typeface="Calibri" pitchFamily="34" charset="-122"/>
+                <a:cs typeface="Calibri" pitchFamily="34" charset="-120"/>
+              </a:rPr>
+              <a:t>a · b = b · a</a:t>
+            </a:r>
+            <a:endParaRPr lang="en-US" sz="1300" dirty="0"/>
+          </a:p>
+          <a:p>
+            <a:pPr indent="0" marL="0">
+              <a:buNone/>
+            </a:pPr>
+            <a:r>
+              <a:rPr lang="en-US" sz="1300" dirty="0">
+                <a:solidFill>
+                  <a:srgbClr val="2F3E4E"/>
+                </a:solidFill>
+                <a:latin typeface="Calibri" pitchFamily="34" charset="0"/>
+                <a:ea typeface="Calibri" pitchFamily="34" charset="-122"/>
+                <a:cs typeface="Calibri" pitchFamily="34" charset="-120"/>
+              </a:rPr>
+              <a:t>Ejemplo: 3 + x = x + 3</a:t>
+            </a:r>
+            <a:endParaRPr lang="en-US" sz="1300" dirty="0"/>
+          </a:p>
+        </p:txBody>
+      </p:sp>
+      <p:sp>
+        <p:nvSpPr>
+          <p:cNvPr id="10" name="Shape 7"/>
           <p:cNvSpPr/>
           <p:nvPr/>
         </p:nvSpPr>
         <p:spPr>
           <a:xfrm>
-            <a:off x="4663440" y="1828800"/>
-            <a:ext cx="2926080" cy="1097280"/>
+            <a:off x="3291840" y="1645920"/>
+            <a:ext cx="2560320" cy="2377440"/>
           </a:xfrm>
           <a:prstGeom prst="roundRect">
             <a:avLst>
-              <a:gd name="adj" fmla="val 10000"/>
+              <a:gd name="adj" fmla="val 4615"/>
             </a:avLst>
           </a:prstGeom>
           <a:solidFill>
@@ -9417,14 +8535,63 @@
       </p:sp>
       <p:sp>
         <p:nvSpPr>
-          <p:cNvPr id="10" name="Text 7"/>
+          <p:cNvPr id="11" name="Shape 8"/>
+          <p:cNvSpPr/>
+          <p:nvPr/>
+        </p:nvSpPr>
+        <p:spPr>
+          <a:xfrm>
+            <a:off x="3474720" y="1828800"/>
+            <a:ext cx="548640" cy="548640"/>
+          </a:xfrm>
+          <a:prstGeom prst="ellipse">
+            <a:avLst/>
+          </a:prstGeom>
+          <a:solidFill>
+            <a:srgbClr val="6FA287"/>
+          </a:solidFill>
+          <a:ln w="12700">
+            <a:solidFill>
+              <a:srgbClr val="6FA287"/>
+            </a:solidFill>
+            <a:prstDash val="solid"/>
+          </a:ln>
+        </p:spPr>
+      </p:sp>
+      <p:pic>
+        <p:nvPicPr>
+          <p:cNvPr id="12" name="Image 1" descr="preencoded.png">    </p:cNvPr>
+          <p:cNvPicPr>
+            <a:picLocks noChangeAspect="1"/>
+          </p:cNvPicPr>
+          <p:nvPr/>
+        </p:nvPicPr>
+        <p:blipFill>
+          <a:blip r:embed="rId2"/>
+          <a:stretch>
+            <a:fillRect/>
+          </a:stretch>
+        </p:blipFill>
+        <p:spPr>
+          <a:xfrm>
+            <a:off x="3622853" y="1976933"/>
+            <a:ext cx="252374" cy="252374"/>
+          </a:xfrm>
+          <a:prstGeom prst="rect">
+            <a:avLst/>
+          </a:prstGeom>
+        </p:spPr>
+      </p:pic>
+      <p:sp>
+        <p:nvSpPr>
+          <p:cNvPr id="13" name="Text 9"/>
           <p:cNvSpPr txBox="1"/>
           <p:nvPr/>
         </p:nvSpPr>
         <p:spPr>
           <a:xfrm>
-            <a:off x="4663440" y="1828800"/>
-            <a:ext cx="2926080" cy="1097280"/>
+            <a:off x="3474720" y="2514600"/>
+            <a:ext cx="2194560" cy="548640"/>
           </a:xfrm>
           <a:prstGeom prst="rect">
             <a:avLst/>
@@ -9433,14 +8600,14 @@
           <a:ln/>
         </p:spPr>
         <p:txBody>
-          <a:bodyPr wrap="square" lIns="0" tIns="0" rIns="0" bIns="0" rtlCol="0" anchor="ctr"/>
-          <a:lstStyle/>
-          <a:p>
-            <a:pPr algn="ctr" indent="0" marL="0">
+          <a:bodyPr wrap="square" lIns="0" tIns="0" rIns="0" bIns="0" rtlCol="0" anchor="t"/>
+          <a:lstStyle/>
+          <a:p>
+            <a:pPr indent="0" marL="0">
               <a:buNone/>
             </a:pPr>
             <a:r>
-              <a:rPr lang="en-US" sz="2600" b="1" dirty="0">
+              <a:rPr lang="en-US" sz="1600" b="1" dirty="0">
                 <a:solidFill>
                   <a:srgbClr val="2F3E4E"/>
                 </a:solidFill>
@@ -9448,22 +8615,22 @@
                 <a:ea typeface="Calibri" pitchFamily="34" charset="-122"/>
                 <a:cs typeface="Calibri" pitchFamily="34" charset="-120"/>
               </a:rPr>
-              <a:t>3x + 12</a:t>
-            </a:r>
-            <a:endParaRPr lang="en-US" sz="2600" dirty="0"/>
-          </a:p>
-        </p:txBody>
-      </p:sp>
-      <p:sp>
-        <p:nvSpPr>
-          <p:cNvPr id="11" name="Text 8"/>
+              <a:t>Asociativa</a:t>
+            </a:r>
+            <a:endParaRPr lang="en-US" sz="1600" dirty="0"/>
+          </a:p>
+        </p:txBody>
+      </p:sp>
+      <p:sp>
+        <p:nvSpPr>
+          <p:cNvPr id="14" name="Text 10"/>
           <p:cNvSpPr txBox="1"/>
           <p:nvPr/>
         </p:nvSpPr>
         <p:spPr>
           <a:xfrm>
-            <a:off x="548640" y="3383280"/>
-            <a:ext cx="8046720" cy="365760"/>
+            <a:off x="3474720" y="3108960"/>
+            <a:ext cx="2194560" cy="868680"/>
           </a:xfrm>
           <a:prstGeom prst="rect">
             <a:avLst/>
@@ -9479,7 +8646,7 @@
               <a:buNone/>
             </a:pPr>
             <a:r>
-              <a:rPr lang="en-US" sz="1800" b="1" dirty="0">
+              <a:rPr lang="en-US" sz="1300" dirty="0">
                 <a:solidFill>
                   <a:srgbClr val="2F3E4E"/>
                 </a:solidFill>
@@ -9487,48 +8654,236 @@
                 <a:ea typeface="Calibri" pitchFamily="34" charset="-122"/>
                 <a:cs typeface="Calibri" pitchFamily="34" charset="-120"/>
               </a:rPr>
-              <a:t>Comprobación con x = 2</a:t>
-            </a:r>
-            <a:endParaRPr lang="en-US" sz="1800" dirty="0"/>
-          </a:p>
-        </p:txBody>
-      </p:sp>
-      <p:sp>
-        <p:nvSpPr>
-          <p:cNvPr id="12" name="Text 9"/>
-          <p:cNvSpPr txBox="1"/>
-          <p:nvPr/>
-        </p:nvSpPr>
-        <p:spPr>
-          <a:xfrm>
-            <a:off x="548640" y="3794760"/>
-            <a:ext cx="8046720" cy="457200"/>
-          </a:xfrm>
-          <a:prstGeom prst="rect">
-            <a:avLst/>
-          </a:prstGeom>
-          <a:noFill/>
-          <a:ln/>
-        </p:spPr>
-        <p:txBody>
-          <a:bodyPr wrap="square" lIns="0" tIns="0" rIns="0" bIns="0" rtlCol="0" anchor="t"/>
-          <a:lstStyle/>
+              <a:t>(a + b) + c = a + (b + c)</a:t>
+            </a:r>
+            <a:endParaRPr lang="en-US" sz="1300" dirty="0"/>
+          </a:p>
           <a:p>
             <a:pPr indent="0" marL="0">
               <a:buNone/>
             </a:pPr>
             <a:r>
-              <a:rPr lang="en-US" sz="1800" dirty="0">
-                <a:solidFill>
-                  <a:srgbClr val="5F6E80"/>
+              <a:rPr lang="en-US" sz="1300" dirty="0">
+                <a:solidFill>
+                  <a:srgbClr val="2F3E4E"/>
                 </a:solidFill>
                 <a:latin typeface="Calibri" pitchFamily="34" charset="0"/>
                 <a:ea typeface="Calibri" pitchFamily="34" charset="-122"/>
                 <a:cs typeface="Calibri" pitchFamily="34" charset="-120"/>
               </a:rPr>
-              <a:t>3(2 + 4) = 18        3 · 2 + 12 = 18        Son iguales.</a:t>
-            </a:r>
-            <a:endParaRPr lang="en-US" sz="1800" dirty="0"/>
+              <a:t>Ejemplo: (2 + x) + 5 = 2 + (x + 5)</a:t>
+            </a:r>
+            <a:endParaRPr lang="en-US" sz="1300" dirty="0"/>
+          </a:p>
+        </p:txBody>
+      </p:sp>
+      <p:sp>
+        <p:nvSpPr>
+          <p:cNvPr id="15" name="Shape 11"/>
+          <p:cNvSpPr/>
+          <p:nvPr/>
+        </p:nvSpPr>
+        <p:spPr>
+          <a:xfrm>
+            <a:off x="6035040" y="1645920"/>
+            <a:ext cx="2560320" cy="2377440"/>
+          </a:xfrm>
+          <a:prstGeom prst="roundRect">
+            <a:avLst>
+              <a:gd name="adj" fmla="val 4615"/>
+            </a:avLst>
+          </a:prstGeom>
+          <a:solidFill>
+            <a:srgbClr val="FBEADC"/>
+          </a:solidFill>
+          <a:ln w="12700">
+            <a:solidFill>
+              <a:srgbClr val="FBEADC"/>
+            </a:solidFill>
+            <a:prstDash val="solid"/>
+          </a:ln>
+        </p:spPr>
+      </p:sp>
+      <p:sp>
+        <p:nvSpPr>
+          <p:cNvPr id="16" name="Shape 12"/>
+          <p:cNvSpPr/>
+          <p:nvPr/>
+        </p:nvSpPr>
+        <p:spPr>
+          <a:xfrm>
+            <a:off x="6217920" y="1828800"/>
+            <a:ext cx="548640" cy="548640"/>
+          </a:xfrm>
+          <a:prstGeom prst="ellipse">
+            <a:avLst/>
+          </a:prstGeom>
+          <a:solidFill>
+            <a:srgbClr val="E39B6B"/>
+          </a:solidFill>
+          <a:ln w="12700">
+            <a:solidFill>
+              <a:srgbClr val="E39B6B"/>
+            </a:solidFill>
+            <a:prstDash val="solid"/>
+          </a:ln>
+        </p:spPr>
+      </p:sp>
+      <p:pic>
+        <p:nvPicPr>
+          <p:cNvPr id="17" name="Image 2" descr="preencoded.png">    </p:cNvPr>
+          <p:cNvPicPr>
+            <a:picLocks noChangeAspect="1"/>
+          </p:cNvPicPr>
+          <p:nvPr/>
+        </p:nvPicPr>
+        <p:blipFill>
+          <a:blip r:embed="rId3"/>
+          <a:stretch>
+            <a:fillRect/>
+          </a:stretch>
+        </p:blipFill>
+        <p:spPr>
+          <a:xfrm>
+            <a:off x="6366053" y="1976933"/>
+            <a:ext cx="252374" cy="252374"/>
+          </a:xfrm>
+          <a:prstGeom prst="rect">
+            <a:avLst/>
+          </a:prstGeom>
+        </p:spPr>
+      </p:pic>
+      <p:sp>
+        <p:nvSpPr>
+          <p:cNvPr id="18" name="Text 13"/>
+          <p:cNvSpPr txBox="1"/>
+          <p:nvPr/>
+        </p:nvSpPr>
+        <p:spPr>
+          <a:xfrm>
+            <a:off x="6217920" y="2514600"/>
+            <a:ext cx="2194560" cy="548640"/>
+          </a:xfrm>
+          <a:prstGeom prst="rect">
+            <a:avLst/>
+          </a:prstGeom>
+          <a:noFill/>
+          <a:ln/>
+        </p:spPr>
+        <p:txBody>
+          <a:bodyPr wrap="square" lIns="0" tIns="0" rIns="0" bIns="0" rtlCol="0" anchor="t"/>
+          <a:lstStyle/>
+          <a:p>
+            <a:pPr indent="0" marL="0">
+              <a:buNone/>
+            </a:pPr>
+            <a:r>
+              <a:rPr lang="en-US" sz="1600" b="1" dirty="0">
+                <a:solidFill>
+                  <a:srgbClr val="2F3E4E"/>
+                </a:solidFill>
+                <a:latin typeface="Calibri" pitchFamily="34" charset="0"/>
+                <a:ea typeface="Calibri" pitchFamily="34" charset="-122"/>
+                <a:cs typeface="Calibri" pitchFamily="34" charset="-120"/>
+              </a:rPr>
+              <a:t>Distributiva</a:t>
+            </a:r>
+            <a:endParaRPr lang="en-US" sz="1600" dirty="0"/>
+          </a:p>
+        </p:txBody>
+      </p:sp>
+      <p:sp>
+        <p:nvSpPr>
+          <p:cNvPr id="19" name="Text 14"/>
+          <p:cNvSpPr txBox="1"/>
+          <p:nvPr/>
+        </p:nvSpPr>
+        <p:spPr>
+          <a:xfrm>
+            <a:off x="6217920" y="3108960"/>
+            <a:ext cx="2194560" cy="868680"/>
+          </a:xfrm>
+          <a:prstGeom prst="rect">
+            <a:avLst/>
+          </a:prstGeom>
+          <a:noFill/>
+          <a:ln/>
+        </p:spPr>
+        <p:txBody>
+          <a:bodyPr wrap="square" lIns="0" tIns="0" rIns="0" bIns="0" rtlCol="0" anchor="t"/>
+          <a:lstStyle/>
+          <a:p>
+            <a:pPr indent="0" marL="0">
+              <a:buNone/>
+            </a:pPr>
+            <a:r>
+              <a:rPr lang="en-US" sz="1300" dirty="0">
+                <a:solidFill>
+                  <a:srgbClr val="2F3E4E"/>
+                </a:solidFill>
+                <a:latin typeface="Calibri" pitchFamily="34" charset="0"/>
+                <a:ea typeface="Calibri" pitchFamily="34" charset="-122"/>
+                <a:cs typeface="Calibri" pitchFamily="34" charset="-120"/>
+              </a:rPr>
+              <a:t>a(b + c) = ab + ac</a:t>
+            </a:r>
+            <a:endParaRPr lang="en-US" sz="1300" dirty="0"/>
+          </a:p>
+          <a:p>
+            <a:pPr indent="0" marL="0">
+              <a:buNone/>
+            </a:pPr>
+            <a:r>
+              <a:rPr lang="en-US" sz="1300" dirty="0">
+                <a:solidFill>
+                  <a:srgbClr val="2F3E4E"/>
+                </a:solidFill>
+                <a:latin typeface="Calibri" pitchFamily="34" charset="0"/>
+                <a:ea typeface="Calibri" pitchFamily="34" charset="-122"/>
+                <a:cs typeface="Calibri" pitchFamily="34" charset="-120"/>
+              </a:rPr>
+              <a:t>Ejemplo: 3(x + 4) = 3x + 12</a:t>
+            </a:r>
+            <a:endParaRPr lang="en-US" sz="1300" dirty="0"/>
+          </a:p>
+        </p:txBody>
+      </p:sp>
+      <p:sp>
+        <p:nvSpPr>
+          <p:cNvPr id="20" name="Text 15"/>
+          <p:cNvSpPr txBox="1"/>
+          <p:nvPr/>
+        </p:nvSpPr>
+        <p:spPr>
+          <a:xfrm>
+            <a:off x="548640" y="4206240"/>
+            <a:ext cx="8046720" cy="365760"/>
+          </a:xfrm>
+          <a:prstGeom prst="rect">
+            <a:avLst/>
+          </a:prstGeom>
+          <a:noFill/>
+          <a:ln/>
+        </p:spPr>
+        <p:txBody>
+          <a:bodyPr wrap="square" lIns="0" tIns="0" rIns="0" bIns="0" rtlCol="0" anchor="t"/>
+          <a:lstStyle/>
+          <a:p>
+            <a:pPr indent="0" marL="0">
+              <a:buNone/>
+            </a:pPr>
+            <a:r>
+              <a:rPr lang="en-US" sz="1600" b="1" dirty="0">
+                <a:solidFill>
+                  <a:srgbClr val="2F3E4E"/>
+                </a:solidFill>
+                <a:latin typeface="Calibri" pitchFamily="34" charset="0"/>
+                <a:ea typeface="Calibri" pitchFamily="34" charset="-122"/>
+                <a:cs typeface="Calibri" pitchFamily="34" charset="-120"/>
+              </a:rPr>
+              <a:t>Simplificar es agrupar términos semejantes:  2(x + 3) − x = x + 6</a:t>
+            </a:r>
+            <a:endParaRPr lang="en-US" sz="1600" dirty="0"/>
           </a:p>
         </p:txBody>
       </p:sp>
@@ -9597,7 +8952,7 @@
                 <a:ea typeface="Cambria" pitchFamily="34" charset="-122"/>
                 <a:cs typeface="Cambria" pitchFamily="34" charset="-120"/>
               </a:rPr>
-              <a:t>Una ecuación es una balanza</a:t>
+              <a:t>La distributiva en acción</a:t>
             </a:r>
             <a:endParaRPr lang="en-US" sz="3000" dirty="0"/>
           </a:p>
@@ -9636,7 +8991,7 @@
                 <a:ea typeface="Calibri" pitchFamily="34" charset="-122"/>
                 <a:cs typeface="Calibri" pitchFamily="34" charset="-120"/>
               </a:rPr>
-              <a:t>Lo que haces de un lado, lo haces del otro</a:t>
+              <a:t>El número de afuera multiplica a cada término de adentro</a:t>
             </a:r>
             <a:endParaRPr lang="en-US" sz="1600" dirty="0"/>
           </a:p>
@@ -9683,114 +9038,18 @@
       </p:sp>
       <p:sp>
         <p:nvSpPr>
-          <p:cNvPr id="6" name="Shape 3"/>
+          <p:cNvPr id="5" name="Shape 3"/>
           <p:cNvSpPr/>
           <p:nvPr/>
         </p:nvSpPr>
         <p:spPr>
           <a:xfrm>
-            <a:off x="4206240" y="2743200"/>
-            <a:ext cx="731520" cy="914400"/>
-          </a:xfrm>
-          <a:prstGeom prst="triangle">
-            <a:avLst/>
-          </a:prstGeom>
-          <a:solidFill>
-            <a:srgbClr val="2F3E4E"/>
-          </a:solidFill>
-          <a:ln w="12700">
-            <a:solidFill>
-              <a:srgbClr val="2F3E4E"/>
-            </a:solidFill>
-            <a:prstDash val="solid"/>
-          </a:ln>
-        </p:spPr>
-      </p:sp>
-      <p:sp>
-        <p:nvSpPr>
-          <p:cNvPr id="7" name="Shape 4"/>
-          <p:cNvSpPr/>
-          <p:nvPr/>
-        </p:nvSpPr>
-        <p:spPr>
-          <a:xfrm>
-            <a:off x="1463040" y="2651760"/>
-            <a:ext cx="6217920" cy="109728"/>
-          </a:xfrm>
-          <a:prstGeom prst="rect">
-            <a:avLst/>
-          </a:prstGeom>
-          <a:solidFill>
-            <a:srgbClr val="2F3E4E"/>
-          </a:solidFill>
-          <a:ln w="12700">
-            <a:solidFill>
-              <a:srgbClr val="2F3E4E"/>
-            </a:solidFill>
-            <a:prstDash val="solid"/>
-          </a:ln>
-        </p:spPr>
-      </p:sp>
-      <p:sp>
-        <p:nvSpPr>
-          <p:cNvPr id="8" name="Shape 5"/>
-          <p:cNvSpPr/>
-          <p:nvPr/>
-        </p:nvSpPr>
-        <p:spPr>
-          <a:xfrm>
-            <a:off x="1920240" y="2761488"/>
-            <a:ext cx="0" cy="438912"/>
-          </a:xfrm>
-          <a:prstGeom prst="line">
-            <a:avLst/>
-          </a:prstGeom>
-          <a:noFill/>
-          <a:ln w="19050">
-            <a:solidFill>
-              <a:srgbClr val="2F3E4E"/>
-            </a:solidFill>
-            <a:prstDash val="solid"/>
-          </a:ln>
-        </p:spPr>
-      </p:sp>
-      <p:sp>
-        <p:nvSpPr>
-          <p:cNvPr id="9" name="Shape 6"/>
-          <p:cNvSpPr/>
-          <p:nvPr/>
-        </p:nvSpPr>
-        <p:spPr>
-          <a:xfrm>
-            <a:off x="7223760" y="2761488"/>
-            <a:ext cx="0" cy="438912"/>
-          </a:xfrm>
-          <a:prstGeom prst="line">
-            <a:avLst/>
-          </a:prstGeom>
-          <a:noFill/>
-          <a:ln w="19050">
-            <a:solidFill>
-              <a:srgbClr val="2F3E4E"/>
-            </a:solidFill>
-            <a:prstDash val="solid"/>
-          </a:ln>
-        </p:spPr>
-      </p:sp>
-      <p:sp>
-        <p:nvSpPr>
-          <p:cNvPr id="10" name="Shape 7"/>
-          <p:cNvSpPr/>
-          <p:nvPr/>
-        </p:nvSpPr>
-        <p:spPr>
-          <a:xfrm>
-            <a:off x="914400" y="3200400"/>
-            <a:ext cx="2011680" cy="731520"/>
+            <a:off x="548640" y="1828800"/>
+            <a:ext cx="2926080" cy="1097280"/>
           </a:xfrm>
           <a:prstGeom prst="roundRect">
             <a:avLst>
-              <a:gd name="adj" fmla="val 15000"/>
+              <a:gd name="adj" fmla="val 10000"/>
             </a:avLst>
           </a:prstGeom>
           <a:solidFill>
@@ -9806,14 +9065,14 @@
       </p:sp>
       <p:sp>
         <p:nvSpPr>
-          <p:cNvPr id="11" name="Text 8"/>
+          <p:cNvPr id="6" name="Text 4"/>
           <p:cNvSpPr txBox="1"/>
           <p:nvPr/>
         </p:nvSpPr>
         <p:spPr>
           <a:xfrm>
-            <a:off x="914400" y="3200400"/>
-            <a:ext cx="2011680" cy="731520"/>
+            <a:off x="548640" y="1828800"/>
+            <a:ext cx="2926080" cy="1097280"/>
           </a:xfrm>
           <a:prstGeom prst="rect">
             <a:avLst/>
@@ -9829,7 +9088,7 @@
               <a:buNone/>
             </a:pPr>
             <a:r>
-              <a:rPr lang="en-US" sz="2200" b="1" dirty="0">
+              <a:rPr lang="en-US" sz="2600" b="1" dirty="0">
                 <a:solidFill>
                   <a:srgbClr val="2F3E4E"/>
                 </a:solidFill>
@@ -9837,26 +9096,51 @@
                 <a:ea typeface="Calibri" pitchFamily="34" charset="-122"/>
                 <a:cs typeface="Calibri" pitchFamily="34" charset="-120"/>
               </a:rPr>
-              <a:t>x + 5</a:t>
-            </a:r>
-            <a:endParaRPr lang="en-US" sz="2200" dirty="0"/>
-          </a:p>
-        </p:txBody>
-      </p:sp>
-      <p:sp>
-        <p:nvSpPr>
-          <p:cNvPr id="12" name="Shape 9"/>
+              <a:t>3(x + 4)</a:t>
+            </a:r>
+            <a:endParaRPr lang="en-US" sz="2600" dirty="0"/>
+          </a:p>
+        </p:txBody>
+      </p:sp>
+      <p:sp>
+        <p:nvSpPr>
+          <p:cNvPr id="7" name="Shape 5"/>
           <p:cNvSpPr/>
           <p:nvPr/>
         </p:nvSpPr>
         <p:spPr>
           <a:xfrm>
-            <a:off x="6217920" y="3200400"/>
-            <a:ext cx="2011680" cy="731520"/>
+            <a:off x="3657600" y="2194560"/>
+            <a:ext cx="822960" cy="365760"/>
+          </a:xfrm>
+          <a:prstGeom prst="rightArrow">
+            <a:avLst/>
+          </a:prstGeom>
+          <a:solidFill>
+            <a:srgbClr val="4F7CAC"/>
+          </a:solidFill>
+          <a:ln w="12700">
+            <a:solidFill>
+              <a:srgbClr val="4F7CAC"/>
+            </a:solidFill>
+            <a:prstDash val="solid"/>
+          </a:ln>
+        </p:spPr>
+      </p:sp>
+      <p:sp>
+        <p:nvSpPr>
+          <p:cNvPr id="8" name="Shape 6"/>
+          <p:cNvSpPr/>
+          <p:nvPr/>
+        </p:nvSpPr>
+        <p:spPr>
+          <a:xfrm>
+            <a:off x="4663440" y="1828800"/>
+            <a:ext cx="2926080" cy="1097280"/>
           </a:xfrm>
           <a:prstGeom prst="roundRect">
             <a:avLst>
-              <a:gd name="adj" fmla="val 15000"/>
+              <a:gd name="adj" fmla="val 10000"/>
             </a:avLst>
           </a:prstGeom>
           <a:solidFill>
@@ -9872,14 +9156,14 @@
       </p:sp>
       <p:sp>
         <p:nvSpPr>
-          <p:cNvPr id="13" name="Text 10"/>
+          <p:cNvPr id="9" name="Text 7"/>
           <p:cNvSpPr txBox="1"/>
           <p:nvPr/>
         </p:nvSpPr>
         <p:spPr>
           <a:xfrm>
-            <a:off x="6217920" y="3200400"/>
-            <a:ext cx="2011680" cy="731520"/>
+            <a:off x="4663440" y="1828800"/>
+            <a:ext cx="2926080" cy="1097280"/>
           </a:xfrm>
           <a:prstGeom prst="rect">
             <a:avLst/>
@@ -9895,7 +9179,7 @@
               <a:buNone/>
             </a:pPr>
             <a:r>
-              <a:rPr lang="en-US" sz="2200" b="1" dirty="0">
+              <a:rPr lang="en-US" sz="2600" b="1" dirty="0">
                 <a:solidFill>
                   <a:srgbClr val="2F3E4E"/>
                 </a:solidFill>
@@ -9903,21 +9187,21 @@
                 <a:ea typeface="Calibri" pitchFamily="34" charset="-122"/>
                 <a:cs typeface="Calibri" pitchFamily="34" charset="-120"/>
               </a:rPr>
-              <a:t>12</a:t>
-            </a:r>
-            <a:endParaRPr lang="en-US" sz="2200" dirty="0"/>
-          </a:p>
-        </p:txBody>
-      </p:sp>
-      <p:sp>
-        <p:nvSpPr>
-          <p:cNvPr id="14" name="Text 11"/>
+              <a:t>3x + 12</a:t>
+            </a:r>
+            <a:endParaRPr lang="en-US" sz="2600" dirty="0"/>
+          </a:p>
+        </p:txBody>
+      </p:sp>
+      <p:sp>
+        <p:nvSpPr>
+          <p:cNvPr id="10" name="Text 8"/>
           <p:cNvSpPr txBox="1"/>
           <p:nvPr/>
         </p:nvSpPr>
         <p:spPr>
           <a:xfrm>
-            <a:off x="548640" y="4206240"/>
+            <a:off x="548640" y="3383280"/>
             <a:ext cx="8046720" cy="365760"/>
           </a:xfrm>
           <a:prstGeom prst="rect">
@@ -9930,19 +9214,58 @@
           <a:bodyPr wrap="square" lIns="0" tIns="0" rIns="0" bIns="0" rtlCol="0" anchor="t"/>
           <a:lstStyle/>
           <a:p>
-            <a:pPr algn="ctr" indent="0" marL="0">
+            <a:pPr indent="0" marL="0">
               <a:buNone/>
             </a:pPr>
             <a:r>
-              <a:rPr lang="en-US" sz="1800" dirty="0">
-                <a:solidFill>
-                  <a:srgbClr val="5F6E80"/>
+              <a:rPr lang="en-US" sz="1800" b="1" dirty="0">
+                <a:solidFill>
+                  <a:srgbClr val="2F3E4E"/>
                 </a:solidFill>
                 <a:latin typeface="Calibri" pitchFamily="34" charset="0"/>
                 <a:ea typeface="Calibri" pitchFamily="34" charset="-122"/>
                 <a:cs typeface="Calibri" pitchFamily="34" charset="-120"/>
               </a:rPr>
-              <a:t>Restar 5 a los dos lados: x = 7</a:t>
+              <a:t>Comprobación con x = 2</a:t>
+            </a:r>
+            <a:endParaRPr lang="en-US" sz="1800" dirty="0"/>
+          </a:p>
+        </p:txBody>
+      </p:sp>
+      <p:sp>
+        <p:nvSpPr>
+          <p:cNvPr id="11" name="Text 9"/>
+          <p:cNvSpPr txBox="1"/>
+          <p:nvPr/>
+        </p:nvSpPr>
+        <p:spPr>
+          <a:xfrm>
+            <a:off x="548640" y="3794760"/>
+            <a:ext cx="8046720" cy="457200"/>
+          </a:xfrm>
+          <a:prstGeom prst="rect">
+            <a:avLst/>
+          </a:prstGeom>
+          <a:noFill/>
+          <a:ln/>
+        </p:spPr>
+        <p:txBody>
+          <a:bodyPr wrap="square" lIns="0" tIns="0" rIns="0" bIns="0" rtlCol="0" anchor="t"/>
+          <a:lstStyle/>
+          <a:p>
+            <a:pPr indent="0" marL="0">
+              <a:buNone/>
+            </a:pPr>
+            <a:r>
+              <a:rPr lang="en-US" sz="1800" dirty="0">
+                <a:solidFill>
+                  <a:srgbClr val="5F6E80"/>
+                </a:solidFill>
+                <a:latin typeface="Calibri" pitchFamily="34" charset="0"/>
+                <a:ea typeface="Calibri" pitchFamily="34" charset="-122"/>
+                <a:cs typeface="Calibri" pitchFamily="34" charset="-120"/>
+              </a:rPr>
+              <a:t>3(2 + 4) = 18        3 · 2 + 12 = 18        Son iguales.</a:t>
             </a:r>
             <a:endParaRPr lang="en-US" sz="1800" dirty="0"/>
           </a:p>
@@ -10013,7 +9336,7 @@
                 <a:ea typeface="Cambria" pitchFamily="34" charset="-122"/>
                 <a:cs typeface="Cambria" pitchFamily="34" charset="-120"/>
               </a:rPr>
-              <a:t>Resolver paso a paso</a:t>
+              <a:t>Cuidado con el signo negativo</a:t>
             </a:r>
             <a:endParaRPr lang="en-US" sz="3000" dirty="0"/>
           </a:p>
@@ -10052,7 +9375,7 @@
                 <a:ea typeface="Calibri" pitchFamily="34" charset="-122"/>
                 <a:cs typeface="Calibri" pitchFamily="34" charset="-120"/>
               </a:rPr>
-              <a:t>Ejemplo: x + 5 = 12</a:t>
+              <a:t>Multiplica el signo por cada término</a:t>
             </a:r>
             <a:endParaRPr lang="en-US" sz="1600" dirty="0"/>
           </a:p>
@@ -10099,18 +9422,18 @@
       </p:sp>
       <p:sp>
         <p:nvSpPr>
-          <p:cNvPr id="6" name="Shape 3"/>
+          <p:cNvPr id="5" name="Shape 3"/>
           <p:cNvSpPr/>
           <p:nvPr/>
         </p:nvSpPr>
         <p:spPr>
           <a:xfrm>
-            <a:off x="548640" y="1645920"/>
-            <a:ext cx="2514600" cy="1737360"/>
+            <a:off x="548640" y="1737360"/>
+            <a:ext cx="2926080" cy="1097280"/>
           </a:xfrm>
           <a:prstGeom prst="roundRect">
             <a:avLst>
-              <a:gd name="adj" fmla="val 6316"/>
+              <a:gd name="adj" fmla="val 10000"/>
             </a:avLst>
           </a:prstGeom>
           <a:solidFill>
@@ -10126,14 +9449,14 @@
       </p:sp>
       <p:sp>
         <p:nvSpPr>
-          <p:cNvPr id="7" name="Text 4"/>
+          <p:cNvPr id="6" name="Text 4"/>
           <p:cNvSpPr txBox="1"/>
           <p:nvPr/>
         </p:nvSpPr>
         <p:spPr>
           <a:xfrm>
-            <a:off x="777240" y="1828800"/>
-            <a:ext cx="2103120" cy="365760"/>
+            <a:off x="548640" y="1737360"/>
+            <a:ext cx="2926080" cy="1097280"/>
           </a:xfrm>
           <a:prstGeom prst="rect">
             <a:avLst/>
@@ -10142,61 +9465,22 @@
           <a:ln/>
         </p:spPr>
         <p:txBody>
-          <a:bodyPr wrap="square" lIns="0" tIns="0" rIns="0" bIns="0" rtlCol="0" anchor="t"/>
-          <a:lstStyle/>
-          <a:p>
-            <a:pPr indent="0" marL="0">
+          <a:bodyPr wrap="square" lIns="0" tIns="0" rIns="0" bIns="0" rtlCol="0" anchor="ctr"/>
+          <a:lstStyle/>
+          <a:p>
+            <a:pPr algn="ctr" indent="0" marL="0">
               <a:buNone/>
             </a:pPr>
             <a:r>
-              <a:rPr lang="en-US" sz="1400" dirty="0">
-                <a:solidFill>
-                  <a:srgbClr val="5F6E80"/>
+              <a:rPr lang="en-US" sz="2600" b="1" dirty="0">
+                <a:solidFill>
+                  <a:srgbClr val="2F3E4E"/>
                 </a:solidFill>
                 <a:latin typeface="Calibri" pitchFamily="34" charset="0"/>
                 <a:ea typeface="Calibri" pitchFamily="34" charset="-122"/>
                 <a:cs typeface="Calibri" pitchFamily="34" charset="-120"/>
               </a:rPr>
-              <a:t>Paso 1</a:t>
-            </a:r>
-            <a:endParaRPr lang="en-US" sz="1400" dirty="0"/>
-          </a:p>
-        </p:txBody>
-      </p:sp>
-      <p:sp>
-        <p:nvSpPr>
-          <p:cNvPr id="8" name="Text 5"/>
-          <p:cNvSpPr txBox="1"/>
-          <p:nvPr/>
-        </p:nvSpPr>
-        <p:spPr>
-          <a:xfrm>
-            <a:off x="777240" y="2286000"/>
-            <a:ext cx="2103120" cy="731520"/>
-          </a:xfrm>
-          <a:prstGeom prst="rect">
-            <a:avLst/>
-          </a:prstGeom>
-          <a:noFill/>
-          <a:ln/>
-        </p:spPr>
-        <p:txBody>
-          <a:bodyPr wrap="square" lIns="0" tIns="0" rIns="0" bIns="0" rtlCol="0" anchor="t"/>
-          <a:lstStyle/>
-          <a:p>
-            <a:pPr indent="0" marL="0">
-              <a:buNone/>
-            </a:pPr>
-            <a:r>
-              <a:rPr lang="en-US" sz="2600" b="1" dirty="0">
-                <a:solidFill>
-                  <a:srgbClr val="2F3E4E"/>
-                </a:solidFill>
-                <a:latin typeface="Calibri" pitchFamily="34" charset="0"/>
-                <a:ea typeface="Calibri" pitchFamily="34" charset="-122"/>
-                <a:cs typeface="Calibri" pitchFamily="34" charset="-120"/>
-              </a:rPr>
-              <a:t>x + 5 = 12</a:t>
+              <a:t>−2(x − 4)</a:t>
             </a:r>
             <a:endParaRPr lang="en-US" sz="2600" dirty="0"/>
           </a:p>
@@ -10204,26 +9488,24 @@
       </p:sp>
       <p:sp>
         <p:nvSpPr>
-          <p:cNvPr id="9" name="Shape 6"/>
+          <p:cNvPr id="7" name="Shape 5"/>
           <p:cNvSpPr/>
           <p:nvPr/>
         </p:nvSpPr>
         <p:spPr>
           <a:xfrm>
-            <a:off x="3337560" y="1645920"/>
-            <a:ext cx="2514600" cy="1737360"/>
-          </a:xfrm>
-          <a:prstGeom prst="roundRect">
-            <a:avLst>
-              <a:gd name="adj" fmla="val 6316"/>
-            </a:avLst>
+            <a:off x="3657600" y="2103120"/>
+            <a:ext cx="822960" cy="365760"/>
+          </a:xfrm>
+          <a:prstGeom prst="rightArrow">
+            <a:avLst/>
           </a:prstGeom>
           <a:solidFill>
-            <a:srgbClr val="ECE8F6"/>
+            <a:srgbClr val="4F7CAC"/>
           </a:solidFill>
           <a:ln w="12700">
             <a:solidFill>
-              <a:srgbClr val="ECE8F6"/>
+              <a:srgbClr val="4F7CAC"/>
             </a:solidFill>
             <a:prstDash val="solid"/>
           </a:ln>
@@ -10231,96 +9513,18 @@
       </p:sp>
       <p:sp>
         <p:nvSpPr>
-          <p:cNvPr id="10" name="Text 7"/>
-          <p:cNvSpPr txBox="1"/>
-          <p:nvPr/>
-        </p:nvSpPr>
-        <p:spPr>
-          <a:xfrm>
-            <a:off x="3566160" y="1828800"/>
-            <a:ext cx="2103120" cy="365760"/>
-          </a:xfrm>
-          <a:prstGeom prst="rect">
-            <a:avLst/>
-          </a:prstGeom>
-          <a:noFill/>
-          <a:ln/>
-        </p:spPr>
-        <p:txBody>
-          <a:bodyPr wrap="square" lIns="0" tIns="0" rIns="0" bIns="0" rtlCol="0" anchor="t"/>
-          <a:lstStyle/>
-          <a:p>
-            <a:pPr indent="0" marL="0">
-              <a:buNone/>
-            </a:pPr>
-            <a:r>
-              <a:rPr lang="en-US" sz="1400" dirty="0">
-                <a:solidFill>
-                  <a:srgbClr val="5F6E80"/>
-                </a:solidFill>
-                <a:latin typeface="Calibri" pitchFamily="34" charset="0"/>
-                <a:ea typeface="Calibri" pitchFamily="34" charset="-122"/>
-                <a:cs typeface="Calibri" pitchFamily="34" charset="-120"/>
-              </a:rPr>
-              <a:t>Paso 2</a:t>
-            </a:r>
-            <a:endParaRPr lang="en-US" sz="1400" dirty="0"/>
-          </a:p>
-        </p:txBody>
-      </p:sp>
-      <p:sp>
-        <p:nvSpPr>
-          <p:cNvPr id="11" name="Text 8"/>
-          <p:cNvSpPr txBox="1"/>
-          <p:nvPr/>
-        </p:nvSpPr>
-        <p:spPr>
-          <a:xfrm>
-            <a:off x="3566160" y="2286000"/>
-            <a:ext cx="2103120" cy="731520"/>
-          </a:xfrm>
-          <a:prstGeom prst="rect">
-            <a:avLst/>
-          </a:prstGeom>
-          <a:noFill/>
-          <a:ln/>
-        </p:spPr>
-        <p:txBody>
-          <a:bodyPr wrap="square" lIns="0" tIns="0" rIns="0" bIns="0" rtlCol="0" anchor="t"/>
-          <a:lstStyle/>
-          <a:p>
-            <a:pPr indent="0" marL="0">
-              <a:buNone/>
-            </a:pPr>
-            <a:r>
-              <a:rPr lang="en-US" sz="2600" b="1" dirty="0">
-                <a:solidFill>
-                  <a:srgbClr val="2F3E4E"/>
-                </a:solidFill>
-                <a:latin typeface="Calibri" pitchFamily="34" charset="0"/>
-                <a:ea typeface="Calibri" pitchFamily="34" charset="-122"/>
-                <a:cs typeface="Calibri" pitchFamily="34" charset="-120"/>
-              </a:rPr>
-              <a:t>x = 12 − 5</a:t>
-            </a:r>
-            <a:endParaRPr lang="en-US" sz="2600" dirty="0"/>
-          </a:p>
-        </p:txBody>
-      </p:sp>
-      <p:sp>
-        <p:nvSpPr>
-          <p:cNvPr id="12" name="Shape 9"/>
+          <p:cNvPr id="8" name="Shape 6"/>
           <p:cNvSpPr/>
           <p:nvPr/>
         </p:nvSpPr>
         <p:spPr>
           <a:xfrm>
-            <a:off x="6126480" y="1645920"/>
-            <a:ext cx="2514600" cy="1737360"/>
+            <a:off x="4663440" y="1737360"/>
+            <a:ext cx="2926080" cy="1097280"/>
           </a:xfrm>
           <a:prstGeom prst="roundRect">
             <a:avLst>
-              <a:gd name="adj" fmla="val 6316"/>
+              <a:gd name="adj" fmla="val 10000"/>
             </a:avLst>
           </a:prstGeom>
           <a:solidFill>
@@ -10336,14 +9540,14 @@
       </p:sp>
       <p:sp>
         <p:nvSpPr>
-          <p:cNvPr id="13" name="Text 10"/>
+          <p:cNvPr id="9" name="Text 7"/>
           <p:cNvSpPr txBox="1"/>
           <p:nvPr/>
         </p:nvSpPr>
         <p:spPr>
           <a:xfrm>
-            <a:off x="6355080" y="1828800"/>
-            <a:ext cx="2103120" cy="365760"/>
+            <a:off x="4663440" y="1737360"/>
+            <a:ext cx="2926080" cy="1097280"/>
           </a:xfrm>
           <a:prstGeom prst="rect">
             <a:avLst/>
@@ -10352,37 +9556,37 @@
           <a:ln/>
         </p:spPr>
         <p:txBody>
-          <a:bodyPr wrap="square" lIns="0" tIns="0" rIns="0" bIns="0" rtlCol="0" anchor="t"/>
-          <a:lstStyle/>
-          <a:p>
-            <a:pPr indent="0" marL="0">
+          <a:bodyPr wrap="square" lIns="0" tIns="0" rIns="0" bIns="0" rtlCol="0" anchor="ctr"/>
+          <a:lstStyle/>
+          <a:p>
+            <a:pPr algn="ctr" indent="0" marL="0">
               <a:buNone/>
             </a:pPr>
             <a:r>
-              <a:rPr lang="en-US" sz="1400" dirty="0">
-                <a:solidFill>
-                  <a:srgbClr val="5F6E80"/>
+              <a:rPr lang="en-US" sz="2600" b="1" dirty="0">
+                <a:solidFill>
+                  <a:srgbClr val="2F3E4E"/>
                 </a:solidFill>
                 <a:latin typeface="Calibri" pitchFamily="34" charset="0"/>
                 <a:ea typeface="Calibri" pitchFamily="34" charset="-122"/>
                 <a:cs typeface="Calibri" pitchFamily="34" charset="-120"/>
               </a:rPr>
-              <a:t>Paso 3</a:t>
-            </a:r>
-            <a:endParaRPr lang="en-US" sz="1400" dirty="0"/>
-          </a:p>
-        </p:txBody>
-      </p:sp>
-      <p:sp>
-        <p:nvSpPr>
-          <p:cNvPr id="14" name="Text 11"/>
+              <a:t>−2x + 8</a:t>
+            </a:r>
+            <a:endParaRPr lang="en-US" sz="2600" dirty="0"/>
+          </a:p>
+        </p:txBody>
+      </p:sp>
+      <p:sp>
+        <p:nvSpPr>
+          <p:cNvPr id="10" name="Text 8"/>
           <p:cNvSpPr txBox="1"/>
           <p:nvPr/>
         </p:nvSpPr>
         <p:spPr>
           <a:xfrm>
-            <a:off x="6355080" y="2286000"/>
-            <a:ext cx="2103120" cy="731520"/>
+            <a:off x="548640" y="3200400"/>
+            <a:ext cx="8046720" cy="1371600"/>
           </a:xfrm>
           <a:prstGeom prst="rect">
             <a:avLst/>
@@ -10394,11 +9598,15 @@
           <a:bodyPr wrap="square" lIns="0" tIns="0" rIns="0" bIns="0" rtlCol="0" anchor="t"/>
           <a:lstStyle/>
           <a:p>
-            <a:pPr indent="0" marL="0">
-              <a:buNone/>
-            </a:pPr>
-            <a:r>
-              <a:rPr lang="en-US" sz="2600" b="1" dirty="0">
+            <a:pPr marL="342900" indent="-342900">
+              <a:spcAft>
+                <a:spcPts val="600"/>
+              </a:spcAft>
+              <a:buSzPct val="100000"/>
+              <a:buChar char="•"/>
+            </a:pPr>
+            <a:r>
+              <a:rPr lang="en-US" sz="1800" dirty="0">
                 <a:solidFill>
                   <a:srgbClr val="2F3E4E"/>
                 </a:solidFill>
@@ -10406,112 +9614,17 @@
                 <a:ea typeface="Calibri" pitchFamily="34" charset="-122"/>
                 <a:cs typeface="Calibri" pitchFamily="34" charset="-120"/>
               </a:rPr>
-              <a:t>x = 7</a:t>
-            </a:r>
-            <a:endParaRPr lang="en-US" sz="2600" dirty="0"/>
-          </a:p>
-        </p:txBody>
-      </p:sp>
-      <p:sp>
-        <p:nvSpPr>
-          <p:cNvPr id="15" name="Shape 12"/>
-          <p:cNvSpPr/>
-          <p:nvPr/>
-        </p:nvSpPr>
-        <p:spPr>
-          <a:xfrm>
-            <a:off x="2971800" y="2377440"/>
-            <a:ext cx="182880" cy="274320"/>
-          </a:xfrm>
-          <a:prstGeom prst="rightArrow">
-            <a:avLst/>
-          </a:prstGeom>
-          <a:solidFill>
-            <a:srgbClr val="4F7CAC"/>
-          </a:solidFill>
-          <a:ln w="12700">
-            <a:solidFill>
-              <a:srgbClr val="4F7CAC"/>
-            </a:solidFill>
-            <a:prstDash val="solid"/>
-          </a:ln>
-        </p:spPr>
-      </p:sp>
-      <p:sp>
-        <p:nvSpPr>
-          <p:cNvPr id="16" name="Shape 13"/>
-          <p:cNvSpPr/>
-          <p:nvPr/>
-        </p:nvSpPr>
-        <p:spPr>
-          <a:xfrm>
-            <a:off x="5760720" y="2377440"/>
-            <a:ext cx="182880" cy="274320"/>
-          </a:xfrm>
-          <a:prstGeom prst="rightArrow">
-            <a:avLst/>
-          </a:prstGeom>
-          <a:solidFill>
-            <a:srgbClr val="4F7CAC"/>
-          </a:solidFill>
-          <a:ln w="12700">
-            <a:solidFill>
-              <a:srgbClr val="4F7CAC"/>
-            </a:solidFill>
-            <a:prstDash val="solid"/>
-          </a:ln>
-        </p:spPr>
-      </p:sp>
-      <p:sp>
-        <p:nvSpPr>
-          <p:cNvPr id="17" name="Shape 14"/>
-          <p:cNvSpPr/>
-          <p:nvPr/>
-        </p:nvSpPr>
-        <p:spPr>
-          <a:xfrm>
-            <a:off x="548640" y="3657600"/>
-            <a:ext cx="8046720" cy="731520"/>
-          </a:xfrm>
-          <a:prstGeom prst="roundRect">
-            <a:avLst>
-              <a:gd name="adj" fmla="val 15000"/>
-            </a:avLst>
-          </a:prstGeom>
-          <a:solidFill>
-            <a:srgbClr val="EEF3F8"/>
-          </a:solidFill>
-          <a:ln w="12700">
-            <a:solidFill>
-              <a:srgbClr val="EEF3F8"/>
-            </a:solidFill>
-            <a:prstDash val="solid"/>
-          </a:ln>
-        </p:spPr>
-      </p:sp>
-      <p:sp>
-        <p:nvSpPr>
-          <p:cNvPr id="18" name="Text 15"/>
-          <p:cNvSpPr txBox="1"/>
-          <p:nvPr/>
-        </p:nvSpPr>
-        <p:spPr>
-          <a:xfrm>
-            <a:off x="822960" y="3657600"/>
-            <a:ext cx="7498080" cy="731520"/>
-          </a:xfrm>
-          <a:prstGeom prst="rect">
-            <a:avLst/>
-          </a:prstGeom>
-          <a:noFill/>
-          <a:ln/>
-        </p:spPr>
-        <p:txBody>
-          <a:bodyPr wrap="square" lIns="0" tIns="0" rIns="0" bIns="0" rtlCol="0" anchor="ctr"/>
-          <a:lstStyle/>
-          <a:p>
-            <a:pPr indent="0" marL="0">
-              <a:buNone/>
+              <a:t>(−2) · x = −2x</a:t>
+            </a:r>
+            <a:endParaRPr lang="en-US" sz="1800" dirty="0"/>
+          </a:p>
+          <a:p>
+            <a:pPr marL="342900" indent="-342900">
+              <a:spcAft>
+                <a:spcPts val="600"/>
+              </a:spcAft>
+              <a:buSzPct val="100000"/>
+              <a:buChar char="•"/>
             </a:pPr>
             <a:r>
               <a:rPr lang="en-US" sz="1800" dirty="0">
@@ -10522,7 +9635,28 @@
                 <a:ea typeface="Calibri" pitchFamily="34" charset="-122"/>
                 <a:cs typeface="Calibri" pitchFamily="34" charset="-120"/>
               </a:rPr>
-              <a:t>Comprobación: 7 + 5 = 12. Siempre comprueba la respuesta.</a:t>
+              <a:t>(−2) · (−4) = +8: negativo por negativo da positivo.</a:t>
+            </a:r>
+            <a:endParaRPr lang="en-US" sz="1800" dirty="0"/>
+          </a:p>
+          <a:p>
+            <a:pPr marL="342900" indent="-342900">
+              <a:spcAft>
+                <a:spcPts val="600"/>
+              </a:spcAft>
+              <a:buSzPct val="100000"/>
+              <a:buChar char="•"/>
+            </a:pPr>
+            <a:r>
+              <a:rPr lang="en-US" sz="1800" dirty="0">
+                <a:solidFill>
+                  <a:srgbClr val="2F3E4E"/>
+                </a:solidFill>
+                <a:latin typeface="Calibri" pitchFamily="34" charset="0"/>
+                <a:ea typeface="Calibri" pitchFamily="34" charset="-122"/>
+                <a:cs typeface="Calibri" pitchFamily="34" charset="-120"/>
+              </a:rPr>
+              <a:t>Error común: escribir −2x − 8.</a:t>
             </a:r>
             <a:endParaRPr lang="en-US" sz="1800" dirty="0"/>
           </a:p>
@@ -10593,7 +9727,7 @@
                 <a:ea typeface="Cambria" pitchFamily="34" charset="-122"/>
                 <a:cs typeface="Cambria" pitchFamily="34" charset="-120"/>
               </a:rPr>
-              <a:t>Igualdad y asignación</a:t>
+              <a:t>Una ecuación es una balanza</a:t>
             </a:r>
             <a:endParaRPr lang="en-US" sz="3000" dirty="0"/>
           </a:p>
@@ -10632,7 +9766,7 @@
                 <a:ea typeface="Calibri" pitchFamily="34" charset="-122"/>
                 <a:cs typeface="Calibri" pitchFamily="34" charset="-120"/>
               </a:rPr>
-              <a:t>El mismo signo "=" significa cosas distintas. En C++, comparar se escribe ==.</a:t>
+              <a:t>Lo que haces de un lado, lo haces del otro</a:t>
             </a:r>
             <a:endParaRPr lang="en-US" sz="1600" dirty="0"/>
           </a:p>
@@ -10679,18 +9813,18 @@
       </p:sp>
       <p:sp>
         <p:nvSpPr>
-          <p:cNvPr id="6" name="Shape 3"/>
+          <p:cNvPr id="5" name="Shape 3"/>
           <p:cNvSpPr/>
           <p:nvPr/>
         </p:nvSpPr>
         <p:spPr>
           <a:xfrm>
             <a:off x="548640" y="1645920"/>
-            <a:ext cx="3749040" cy="2834640"/>
+            <a:ext cx="1874520" cy="2560320"/>
           </a:xfrm>
           <a:prstGeom prst="roundRect">
             <a:avLst>
-              <a:gd name="adj" fmla="val 3871"/>
+              <a:gd name="adj" fmla="val 5854"/>
             </a:avLst>
           </a:prstGeom>
           <a:solidFill>
@@ -10706,14 +9840,14 @@
       </p:sp>
       <p:sp>
         <p:nvSpPr>
-          <p:cNvPr id="7" name="Shape 4"/>
+          <p:cNvPr id="6" name="Shape 4"/>
           <p:cNvSpPr/>
           <p:nvPr/>
         </p:nvSpPr>
         <p:spPr>
           <a:xfrm>
-            <a:off x="822960" y="1920240"/>
-            <a:ext cx="731520" cy="731520"/>
+            <a:off x="731520" y="1828800"/>
+            <a:ext cx="548640" cy="548640"/>
           </a:xfrm>
           <a:prstGeom prst="ellipse">
             <a:avLst/>
@@ -10731,7 +9865,7 @@
       </p:sp>
       <p:pic>
         <p:nvPicPr>
-          <p:cNvPr id="8" name="Image 0" descr="preencoded.png">    </p:cNvPr>
+          <p:cNvPr id="7" name="Image 0" descr="preencoded.png">    </p:cNvPr>
           <p:cNvPicPr>
             <a:picLocks noChangeAspect="1"/>
           </p:cNvPicPr>
@@ -10745,8 +9879,8 @@
         </p:blipFill>
         <p:spPr>
           <a:xfrm>
-            <a:off x="1020470" y="2117750"/>
-            <a:ext cx="336499" cy="336499"/>
+            <a:off x="879653" y="1976933"/>
+            <a:ext cx="252374" cy="252374"/>
           </a:xfrm>
           <a:prstGeom prst="rect">
             <a:avLst/>
@@ -10755,14 +9889,14 @@
       </p:pic>
       <p:sp>
         <p:nvSpPr>
-          <p:cNvPr id="9" name="Text 5"/>
+          <p:cNvPr id="8" name="Text 5"/>
           <p:cNvSpPr txBox="1"/>
           <p:nvPr/>
         </p:nvSpPr>
         <p:spPr>
           <a:xfrm>
-            <a:off x="822960" y="2834640"/>
-            <a:ext cx="3291840" cy="365760"/>
+            <a:off x="731520" y="2514600"/>
+            <a:ext cx="1508760" cy="548640"/>
           </a:xfrm>
           <a:prstGeom prst="rect">
             <a:avLst/>
@@ -10778,7 +9912,7 @@
               <a:buNone/>
             </a:pPr>
             <a:r>
-              <a:rPr lang="en-US" sz="2000" b="1" dirty="0">
+              <a:rPr lang="en-US" sz="1600" b="1" dirty="0">
                 <a:solidFill>
                   <a:srgbClr val="2F3E4E"/>
                 </a:solidFill>
@@ -10786,22 +9920,22 @@
                 <a:ea typeface="Calibri" pitchFamily="34" charset="-122"/>
                 <a:cs typeface="Calibri" pitchFamily="34" charset="-120"/>
               </a:rPr>
-              <a:t>En álgebra</a:t>
-            </a:r>
-            <a:endParaRPr lang="en-US" sz="2000" dirty="0"/>
-          </a:p>
-        </p:txBody>
-      </p:sp>
-      <p:sp>
-        <p:nvSpPr>
-          <p:cNvPr id="10" name="Text 6"/>
+              <a:t>1. Simplificar</a:t>
+            </a:r>
+            <a:endParaRPr lang="en-US" sz="1600" dirty="0"/>
+          </a:p>
+        </p:txBody>
+      </p:sp>
+      <p:sp>
+        <p:nvSpPr>
+          <p:cNvPr id="9" name="Text 6"/>
           <p:cNvSpPr txBox="1"/>
           <p:nvPr/>
         </p:nvSpPr>
         <p:spPr>
           <a:xfrm>
-            <a:off x="822960" y="3291840"/>
-            <a:ext cx="3291840" cy="731520"/>
+            <a:off x="731520" y="3108960"/>
+            <a:ext cx="1508760" cy="1051560"/>
           </a:xfrm>
           <a:prstGeom prst="rect">
             <a:avLst/>
@@ -10817,7 +9951,7 @@
               <a:buNone/>
             </a:pPr>
             <a:r>
-              <a:rPr lang="en-US" sz="1700" dirty="0">
+              <a:rPr lang="en-US" sz="1300" dirty="0">
                 <a:solidFill>
                   <a:srgbClr val="2F3E4E"/>
                 </a:solidFill>
@@ -10825,26 +9959,180 @@
                 <a:ea typeface="Calibri" pitchFamily="34" charset="-122"/>
                 <a:cs typeface="Calibri" pitchFamily="34" charset="-120"/>
               </a:rPr>
-              <a:t>x = 5 es una afirmación: x vale 5.</a:t>
-            </a:r>
-            <a:endParaRPr lang="en-US" sz="1700" dirty="0"/>
-          </a:p>
-        </p:txBody>
-      </p:sp>
-      <p:sp>
-        <p:nvSpPr>
-          <p:cNvPr id="11" name="Shape 7"/>
+              <a:t>Quita paréntesis y agrupa términos semejantes.</a:t>
+            </a:r>
+            <a:endParaRPr lang="en-US" sz="1300" dirty="0"/>
+          </a:p>
+        </p:txBody>
+      </p:sp>
+      <p:sp>
+        <p:nvSpPr>
+          <p:cNvPr id="10" name="Shape 7"/>
           <p:cNvSpPr/>
           <p:nvPr/>
         </p:nvSpPr>
         <p:spPr>
           <a:xfrm>
-            <a:off x="4846320" y="1645920"/>
-            <a:ext cx="3749040" cy="2834640"/>
+            <a:off x="2606040" y="1645920"/>
+            <a:ext cx="1874520" cy="2560320"/>
           </a:xfrm>
           <a:prstGeom prst="roundRect">
             <a:avLst>
-              <a:gd name="adj" fmla="val 3871"/>
+              <a:gd name="adj" fmla="val 5854"/>
+            </a:avLst>
+          </a:prstGeom>
+          <a:solidFill>
+            <a:srgbClr val="E1F0E7"/>
+          </a:solidFill>
+          <a:ln w="12700">
+            <a:solidFill>
+              <a:srgbClr val="E1F0E7"/>
+            </a:solidFill>
+            <a:prstDash val="solid"/>
+          </a:ln>
+        </p:spPr>
+      </p:sp>
+      <p:sp>
+        <p:nvSpPr>
+          <p:cNvPr id="11" name="Shape 8"/>
+          <p:cNvSpPr/>
+          <p:nvPr/>
+        </p:nvSpPr>
+        <p:spPr>
+          <a:xfrm>
+            <a:off x="2788920" y="1828800"/>
+            <a:ext cx="548640" cy="548640"/>
+          </a:xfrm>
+          <a:prstGeom prst="ellipse">
+            <a:avLst/>
+          </a:prstGeom>
+          <a:solidFill>
+            <a:srgbClr val="6FA287"/>
+          </a:solidFill>
+          <a:ln w="12700">
+            <a:solidFill>
+              <a:srgbClr val="6FA287"/>
+            </a:solidFill>
+            <a:prstDash val="solid"/>
+          </a:ln>
+        </p:spPr>
+      </p:sp>
+      <p:pic>
+        <p:nvPicPr>
+          <p:cNvPr id="12" name="Image 1" descr="preencoded.png">    </p:cNvPr>
+          <p:cNvPicPr>
+            <a:picLocks noChangeAspect="1"/>
+          </p:cNvPicPr>
+          <p:nvPr/>
+        </p:nvPicPr>
+        <p:blipFill>
+          <a:blip r:embed="rId2"/>
+          <a:stretch>
+            <a:fillRect/>
+          </a:stretch>
+        </p:blipFill>
+        <p:spPr>
+          <a:xfrm>
+            <a:off x="2937053" y="1976933"/>
+            <a:ext cx="252374" cy="252374"/>
+          </a:xfrm>
+          <a:prstGeom prst="rect">
+            <a:avLst/>
+          </a:prstGeom>
+        </p:spPr>
+      </p:pic>
+      <p:sp>
+        <p:nvSpPr>
+          <p:cNvPr id="13" name="Text 9"/>
+          <p:cNvSpPr txBox="1"/>
+          <p:nvPr/>
+        </p:nvSpPr>
+        <p:spPr>
+          <a:xfrm>
+            <a:off x="2788920" y="2514600"/>
+            <a:ext cx="1508760" cy="548640"/>
+          </a:xfrm>
+          <a:prstGeom prst="rect">
+            <a:avLst/>
+          </a:prstGeom>
+          <a:noFill/>
+          <a:ln/>
+        </p:spPr>
+        <p:txBody>
+          <a:bodyPr wrap="square" lIns="0" tIns="0" rIns="0" bIns="0" rtlCol="0" anchor="t"/>
+          <a:lstStyle/>
+          <a:p>
+            <a:pPr indent="0" marL="0">
+              <a:buNone/>
+            </a:pPr>
+            <a:r>
+              <a:rPr lang="en-US" sz="1600" b="1" dirty="0">
+                <a:solidFill>
+                  <a:srgbClr val="2F3E4E"/>
+                </a:solidFill>
+                <a:latin typeface="Calibri" pitchFamily="34" charset="0"/>
+                <a:ea typeface="Calibri" pitchFamily="34" charset="-122"/>
+                <a:cs typeface="Calibri" pitchFamily="34" charset="-120"/>
+              </a:rPr>
+              <a:t>2. Agrupar</a:t>
+            </a:r>
+            <a:endParaRPr lang="en-US" sz="1600" dirty="0"/>
+          </a:p>
+        </p:txBody>
+      </p:sp>
+      <p:sp>
+        <p:nvSpPr>
+          <p:cNvPr id="14" name="Text 10"/>
+          <p:cNvSpPr txBox="1"/>
+          <p:nvPr/>
+        </p:nvSpPr>
+        <p:spPr>
+          <a:xfrm>
+            <a:off x="2788920" y="3108960"/>
+            <a:ext cx="1508760" cy="1051560"/>
+          </a:xfrm>
+          <a:prstGeom prst="rect">
+            <a:avLst/>
+          </a:prstGeom>
+          <a:noFill/>
+          <a:ln/>
+        </p:spPr>
+        <p:txBody>
+          <a:bodyPr wrap="square" lIns="0" tIns="0" rIns="0" bIns="0" rtlCol="0" anchor="t"/>
+          <a:lstStyle/>
+          <a:p>
+            <a:pPr indent="0" marL="0">
+              <a:buNone/>
+            </a:pPr>
+            <a:r>
+              <a:rPr lang="en-US" sz="1300" dirty="0">
+                <a:solidFill>
+                  <a:srgbClr val="2F3E4E"/>
+                </a:solidFill>
+                <a:latin typeface="Calibri" pitchFamily="34" charset="0"/>
+                <a:ea typeface="Calibri" pitchFamily="34" charset="-122"/>
+                <a:cs typeface="Calibri" pitchFamily="34" charset="-120"/>
+              </a:rPr>
+              <a:t>Variables de un lado, números del otro.</a:t>
+            </a:r>
+            <a:endParaRPr lang="en-US" sz="1300" dirty="0"/>
+          </a:p>
+        </p:txBody>
+      </p:sp>
+      <p:sp>
+        <p:nvSpPr>
+          <p:cNvPr id="15" name="Shape 11"/>
+          <p:cNvSpPr/>
+          <p:nvPr/>
+        </p:nvSpPr>
+        <p:spPr>
+          <a:xfrm>
+            <a:off x="4663440" y="1645920"/>
+            <a:ext cx="1874520" cy="2560320"/>
+          </a:xfrm>
+          <a:prstGeom prst="roundRect">
+            <a:avLst>
+              <a:gd name="adj" fmla="val 5854"/>
             </a:avLst>
           </a:prstGeom>
           <a:solidFill>
@@ -10860,14 +10148,14 @@
       </p:sp>
       <p:sp>
         <p:nvSpPr>
-          <p:cNvPr id="12" name="Shape 8"/>
+          <p:cNvPr id="16" name="Shape 12"/>
           <p:cNvSpPr/>
           <p:nvPr/>
         </p:nvSpPr>
         <p:spPr>
           <a:xfrm>
-            <a:off x="5120640" y="1920240"/>
-            <a:ext cx="731520" cy="731520"/>
+            <a:off x="4846320" y="1828800"/>
+            <a:ext cx="548640" cy="548640"/>
           </a:xfrm>
           <a:prstGeom prst="ellipse">
             <a:avLst/>
@@ -10885,22 +10173,22 @@
       </p:sp>
       <p:pic>
         <p:nvPicPr>
-          <p:cNvPr id="13" name="Image 1" descr="preencoded.png">    </p:cNvPr>
+          <p:cNvPr id="17" name="Image 2" descr="preencoded.png">    </p:cNvPr>
           <p:cNvPicPr>
             <a:picLocks noChangeAspect="1"/>
           </p:cNvPicPr>
           <p:nvPr/>
         </p:nvPicPr>
         <p:blipFill>
-          <a:blip r:embed="rId2"/>
+          <a:blip r:embed="rId3"/>
           <a:stretch>
             <a:fillRect/>
           </a:stretch>
         </p:blipFill>
         <p:spPr>
           <a:xfrm>
-            <a:off x="5318150" y="2117750"/>
-            <a:ext cx="336499" cy="336499"/>
+            <a:off x="4994453" y="1976933"/>
+            <a:ext cx="252374" cy="252374"/>
           </a:xfrm>
           <a:prstGeom prst="rect">
             <a:avLst/>
@@ -10909,14 +10197,14 @@
       </p:pic>
       <p:sp>
         <p:nvSpPr>
-          <p:cNvPr id="14" name="Text 9"/>
+          <p:cNvPr id="18" name="Text 13"/>
           <p:cNvSpPr txBox="1"/>
           <p:nvPr/>
         </p:nvSpPr>
         <p:spPr>
           <a:xfrm>
-            <a:off x="5120640" y="2834640"/>
-            <a:ext cx="3291840" cy="365760"/>
+            <a:off x="4846320" y="2514600"/>
+            <a:ext cx="1508760" cy="548640"/>
           </a:xfrm>
           <a:prstGeom prst="rect">
             <a:avLst/>
@@ -10932,7 +10220,7 @@
               <a:buNone/>
             </a:pPr>
             <a:r>
-              <a:rPr lang="en-US" sz="2000" b="1" dirty="0">
+              <a:rPr lang="en-US" sz="1600" b="1" dirty="0">
                 <a:solidFill>
                   <a:srgbClr val="2F3E4E"/>
                 </a:solidFill>
@@ -10940,22 +10228,22 @@
                 <a:ea typeface="Calibri" pitchFamily="34" charset="-122"/>
                 <a:cs typeface="Calibri" pitchFamily="34" charset="-120"/>
               </a:rPr>
-              <a:t>En C++</a:t>
-            </a:r>
-            <a:endParaRPr lang="en-US" sz="2000" dirty="0"/>
-          </a:p>
-        </p:txBody>
-      </p:sp>
-      <p:sp>
-        <p:nvSpPr>
-          <p:cNvPr id="15" name="Text 10"/>
+              <a:t>3. Despejar</a:t>
+            </a:r>
+            <a:endParaRPr lang="en-US" sz="1600" dirty="0"/>
+          </a:p>
+        </p:txBody>
+      </p:sp>
+      <p:sp>
+        <p:nvSpPr>
+          <p:cNvPr id="19" name="Text 14"/>
           <p:cNvSpPr txBox="1"/>
           <p:nvPr/>
         </p:nvSpPr>
         <p:spPr>
           <a:xfrm>
-            <a:off x="5120640" y="3291840"/>
-            <a:ext cx="3291840" cy="822960"/>
+            <a:off x="4846320" y="3108960"/>
+            <a:ext cx="1508760" cy="1051560"/>
           </a:xfrm>
           <a:prstGeom prst="rect">
             <a:avLst/>
@@ -10971,7 +10259,7 @@
               <a:buNone/>
             </a:pPr>
             <a:r>
-              <a:rPr lang="en-US" sz="1700" dirty="0">
+              <a:rPr lang="en-US" sz="1300" dirty="0">
                 <a:solidFill>
                   <a:srgbClr val="2F3E4E"/>
                 </a:solidFill>
@@ -10979,9 +10267,163 @@
                 <a:ea typeface="Calibri" pitchFamily="34" charset="-122"/>
                 <a:cs typeface="Calibri" pitchFamily="34" charset="-120"/>
               </a:rPr>
-              <a:t>x = x + 1; es una orden: toma x, súmale 1 y guárdalo en x.</a:t>
-            </a:r>
-            <a:endParaRPr lang="en-US" sz="1700" dirty="0"/>
+              <a:t>Divide entre el coeficiente de la variable.</a:t>
+            </a:r>
+            <a:endParaRPr lang="en-US" sz="1300" dirty="0"/>
+          </a:p>
+        </p:txBody>
+      </p:sp>
+      <p:sp>
+        <p:nvSpPr>
+          <p:cNvPr id="20" name="Shape 15"/>
+          <p:cNvSpPr/>
+          <p:nvPr/>
+        </p:nvSpPr>
+        <p:spPr>
+          <a:xfrm>
+            <a:off x="6720840" y="1645920"/>
+            <a:ext cx="1874520" cy="2560320"/>
+          </a:xfrm>
+          <a:prstGeom prst="roundRect">
+            <a:avLst>
+              <a:gd name="adj" fmla="val 5854"/>
+            </a:avLst>
+          </a:prstGeom>
+          <a:solidFill>
+            <a:srgbClr val="ECE8F6"/>
+          </a:solidFill>
+          <a:ln w="12700">
+            <a:solidFill>
+              <a:srgbClr val="ECE8F6"/>
+            </a:solidFill>
+            <a:prstDash val="solid"/>
+          </a:ln>
+        </p:spPr>
+      </p:sp>
+      <p:sp>
+        <p:nvSpPr>
+          <p:cNvPr id="21" name="Shape 16"/>
+          <p:cNvSpPr/>
+          <p:nvPr/>
+        </p:nvSpPr>
+        <p:spPr>
+          <a:xfrm>
+            <a:off x="6903720" y="1828800"/>
+            <a:ext cx="548640" cy="548640"/>
+          </a:xfrm>
+          <a:prstGeom prst="ellipse">
+            <a:avLst/>
+          </a:prstGeom>
+          <a:solidFill>
+            <a:srgbClr val="8E7FBF"/>
+          </a:solidFill>
+          <a:ln w="12700">
+            <a:solidFill>
+              <a:srgbClr val="8E7FBF"/>
+            </a:solidFill>
+            <a:prstDash val="solid"/>
+          </a:ln>
+        </p:spPr>
+      </p:sp>
+      <p:pic>
+        <p:nvPicPr>
+          <p:cNvPr id="22" name="Image 3" descr="preencoded.png">    </p:cNvPr>
+          <p:cNvPicPr>
+            <a:picLocks noChangeAspect="1"/>
+          </p:cNvPicPr>
+          <p:nvPr/>
+        </p:nvPicPr>
+        <p:blipFill>
+          <a:blip r:embed="rId4"/>
+          <a:stretch>
+            <a:fillRect/>
+          </a:stretch>
+        </p:blipFill>
+        <p:spPr>
+          <a:xfrm>
+            <a:off x="7051853" y="1976933"/>
+            <a:ext cx="252374" cy="252374"/>
+          </a:xfrm>
+          <a:prstGeom prst="rect">
+            <a:avLst/>
+          </a:prstGeom>
+        </p:spPr>
+      </p:pic>
+      <p:sp>
+        <p:nvSpPr>
+          <p:cNvPr id="23" name="Text 17"/>
+          <p:cNvSpPr txBox="1"/>
+          <p:nvPr/>
+        </p:nvSpPr>
+        <p:spPr>
+          <a:xfrm>
+            <a:off x="6903720" y="2514600"/>
+            <a:ext cx="1508760" cy="548640"/>
+          </a:xfrm>
+          <a:prstGeom prst="rect">
+            <a:avLst/>
+          </a:prstGeom>
+          <a:noFill/>
+          <a:ln/>
+        </p:spPr>
+        <p:txBody>
+          <a:bodyPr wrap="square" lIns="0" tIns="0" rIns="0" bIns="0" rtlCol="0" anchor="t"/>
+          <a:lstStyle/>
+          <a:p>
+            <a:pPr indent="0" marL="0">
+              <a:buNone/>
+            </a:pPr>
+            <a:r>
+              <a:rPr lang="en-US" sz="1600" b="1" dirty="0">
+                <a:solidFill>
+                  <a:srgbClr val="2F3E4E"/>
+                </a:solidFill>
+                <a:latin typeface="Calibri" pitchFamily="34" charset="0"/>
+                <a:ea typeface="Calibri" pitchFamily="34" charset="-122"/>
+                <a:cs typeface="Calibri" pitchFamily="34" charset="-120"/>
+              </a:rPr>
+              <a:t>4. Comprobar</a:t>
+            </a:r>
+            <a:endParaRPr lang="en-US" sz="1600" dirty="0"/>
+          </a:p>
+        </p:txBody>
+      </p:sp>
+      <p:sp>
+        <p:nvSpPr>
+          <p:cNvPr id="24" name="Text 18"/>
+          <p:cNvSpPr txBox="1"/>
+          <p:nvPr/>
+        </p:nvSpPr>
+        <p:spPr>
+          <a:xfrm>
+            <a:off x="6903720" y="3108960"/>
+            <a:ext cx="1508760" cy="1051560"/>
+          </a:xfrm>
+          <a:prstGeom prst="rect">
+            <a:avLst/>
+          </a:prstGeom>
+          <a:noFill/>
+          <a:ln/>
+        </p:spPr>
+        <p:txBody>
+          <a:bodyPr wrap="square" lIns="0" tIns="0" rIns="0" bIns="0" rtlCol="0" anchor="t"/>
+          <a:lstStyle/>
+          <a:p>
+            <a:pPr indent="0" marL="0">
+              <a:buNone/>
+            </a:pPr>
+            <a:r>
+              <a:rPr lang="en-US" sz="1300" dirty="0">
+                <a:solidFill>
+                  <a:srgbClr val="2F3E4E"/>
+                </a:solidFill>
+                <a:latin typeface="Calibri" pitchFamily="34" charset="0"/>
+                <a:ea typeface="Calibri" pitchFamily="34" charset="-122"/>
+                <a:cs typeface="Calibri" pitchFamily="34" charset="-120"/>
+              </a:rPr>
+              <a:t>Sustituye en la ecuación original.</a:t>
+            </a:r>
+            <a:endParaRPr lang="en-US" sz="1300" dirty="0"/>
           </a:p>
         </p:txBody>
       </p:sp>
@@ -11050,7 +10492,7 @@
                 <a:ea typeface="Cambria" pitchFamily="34" charset="-122"/>
                 <a:cs typeface="Cambria" pitchFamily="34" charset="-120"/>
               </a:rPr>
-              <a:t>Proposiciones: verdadero o falso</a:t>
+              <a:t>Resolver paso a paso</a:t>
             </a:r>
             <a:endParaRPr lang="en-US" sz="3000" dirty="0"/>
           </a:p>
@@ -11089,7 +10531,7 @@
                 <a:ea typeface="Calibri" pitchFamily="34" charset="-122"/>
                 <a:cs typeface="Calibri" pitchFamily="34" charset="-120"/>
               </a:rPr>
-              <a:t>Una proposición tiene un valor de verdad</a:t>
+              <a:t>Ejemplo: 3x − 4 = 11</a:t>
             </a:r>
             <a:endParaRPr lang="en-US" sz="1600" dirty="0"/>
           </a:p>
@@ -11136,26 +10578,111 @@
       </p:sp>
       <p:sp>
         <p:nvSpPr>
-          <p:cNvPr id="6" name="Shape 3"/>
+          <p:cNvPr id="5" name="Text 3"/>
+          <p:cNvSpPr txBox="1"/>
+          <p:nvPr/>
+        </p:nvSpPr>
+        <p:spPr>
+          <a:xfrm>
+            <a:off x="548640" y="1645920"/>
+            <a:ext cx="8046720" cy="1554480"/>
+          </a:xfrm>
+          <a:prstGeom prst="rect">
+            <a:avLst/>
+          </a:prstGeom>
+          <a:noFill/>
+          <a:ln/>
+        </p:spPr>
+        <p:txBody>
+          <a:bodyPr wrap="square" lIns="0" tIns="0" rIns="0" bIns="0" rtlCol="0" anchor="t"/>
+          <a:lstStyle/>
+          <a:p>
+            <a:pPr marL="342900" indent="-342900">
+              <a:spcAft>
+                <a:spcPts val="600"/>
+              </a:spcAft>
+              <a:buSzPct val="100000"/>
+              <a:buChar char="•"/>
+            </a:pPr>
+            <a:r>
+              <a:rPr lang="en-US" sz="1800" dirty="0">
+                <a:solidFill>
+                  <a:srgbClr val="2F3E4E"/>
+                </a:solidFill>
+                <a:latin typeface="Calibri" pitchFamily="34" charset="0"/>
+                <a:ea typeface="Calibri" pitchFamily="34" charset="-122"/>
+                <a:cs typeface="Calibri" pitchFamily="34" charset="-120"/>
+              </a:rPr>
+              <a:t>Sumamos 4 en ambos lados: 3x = 15.</a:t>
+            </a:r>
+            <a:endParaRPr lang="en-US" sz="1800" dirty="0"/>
+          </a:p>
+          <a:p>
+            <a:pPr marL="342900" indent="-342900">
+              <a:spcAft>
+                <a:spcPts val="600"/>
+              </a:spcAft>
+              <a:buSzPct val="100000"/>
+              <a:buChar char="•"/>
+            </a:pPr>
+            <a:r>
+              <a:rPr lang="en-US" sz="1800" dirty="0">
+                <a:solidFill>
+                  <a:srgbClr val="2F3E4E"/>
+                </a:solidFill>
+                <a:latin typeface="Calibri" pitchFamily="34" charset="0"/>
+                <a:ea typeface="Calibri" pitchFamily="34" charset="-122"/>
+                <a:cs typeface="Calibri" pitchFamily="34" charset="-120"/>
+              </a:rPr>
+              <a:t>Dividimos entre 3: x = 5.</a:t>
+            </a:r>
+            <a:endParaRPr lang="en-US" sz="1800" dirty="0"/>
+          </a:p>
+          <a:p>
+            <a:pPr marL="342900" indent="-342900">
+              <a:spcAft>
+                <a:spcPts val="600"/>
+              </a:spcAft>
+              <a:buSzPct val="100000"/>
+              <a:buChar char="•"/>
+            </a:pPr>
+            <a:r>
+              <a:rPr lang="en-US" sz="1800" dirty="0">
+                <a:solidFill>
+                  <a:srgbClr val="2F3E4E"/>
+                </a:solidFill>
+                <a:latin typeface="Calibri" pitchFamily="34" charset="0"/>
+                <a:ea typeface="Calibri" pitchFamily="34" charset="-122"/>
+                <a:cs typeface="Calibri" pitchFamily="34" charset="-120"/>
+              </a:rPr>
+              <a:t>Comprobación: 3(5) − 4 = 15 − 4 = 11. Sí se cumple.</a:t>
+            </a:r>
+            <a:endParaRPr lang="en-US" sz="1800" dirty="0"/>
+          </a:p>
+        </p:txBody>
+      </p:sp>
+      <p:sp>
+        <p:nvSpPr>
+          <p:cNvPr id="6" name="Shape 4"/>
           <p:cNvSpPr/>
           <p:nvPr/>
         </p:nvSpPr>
         <p:spPr>
           <a:xfrm>
-            <a:off x="548640" y="1645920"/>
-            <a:ext cx="3749040" cy="2651760"/>
+            <a:off x="548640" y="3383280"/>
+            <a:ext cx="8046720" cy="1097280"/>
           </a:xfrm>
           <a:prstGeom prst="roundRect">
             <a:avLst>
-              <a:gd name="adj" fmla="val 4138"/>
+              <a:gd name="adj" fmla="val 10000"/>
             </a:avLst>
           </a:prstGeom>
           <a:solidFill>
-            <a:srgbClr val="E1F0E7"/>
+            <a:srgbClr val="EEF3F8"/>
           </a:solidFill>
           <a:ln w="12700">
             <a:solidFill>
-              <a:srgbClr val="E1F0E7"/>
+              <a:srgbClr val="EEF3F8"/>
             </a:solidFill>
             <a:prstDash val="solid"/>
           </a:ln>
@@ -11163,63 +10690,14 @@
       </p:sp>
       <p:sp>
         <p:nvSpPr>
-          <p:cNvPr id="7" name="Shape 4"/>
-          <p:cNvSpPr/>
-          <p:nvPr/>
-        </p:nvSpPr>
-        <p:spPr>
-          <a:xfrm>
-            <a:off x="822960" y="1920240"/>
-            <a:ext cx="731520" cy="731520"/>
-          </a:xfrm>
-          <a:prstGeom prst="ellipse">
-            <a:avLst/>
-          </a:prstGeom>
-          <a:solidFill>
-            <a:srgbClr val="6FA287"/>
-          </a:solidFill>
-          <a:ln w="12700">
-            <a:solidFill>
-              <a:srgbClr val="6FA287"/>
-            </a:solidFill>
-            <a:prstDash val="solid"/>
-          </a:ln>
-        </p:spPr>
-      </p:sp>
-      <p:pic>
-        <p:nvPicPr>
-          <p:cNvPr id="8" name="Image 0" descr="preencoded.png">    </p:cNvPr>
-          <p:cNvPicPr>
-            <a:picLocks noChangeAspect="1"/>
-          </p:cNvPicPr>
-          <p:nvPr/>
-        </p:nvPicPr>
-        <p:blipFill>
-          <a:blip r:embed="rId1"/>
-          <a:stretch>
-            <a:fillRect/>
-          </a:stretch>
-        </p:blipFill>
-        <p:spPr>
-          <a:xfrm>
-            <a:off x="1020470" y="2117750"/>
-            <a:ext cx="336499" cy="336499"/>
-          </a:xfrm>
-          <a:prstGeom prst="rect">
-            <a:avLst/>
-          </a:prstGeom>
-        </p:spPr>
-      </p:pic>
-      <p:sp>
-        <p:nvSpPr>
-          <p:cNvPr id="9" name="Text 5"/>
+          <p:cNvPr id="7" name="Text 5"/>
           <p:cNvSpPr txBox="1"/>
           <p:nvPr/>
         </p:nvSpPr>
         <p:spPr>
           <a:xfrm>
-            <a:off x="822960" y="2834640"/>
-            <a:ext cx="3291840" cy="731520"/>
+            <a:off x="822960" y="3611880"/>
+            <a:ext cx="7498080" cy="731520"/>
           </a:xfrm>
           <a:prstGeom prst="rect">
             <a:avLst/>
@@ -11228,14 +10706,14 @@
           <a:ln/>
         </p:spPr>
         <p:txBody>
-          <a:bodyPr wrap="square" lIns="0" tIns="0" rIns="0" bIns="0" rtlCol="0" anchor="t"/>
+          <a:bodyPr wrap="square" lIns="0" tIns="0" rIns="0" bIns="0" rtlCol="0" anchor="ctr"/>
           <a:lstStyle/>
           <a:p>
             <a:pPr indent="0" marL="0">
               <a:buNone/>
             </a:pPr>
             <a:r>
-              <a:rPr lang="en-US" sz="2000" b="1" dirty="0">
+              <a:rPr lang="en-US" sz="1600" dirty="0">
                 <a:solidFill>
                   <a:srgbClr val="2F3E4E"/>
                 </a:solidFill>
@@ -11243,200 +10721,7 @@
                 <a:ea typeface="Calibri" pitchFamily="34" charset="-122"/>
                 <a:cs typeface="Calibri" pitchFamily="34" charset="-120"/>
               </a:rPr>
-              <a:t>"Mazatlán está en Sinaloa."</a:t>
-            </a:r>
-            <a:endParaRPr lang="en-US" sz="2000" dirty="0"/>
-          </a:p>
-        </p:txBody>
-      </p:sp>
-      <p:sp>
-        <p:nvSpPr>
-          <p:cNvPr id="10" name="Text 6"/>
-          <p:cNvSpPr txBox="1"/>
-          <p:nvPr/>
-        </p:nvSpPr>
-        <p:spPr>
-          <a:xfrm>
-            <a:off x="822960" y="3657600"/>
-            <a:ext cx="3291840" cy="457200"/>
-          </a:xfrm>
-          <a:prstGeom prst="rect">
-            <a:avLst/>
-          </a:prstGeom>
-          <a:noFill/>
-          <a:ln/>
-        </p:spPr>
-        <p:txBody>
-          <a:bodyPr wrap="square" lIns="0" tIns="0" rIns="0" bIns="0" rtlCol="0" anchor="t"/>
-          <a:lstStyle/>
-          <a:p>
-            <a:pPr indent="0" marL="0">
-              <a:buNone/>
-            </a:pPr>
-            <a:r>
-              <a:rPr lang="en-US" sz="1600" dirty="0">
-                <a:solidFill>
-                  <a:srgbClr val="5F6E80"/>
-                </a:solidFill>
-                <a:latin typeface="Calibri" pitchFamily="34" charset="0"/>
-                <a:ea typeface="Calibri" pitchFamily="34" charset="-122"/>
-                <a:cs typeface="Calibri" pitchFamily="34" charset="-120"/>
-              </a:rPr>
-              <a:t>Es proposición: es verdadera.</a:t>
-            </a:r>
-            <a:endParaRPr lang="en-US" sz="1600" dirty="0"/>
-          </a:p>
-        </p:txBody>
-      </p:sp>
-      <p:sp>
-        <p:nvSpPr>
-          <p:cNvPr id="11" name="Shape 7"/>
-          <p:cNvSpPr/>
-          <p:nvPr/>
-        </p:nvSpPr>
-        <p:spPr>
-          <a:xfrm>
-            <a:off x="4846320" y="1645920"/>
-            <a:ext cx="3749040" cy="2651760"/>
-          </a:xfrm>
-          <a:prstGeom prst="roundRect">
-            <a:avLst>
-              <a:gd name="adj" fmla="val 4138"/>
-            </a:avLst>
-          </a:prstGeom>
-          <a:solidFill>
-            <a:srgbClr val="FBEADC"/>
-          </a:solidFill>
-          <a:ln w="12700">
-            <a:solidFill>
-              <a:srgbClr val="FBEADC"/>
-            </a:solidFill>
-            <a:prstDash val="solid"/>
-          </a:ln>
-        </p:spPr>
-      </p:sp>
-      <p:sp>
-        <p:nvSpPr>
-          <p:cNvPr id="12" name="Shape 8"/>
-          <p:cNvSpPr/>
-          <p:nvPr/>
-        </p:nvSpPr>
-        <p:spPr>
-          <a:xfrm>
-            <a:off x="5120640" y="1920240"/>
-            <a:ext cx="731520" cy="731520"/>
-          </a:xfrm>
-          <a:prstGeom prst="ellipse">
-            <a:avLst/>
-          </a:prstGeom>
-          <a:solidFill>
-            <a:srgbClr val="E39B6B"/>
-          </a:solidFill>
-          <a:ln w="12700">
-            <a:solidFill>
-              <a:srgbClr val="E39B6B"/>
-            </a:solidFill>
-            <a:prstDash val="solid"/>
-          </a:ln>
-        </p:spPr>
-      </p:sp>
-      <p:pic>
-        <p:nvPicPr>
-          <p:cNvPr id="13" name="Image 1" descr="preencoded.png">    </p:cNvPr>
-          <p:cNvPicPr>
-            <a:picLocks noChangeAspect="1"/>
-          </p:cNvPicPr>
-          <p:nvPr/>
-        </p:nvPicPr>
-        <p:blipFill>
-          <a:blip r:embed="rId2"/>
-          <a:stretch>
-            <a:fillRect/>
-          </a:stretch>
-        </p:blipFill>
-        <p:spPr>
-          <a:xfrm>
-            <a:off x="5318150" y="2117750"/>
-            <a:ext cx="336499" cy="336499"/>
-          </a:xfrm>
-          <a:prstGeom prst="rect">
-            <a:avLst/>
-          </a:prstGeom>
-        </p:spPr>
-      </p:pic>
-      <p:sp>
-        <p:nvSpPr>
-          <p:cNvPr id="14" name="Text 9"/>
-          <p:cNvSpPr txBox="1"/>
-          <p:nvPr/>
-        </p:nvSpPr>
-        <p:spPr>
-          <a:xfrm>
-            <a:off x="5120640" y="2834640"/>
-            <a:ext cx="3291840" cy="731520"/>
-          </a:xfrm>
-          <a:prstGeom prst="rect">
-            <a:avLst/>
-          </a:prstGeom>
-          <a:noFill/>
-          <a:ln/>
-        </p:spPr>
-        <p:txBody>
-          <a:bodyPr wrap="square" lIns="0" tIns="0" rIns="0" bIns="0" rtlCol="0" anchor="t"/>
-          <a:lstStyle/>
-          <a:p>
-            <a:pPr indent="0" marL="0">
-              <a:buNone/>
-            </a:pPr>
-            <a:r>
-              <a:rPr lang="en-US" sz="2000" b="1" dirty="0">
-                <a:solidFill>
-                  <a:srgbClr val="2F3E4E"/>
-                </a:solidFill>
-                <a:latin typeface="Calibri" pitchFamily="34" charset="0"/>
-                <a:ea typeface="Calibri" pitchFamily="34" charset="-122"/>
-                <a:cs typeface="Calibri" pitchFamily="34" charset="-120"/>
-              </a:rPr>
-              <a:t>"¡Qué día tan bonito!"</a:t>
-            </a:r>
-            <a:endParaRPr lang="en-US" sz="2000" dirty="0"/>
-          </a:p>
-        </p:txBody>
-      </p:sp>
-      <p:sp>
-        <p:nvSpPr>
-          <p:cNvPr id="15" name="Text 10"/>
-          <p:cNvSpPr txBox="1"/>
-          <p:nvPr/>
-        </p:nvSpPr>
-        <p:spPr>
-          <a:xfrm>
-            <a:off x="5120640" y="3657600"/>
-            <a:ext cx="3291840" cy="457200"/>
-          </a:xfrm>
-          <a:prstGeom prst="rect">
-            <a:avLst/>
-          </a:prstGeom>
-          <a:noFill/>
-          <a:ln/>
-        </p:spPr>
-        <p:txBody>
-          <a:bodyPr wrap="square" lIns="0" tIns="0" rIns="0" bIns="0" rtlCol="0" anchor="t"/>
-          <a:lstStyle/>
-          <a:p>
-            <a:pPr indent="0" marL="0">
-              <a:buNone/>
-            </a:pPr>
-            <a:r>
-              <a:rPr lang="en-US" sz="1600" dirty="0">
-                <a:solidFill>
-                  <a:srgbClr val="5F6E80"/>
-                </a:solidFill>
-                <a:latin typeface="Calibri" pitchFamily="34" charset="0"/>
-                <a:ea typeface="Calibri" pitchFamily="34" charset="-122"/>
-                <a:cs typeface="Calibri" pitchFamily="34" charset="-120"/>
-              </a:rPr>
-              <a:t>No es proposición: es una opinión.</a:t>
+              <a:t>Otro ejemplo: 2(x + 3) − x = 10 → x + 6 = 10 → x = 4.   Comprobación: 2(7) − 4 = 10.</a:t>
             </a:r>
             <a:endParaRPr lang="en-US" sz="1600" dirty="0"/>
           </a:p>
